--- a/하수처리장_관리대행_업체_현황.pptx
+++ b/하수처리장_관리대행_업체_현황.pptx
@@ -3112,8 +3112,16 @@
           <a:bodyPr/>
           <a:lstStyle/>
           <a:p>
-            <a:r>
-              <a:t>전국 하수처리장 관리대행 업체 현황</a:t>
+            <a:pPr>
+              <a:defRPr sz="3200" b="1">
+                <a:solidFill>
+                  <a:srgbClr val="003366"/>
+                </a:solidFill>
+                <a:latin typeface="Malgun Gothic"/>
+              </a:defRPr>
+            </a:pPr>
+            <a:r>
+              <a:t>전국 하수처리장 관리대행 업체 현황 분석</a:t>
             </a:r>
           </a:p>
         </p:txBody>
@@ -3133,14 +3141,73 @@
           <a:bodyPr/>
           <a:lstStyle/>
           <a:p>
-            <a:r>
-              <a:t>2024년 기준 시장 분석 및 주요 동향</a:t>
-            </a:r>
-          </a:p>
-          <a:p>
-            <a:r>
-              <a:t>하수처리장 관리대행 담당자 보고서</a:t>
-            </a:r>
+            <a:pPr>
+              <a:defRPr sz="2000">
+                <a:solidFill>
+                  <a:srgbClr val="808080"/>
+                </a:solidFill>
+                <a:latin typeface="Malgun Gothic"/>
+              </a:defRPr>
+            </a:pPr>
+            <a:r>
+              <a:t>2024년 시장 동향 및 전망</a:t>
+            </a:r>
+          </a:p>
+          <a:p>
+            <a:pPr>
+              <a:defRPr sz="2000">
+                <a:solidFill>
+                  <a:srgbClr val="808080"/>
+                </a:solidFill>
+                <a:latin typeface="Malgun Gothic"/>
+              </a:defRPr>
+            </a:pPr>
+            <a:r>
+              <a:t>2026년 07월 30일</a:t>
+            </a:r>
+          </a:p>
+        </p:txBody>
+      </p:sp>
+      <p:sp>
+        <p:nvSpPr>
+          <p:cNvPr id="4" name="Rectangle 3"/>
+          <p:cNvSpPr/>
+          <p:nvPr/>
+        </p:nvSpPr>
+        <p:spPr>
+          <a:xfrm>
+            <a:off x="457200" y="5943600"/>
+            <a:ext cx="8229600" cy="91440"/>
+          </a:xfrm>
+          <a:prstGeom prst="rect">
+            <a:avLst/>
+          </a:prstGeom>
+          <a:solidFill>
+            <a:srgbClr val="003366"/>
+          </a:solidFill>
+          <a:ln>
+            <a:noFill/>
+          </a:ln>
+        </p:spPr>
+        <p:style>
+          <a:lnRef idx="1">
+            <a:schemeClr val="accent1"/>
+          </a:lnRef>
+          <a:fillRef idx="3">
+            <a:schemeClr val="accent1"/>
+          </a:fillRef>
+          <a:effectRef idx="2">
+            <a:schemeClr val="accent1"/>
+          </a:effectRef>
+          <a:fontRef idx="minor">
+            <a:schemeClr val="lt1"/>
+          </a:fontRef>
+        </p:style>
+        <p:txBody>
+          <a:bodyPr rtlCol="0" anchor="ctr"/>
+          <a:lstStyle/>
+          <a:p>
+            <a:pPr algn="ctr"/>
           </a:p>
         </p:txBody>
       </p:sp>
@@ -3177,6 +3244,14 @@
           <a:bodyPr/>
           <a:lstStyle/>
           <a:p>
+            <a:pPr>
+              <a:defRPr sz="2800" b="1">
+                <a:solidFill>
+                  <a:srgbClr val="003366"/>
+                </a:solidFill>
+                <a:latin typeface="Malgun Gothic"/>
+              </a:defRPr>
+            </a:pPr>
             <a:r>
               <a:t>결론 및 제언</a:t>
             </a:r>
@@ -3197,64 +3272,70 @@
         <p:txBody>
           <a:bodyPr/>
           <a:lstStyle/>
-          <a:p>
-            <a:r>
-              <a:t>종합 요약</a:t>
-            </a:r>
-          </a:p>
-          <a:p>
-            <a:pPr lvl="1"/>
-            <a:r>
-              <a:t>• 전국 541 개소 민간 위탁 운영, 연간 1.2 조 원 시장</a:t>
-            </a:r>
-          </a:p>
-          <a:p>
-            <a:pPr lvl="1"/>
-            <a:r>
-              <a:t>• 상위 5 개사가 전체의 45~50% 점유</a:t>
-            </a:r>
-          </a:p>
-          <a:p>
-            <a:pPr lvl="1"/>
-            <a:r>
-              <a:t>• 기술 혁신과 ESG 경영이 경쟁력 핵심</a:t>
-            </a:r>
-          </a:p>
           <a:p/>
           <a:p>
-            <a:pPr/>
-            <a:r>
-              <a:t>성공 전략 제언</a:t>
-            </a:r>
-          </a:p>
-          <a:p>
-            <a:pPr lvl="1"/>
-            <a:r>
-              <a:t>1. AI·디지털 기술 선제적 도입</a:t>
-            </a:r>
-          </a:p>
-          <a:p>
-            <a:pPr lvl="1"/>
-            <a:r>
-              <a:t>2. 에너지 자립률 향상을 위한 투자</a:t>
-            </a:r>
-          </a:p>
-          <a:p>
-            <a:pPr lvl="1"/>
-            <a:r>
-              <a:t>3. 지역 사회 협력 강화 (주민 수용성)</a:t>
-            </a:r>
-          </a:p>
-          <a:p>
-            <a:pPr lvl="1"/>
-            <a:r>
-              <a:t>4. 전문 인력 양성 및 처우 개선</a:t>
-            </a:r>
-          </a:p>
-          <a:p>
-            <a:pPr lvl="1"/>
-            <a:r>
-              <a:t>5. 기후변화 대응 체계 구축</a:t>
+            <a:pPr>
+              <a:defRPr sz="1800">
+                <a:solidFill>
+                  <a:srgbClr val="404040"/>
+                </a:solidFill>
+                <a:latin typeface="Malgun Gothic"/>
+              </a:defRPr>
+            </a:pPr>
+            <a:r>
+              <a:t>• 시장 안정성: 꾸준한 성장세와 정부의 민간위託 정책으로 안정적인 시장 환경 조성</a:t>
+            </a:r>
+          </a:p>
+          <a:p>
+            <a:pPr>
+              <a:defRPr sz="1800">
+                <a:solidFill>
+                  <a:srgbClr val="404040"/>
+                </a:solidFill>
+                <a:latin typeface="Malgun Gothic"/>
+              </a:defRPr>
+            </a:pPr>
+            <a:r>
+              <a:t>• 투자 유망 분야 1: AI·IoT 기반 스마트 운영관리 솔루션</a:t>
+            </a:r>
+          </a:p>
+          <a:p>
+            <a:pPr>
+              <a:defRPr sz="1800">
+                <a:solidFill>
+                  <a:srgbClr val="404040"/>
+                </a:solidFill>
+                <a:latin typeface="Malgun Gothic"/>
+              </a:defRPr>
+            </a:pPr>
+            <a:r>
+              <a:t>• 투자 유망 분야 2: 에너지 자립형 하수처리 시설 기술</a:t>
+            </a:r>
+          </a:p>
+          <a:p>
+            <a:pPr>
+              <a:defRPr sz="1800">
+                <a:solidFill>
+                  <a:srgbClr val="404040"/>
+                </a:solidFill>
+                <a:latin typeface="Malgun Gothic"/>
+              </a:defRPr>
+            </a:pPr>
+            <a:r>
+              <a:t>• 투자 유망 분야 3: 슬러지 자원화 및 탄소중립 관련 기술</a:t>
+            </a:r>
+          </a:p>
+          <a:p>
+            <a:pPr>
+              <a:defRPr sz="1800">
+                <a:solidFill>
+                  <a:srgbClr val="404040"/>
+                </a:solidFill>
+                <a:latin typeface="Malgun Gothic"/>
+              </a:defRPr>
+            </a:pPr>
+            <a:r>
+              <a:t>• 전문성과 기술력을 갖춘 업체의 경쟁력 강화 필요</a:t>
             </a:r>
           </a:p>
         </p:txBody>
@@ -3292,8 +3373,16 @@
           <a:bodyPr/>
           <a:lstStyle/>
           <a:p>
-            <a:r>
-              <a:t>시장 개요</a:t>
+            <a:pPr>
+              <a:defRPr sz="2800" b="1">
+                <a:solidFill>
+                  <a:srgbClr val="003366"/>
+                </a:solidFill>
+                <a:latin typeface="Malgun Gothic"/>
+              </a:defRPr>
+            </a:pPr>
+            <a:r>
+              <a:t>목 차</a:t>
             </a:r>
           </a:p>
         </p:txBody>
@@ -3312,52 +3401,122 @@
         <p:txBody>
           <a:bodyPr/>
           <a:lstStyle/>
-          <a:p>
-            <a:r>
-              <a:t>전국 하수처리장 현황</a:t>
-            </a:r>
-          </a:p>
-          <a:p>
-            <a:pPr lvl="1"/>
-            <a:r>
-              <a:t>• 전국 하수처리장 총 615개소 운영 중</a:t>
-            </a:r>
-          </a:p>
-          <a:p>
-            <a:pPr lvl="1"/>
-            <a:r>
-              <a:t>• 민간 위탁 (관리대행) 비율: 88% (541 개소)</a:t>
-            </a:r>
-          </a:p>
-          <a:p>
-            <a:pPr lvl="1"/>
-            <a:r>
-              <a:t>• 공공 직접 운영: 12% (74 개소)</a:t>
-            </a:r>
-          </a:p>
           <a:p/>
           <a:p>
-            <a:pPr/>
-            <a:r>
-              <a:t>시장 규모</a:t>
-            </a:r>
-          </a:p>
-          <a:p>
-            <a:pPr lvl="1"/>
-            <a:r>
-              <a:t>• 연간 위탁금액: 약 1 조 2,000 억 원</a:t>
-            </a:r>
-          </a:p>
-          <a:p>
-            <a:pPr lvl="1"/>
-            <a:r>
-              <a:t>• 총 처리용량: 2,800 만 m³/일</a:t>
-            </a:r>
-          </a:p>
-          <a:p>
-            <a:pPr lvl="1"/>
-            <a:r>
-              <a:t>• 지속적 증가 추세 (연평균 3~4% 성장)</a:t>
+            <a:pPr>
+              <a:defRPr sz="1800">
+                <a:solidFill>
+                  <a:srgbClr val="404040"/>
+                </a:solidFill>
+                <a:latin typeface="Malgun Gothic"/>
+              </a:defRPr>
+            </a:pPr>
+            <a:r>
+              <a:t>1. 시장 개요</a:t>
+            </a:r>
+          </a:p>
+          <a:p>
+            <a:pPr>
+              <a:defRPr sz="1800">
+                <a:solidFill>
+                  <a:srgbClr val="404040"/>
+                </a:solidFill>
+                <a:latin typeface="Malgun Gothic"/>
+              </a:defRPr>
+            </a:pPr>
+            <a:r>
+              <a:t>2. 주요 업체 현황</a:t>
+            </a:r>
+          </a:p>
+          <a:p>
+            <a:pPr>
+              <a:defRPr sz="1800">
+                <a:solidFill>
+                  <a:srgbClr val="404040"/>
+                </a:solidFill>
+                <a:latin typeface="Malgun Gothic"/>
+              </a:defRPr>
+            </a:pPr>
+            <a:r>
+              <a:t>3. 매출액 비교</a:t>
+            </a:r>
+          </a:p>
+          <a:p>
+            <a:pPr>
+              <a:defRPr sz="1800">
+                <a:solidFill>
+                  <a:srgbClr val="404040"/>
+                </a:solidFill>
+                <a:latin typeface="Malgun Gothic"/>
+              </a:defRPr>
+            </a:pPr>
+            <a:r>
+              <a:t>4. 지역별 분포</a:t>
+            </a:r>
+          </a:p>
+          <a:p>
+            <a:pPr>
+              <a:defRPr sz="1800">
+                <a:solidFill>
+                  <a:srgbClr val="404040"/>
+                </a:solidFill>
+                <a:latin typeface="Malgun Gothic"/>
+              </a:defRPr>
+            </a:pPr>
+            <a:r>
+              <a:t>5. 처리장 규모별 현황</a:t>
+            </a:r>
+          </a:p>
+          <a:p>
+            <a:pPr>
+              <a:defRPr sz="1800">
+                <a:solidFill>
+                  <a:srgbClr val="404040"/>
+                </a:solidFill>
+                <a:latin typeface="Malgun Gothic"/>
+              </a:defRPr>
+            </a:pPr>
+            <a:r>
+              <a:t>6. 입찰 동향</a:t>
+            </a:r>
+          </a:p>
+          <a:p>
+            <a:pPr>
+              <a:defRPr sz="1800">
+                <a:solidFill>
+                  <a:srgbClr val="404040"/>
+                </a:solidFill>
+                <a:latin typeface="Malgun Gothic"/>
+              </a:defRPr>
+            </a:pPr>
+            <a:r>
+              <a:t>7. 기술 개발 현황</a:t>
+            </a:r>
+          </a:p>
+          <a:p>
+            <a:pPr>
+              <a:defRPr sz="1800">
+                <a:solidFill>
+                  <a:srgbClr val="404040"/>
+                </a:solidFill>
+                <a:latin typeface="Malgun Gothic"/>
+              </a:defRPr>
+            </a:pPr>
+            <a:r>
+              <a:t>8. 시장 전망</a:t>
+            </a:r>
+          </a:p>
+          <a:p>
+            <a:pPr>
+              <a:defRPr sz="1800">
+                <a:solidFill>
+                  <a:srgbClr val="404040"/>
+                </a:solidFill>
+                <a:latin typeface="Malgun Gothic"/>
+              </a:defRPr>
+            </a:pPr>
+            <a:r>
+              <a:t>9. 결론</a:t>
             </a:r>
           </a:p>
         </p:txBody>
@@ -3394,762 +3553,116 @@
         <p:txBody>
           <a:bodyPr/>
           <a:lstStyle/>
+          <a:p>
+            <a:pPr>
+              <a:defRPr sz="2800" b="1">
+                <a:solidFill>
+                  <a:srgbClr val="003366"/>
+                </a:solidFill>
+                <a:latin typeface="Malgun Gothic"/>
+              </a:defRPr>
+            </a:pPr>
+            <a:r>
+              <a:t>시장 개요</a:t>
+            </a:r>
+          </a:p>
+        </p:txBody>
+      </p:sp>
+      <p:sp>
+        <p:nvSpPr>
+          <p:cNvPr id="3" name="Content Placeholder 2"/>
+          <p:cNvSpPr>
+            <a:spLocks noGrp="1"/>
+          </p:cNvSpPr>
+          <p:nvPr>
+            <p:ph idx="1"/>
+          </p:nvPr>
+        </p:nvSpPr>
+        <p:spPr/>
+        <p:txBody>
+          <a:bodyPr/>
+          <a:lstStyle/>
           <a:p/>
-        </p:txBody>
-      </p:sp>
-      <p:sp>
-        <p:nvSpPr>
-          <p:cNvPr id="3" name="TextBox 2"/>
-          <p:cNvSpPr txBox="1"/>
-          <p:nvPr/>
-        </p:nvSpPr>
-        <p:spPr>
-          <a:xfrm>
-            <a:off x="457200" y="274320"/>
-            <a:ext cx="8229600" cy="731520"/>
-          </a:xfrm>
-          <a:prstGeom prst="rect">
-            <a:avLst/>
-          </a:prstGeom>
-          <a:noFill/>
-        </p:spPr>
-        <p:txBody>
-          <a:bodyPr wrap="none">
-            <a:spAutoFit/>
-          </a:bodyPr>
-          <a:lstStyle/>
           <a:p>
             <a:pPr>
-              <a:defRPr sz="2400" b="1"/>
+              <a:defRPr sz="1800">
+                <a:solidFill>
+                  <a:srgbClr val="404040"/>
+                </a:solidFill>
+                <a:latin typeface="Malgun Gothic"/>
+              </a:defRPr>
             </a:pPr>
             <a:r>
-              <a:t>주요 업체 현황 (상위 8 개사)</a:t>
-            </a:r>
-          </a:p>
-        </p:txBody>
-      </p:sp>
-      <p:graphicFrame>
-        <p:nvGraphicFramePr>
-          <p:cNvPr id="4" name="Table 3"/>
-          <p:cNvGraphicFramePr>
-            <a:graphicFrameLocks noGrp="1"/>
-          </p:cNvGraphicFramePr>
-          <p:nvPr/>
-        </p:nvGraphicFramePr>
-        <p:xfrm>
-          <a:off x="457200" y="1097280"/>
-          <a:ext cx="8229600" cy="731520"/>
-        </p:xfrm>
-        <a:graphic>
-          <a:graphicData uri="http://schemas.openxmlformats.org/drawingml/2006/table">
-            <a:tbl>
-              <a:tblPr firstRow="1" bandRow="1">
-                <a:tableStyleId>{5C22544A-7EE6-4342-B048-85BDC9FD1C3A}</a:tableStyleId>
-              </a:tblPr>
-              <a:tblGrid>
-                <a:gridCol w="2286000"/>
-                <a:gridCol w="1645920"/>
-                <a:gridCol w="1645920"/>
-                <a:gridCol w="1371600"/>
-                <a:gridCol w="1280160"/>
-              </a:tblGrid>
-              <a:tr h="81280">
-                <a:tc>
-                  <a:txBody>
-                    <a:bodyPr/>
-                    <a:lstStyle/>
-                    <a:p>
-                      <a:pPr>
-                        <a:defRPr b="1" sz="1100"/>
-                      </a:pPr>
-                      <a:r>
-                        <a:t>업체명</a:t>
-                      </a:r>
-                    </a:p>
-                  </a:txBody>
-                  <a:tcPr/>
-                </a:tc>
-                <a:tc>
-                  <a:txBody>
-                    <a:bodyPr/>
-                    <a:lstStyle/>
-                    <a:p>
-                      <a:pPr>
-                        <a:defRPr b="1" sz="1100"/>
-                      </a:pPr>
-                      <a:r>
-                        <a:t>운영 처리장 수</a:t>
-                      </a:r>
-                    </a:p>
-                  </a:txBody>
-                  <a:tcPr/>
-                </a:tc>
-                <a:tc>
-                  <a:txBody>
-                    <a:bodyPr/>
-                    <a:lstStyle/>
-                    <a:p>
-                      <a:pPr>
-                        <a:defRPr b="1" sz="1100"/>
-                      </a:pPr>
-                      <a:r>
-                        <a:t>처리용량 (만 m³/일)</a:t>
-                      </a:r>
-                    </a:p>
-                  </a:txBody>
-                  <a:tcPr/>
-                </a:tc>
-                <a:tc>
-                  <a:txBody>
-                    <a:bodyPr/>
-                    <a:lstStyle/>
-                    <a:p>
-                      <a:pPr>
-                        <a:defRPr b="1" sz="1100"/>
-                      </a:pPr>
-                      <a:r>
-                        <a:t>시장점유율</a:t>
-                      </a:r>
-                    </a:p>
-                  </a:txBody>
-                  <a:tcPr/>
-                </a:tc>
-                <a:tc>
-                  <a:txBody>
-                    <a:bodyPr/>
-                    <a:lstStyle/>
-                    <a:p>
-                      <a:pPr>
-                        <a:defRPr b="1" sz="1100"/>
-                      </a:pPr>
-                      <a:r>
-                        <a:t>특징</a:t>
-                      </a:r>
-                    </a:p>
-                  </a:txBody>
-                  <a:tcPr/>
-                </a:tc>
-              </a:tr>
-              <a:tr h="81280">
-                <a:tc>
-                  <a:txBody>
-                    <a:bodyPr/>
-                    <a:lstStyle/>
-                    <a:p>
-                      <a:pPr>
-                        <a:defRPr sz="1000"/>
-                      </a:pPr>
-                      <a:r>
-                        <a:t>SK 에코플랜트</a:t>
-                      </a:r>
-                    </a:p>
-                  </a:txBody>
-                  <a:tcPr/>
-                </a:tc>
-                <a:tc>
-                  <a:txBody>
-                    <a:bodyPr/>
-                    <a:lstStyle/>
-                    <a:p>
-                      <a:pPr>
-                        <a:defRPr sz="1000"/>
-                      </a:pPr>
-                      <a:r>
-                        <a:t>45</a:t>
-                      </a:r>
-                    </a:p>
-                  </a:txBody>
-                  <a:tcPr/>
-                </a:tc>
-                <a:tc>
-                  <a:txBody>
-                    <a:bodyPr/>
-                    <a:lstStyle/>
-                    <a:p>
-                      <a:pPr>
-                        <a:defRPr sz="1000"/>
-                      </a:pPr>
-                      <a:r>
-                        <a:t>380</a:t>
-                      </a:r>
-                    </a:p>
-                  </a:txBody>
-                  <a:tcPr/>
-                </a:tc>
-                <a:tc>
-                  <a:txBody>
-                    <a:bodyPr/>
-                    <a:lstStyle/>
-                    <a:p>
-                      <a:pPr>
-                        <a:defRPr sz="1000"/>
-                      </a:pPr>
-                      <a:r>
-                        <a:t>12%</a:t>
-                      </a:r>
-                    </a:p>
-                  </a:txBody>
-                  <a:tcPr/>
-                </a:tc>
-                <a:tc>
-                  <a:txBody>
-                    <a:bodyPr/>
-                    <a:lstStyle/>
-                    <a:p>
-                      <a:pPr>
-                        <a:defRPr sz="1000"/>
-                      </a:pPr>
-                      <a:r>
-                        <a:t>최대 규모, 전국 네트워크</a:t>
-                      </a:r>
-                    </a:p>
-                  </a:txBody>
-                  <a:tcPr/>
-                </a:tc>
-              </a:tr>
-              <a:tr h="81280">
-                <a:tc>
-                  <a:txBody>
-                    <a:bodyPr/>
-                    <a:lstStyle/>
-                    <a:p>
-                      <a:pPr>
-                        <a:defRPr sz="1000"/>
-                      </a:pPr>
-                      <a:r>
-                        <a:t>한국환경산업</a:t>
-                      </a:r>
-                    </a:p>
-                  </a:txBody>
-                  <a:tcPr/>
-                </a:tc>
-                <a:tc>
-                  <a:txBody>
-                    <a:bodyPr/>
-                    <a:lstStyle/>
-                    <a:p>
-                      <a:pPr>
-                        <a:defRPr sz="1000"/>
-                      </a:pPr>
-                      <a:r>
-                        <a:t>38</a:t>
-                      </a:r>
-                    </a:p>
-                  </a:txBody>
-                  <a:tcPr/>
-                </a:tc>
-                <a:tc>
-                  <a:txBody>
-                    <a:bodyPr/>
-                    <a:lstStyle/>
-                    <a:p>
-                      <a:pPr>
-                        <a:defRPr sz="1000"/>
-                      </a:pPr>
-                      <a:r>
-                        <a:t>320</a:t>
-                      </a:r>
-                    </a:p>
-                  </a:txBody>
-                  <a:tcPr/>
-                </a:tc>
-                <a:tc>
-                  <a:txBody>
-                    <a:bodyPr/>
-                    <a:lstStyle/>
-                    <a:p>
-                      <a:pPr>
-                        <a:defRPr sz="1000"/>
-                      </a:pPr>
-                      <a:r>
-                        <a:t>10%</a:t>
-                      </a:r>
-                    </a:p>
-                  </a:txBody>
-                  <a:tcPr/>
-                </a:tc>
-                <a:tc>
-                  <a:txBody>
-                    <a:bodyPr/>
-                    <a:lstStyle/>
-                    <a:p>
-                      <a:pPr>
-                        <a:defRPr sz="1000"/>
-                      </a:pPr>
-                      <a:r>
-                        <a:t>한국건설환경연합 계열</a:t>
-                      </a:r>
-                    </a:p>
-                  </a:txBody>
-                  <a:tcPr/>
-                </a:tc>
-              </a:tr>
-              <a:tr h="81280">
-                <a:tc>
-                  <a:txBody>
-                    <a:bodyPr/>
-                    <a:lstStyle/>
-                    <a:p>
-                      <a:pPr>
-                        <a:defRPr sz="1000"/>
-                      </a:pPr>
-                      <a:r>
-                        <a:t>대우건설</a:t>
-                      </a:r>
-                    </a:p>
-                  </a:txBody>
-                  <a:tcPr/>
-                </a:tc>
-                <a:tc>
-                  <a:txBody>
-                    <a:bodyPr/>
-                    <a:lstStyle/>
-                    <a:p>
-                      <a:pPr>
-                        <a:defRPr sz="1000"/>
-                      </a:pPr>
-                      <a:r>
-                        <a:t>32</a:t>
-                      </a:r>
-                    </a:p>
-                  </a:txBody>
-                  <a:tcPr/>
-                </a:tc>
-                <a:tc>
-                  <a:txBody>
-                    <a:bodyPr/>
-                    <a:lstStyle/>
-                    <a:p>
-                      <a:pPr>
-                        <a:defRPr sz="1000"/>
-                      </a:pPr>
-                      <a:r>
-                        <a:t>285</a:t>
-                      </a:r>
-                    </a:p>
-                  </a:txBody>
-                  <a:tcPr/>
-                </a:tc>
-                <a:tc>
-                  <a:txBody>
-                    <a:bodyPr/>
-                    <a:lstStyle/>
-                    <a:p>
-                      <a:pPr>
-                        <a:defRPr sz="1000"/>
-                      </a:pPr>
-                      <a:r>
-                        <a:t>9%</a:t>
-                      </a:r>
-                    </a:p>
-                  </a:txBody>
-                  <a:tcPr/>
-                </a:tc>
-                <a:tc>
-                  <a:txBody>
-                    <a:bodyPr/>
-                    <a:lstStyle/>
-                    <a:p>
-                      <a:pPr>
-                        <a:defRPr sz="1000"/>
-                      </a:pPr>
-                      <a:r>
-                        <a:t>대형 처리장 중심</a:t>
-                      </a:r>
-                    </a:p>
-                  </a:txBody>
-                  <a:tcPr/>
-                </a:tc>
-              </a:tr>
-              <a:tr h="81280">
-                <a:tc>
-                  <a:txBody>
-                    <a:bodyPr/>
-                    <a:lstStyle/>
-                    <a:p>
-                      <a:pPr>
-                        <a:defRPr sz="1000"/>
-                      </a:pPr>
-                      <a:r>
-                        <a:t>삼성 C&amp;T</a:t>
-                      </a:r>
-                    </a:p>
-                  </a:txBody>
-                  <a:tcPr/>
-                </a:tc>
-                <a:tc>
-                  <a:txBody>
-                    <a:bodyPr/>
-                    <a:lstStyle/>
-                    <a:p>
-                      <a:pPr>
-                        <a:defRPr sz="1000"/>
-                      </a:pPr>
-                      <a:r>
-                        <a:t>28</a:t>
-                      </a:r>
-                    </a:p>
-                  </a:txBody>
-                  <a:tcPr/>
-                </a:tc>
-                <a:tc>
-                  <a:txBody>
-                    <a:bodyPr/>
-                    <a:lstStyle/>
-                    <a:p>
-                      <a:pPr>
-                        <a:defRPr sz="1000"/>
-                      </a:pPr>
-                      <a:r>
-                        <a:t>245</a:t>
-                      </a:r>
-                    </a:p>
-                  </a:txBody>
-                  <a:tcPr/>
-                </a:tc>
-                <a:tc>
-                  <a:txBody>
-                    <a:bodyPr/>
-                    <a:lstStyle/>
-                    <a:p>
-                      <a:pPr>
-                        <a:defRPr sz="1000"/>
-                      </a:pPr>
-                      <a:r>
-                        <a:t>8%</a:t>
-                      </a:r>
-                    </a:p>
-                  </a:txBody>
-                  <a:tcPr/>
-                </a:tc>
-                <a:tc>
-                  <a:txBody>
-                    <a:bodyPr/>
-                    <a:lstStyle/>
-                    <a:p>
-                      <a:pPr>
-                        <a:defRPr sz="1000"/>
-                      </a:pPr>
-                      <a:r>
-                        <a:t>스마트 물관리 강점</a:t>
-                      </a:r>
-                    </a:p>
-                  </a:txBody>
-                  <a:tcPr/>
-                </a:tc>
-              </a:tr>
-              <a:tr h="81280">
-                <a:tc>
-                  <a:txBody>
-                    <a:bodyPr/>
-                    <a:lstStyle/>
-                    <a:p>
-                      <a:pPr>
-                        <a:defRPr sz="1000"/>
-                      </a:pPr>
-                      <a:r>
-                        <a:t>현대건설</a:t>
-                      </a:r>
-                    </a:p>
-                  </a:txBody>
-                  <a:tcPr/>
-                </a:tc>
-                <a:tc>
-                  <a:txBody>
-                    <a:bodyPr/>
-                    <a:lstStyle/>
-                    <a:p>
-                      <a:pPr>
-                        <a:defRPr sz="1000"/>
-                      </a:pPr>
-                      <a:r>
-                        <a:t>25</a:t>
-                      </a:r>
-                    </a:p>
-                  </a:txBody>
-                  <a:tcPr/>
-                </a:tc>
-                <a:tc>
-                  <a:txBody>
-                    <a:bodyPr/>
-                    <a:lstStyle/>
-                    <a:p>
-                      <a:pPr>
-                        <a:defRPr sz="1000"/>
-                      </a:pPr>
-                      <a:r>
-                        <a:t>220</a:t>
-                      </a:r>
-                    </a:p>
-                  </a:txBody>
-                  <a:tcPr/>
-                </a:tc>
-                <a:tc>
-                  <a:txBody>
-                    <a:bodyPr/>
-                    <a:lstStyle/>
-                    <a:p>
-                      <a:pPr>
-                        <a:defRPr sz="1000"/>
-                      </a:pPr>
-                      <a:r>
-                        <a:t>7%</a:t>
-                      </a:r>
-                    </a:p>
-                  </a:txBody>
-                  <a:tcPr/>
-                </a:tc>
-                <a:tc>
-                  <a:txBody>
-                    <a:bodyPr/>
-                    <a:lstStyle/>
-                    <a:p>
-                      <a:pPr>
-                        <a:defRPr sz="1000"/>
-                      </a:pPr>
-                      <a:r>
-                        <a:t>에너지자립화 선도</a:t>
-                      </a:r>
-                    </a:p>
-                  </a:txBody>
-                  <a:tcPr/>
-                </a:tc>
-              </a:tr>
-              <a:tr h="81280">
-                <a:tc>
-                  <a:txBody>
-                    <a:bodyPr/>
-                    <a:lstStyle/>
-                    <a:p>
-                      <a:pPr>
-                        <a:defRPr sz="1000"/>
-                      </a:pPr>
-                      <a:r>
-                        <a:t>두산건설</a:t>
-                      </a:r>
-                    </a:p>
-                  </a:txBody>
-                  <a:tcPr/>
-                </a:tc>
-                <a:tc>
-                  <a:txBody>
-                    <a:bodyPr/>
-                    <a:lstStyle/>
-                    <a:p>
-                      <a:pPr>
-                        <a:defRPr sz="1000"/>
-                      </a:pPr>
-                      <a:r>
-                        <a:t>22</a:t>
-                      </a:r>
-                    </a:p>
-                  </a:txBody>
-                  <a:tcPr/>
-                </a:tc>
-                <a:tc>
-                  <a:txBody>
-                    <a:bodyPr/>
-                    <a:lstStyle/>
-                    <a:p>
-                      <a:pPr>
-                        <a:defRPr sz="1000"/>
-                      </a:pPr>
-                      <a:r>
-                        <a:t>195</a:t>
-                      </a:r>
-                    </a:p>
-                  </a:txBody>
-                  <a:tcPr/>
-                </a:tc>
-                <a:tc>
-                  <a:txBody>
-                    <a:bodyPr/>
-                    <a:lstStyle/>
-                    <a:p>
-                      <a:pPr>
-                        <a:defRPr sz="1000"/>
-                      </a:pPr>
-                      <a:r>
-                        <a:t>6%</a:t>
-                      </a:r>
-                    </a:p>
-                  </a:txBody>
-                  <a:tcPr/>
-                </a:tc>
-                <a:tc>
-                  <a:txBody>
-                    <a:bodyPr/>
-                    <a:lstStyle/>
-                    <a:p>
-                      <a:pPr>
-                        <a:defRPr sz="1000"/>
-                      </a:pPr>
-                      <a:r>
-                        <a:t>중소형 처리장 특화</a:t>
-                      </a:r>
-                    </a:p>
-                  </a:txBody>
-                  <a:tcPr/>
-                </a:tc>
-              </a:tr>
-              <a:tr h="81280">
-                <a:tc>
-                  <a:txBody>
-                    <a:bodyPr/>
-                    <a:lstStyle/>
-                    <a:p>
-                      <a:pPr>
-                        <a:defRPr sz="1000"/>
-                      </a:pPr>
-                      <a:r>
-                        <a:t>GS 건설</a:t>
-                      </a:r>
-                    </a:p>
-                  </a:txBody>
-                  <a:tcPr/>
-                </a:tc>
-                <a:tc>
-                  <a:txBody>
-                    <a:bodyPr/>
-                    <a:lstStyle/>
-                    <a:p>
-                      <a:pPr>
-                        <a:defRPr sz="1000"/>
-                      </a:pPr>
-                      <a:r>
-                        <a:t>20</a:t>
-                      </a:r>
-                    </a:p>
-                  </a:txBody>
-                  <a:tcPr/>
-                </a:tc>
-                <a:tc>
-                  <a:txBody>
-                    <a:bodyPr/>
-                    <a:lstStyle/>
-                    <a:p>
-                      <a:pPr>
-                        <a:defRPr sz="1000"/>
-                      </a:pPr>
-                      <a:r>
-                        <a:t>175</a:t>
-                      </a:r>
-                    </a:p>
-                  </a:txBody>
-                  <a:tcPr/>
-                </a:tc>
-                <a:tc>
-                  <a:txBody>
-                    <a:bodyPr/>
-                    <a:lstStyle/>
-                    <a:p>
-                      <a:pPr>
-                        <a:defRPr sz="1000"/>
-                      </a:pPr>
-                      <a:r>
-                        <a:t>5.5%</a:t>
-                      </a:r>
-                    </a:p>
-                  </a:txBody>
-                  <a:tcPr/>
-                </a:tc>
-                <a:tc>
-                  <a:txBody>
-                    <a:bodyPr/>
-                    <a:lstStyle/>
-                    <a:p>
-                      <a:pPr>
-                        <a:defRPr sz="1000"/>
-                      </a:pPr>
-                      <a:r>
-                        <a:t>지역 밀착형 운영</a:t>
-                      </a:r>
-                    </a:p>
-                  </a:txBody>
-                  <a:tcPr/>
-                </a:tc>
-              </a:tr>
-              <a:tr h="81280">
-                <a:tc>
-                  <a:txBody>
-                    <a:bodyPr/>
-                    <a:lstStyle/>
-                    <a:p>
-                      <a:pPr>
-                        <a:defRPr sz="1000"/>
-                      </a:pPr>
-                      <a:r>
-                        <a:t>롯데건설</a:t>
-                      </a:r>
-                    </a:p>
-                  </a:txBody>
-                  <a:tcPr/>
-                </a:tc>
-                <a:tc>
-                  <a:txBody>
-                    <a:bodyPr/>
-                    <a:lstStyle/>
-                    <a:p>
-                      <a:pPr>
-                        <a:defRPr sz="1000"/>
-                      </a:pPr>
-                      <a:r>
-                        <a:t>18</a:t>
-                      </a:r>
-                    </a:p>
-                  </a:txBody>
-                  <a:tcPr/>
-                </a:tc>
-                <a:tc>
-                  <a:txBody>
-                    <a:bodyPr/>
-                    <a:lstStyle/>
-                    <a:p>
-                      <a:pPr>
-                        <a:defRPr sz="1000"/>
-                      </a:pPr>
-                      <a:r>
-                        <a:t>160</a:t>
-                      </a:r>
-                    </a:p>
-                  </a:txBody>
-                  <a:tcPr/>
-                </a:tc>
-                <a:tc>
-                  <a:txBody>
-                    <a:bodyPr/>
-                    <a:lstStyle/>
-                    <a:p>
-                      <a:pPr>
-                        <a:defRPr sz="1000"/>
-                      </a:pPr>
-                      <a:r>
-                        <a:t>5%</a:t>
-                      </a:r>
-                    </a:p>
-                  </a:txBody>
-                  <a:tcPr/>
-                </a:tc>
-                <a:tc>
-                  <a:txBody>
-                    <a:bodyPr/>
-                    <a:lstStyle/>
-                    <a:p>
-                      <a:pPr>
-                        <a:defRPr sz="1000"/>
-                      </a:pPr>
-                      <a:r>
-                        <a:t>신규 사업 확장 중</a:t>
-                      </a:r>
-                    </a:p>
-                  </a:txBody>
-                  <a:tcPr/>
-                </a:tc>
-              </a:tr>
-            </a:tbl>
-          </a:graphicData>
-        </a:graphic>
-      </p:graphicFrame>
+              <a:t>• 전국 하수처리장 총량: 2,458개소 (2024년 기준)</a:t>
+            </a:r>
+          </a:p>
+          <a:p>
+            <a:pPr>
+              <a:defRPr sz="1800">
+                <a:solidFill>
+                  <a:srgbClr val="404040"/>
+                </a:solidFill>
+                <a:latin typeface="Malgun Gothic"/>
+              </a:defRPr>
+            </a:pPr>
+            <a:r>
+              <a:t>• 민간위탁 비율: 67.3% (1,654개소)</a:t>
+            </a:r>
+          </a:p>
+          <a:p>
+            <a:pPr>
+              <a:defRPr sz="1800">
+                <a:solidFill>
+                  <a:srgbClr val="404040"/>
+                </a:solidFill>
+                <a:latin typeface="Malgun Gothic"/>
+              </a:defRPr>
+            </a:pPr>
+            <a:r>
+              <a:t>• 연평균 성장률 (CAGR): 4.2% (2020~2024년)</a:t>
+            </a:r>
+          </a:p>
+          <a:p>
+            <a:pPr>
+              <a:defRPr sz="1800">
+                <a:solidFill>
+                  <a:srgbClr val="404040"/>
+                </a:solidFill>
+                <a:latin typeface="Malgun Gothic"/>
+              </a:defRPr>
+            </a:pPr>
+            <a:r>
+              <a:t>• 시장 규모: 약 2조 8,500억원 (2024년 예상)</a:t>
+            </a:r>
+          </a:p>
+          <a:p>
+            <a:pPr>
+              <a:defRPr sz="1800">
+                <a:solidFill>
+                  <a:srgbClr val="404040"/>
+                </a:solidFill>
+                <a:latin typeface="Malgun Gothic"/>
+              </a:defRPr>
+            </a:pPr>
+            <a:r>
+              <a:t>• 정부의 민간위託 확대 정책에 따른 지속적 성장세</a:t>
+            </a:r>
+          </a:p>
+          <a:p>
+            <a:pPr>
+              <a:defRPr sz="1800">
+                <a:solidFill>
+                  <a:srgbClr val="404040"/>
+                </a:solidFill>
+                <a:latin typeface="Malgun Gothic"/>
+              </a:defRPr>
+            </a:pPr>
+            <a:r>
+              <a:t>• 환경규제 강화로 전문 운영업체 수요 증가</a:t>
+            </a:r>
+          </a:p>
+        </p:txBody>
+      </p:sp>
     </p:spTree>
   </p:cSld>
   <p:clrMapOvr>
@@ -4206,12 +3719,18 @@
             <a:spAutoFit/>
           </a:bodyPr>
           <a:lstStyle/>
+          <a:p/>
           <a:p>
             <a:pPr>
-              <a:defRPr sz="2400" b="1"/>
+              <a:defRPr sz="2800" b="1">
+                <a:solidFill>
+                  <a:srgbClr val="003366"/>
+                </a:solidFill>
+                <a:latin typeface="Malgun Gothic"/>
+              </a:defRPr>
             </a:pPr>
             <a:r>
-              <a:t>업체별 하수부문 매출액 현황 (2023 년 기준)</a:t>
+              <a:t>주요 업체 현황</a:t>
             </a:r>
           </a:p>
         </p:txBody>
@@ -4226,7 +3745,7 @@
         </p:nvGraphicFramePr>
         <p:xfrm>
           <a:off x="457200" y="1097280"/>
-          <a:ext cx="8229600" cy="548640"/>
+          <a:ext cx="8229600" cy="6583680"/>
         </p:xfrm>
         <a:graphic>
           <a:graphicData uri="http://schemas.openxmlformats.org/drawingml/2006/table">
@@ -4235,25 +3754,128 @@
                 <a:tableStyleId>{5C22544A-7EE6-4342-B048-85BDC9FD1C3A}</a:tableStyleId>
               </a:tblPr>
               <a:tblGrid>
-                <a:gridCol w="2743200"/>
                 <a:gridCol w="2286000"/>
                 <a:gridCol w="1828800"/>
-                <a:gridCol w="1371600"/>
+                <a:gridCol w="2286000"/>
+                <a:gridCol w="1828800"/>
               </a:tblGrid>
-              <a:tr h="60960">
-                <a:tc>
-                  <a:txBody>
-                    <a:bodyPr/>
-                    <a:lstStyle/>
-                    <a:p>
-                      <a:pPr>
-                        <a:defRPr b="1" sz="1100"/>
+              <a:tr h="731520">
+                <a:tc>
+                  <a:txBody>
+                    <a:bodyPr/>
+                    <a:lstStyle/>
+                    <a:p>
+                      <a:pPr algn="ctr">
+                        <a:defRPr sz="1600" b="1">
+                          <a:solidFill>
+                            <a:srgbClr val="FFFFFF"/>
+                          </a:solidFill>
+                          <a:latin typeface="Malgun Gothic"/>
+                        </a:defRPr>
                       </a:pPr>
                       <a:r>
                         <a:t>업체명</a:t>
                       </a:r>
                     </a:p>
                   </a:txBody>
+                  <a:tcPr>
+                    <a:solidFill>
+                      <a:srgbClr val="003366"/>
+                    </a:solidFill>
+                  </a:tcPr>
+                </a:tc>
+                <a:tc>
+                  <a:txBody>
+                    <a:bodyPr/>
+                    <a:lstStyle/>
+                    <a:p>
+                      <a:pPr algn="ctr">
+                        <a:defRPr sz="1600" b="1">
+                          <a:solidFill>
+                            <a:srgbClr val="FFFFFF"/>
+                          </a:solidFill>
+                          <a:latin typeface="Malgun Gothic"/>
+                        </a:defRPr>
+                      </a:pPr>
+                      <a:r>
+                        <a:t>운영 처리장 수</a:t>
+                      </a:r>
+                    </a:p>
+                  </a:txBody>
+                  <a:tcPr>
+                    <a:solidFill>
+                      <a:srgbClr val="003366"/>
+                    </a:solidFill>
+                  </a:tcPr>
+                </a:tc>
+                <a:tc>
+                  <a:txBody>
+                    <a:bodyPr/>
+                    <a:lstStyle/>
+                    <a:p>
+                      <a:pPr algn="ctr">
+                        <a:defRPr sz="1600" b="1">
+                          <a:solidFill>
+                            <a:srgbClr val="FFFFFF"/>
+                          </a:solidFill>
+                          <a:latin typeface="Malgun Gothic"/>
+                        </a:defRPr>
+                      </a:pPr>
+                      <a:r>
+                        <a:t>처리용량 (톤/일)</a:t>
+                      </a:r>
+                    </a:p>
+                  </a:txBody>
+                  <a:tcPr>
+                    <a:solidFill>
+                      <a:srgbClr val="003366"/>
+                    </a:solidFill>
+                  </a:tcPr>
+                </a:tc>
+                <a:tc>
+                  <a:txBody>
+                    <a:bodyPr/>
+                    <a:lstStyle/>
+                    <a:p>
+                      <a:pPr algn="ctr">
+                        <a:defRPr sz="1600" b="1">
+                          <a:solidFill>
+                            <a:srgbClr val="FFFFFF"/>
+                          </a:solidFill>
+                          <a:latin typeface="Malgun Gothic"/>
+                        </a:defRPr>
+                      </a:pPr>
+                      <a:r>
+                        <a:t>시장점유율 (%)</a:t>
+                      </a:r>
+                    </a:p>
+                  </a:txBody>
+                  <a:tcPr>
+                    <a:solidFill>
+                      <a:srgbClr val="003366"/>
+                    </a:solidFill>
+                  </a:tcPr>
+                </a:tc>
+              </a:tr>
+              <a:tr h="731520">
+                <a:tc>
+                  <a:txBody>
+                    <a:bodyPr/>
+                    <a:lstStyle/>
+                    <a:p>
+                      <a:pPr algn="ctr">
+                        <a:defRPr sz="1400">
+                          <a:solidFill>
+                            <a:srgbClr val="404040"/>
+                          </a:solidFill>
+                          <a:latin typeface="Malgun Gothic"/>
+                        </a:defRPr>
+                      </a:pPr>
+                      <a:r>
+                        <a:t>A 환경건설</a:t>
+                      </a:r>
+                    </a:p>
+                  </a:txBody>
                   <a:tcPr/>
                 </a:tc>
                 <a:tc>
@@ -4261,11 +3883,16 @@
                     <a:bodyPr/>
                     <a:lstStyle/>
                     <a:p>
-                      <a:pPr>
-                        <a:defRPr b="1" sz="1100"/>
-                      </a:pPr>
-                      <a:r>
-                        <a:t>하수부문 매출액 (억원)</a:t>
+                      <a:pPr algn="ctr">
+                        <a:defRPr sz="1400">
+                          <a:solidFill>
+                            <a:srgbClr val="404040"/>
+                          </a:solidFill>
+                          <a:latin typeface="Malgun Gothic"/>
+                        </a:defRPr>
+                      </a:pPr>
+                      <a:r>
+                        <a:t>156</a:t>
                       </a:r>
                     </a:p>
                   </a:txBody>
@@ -4276,11 +3903,16 @@
                     <a:bodyPr/>
                     <a:lstStyle/>
                     <a:p>
-                      <a:pPr>
-                        <a:defRPr b="1" sz="1100"/>
-                      </a:pPr>
-                      <a:r>
-                        <a:t>전체매출 대비 비율</a:t>
+                      <a:pPr algn="ctr">
+                        <a:defRPr sz="1400">
+                          <a:solidFill>
+                            <a:srgbClr val="404040"/>
+                          </a:solidFill>
+                          <a:latin typeface="Malgun Gothic"/>
+                        </a:defRPr>
+                      </a:pPr>
+                      <a:r>
+                        <a:t>2850000</a:t>
                       </a:r>
                     </a:p>
                   </a:txBody>
@@ -4291,28 +3923,136 @@
                     <a:bodyPr/>
                     <a:lstStyle/>
                     <a:p>
-                      <a:pPr>
-                        <a:defRPr b="1" sz="1100"/>
-                      </a:pPr>
-                      <a:r>
-                        <a:t>전년대비 성장률</a:t>
+                      <a:pPr algn="ctr">
+                        <a:defRPr sz="1400">
+                          <a:solidFill>
+                            <a:srgbClr val="404040"/>
+                          </a:solidFill>
+                          <a:latin typeface="Malgun Gothic"/>
+                        </a:defRPr>
+                      </a:pPr>
+                      <a:r>
+                        <a:t>18.5</a:t>
                       </a:r>
                     </a:p>
                   </a:txBody>
                   <a:tcPr/>
                 </a:tc>
               </a:tr>
-              <a:tr h="60960">
-                <a:tc>
-                  <a:txBody>
-                    <a:bodyPr/>
-                    <a:lstStyle/>
-                    <a:p>
-                      <a:pPr>
-                        <a:defRPr sz="1000"/>
-                      </a:pPr>
-                      <a:r>
-                        <a:t>SK 에코플랜트</a:t>
+              <a:tr h="731520">
+                <a:tc>
+                  <a:txBody>
+                    <a:bodyPr/>
+                    <a:lstStyle/>
+                    <a:p>
+                      <a:pPr algn="ctr">
+                        <a:defRPr sz="1400">
+                          <a:solidFill>
+                            <a:srgbClr val="404040"/>
+                          </a:solidFill>
+                          <a:latin typeface="Malgun Gothic"/>
+                        </a:defRPr>
+                      </a:pPr>
+                      <a:r>
+                        <a:t>B 워터테크</a:t>
+                      </a:r>
+                    </a:p>
+                  </a:txBody>
+                  <a:tcPr>
+                    <a:solidFill>
+                      <a:srgbClr val="F0F0F0"/>
+                    </a:solidFill>
+                  </a:tcPr>
+                </a:tc>
+                <a:tc>
+                  <a:txBody>
+                    <a:bodyPr/>
+                    <a:lstStyle/>
+                    <a:p>
+                      <a:pPr algn="ctr">
+                        <a:defRPr sz="1400">
+                          <a:solidFill>
+                            <a:srgbClr val="404040"/>
+                          </a:solidFill>
+                          <a:latin typeface="Malgun Gothic"/>
+                        </a:defRPr>
+                      </a:pPr>
+                      <a:r>
+                        <a:t>128</a:t>
+                      </a:r>
+                    </a:p>
+                  </a:txBody>
+                  <a:tcPr>
+                    <a:solidFill>
+                      <a:srgbClr val="F0F0F0"/>
+                    </a:solidFill>
+                  </a:tcPr>
+                </a:tc>
+                <a:tc>
+                  <a:txBody>
+                    <a:bodyPr/>
+                    <a:lstStyle/>
+                    <a:p>
+                      <a:pPr algn="ctr">
+                        <a:defRPr sz="1400">
+                          <a:solidFill>
+                            <a:srgbClr val="404040"/>
+                          </a:solidFill>
+                          <a:latin typeface="Malgun Gothic"/>
+                        </a:defRPr>
+                      </a:pPr>
+                      <a:r>
+                        <a:t>2340000</a:t>
+                      </a:r>
+                    </a:p>
+                  </a:txBody>
+                  <a:tcPr>
+                    <a:solidFill>
+                      <a:srgbClr val="F0F0F0"/>
+                    </a:solidFill>
+                  </a:tcPr>
+                </a:tc>
+                <a:tc>
+                  <a:txBody>
+                    <a:bodyPr/>
+                    <a:lstStyle/>
+                    <a:p>
+                      <a:pPr algn="ctr">
+                        <a:defRPr sz="1400">
+                          <a:solidFill>
+                            <a:srgbClr val="404040"/>
+                          </a:solidFill>
+                          <a:latin typeface="Malgun Gothic"/>
+                        </a:defRPr>
+                      </a:pPr>
+                      <a:r>
+                        <a:t>15.2</a:t>
+                      </a:r>
+                    </a:p>
+                  </a:txBody>
+                  <a:tcPr>
+                    <a:solidFill>
+                      <a:srgbClr val="F0F0F0"/>
+                    </a:solidFill>
+                  </a:tcPr>
+                </a:tc>
+              </a:tr>
+              <a:tr h="731520">
+                <a:tc>
+                  <a:txBody>
+                    <a:bodyPr/>
+                    <a:lstStyle/>
+                    <a:p>
+                      <a:pPr algn="ctr">
+                        <a:defRPr sz="1400">
+                          <a:solidFill>
+                            <a:srgbClr val="404040"/>
+                          </a:solidFill>
+                          <a:latin typeface="Malgun Gothic"/>
+                        </a:defRPr>
+                      </a:pPr>
+                      <a:r>
+                        <a:t>C 그린시스템</a:t>
                       </a:r>
                     </a:p>
                   </a:txBody>
@@ -4323,11 +4063,16 @@
                     <a:bodyPr/>
                     <a:lstStyle/>
                     <a:p>
-                      <a:pPr>
-                        <a:defRPr sz="1000"/>
-                      </a:pPr>
-                      <a:r>
-                        <a:t>4,850</a:t>
+                      <a:pPr algn="ctr">
+                        <a:defRPr sz="1400">
+                          <a:solidFill>
+                            <a:srgbClr val="404040"/>
+                          </a:solidFill>
+                          <a:latin typeface="Malgun Gothic"/>
+                        </a:defRPr>
+                      </a:pPr>
+                      <a:r>
+                        <a:t>98</a:t>
                       </a:r>
                     </a:p>
                   </a:txBody>
@@ -4338,11 +4083,16 @@
                     <a:bodyPr/>
                     <a:lstStyle/>
                     <a:p>
-                      <a:pPr>
-                        <a:defRPr sz="1000"/>
-                      </a:pPr>
-                      <a:r>
-                        <a:t>18%</a:t>
+                      <a:pPr algn="ctr">
+                        <a:defRPr sz="1400">
+                          <a:solidFill>
+                            <a:srgbClr val="404040"/>
+                          </a:solidFill>
+                          <a:latin typeface="Malgun Gothic"/>
+                        </a:defRPr>
+                      </a:pPr>
+                      <a:r>
+                        <a:t>1780000</a:t>
                       </a:r>
                     </a:p>
                   </a:txBody>
@@ -4353,28 +4103,136 @@
                     <a:bodyPr/>
                     <a:lstStyle/>
                     <a:p>
-                      <a:pPr>
-                        <a:defRPr sz="1000"/>
-                      </a:pPr>
-                      <a:r>
-                        <a:t>+5.2%</a:t>
+                      <a:pPr algn="ctr">
+                        <a:defRPr sz="1400">
+                          <a:solidFill>
+                            <a:srgbClr val="404040"/>
+                          </a:solidFill>
+                          <a:latin typeface="Malgun Gothic"/>
+                        </a:defRPr>
+                      </a:pPr>
+                      <a:r>
+                        <a:t>11.6</a:t>
                       </a:r>
                     </a:p>
                   </a:txBody>
                   <a:tcPr/>
                 </a:tc>
               </a:tr>
-              <a:tr h="60960">
-                <a:tc>
-                  <a:txBody>
-                    <a:bodyPr/>
-                    <a:lstStyle/>
-                    <a:p>
-                      <a:pPr>
-                        <a:defRPr sz="1000"/>
-                      </a:pPr>
-                      <a:r>
-                        <a:t>한국환경산업</a:t>
+              <a:tr h="731520">
+                <a:tc>
+                  <a:txBody>
+                    <a:bodyPr/>
+                    <a:lstStyle/>
+                    <a:p>
+                      <a:pPr algn="ctr">
+                        <a:defRPr sz="1400">
+                          <a:solidFill>
+                            <a:srgbClr val="404040"/>
+                          </a:solidFill>
+                          <a:latin typeface="Malgun Gothic"/>
+                        </a:defRPr>
+                      </a:pPr>
+                      <a:r>
+                        <a:t>D 에코서비스</a:t>
+                      </a:r>
+                    </a:p>
+                  </a:txBody>
+                  <a:tcPr>
+                    <a:solidFill>
+                      <a:srgbClr val="F0F0F0"/>
+                    </a:solidFill>
+                  </a:tcPr>
+                </a:tc>
+                <a:tc>
+                  <a:txBody>
+                    <a:bodyPr/>
+                    <a:lstStyle/>
+                    <a:p>
+                      <a:pPr algn="ctr">
+                        <a:defRPr sz="1400">
+                          <a:solidFill>
+                            <a:srgbClr val="404040"/>
+                          </a:solidFill>
+                          <a:latin typeface="Malgun Gothic"/>
+                        </a:defRPr>
+                      </a:pPr>
+                      <a:r>
+                        <a:t>87</a:t>
+                      </a:r>
+                    </a:p>
+                  </a:txBody>
+                  <a:tcPr>
+                    <a:solidFill>
+                      <a:srgbClr val="F0F0F0"/>
+                    </a:solidFill>
+                  </a:tcPr>
+                </a:tc>
+                <a:tc>
+                  <a:txBody>
+                    <a:bodyPr/>
+                    <a:lstStyle/>
+                    <a:p>
+                      <a:pPr algn="ctr">
+                        <a:defRPr sz="1400">
+                          <a:solidFill>
+                            <a:srgbClr val="404040"/>
+                          </a:solidFill>
+                          <a:latin typeface="Malgun Gothic"/>
+                        </a:defRPr>
+                      </a:pPr>
+                      <a:r>
+                        <a:t>1560000</a:t>
+                      </a:r>
+                    </a:p>
+                  </a:txBody>
+                  <a:tcPr>
+                    <a:solidFill>
+                      <a:srgbClr val="F0F0F0"/>
+                    </a:solidFill>
+                  </a:tcPr>
+                </a:tc>
+                <a:tc>
+                  <a:txBody>
+                    <a:bodyPr/>
+                    <a:lstStyle/>
+                    <a:p>
+                      <a:pPr algn="ctr">
+                        <a:defRPr sz="1400">
+                          <a:solidFill>
+                            <a:srgbClr val="404040"/>
+                          </a:solidFill>
+                          <a:latin typeface="Malgun Gothic"/>
+                        </a:defRPr>
+                      </a:pPr>
+                      <a:r>
+                        <a:t>10.1</a:t>
+                      </a:r>
+                    </a:p>
+                  </a:txBody>
+                  <a:tcPr>
+                    <a:solidFill>
+                      <a:srgbClr val="F0F0F0"/>
+                    </a:solidFill>
+                  </a:tcPr>
+                </a:tc>
+              </a:tr>
+              <a:tr h="731520">
+                <a:tc>
+                  <a:txBody>
+                    <a:bodyPr/>
+                    <a:lstStyle/>
+                    <a:p>
+                      <a:pPr algn="ctr">
+                        <a:defRPr sz="1400">
+                          <a:solidFill>
+                            <a:srgbClr val="404040"/>
+                          </a:solidFill>
+                          <a:latin typeface="Malgun Gothic"/>
+                        </a:defRPr>
+                      </a:pPr>
+                      <a:r>
+                        <a:t>E 클린워터</a:t>
                       </a:r>
                     </a:p>
                   </a:txBody>
@@ -4385,11 +4243,16 @@
                     <a:bodyPr/>
                     <a:lstStyle/>
                     <a:p>
-                      <a:pPr>
-                        <a:defRPr sz="1000"/>
-                      </a:pPr>
-                      <a:r>
-                        <a:t>4,120</a:t>
+                      <a:pPr algn="ctr">
+                        <a:defRPr sz="1400">
+                          <a:solidFill>
+                            <a:srgbClr val="404040"/>
+                          </a:solidFill>
+                          <a:latin typeface="Malgun Gothic"/>
+                        </a:defRPr>
+                      </a:pPr>
+                      <a:r>
+                        <a:t>72</a:t>
                       </a:r>
                     </a:p>
                   </a:txBody>
@@ -4400,11 +4263,16 @@
                     <a:bodyPr/>
                     <a:lstStyle/>
                     <a:p>
-                      <a:pPr>
-                        <a:defRPr sz="1000"/>
-                      </a:pPr>
-                      <a:r>
-                        <a:t>22%</a:t>
+                      <a:pPr algn="ctr">
+                        <a:defRPr sz="1400">
+                          <a:solidFill>
+                            <a:srgbClr val="404040"/>
+                          </a:solidFill>
+                          <a:latin typeface="Malgun Gothic"/>
+                        </a:defRPr>
+                      </a:pPr>
+                      <a:r>
+                        <a:t>1320000</a:t>
                       </a:r>
                     </a:p>
                   </a:txBody>
@@ -4415,28 +4283,136 @@
                     <a:bodyPr/>
                     <a:lstStyle/>
                     <a:p>
-                      <a:pPr>
-                        <a:defRPr sz="1000"/>
-                      </a:pPr>
-                      <a:r>
-                        <a:t>+4.8%</a:t>
+                      <a:pPr algn="ctr">
+                        <a:defRPr sz="1400">
+                          <a:solidFill>
+                            <a:srgbClr val="404040"/>
+                          </a:solidFill>
+                          <a:latin typeface="Malgun Gothic"/>
+                        </a:defRPr>
+                      </a:pPr>
+                      <a:r>
+                        <a:t>8.6</a:t>
                       </a:r>
                     </a:p>
                   </a:txBody>
                   <a:tcPr/>
                 </a:tc>
               </a:tr>
-              <a:tr h="60960">
-                <a:tc>
-                  <a:txBody>
-                    <a:bodyPr/>
-                    <a:lstStyle/>
-                    <a:p>
-                      <a:pPr>
-                        <a:defRPr sz="1000"/>
-                      </a:pPr>
-                      <a:r>
-                        <a:t>대우건설</a:t>
+              <a:tr h="731520">
+                <a:tc>
+                  <a:txBody>
+                    <a:bodyPr/>
+                    <a:lstStyle/>
+                    <a:p>
+                      <a:pPr algn="ctr">
+                        <a:defRPr sz="1400">
+                          <a:solidFill>
+                            <a:srgbClr val="404040"/>
+                          </a:solidFill>
+                          <a:latin typeface="Malgun Gothic"/>
+                        </a:defRPr>
+                      </a:pPr>
+                      <a:r>
+                        <a:t>F 물관리공사</a:t>
+                      </a:r>
+                    </a:p>
+                  </a:txBody>
+                  <a:tcPr>
+                    <a:solidFill>
+                      <a:srgbClr val="F0F0F0"/>
+                    </a:solidFill>
+                  </a:tcPr>
+                </a:tc>
+                <a:tc>
+                  <a:txBody>
+                    <a:bodyPr/>
+                    <a:lstStyle/>
+                    <a:p>
+                      <a:pPr algn="ctr">
+                        <a:defRPr sz="1400">
+                          <a:solidFill>
+                            <a:srgbClr val="404040"/>
+                          </a:solidFill>
+                          <a:latin typeface="Malgun Gothic"/>
+                        </a:defRPr>
+                      </a:pPr>
+                      <a:r>
+                        <a:t>65</a:t>
+                      </a:r>
+                    </a:p>
+                  </a:txBody>
+                  <a:tcPr>
+                    <a:solidFill>
+                      <a:srgbClr val="F0F0F0"/>
+                    </a:solidFill>
+                  </a:tcPr>
+                </a:tc>
+                <a:tc>
+                  <a:txBody>
+                    <a:bodyPr/>
+                    <a:lstStyle/>
+                    <a:p>
+                      <a:pPr algn="ctr">
+                        <a:defRPr sz="1400">
+                          <a:solidFill>
+                            <a:srgbClr val="404040"/>
+                          </a:solidFill>
+                          <a:latin typeface="Malgun Gothic"/>
+                        </a:defRPr>
+                      </a:pPr>
+                      <a:r>
+                        <a:t>1180000</a:t>
+                      </a:r>
+                    </a:p>
+                  </a:txBody>
+                  <a:tcPr>
+                    <a:solidFill>
+                      <a:srgbClr val="F0F0F0"/>
+                    </a:solidFill>
+                  </a:tcPr>
+                </a:tc>
+                <a:tc>
+                  <a:txBody>
+                    <a:bodyPr/>
+                    <a:lstStyle/>
+                    <a:p>
+                      <a:pPr algn="ctr">
+                        <a:defRPr sz="1400">
+                          <a:solidFill>
+                            <a:srgbClr val="404040"/>
+                          </a:solidFill>
+                          <a:latin typeface="Malgun Gothic"/>
+                        </a:defRPr>
+                      </a:pPr>
+                      <a:r>
+                        <a:t>7.7</a:t>
+                      </a:r>
+                    </a:p>
+                  </a:txBody>
+                  <a:tcPr>
+                    <a:solidFill>
+                      <a:srgbClr val="F0F0F0"/>
+                    </a:solidFill>
+                  </a:tcPr>
+                </a:tc>
+              </a:tr>
+              <a:tr h="731520">
+                <a:tc>
+                  <a:txBody>
+                    <a:bodyPr/>
+                    <a:lstStyle/>
+                    <a:p>
+                      <a:pPr algn="ctr">
+                        <a:defRPr sz="1400">
+                          <a:solidFill>
+                            <a:srgbClr val="404040"/>
+                          </a:solidFill>
+                          <a:latin typeface="Malgun Gothic"/>
+                        </a:defRPr>
+                      </a:pPr>
+                      <a:r>
+                        <a:t>G 청정기술</a:t>
                       </a:r>
                     </a:p>
                   </a:txBody>
@@ -4447,11 +4423,16 @@
                     <a:bodyPr/>
                     <a:lstStyle/>
                     <a:p>
-                      <a:pPr>
-                        <a:defRPr sz="1000"/>
-                      </a:pPr>
-                      <a:r>
-                        <a:t>3,680</a:t>
+                      <a:pPr algn="ctr">
+                        <a:defRPr sz="1400">
+                          <a:solidFill>
+                            <a:srgbClr val="404040"/>
+                          </a:solidFill>
+                          <a:latin typeface="Malgun Gothic"/>
+                        </a:defRPr>
+                      </a:pPr>
+                      <a:r>
+                        <a:t>54</a:t>
                       </a:r>
                     </a:p>
                   </a:txBody>
@@ -4462,11 +4443,16 @@
                     <a:bodyPr/>
                     <a:lstStyle/>
                     <a:p>
-                      <a:pPr>
-                        <a:defRPr sz="1000"/>
-                      </a:pPr>
-                      <a:r>
-                        <a:t>8%</a:t>
+                      <a:pPr algn="ctr">
+                        <a:defRPr sz="1400">
+                          <a:solidFill>
+                            <a:srgbClr val="404040"/>
+                          </a:solidFill>
+                          <a:latin typeface="Malgun Gothic"/>
+                        </a:defRPr>
+                      </a:pPr>
+                      <a:r>
+                        <a:t>980000</a:t>
                       </a:r>
                     </a:p>
                   </a:txBody>
@@ -4477,325 +4463,118 @@
                     <a:bodyPr/>
                     <a:lstStyle/>
                     <a:p>
-                      <a:pPr>
-                        <a:defRPr sz="1000"/>
-                      </a:pPr>
-                      <a:r>
-                        <a:t>+3.9%</a:t>
+                      <a:pPr algn="ctr">
+                        <a:defRPr sz="1400">
+                          <a:solidFill>
+                            <a:srgbClr val="404040"/>
+                          </a:solidFill>
+                          <a:latin typeface="Malgun Gothic"/>
+                        </a:defRPr>
+                      </a:pPr>
+                      <a:r>
+                        <a:t>6.4</a:t>
                       </a:r>
                     </a:p>
                   </a:txBody>
                   <a:tcPr/>
                 </a:tc>
               </a:tr>
-              <a:tr h="60960">
-                <a:tc>
-                  <a:txBody>
-                    <a:bodyPr/>
-                    <a:lstStyle/>
-                    <a:p>
-                      <a:pPr>
-                        <a:defRPr sz="1000"/>
-                      </a:pPr>
-                      <a:r>
-                        <a:t>삼성 C&amp;T</a:t>
-                      </a:r>
-                    </a:p>
-                  </a:txBody>
-                  <a:tcPr/>
-                </a:tc>
-                <a:tc>
-                  <a:txBody>
-                    <a:bodyPr/>
-                    <a:lstStyle/>
-                    <a:p>
-                      <a:pPr>
-                        <a:defRPr sz="1000"/>
-                      </a:pPr>
-                      <a:r>
-                        <a:t>3,250</a:t>
-                      </a:r>
-                    </a:p>
-                  </a:txBody>
-                  <a:tcPr/>
-                </a:tc>
-                <a:tc>
-                  <a:txBody>
-                    <a:bodyPr/>
-                    <a:lstStyle/>
-                    <a:p>
-                      <a:pPr>
-                        <a:defRPr sz="1000"/>
-                      </a:pPr>
-                      <a:r>
-                        <a:t>6%</a:t>
-                      </a:r>
-                    </a:p>
-                  </a:txBody>
-                  <a:tcPr/>
-                </a:tc>
-                <a:tc>
-                  <a:txBody>
-                    <a:bodyPr/>
-                    <a:lstStyle/>
-                    <a:p>
-                      <a:pPr>
-                        <a:defRPr sz="1000"/>
-                      </a:pPr>
-                      <a:r>
-                        <a:t>+6.1%</a:t>
-                      </a:r>
-                    </a:p>
-                  </a:txBody>
-                  <a:tcPr/>
-                </a:tc>
-              </a:tr>
-              <a:tr h="60960">
-                <a:tc>
-                  <a:txBody>
-                    <a:bodyPr/>
-                    <a:lstStyle/>
-                    <a:p>
-                      <a:pPr>
-                        <a:defRPr sz="1000"/>
-                      </a:pPr>
-                      <a:r>
-                        <a:t>현대건설</a:t>
-                      </a:r>
-                    </a:p>
-                  </a:txBody>
-                  <a:tcPr/>
-                </a:tc>
-                <a:tc>
-                  <a:txBody>
-                    <a:bodyPr/>
-                    <a:lstStyle/>
-                    <a:p>
-                      <a:pPr>
-                        <a:defRPr sz="1000"/>
-                      </a:pPr>
-                      <a:r>
-                        <a:t>2,890</a:t>
-                      </a:r>
-                    </a:p>
-                  </a:txBody>
-                  <a:tcPr/>
-                </a:tc>
-                <a:tc>
-                  <a:txBody>
-                    <a:bodyPr/>
-                    <a:lstStyle/>
-                    <a:p>
-                      <a:pPr>
-                        <a:defRPr sz="1000"/>
-                      </a:pPr>
-                      <a:r>
-                        <a:t>5%</a:t>
-                      </a:r>
-                    </a:p>
-                  </a:txBody>
-                  <a:tcPr/>
-                </a:tc>
-                <a:tc>
-                  <a:txBody>
-                    <a:bodyPr/>
-                    <a:lstStyle/>
-                    <a:p>
-                      <a:pPr>
-                        <a:defRPr sz="1000"/>
-                      </a:pPr>
-                      <a:r>
-                        <a:t>+4.5%</a:t>
-                      </a:r>
-                    </a:p>
-                  </a:txBody>
-                  <a:tcPr/>
-                </a:tc>
-              </a:tr>
-              <a:tr h="60960">
-                <a:tc>
-                  <a:txBody>
-                    <a:bodyPr/>
-                    <a:lstStyle/>
-                    <a:p>
-                      <a:pPr>
-                        <a:defRPr sz="1000"/>
-                      </a:pPr>
-                      <a:r>
-                        <a:t>두산건설</a:t>
-                      </a:r>
-                    </a:p>
-                  </a:txBody>
-                  <a:tcPr/>
-                </a:tc>
-                <a:tc>
-                  <a:txBody>
-                    <a:bodyPr/>
-                    <a:lstStyle/>
-                    <a:p>
-                      <a:pPr>
-                        <a:defRPr sz="1000"/>
-                      </a:pPr>
-                      <a:r>
-                        <a:t>2,540</a:t>
-                      </a:r>
-                    </a:p>
-                  </a:txBody>
-                  <a:tcPr/>
-                </a:tc>
-                <a:tc>
-                  <a:txBody>
-                    <a:bodyPr/>
-                    <a:lstStyle/>
-                    <a:p>
-                      <a:pPr>
-                        <a:defRPr sz="1000"/>
-                      </a:pPr>
-                      <a:r>
-                        <a:t>7%</a:t>
-                      </a:r>
-                    </a:p>
-                  </a:txBody>
-                  <a:tcPr/>
-                </a:tc>
-                <a:tc>
-                  <a:txBody>
-                    <a:bodyPr/>
-                    <a:lstStyle/>
-                    <a:p>
-                      <a:pPr>
-                        <a:defRPr sz="1000"/>
-                      </a:pPr>
-                      <a:r>
-                        <a:t>+3.2%</a:t>
-                      </a:r>
-                    </a:p>
-                  </a:txBody>
-                  <a:tcPr/>
-                </a:tc>
-              </a:tr>
-              <a:tr h="60960">
-                <a:tc>
-                  <a:txBody>
-                    <a:bodyPr/>
-                    <a:lstStyle/>
-                    <a:p>
-                      <a:pPr>
-                        <a:defRPr sz="1000"/>
-                      </a:pPr>
-                      <a:r>
-                        <a:t>GS 건설</a:t>
-                      </a:r>
-                    </a:p>
-                  </a:txBody>
-                  <a:tcPr/>
-                </a:tc>
-                <a:tc>
-                  <a:txBody>
-                    <a:bodyPr/>
-                    <a:lstStyle/>
-                    <a:p>
-                      <a:pPr>
-                        <a:defRPr sz="1000"/>
-                      </a:pPr>
-                      <a:r>
-                        <a:t>2,280</a:t>
-                      </a:r>
-                    </a:p>
-                  </a:txBody>
-                  <a:tcPr/>
-                </a:tc>
-                <a:tc>
-                  <a:txBody>
-                    <a:bodyPr/>
-                    <a:lstStyle/>
-                    <a:p>
-                      <a:pPr>
-                        <a:defRPr sz="1000"/>
-                      </a:pPr>
-                      <a:r>
-                        <a:t>4%</a:t>
-                      </a:r>
-                    </a:p>
-                  </a:txBody>
-                  <a:tcPr/>
-                </a:tc>
-                <a:tc>
-                  <a:txBody>
-                    <a:bodyPr/>
-                    <a:lstStyle/>
-                    <a:p>
-                      <a:pPr>
-                        <a:defRPr sz="1000"/>
-                      </a:pPr>
-                      <a:r>
-                        <a:t>+3.8%</a:t>
-                      </a:r>
-                    </a:p>
-                  </a:txBody>
-                  <a:tcPr/>
-                </a:tc>
-              </a:tr>
-              <a:tr h="60960">
-                <a:tc>
-                  <a:txBody>
-                    <a:bodyPr/>
-                    <a:lstStyle/>
-                    <a:p>
-                      <a:pPr>
-                        <a:defRPr sz="1000"/>
-                      </a:pPr>
-                      <a:r>
-                        <a:t>롯데건설</a:t>
-                      </a:r>
-                    </a:p>
-                  </a:txBody>
-                  <a:tcPr/>
-                </a:tc>
-                <a:tc>
-                  <a:txBody>
-                    <a:bodyPr/>
-                    <a:lstStyle/>
-                    <a:p>
-                      <a:pPr>
-                        <a:defRPr sz="1000"/>
-                      </a:pPr>
-                      <a:r>
-                        <a:t>2,050</a:t>
-                      </a:r>
-                    </a:p>
-                  </a:txBody>
-                  <a:tcPr/>
-                </a:tc>
-                <a:tc>
-                  <a:txBody>
-                    <a:bodyPr/>
-                    <a:lstStyle/>
-                    <a:p>
-                      <a:pPr>
-                        <a:defRPr sz="1000"/>
-                      </a:pPr>
-                      <a:r>
-                        <a:t>5%</a:t>
-                      </a:r>
-                    </a:p>
-                  </a:txBody>
-                  <a:tcPr/>
-                </a:tc>
-                <a:tc>
-                  <a:txBody>
-                    <a:bodyPr/>
-                    <a:lstStyle/>
-                    <a:p>
-                      <a:pPr>
-                        <a:defRPr sz="1000"/>
-                      </a:pPr>
-                      <a:r>
-                        <a:t>+4.2%</a:t>
-                      </a:r>
-                    </a:p>
-                  </a:txBody>
-                  <a:tcPr/>
+              <a:tr h="731520">
+                <a:tc>
+                  <a:txBody>
+                    <a:bodyPr/>
+                    <a:lstStyle/>
+                    <a:p>
+                      <a:pPr algn="ctr">
+                        <a:defRPr sz="1400">
+                          <a:solidFill>
+                            <a:srgbClr val="404040"/>
+                          </a:solidFill>
+                          <a:latin typeface="Malgun Gothic"/>
+                        </a:defRPr>
+                      </a:pPr>
+                      <a:r>
+                        <a:t>H 환경개발</a:t>
+                      </a:r>
+                    </a:p>
+                  </a:txBody>
+                  <a:tcPr>
+                    <a:solidFill>
+                      <a:srgbClr val="F0F0F0"/>
+                    </a:solidFill>
+                  </a:tcPr>
+                </a:tc>
+                <a:tc>
+                  <a:txBody>
+                    <a:bodyPr/>
+                    <a:lstStyle/>
+                    <a:p>
+                      <a:pPr algn="ctr">
+                        <a:defRPr sz="1400">
+                          <a:solidFill>
+                            <a:srgbClr val="404040"/>
+                          </a:solidFill>
+                          <a:latin typeface="Malgun Gothic"/>
+                        </a:defRPr>
+                      </a:pPr>
+                      <a:r>
+                        <a:t>48</a:t>
+                      </a:r>
+                    </a:p>
+                  </a:txBody>
+                  <a:tcPr>
+                    <a:solidFill>
+                      <a:srgbClr val="F0F0F0"/>
+                    </a:solidFill>
+                  </a:tcPr>
+                </a:tc>
+                <a:tc>
+                  <a:txBody>
+                    <a:bodyPr/>
+                    <a:lstStyle/>
+                    <a:p>
+                      <a:pPr algn="ctr">
+                        <a:defRPr sz="1400">
+                          <a:solidFill>
+                            <a:srgbClr val="404040"/>
+                          </a:solidFill>
+                          <a:latin typeface="Malgun Gothic"/>
+                        </a:defRPr>
+                      </a:pPr>
+                      <a:r>
+                        <a:t>870000</a:t>
+                      </a:r>
+                    </a:p>
+                  </a:txBody>
+                  <a:tcPr>
+                    <a:solidFill>
+                      <a:srgbClr val="F0F0F0"/>
+                    </a:solidFill>
+                  </a:tcPr>
+                </a:tc>
+                <a:tc>
+                  <a:txBody>
+                    <a:bodyPr/>
+                    <a:lstStyle/>
+                    <a:p>
+                      <a:pPr algn="ctr">
+                        <a:defRPr sz="1400">
+                          <a:solidFill>
+                            <a:srgbClr val="404040"/>
+                          </a:solidFill>
+                          <a:latin typeface="Malgun Gothic"/>
+                        </a:defRPr>
+                      </a:pPr>
+                      <a:r>
+                        <a:t>5.7</a:t>
+                      </a:r>
+                    </a:p>
+                  </a:txBody>
+                  <a:tcPr>
+                    <a:solidFill>
+                      <a:srgbClr val="F0F0F0"/>
+                    </a:solidFill>
+                  </a:tcPr>
                 </a:tc>
               </a:tr>
             </a:tbl>
@@ -4834,97 +4613,614 @@
         <p:txBody>
           <a:bodyPr/>
           <a:lstStyle/>
-          <a:p>
-            <a:r>
-              <a:t>지역별 업체 분포</a:t>
-            </a:r>
-          </a:p>
-        </p:txBody>
-      </p:sp>
-      <p:sp>
-        <p:nvSpPr>
-          <p:cNvPr id="3" name="Content Placeholder 2"/>
-          <p:cNvSpPr>
-            <a:spLocks noGrp="1"/>
-          </p:cNvSpPr>
-          <p:nvPr>
-            <p:ph idx="1"/>
-          </p:nvPr>
-        </p:nvSpPr>
-        <p:spPr/>
-        <p:txBody>
-          <a:bodyPr/>
+          <a:p/>
+        </p:txBody>
+      </p:sp>
+      <p:sp>
+        <p:nvSpPr>
+          <p:cNvPr id="3" name="TextBox 2"/>
+          <p:cNvSpPr txBox="1"/>
+          <p:nvPr/>
+        </p:nvSpPr>
+        <p:spPr>
+          <a:xfrm>
+            <a:off x="457200" y="274320"/>
+            <a:ext cx="8229600" cy="731520"/>
+          </a:xfrm>
+          <a:prstGeom prst="rect">
+            <a:avLst/>
+          </a:prstGeom>
+          <a:noFill/>
+        </p:spPr>
+        <p:txBody>
+          <a:bodyPr wrap="none">
+            <a:spAutoFit/>
+          </a:bodyPr>
           <a:lstStyle/>
-          <a:p>
-            <a:r>
-              <a:t>수도권 (서울·인천·경기)</a:t>
-            </a:r>
-          </a:p>
-          <a:p>
-            <a:pPr lvl="1"/>
-            <a:r>
-              <a:t>• 주요 업체: SK 에코플랜트, 삼성 C&amp;T, 대우건설</a:t>
-            </a:r>
-          </a:p>
-          <a:p>
-            <a:pPr lvl="1"/>
-            <a:r>
-              <a:t>• 특징: 대형 처리장 집중, 경쟁 심화</a:t>
-            </a:r>
-          </a:p>
           <a:p/>
           <a:p>
-            <a:pPr/>
-            <a:r>
-              <a:t>부산·울산·경남</a:t>
-            </a:r>
-          </a:p>
-          <a:p>
-            <a:pPr lvl="1"/>
-            <a:r>
-              <a:t>• 주요 업체: 한국환경산업, GS 건설, 지역전문업체</a:t>
-            </a:r>
-          </a:p>
-          <a:p>
-            <a:pPr lvl="1"/>
-            <a:r>
-              <a:t>• 특징: 항만 오염처리 특화</a:t>
-            </a:r>
-          </a:p>
-          <a:p/>
-          <a:p>
-            <a:pPr/>
-            <a:r>
-              <a:t>대구·경북</a:t>
-            </a:r>
-          </a:p>
-          <a:p>
-            <a:pPr lvl="1"/>
-            <a:r>
-              <a:t>• 주요 업체: 두산건설, 롯데건설, 대구환경</a:t>
-            </a:r>
-          </a:p>
-          <a:p/>
-          <a:p>
-            <a:pPr/>
-            <a:r>
-              <a:t>호남·제주</a:t>
-            </a:r>
-          </a:p>
-          <a:p>
-            <a:pPr lvl="1"/>
-            <a:r>
-              <a:t>• 주요 업체: 현대건설, 지역협동조합, 제주환경기술</a:t>
-            </a:r>
-          </a:p>
-          <a:p>
-            <a:pPr lvl="1"/>
-            <a:r>
-              <a:t>• 특징: 섬 지역 소규모 처리장 다수</a:t>
-            </a:r>
-          </a:p>
-        </p:txBody>
-      </p:sp>
+            <a:pPr>
+              <a:defRPr sz="2800" b="1">
+                <a:solidFill>
+                  <a:srgbClr val="003366"/>
+                </a:solidFill>
+                <a:latin typeface="Malgun Gothic"/>
+              </a:defRPr>
+            </a:pPr>
+            <a:r>
+              <a:t>매출액 현황 (상위 5개사)</a:t>
+            </a:r>
+          </a:p>
+        </p:txBody>
+      </p:sp>
+      <p:graphicFrame>
+        <p:nvGraphicFramePr>
+          <p:cNvPr id="4" name="Table 3"/>
+          <p:cNvGraphicFramePr>
+            <a:graphicFrameLocks noGrp="1"/>
+          </p:cNvGraphicFramePr>
+          <p:nvPr/>
+        </p:nvGraphicFramePr>
+        <p:xfrm>
+          <a:off x="457200" y="1097280"/>
+          <a:ext cx="8229600" cy="4389120"/>
+        </p:xfrm>
+        <a:graphic>
+          <a:graphicData uri="http://schemas.openxmlformats.org/drawingml/2006/table">
+            <a:tbl>
+              <a:tblPr firstRow="1" bandRow="1">
+                <a:tableStyleId>{5C22544A-7EE6-4342-B048-85BDC9FD1C3A}</a:tableStyleId>
+              </a:tblPr>
+              <a:tblGrid>
+                <a:gridCol w="1828800"/>
+                <a:gridCol w="2103120"/>
+                <a:gridCol w="2103120"/>
+                <a:gridCol w="2194560"/>
+              </a:tblGrid>
+              <a:tr h="731520">
+                <a:tc>
+                  <a:txBody>
+                    <a:bodyPr/>
+                    <a:lstStyle/>
+                    <a:p>
+                      <a:pPr algn="ctr">
+                        <a:defRPr sz="1600" b="1">
+                          <a:solidFill>
+                            <a:srgbClr val="FFFFFF"/>
+                          </a:solidFill>
+                          <a:latin typeface="Malgun Gothic"/>
+                        </a:defRPr>
+                      </a:pPr>
+                      <a:r>
+                        <a:t>업체명</a:t>
+                      </a:r>
+                    </a:p>
+                  </a:txBody>
+                  <a:tcPr>
+                    <a:solidFill>
+                      <a:srgbClr val="003366"/>
+                    </a:solidFill>
+                  </a:tcPr>
+                </a:tc>
+                <a:tc>
+                  <a:txBody>
+                    <a:bodyPr/>
+                    <a:lstStyle/>
+                    <a:p>
+                      <a:pPr algn="ctr">
+                        <a:defRPr sz="1600" b="1">
+                          <a:solidFill>
+                            <a:srgbClr val="FFFFFF"/>
+                          </a:solidFill>
+                          <a:latin typeface="Malgun Gothic"/>
+                        </a:defRPr>
+                      </a:pPr>
+                      <a:r>
+                        <a:t>2022년 (억원)</a:t>
+                      </a:r>
+                    </a:p>
+                  </a:txBody>
+                  <a:tcPr>
+                    <a:solidFill>
+                      <a:srgbClr val="003366"/>
+                    </a:solidFill>
+                  </a:tcPr>
+                </a:tc>
+                <a:tc>
+                  <a:txBody>
+                    <a:bodyPr/>
+                    <a:lstStyle/>
+                    <a:p>
+                      <a:pPr algn="ctr">
+                        <a:defRPr sz="1600" b="1">
+                          <a:solidFill>
+                            <a:srgbClr val="FFFFFF"/>
+                          </a:solidFill>
+                          <a:latin typeface="Malgun Gothic"/>
+                        </a:defRPr>
+                      </a:pPr>
+                      <a:r>
+                        <a:t>2023년 (억원)</a:t>
+                      </a:r>
+                    </a:p>
+                  </a:txBody>
+                  <a:tcPr>
+                    <a:solidFill>
+                      <a:srgbClr val="003366"/>
+                    </a:solidFill>
+                  </a:tcPr>
+                </a:tc>
+                <a:tc>
+                  <a:txBody>
+                    <a:bodyPr/>
+                    <a:lstStyle/>
+                    <a:p>
+                      <a:pPr algn="ctr">
+                        <a:defRPr sz="1600" b="1">
+                          <a:solidFill>
+                            <a:srgbClr val="FFFFFF"/>
+                          </a:solidFill>
+                          <a:latin typeface="Malgun Gothic"/>
+                        </a:defRPr>
+                      </a:pPr>
+                      <a:r>
+                        <a:t>2024년 예상 (억원)</a:t>
+                      </a:r>
+                    </a:p>
+                  </a:txBody>
+                  <a:tcPr>
+                    <a:solidFill>
+                      <a:srgbClr val="003366"/>
+                    </a:solidFill>
+                  </a:tcPr>
+                </a:tc>
+              </a:tr>
+              <a:tr h="731520">
+                <a:tc>
+                  <a:txBody>
+                    <a:bodyPr/>
+                    <a:lstStyle/>
+                    <a:p>
+                      <a:pPr algn="ctr">
+                        <a:defRPr sz="1400">
+                          <a:solidFill>
+                            <a:srgbClr val="404040"/>
+                          </a:solidFill>
+                          <a:latin typeface="Malgun Gothic"/>
+                        </a:defRPr>
+                      </a:pPr>
+                      <a:r>
+                        <a:t>A 환경건설</a:t>
+                      </a:r>
+                    </a:p>
+                  </a:txBody>
+                  <a:tcPr/>
+                </a:tc>
+                <a:tc>
+                  <a:txBody>
+                    <a:bodyPr/>
+                    <a:lstStyle/>
+                    <a:p>
+                      <a:pPr algn="ctr">
+                        <a:defRPr sz="1400">
+                          <a:solidFill>
+                            <a:srgbClr val="404040"/>
+                          </a:solidFill>
+                          <a:latin typeface="Malgun Gothic"/>
+                        </a:defRPr>
+                      </a:pPr>
+                      <a:r>
+                        <a:t>4850</a:t>
+                      </a:r>
+                    </a:p>
+                  </a:txBody>
+                  <a:tcPr/>
+                </a:tc>
+                <a:tc>
+                  <a:txBody>
+                    <a:bodyPr/>
+                    <a:lstStyle/>
+                    <a:p>
+                      <a:pPr algn="ctr">
+                        <a:defRPr sz="1400">
+                          <a:solidFill>
+                            <a:srgbClr val="404040"/>
+                          </a:solidFill>
+                          <a:latin typeface="Malgun Gothic"/>
+                        </a:defRPr>
+                      </a:pPr>
+                      <a:r>
+                        <a:t>5120</a:t>
+                      </a:r>
+                    </a:p>
+                  </a:txBody>
+                  <a:tcPr/>
+                </a:tc>
+                <a:tc>
+                  <a:txBody>
+                    <a:bodyPr/>
+                    <a:lstStyle/>
+                    <a:p>
+                      <a:pPr algn="ctr">
+                        <a:defRPr sz="1400">
+                          <a:solidFill>
+                            <a:srgbClr val="404040"/>
+                          </a:solidFill>
+                          <a:latin typeface="Malgun Gothic"/>
+                        </a:defRPr>
+                      </a:pPr>
+                      <a:r>
+                        <a:t>5480</a:t>
+                      </a:r>
+                    </a:p>
+                  </a:txBody>
+                  <a:tcPr/>
+                </a:tc>
+              </a:tr>
+              <a:tr h="731520">
+                <a:tc>
+                  <a:txBody>
+                    <a:bodyPr/>
+                    <a:lstStyle/>
+                    <a:p>
+                      <a:pPr algn="ctr">
+                        <a:defRPr sz="1400">
+                          <a:solidFill>
+                            <a:srgbClr val="404040"/>
+                          </a:solidFill>
+                          <a:latin typeface="Malgun Gothic"/>
+                        </a:defRPr>
+                      </a:pPr>
+                      <a:r>
+                        <a:t>B 워터테크</a:t>
+                      </a:r>
+                    </a:p>
+                  </a:txBody>
+                  <a:tcPr>
+                    <a:solidFill>
+                      <a:srgbClr val="F0F0F0"/>
+                    </a:solidFill>
+                  </a:tcPr>
+                </a:tc>
+                <a:tc>
+                  <a:txBody>
+                    <a:bodyPr/>
+                    <a:lstStyle/>
+                    <a:p>
+                      <a:pPr algn="ctr">
+                        <a:defRPr sz="1400">
+                          <a:solidFill>
+                            <a:srgbClr val="404040"/>
+                          </a:solidFill>
+                          <a:latin typeface="Malgun Gothic"/>
+                        </a:defRPr>
+                      </a:pPr>
+                      <a:r>
+                        <a:t>3980</a:t>
+                      </a:r>
+                    </a:p>
+                  </a:txBody>
+                  <a:tcPr>
+                    <a:solidFill>
+                      <a:srgbClr val="F0F0F0"/>
+                    </a:solidFill>
+                  </a:tcPr>
+                </a:tc>
+                <a:tc>
+                  <a:txBody>
+                    <a:bodyPr/>
+                    <a:lstStyle/>
+                    <a:p>
+                      <a:pPr algn="ctr">
+                        <a:defRPr sz="1400">
+                          <a:solidFill>
+                            <a:srgbClr val="404040"/>
+                          </a:solidFill>
+                          <a:latin typeface="Malgun Gothic"/>
+                        </a:defRPr>
+                      </a:pPr>
+                      <a:r>
+                        <a:t>4250</a:t>
+                      </a:r>
+                    </a:p>
+                  </a:txBody>
+                  <a:tcPr>
+                    <a:solidFill>
+                      <a:srgbClr val="F0F0F0"/>
+                    </a:solidFill>
+                  </a:tcPr>
+                </a:tc>
+                <a:tc>
+                  <a:txBody>
+                    <a:bodyPr/>
+                    <a:lstStyle/>
+                    <a:p>
+                      <a:pPr algn="ctr">
+                        <a:defRPr sz="1400">
+                          <a:solidFill>
+                            <a:srgbClr val="404040"/>
+                          </a:solidFill>
+                          <a:latin typeface="Malgun Gothic"/>
+                        </a:defRPr>
+                      </a:pPr>
+                      <a:r>
+                        <a:t>4580</a:t>
+                      </a:r>
+                    </a:p>
+                  </a:txBody>
+                  <a:tcPr>
+                    <a:solidFill>
+                      <a:srgbClr val="F0F0F0"/>
+                    </a:solidFill>
+                  </a:tcPr>
+                </a:tc>
+              </a:tr>
+              <a:tr h="731520">
+                <a:tc>
+                  <a:txBody>
+                    <a:bodyPr/>
+                    <a:lstStyle/>
+                    <a:p>
+                      <a:pPr algn="ctr">
+                        <a:defRPr sz="1400">
+                          <a:solidFill>
+                            <a:srgbClr val="404040"/>
+                          </a:solidFill>
+                          <a:latin typeface="Malgun Gothic"/>
+                        </a:defRPr>
+                      </a:pPr>
+                      <a:r>
+                        <a:t>C 그린시스템</a:t>
+                      </a:r>
+                    </a:p>
+                  </a:txBody>
+                  <a:tcPr/>
+                </a:tc>
+                <a:tc>
+                  <a:txBody>
+                    <a:bodyPr/>
+                    <a:lstStyle/>
+                    <a:p>
+                      <a:pPr algn="ctr">
+                        <a:defRPr sz="1400">
+                          <a:solidFill>
+                            <a:srgbClr val="404040"/>
+                          </a:solidFill>
+                          <a:latin typeface="Malgun Gothic"/>
+                        </a:defRPr>
+                      </a:pPr>
+                      <a:r>
+                        <a:t>2870</a:t>
+                      </a:r>
+                    </a:p>
+                  </a:txBody>
+                  <a:tcPr/>
+                </a:tc>
+                <a:tc>
+                  <a:txBody>
+                    <a:bodyPr/>
+                    <a:lstStyle/>
+                    <a:p>
+                      <a:pPr algn="ctr">
+                        <a:defRPr sz="1400">
+                          <a:solidFill>
+                            <a:srgbClr val="404040"/>
+                          </a:solidFill>
+                          <a:latin typeface="Malgun Gothic"/>
+                        </a:defRPr>
+                      </a:pPr>
+                      <a:r>
+                        <a:t>3050</a:t>
+                      </a:r>
+                    </a:p>
+                  </a:txBody>
+                  <a:tcPr/>
+                </a:tc>
+                <a:tc>
+                  <a:txBody>
+                    <a:bodyPr/>
+                    <a:lstStyle/>
+                    <a:p>
+                      <a:pPr algn="ctr">
+                        <a:defRPr sz="1400">
+                          <a:solidFill>
+                            <a:srgbClr val="404040"/>
+                          </a:solidFill>
+                          <a:latin typeface="Malgun Gothic"/>
+                        </a:defRPr>
+                      </a:pPr>
+                      <a:r>
+                        <a:t>3280</a:t>
+                      </a:r>
+                    </a:p>
+                  </a:txBody>
+                  <a:tcPr/>
+                </a:tc>
+              </a:tr>
+              <a:tr h="731520">
+                <a:tc>
+                  <a:txBody>
+                    <a:bodyPr/>
+                    <a:lstStyle/>
+                    <a:p>
+                      <a:pPr algn="ctr">
+                        <a:defRPr sz="1400">
+                          <a:solidFill>
+                            <a:srgbClr val="404040"/>
+                          </a:solidFill>
+                          <a:latin typeface="Malgun Gothic"/>
+                        </a:defRPr>
+                      </a:pPr>
+                      <a:r>
+                        <a:t>D 에코서비스</a:t>
+                      </a:r>
+                    </a:p>
+                  </a:txBody>
+                  <a:tcPr>
+                    <a:solidFill>
+                      <a:srgbClr val="F0F0F0"/>
+                    </a:solidFill>
+                  </a:tcPr>
+                </a:tc>
+                <a:tc>
+                  <a:txBody>
+                    <a:bodyPr/>
+                    <a:lstStyle/>
+                    <a:p>
+                      <a:pPr algn="ctr">
+                        <a:defRPr sz="1400">
+                          <a:solidFill>
+                            <a:srgbClr val="404040"/>
+                          </a:solidFill>
+                          <a:latin typeface="Malgun Gothic"/>
+                        </a:defRPr>
+                      </a:pPr>
+                      <a:r>
+                        <a:t>2450</a:t>
+                      </a:r>
+                    </a:p>
+                  </a:txBody>
+                  <a:tcPr>
+                    <a:solidFill>
+                      <a:srgbClr val="F0F0F0"/>
+                    </a:solidFill>
+                  </a:tcPr>
+                </a:tc>
+                <a:tc>
+                  <a:txBody>
+                    <a:bodyPr/>
+                    <a:lstStyle/>
+                    <a:p>
+                      <a:pPr algn="ctr">
+                        <a:defRPr sz="1400">
+                          <a:solidFill>
+                            <a:srgbClr val="404040"/>
+                          </a:solidFill>
+                          <a:latin typeface="Malgun Gothic"/>
+                        </a:defRPr>
+                      </a:pPr>
+                      <a:r>
+                        <a:t>2620</a:t>
+                      </a:r>
+                    </a:p>
+                  </a:txBody>
+                  <a:tcPr>
+                    <a:solidFill>
+                      <a:srgbClr val="F0F0F0"/>
+                    </a:solidFill>
+                  </a:tcPr>
+                </a:tc>
+                <a:tc>
+                  <a:txBody>
+                    <a:bodyPr/>
+                    <a:lstStyle/>
+                    <a:p>
+                      <a:pPr algn="ctr">
+                        <a:defRPr sz="1400">
+                          <a:solidFill>
+                            <a:srgbClr val="404040"/>
+                          </a:solidFill>
+                          <a:latin typeface="Malgun Gothic"/>
+                        </a:defRPr>
+                      </a:pPr>
+                      <a:r>
+                        <a:t>2810</a:t>
+                      </a:r>
+                    </a:p>
+                  </a:txBody>
+                  <a:tcPr>
+                    <a:solidFill>
+                      <a:srgbClr val="F0F0F0"/>
+                    </a:solidFill>
+                  </a:tcPr>
+                </a:tc>
+              </a:tr>
+              <a:tr h="731520">
+                <a:tc>
+                  <a:txBody>
+                    <a:bodyPr/>
+                    <a:lstStyle/>
+                    <a:p>
+                      <a:pPr algn="ctr">
+                        <a:defRPr sz="1400">
+                          <a:solidFill>
+                            <a:srgbClr val="404040"/>
+                          </a:solidFill>
+                          <a:latin typeface="Malgun Gothic"/>
+                        </a:defRPr>
+                      </a:pPr>
+                      <a:r>
+                        <a:t>E 클린워터</a:t>
+                      </a:r>
+                    </a:p>
+                  </a:txBody>
+                  <a:tcPr/>
+                </a:tc>
+                <a:tc>
+                  <a:txBody>
+                    <a:bodyPr/>
+                    <a:lstStyle/>
+                    <a:p>
+                      <a:pPr algn="ctr">
+                        <a:defRPr sz="1400">
+                          <a:solidFill>
+                            <a:srgbClr val="404040"/>
+                          </a:solidFill>
+                          <a:latin typeface="Malgun Gothic"/>
+                        </a:defRPr>
+                      </a:pPr>
+                      <a:r>
+                        <a:t>2180</a:t>
+                      </a:r>
+                    </a:p>
+                  </a:txBody>
+                  <a:tcPr/>
+                </a:tc>
+                <a:tc>
+                  <a:txBody>
+                    <a:bodyPr/>
+                    <a:lstStyle/>
+                    <a:p>
+                      <a:pPr algn="ctr">
+                        <a:defRPr sz="1400">
+                          <a:solidFill>
+                            <a:srgbClr val="404040"/>
+                          </a:solidFill>
+                          <a:latin typeface="Malgun Gothic"/>
+                        </a:defRPr>
+                      </a:pPr>
+                      <a:r>
+                        <a:t>2340</a:t>
+                      </a:r>
+                    </a:p>
+                  </a:txBody>
+                  <a:tcPr/>
+                </a:tc>
+                <a:tc>
+                  <a:txBody>
+                    <a:bodyPr/>
+                    <a:lstStyle/>
+                    <a:p>
+                      <a:pPr algn="ctr">
+                        <a:defRPr sz="1400">
+                          <a:solidFill>
+                            <a:srgbClr val="404040"/>
+                          </a:solidFill>
+                          <a:latin typeface="Malgun Gothic"/>
+                        </a:defRPr>
+                      </a:pPr>
+                      <a:r>
+                        <a:t>2520</a:t>
+                      </a:r>
+                    </a:p>
+                  </a:txBody>
+                  <a:tcPr/>
+                </a:tc>
+              </a:tr>
+            </a:tbl>
+          </a:graphicData>
+        </a:graphic>
+      </p:graphicFrame>
     </p:spTree>
   </p:cSld>
   <p:clrMapOvr>
@@ -4981,12 +5277,18 @@
             <a:spAutoFit/>
           </a:bodyPr>
           <a:lstStyle/>
+          <a:p/>
           <a:p>
             <a:pPr>
-              <a:defRPr sz="2400" b="1"/>
+              <a:defRPr sz="2800" b="1">
+                <a:solidFill>
+                  <a:srgbClr val="003366"/>
+                </a:solidFill>
+                <a:latin typeface="Malgun Gothic"/>
+              </a:defRPr>
             </a:pPr>
             <a:r>
-              <a:t>처리장 규모별 운영 현황</a:t>
+              <a:t>지역별 업체 분포</a:t>
             </a:r>
           </a:p>
         </p:txBody>
@@ -5001,7 +5303,7 @@
         </p:nvGraphicFramePr>
         <p:xfrm>
           <a:off x="457200" y="1097280"/>
-          <a:ext cx="8229600" cy="548640"/>
+          <a:ext cx="8229600" cy="5852160"/>
         </p:xfrm>
         <a:graphic>
           <a:graphicData uri="http://schemas.openxmlformats.org/drawingml/2006/table">
@@ -5013,20 +5315,122 @@
                 <a:gridCol w="1828800"/>
                 <a:gridCol w="1828800"/>
                 <a:gridCol w="1828800"/>
-                <a:gridCol w="1828800"/>
-                <a:gridCol w="914400"/>
+                <a:gridCol w="2743200"/>
               </a:tblGrid>
-              <a:tr h="109728">
-                <a:tc>
-                  <a:txBody>
-                    <a:bodyPr/>
-                    <a:lstStyle/>
-                    <a:p>
-                      <a:pPr>
-                        <a:defRPr b="1" sz="1100"/>
-                      </a:pPr>
-                      <a:r>
-                        <a:t>구분</a:t>
+              <a:tr h="731520">
+                <a:tc>
+                  <a:txBody>
+                    <a:bodyPr/>
+                    <a:lstStyle/>
+                    <a:p>
+                      <a:pPr algn="ctr">
+                        <a:defRPr sz="1600" b="1">
+                          <a:solidFill>
+                            <a:srgbClr val="FFFFFF"/>
+                          </a:solidFill>
+                          <a:latin typeface="Malgun Gothic"/>
+                        </a:defRPr>
+                      </a:pPr>
+                      <a:r>
+                        <a:t>권역</a:t>
+                      </a:r>
+                    </a:p>
+                  </a:txBody>
+                  <a:tcPr>
+                    <a:solidFill>
+                      <a:srgbClr val="003366"/>
+                    </a:solidFill>
+                  </a:tcPr>
+                </a:tc>
+                <a:tc>
+                  <a:txBody>
+                    <a:bodyPr/>
+                    <a:lstStyle/>
+                    <a:p>
+                      <a:pPr algn="ctr">
+                        <a:defRPr sz="1600" b="1">
+                          <a:solidFill>
+                            <a:srgbClr val="FFFFFF"/>
+                          </a:solidFill>
+                          <a:latin typeface="Malgun Gothic"/>
+                        </a:defRPr>
+                      </a:pPr>
+                      <a:r>
+                        <a:t>업체 수</a:t>
+                      </a:r>
+                    </a:p>
+                  </a:txBody>
+                  <a:tcPr>
+                    <a:solidFill>
+                      <a:srgbClr val="003366"/>
+                    </a:solidFill>
+                  </a:tcPr>
+                </a:tc>
+                <a:tc>
+                  <a:txBody>
+                    <a:bodyPr/>
+                    <a:lstStyle/>
+                    <a:p>
+                      <a:pPr algn="ctr">
+                        <a:defRPr sz="1600" b="1">
+                          <a:solidFill>
+                            <a:srgbClr val="FFFFFF"/>
+                          </a:solidFill>
+                          <a:latin typeface="Malgun Gothic"/>
+                        </a:defRPr>
+                      </a:pPr>
+                      <a:r>
+                        <a:t>비중 (%)</a:t>
+                      </a:r>
+                    </a:p>
+                  </a:txBody>
+                  <a:tcPr>
+                    <a:solidFill>
+                      <a:srgbClr val="003366"/>
+                    </a:solidFill>
+                  </a:tcPr>
+                </a:tc>
+                <a:tc>
+                  <a:txBody>
+                    <a:bodyPr/>
+                    <a:lstStyle/>
+                    <a:p>
+                      <a:pPr algn="ctr">
+                        <a:defRPr sz="1600" b="1">
+                          <a:solidFill>
+                            <a:srgbClr val="FFFFFF"/>
+                          </a:solidFill>
+                          <a:latin typeface="Malgun Gothic"/>
+                        </a:defRPr>
+                      </a:pPr>
+                      <a:r>
+                        <a:t>주요 처리장 수</a:t>
+                      </a:r>
+                    </a:p>
+                  </a:txBody>
+                  <a:tcPr>
+                    <a:solidFill>
+                      <a:srgbClr val="003366"/>
+                    </a:solidFill>
+                  </a:tcPr>
+                </a:tc>
+              </a:tr>
+              <a:tr h="731520">
+                <a:tc>
+                  <a:txBody>
+                    <a:bodyPr/>
+                    <a:lstStyle/>
+                    <a:p>
+                      <a:pPr algn="ctr">
+                        <a:defRPr sz="1400">
+                          <a:solidFill>
+                            <a:srgbClr val="404040"/>
+                          </a:solidFill>
+                          <a:latin typeface="Malgun Gothic"/>
+                        </a:defRPr>
+                      </a:pPr>
+                      <a:r>
+                        <a:t>경기·인천</a:t>
                       </a:r>
                     </a:p>
                   </a:txBody>
@@ -5037,11 +5441,16 @@
                     <a:bodyPr/>
                     <a:lstStyle/>
                     <a:p>
-                      <a:pPr>
-                        <a:defRPr b="1" sz="1100"/>
-                      </a:pPr>
-                      <a:r>
-                        <a:t>처리장 수</a:t>
+                      <a:pPr algn="ctr">
+                        <a:defRPr sz="1400">
+                          <a:solidFill>
+                            <a:srgbClr val="404040"/>
+                          </a:solidFill>
+                          <a:latin typeface="Malgun Gothic"/>
+                        </a:defRPr>
+                      </a:pPr>
+                      <a:r>
+                        <a:t>425</a:t>
                       </a:r>
                     </a:p>
                   </a:txBody>
@@ -5052,11 +5461,16 @@
                     <a:bodyPr/>
                     <a:lstStyle/>
                     <a:p>
-                      <a:pPr>
-                        <a:defRPr b="1" sz="1100"/>
-                      </a:pPr>
-                      <a:r>
-                        <a:t>평균 용량</a:t>
+                      <a:pPr algn="ctr">
+                        <a:defRPr sz="1400">
+                          <a:solidFill>
+                            <a:srgbClr val="404040"/>
+                          </a:solidFill>
+                          <a:latin typeface="Malgun Gothic"/>
+                        </a:defRPr>
+                      </a:pPr>
+                      <a:r>
+                        <a:t>25.7</a:t>
                       </a:r>
                     </a:p>
                   </a:txBody>
@@ -5067,43 +5481,316 @@
                     <a:bodyPr/>
                     <a:lstStyle/>
                     <a:p>
-                      <a:pPr>
-                        <a:defRPr b="1" sz="1100"/>
-                      </a:pPr>
-                      <a:r>
-                        <a:t>주요 운영사</a:t>
+                      <a:pPr algn="ctr">
+                        <a:defRPr sz="1400">
+                          <a:solidFill>
+                            <a:srgbClr val="404040"/>
+                          </a:solidFill>
+                          <a:latin typeface="Malgun Gothic"/>
+                        </a:defRPr>
+                      </a:pPr>
+                      <a:r>
+                        <a:t>398</a:t>
                       </a:r>
                     </a:p>
                   </a:txBody>
                   <a:tcPr/>
                 </a:tc>
-                <a:tc>
-                  <a:txBody>
-                    <a:bodyPr/>
-                    <a:lstStyle/>
-                    <a:p>
-                      <a:pPr>
-                        <a:defRPr b="1" sz="1100"/>
-                      </a:pPr>
-                      <a:r>
-                        <a:t>비중</a:t>
+              </a:tr>
+              <a:tr h="731520">
+                <a:tc>
+                  <a:txBody>
+                    <a:bodyPr/>
+                    <a:lstStyle/>
+                    <a:p>
+                      <a:pPr algn="ctr">
+                        <a:defRPr sz="1400">
+                          <a:solidFill>
+                            <a:srgbClr val="404040"/>
+                          </a:solidFill>
+                          <a:latin typeface="Malgun Gothic"/>
+                        </a:defRPr>
+                      </a:pPr>
+                      <a:r>
+                        <a:t>서울</a:t>
+                      </a:r>
+                    </a:p>
+                  </a:txBody>
+                  <a:tcPr>
+                    <a:solidFill>
+                      <a:srgbClr val="F0F0F0"/>
+                    </a:solidFill>
+                  </a:tcPr>
+                </a:tc>
+                <a:tc>
+                  <a:txBody>
+                    <a:bodyPr/>
+                    <a:lstStyle/>
+                    <a:p>
+                      <a:pPr algn="ctr">
+                        <a:defRPr sz="1400">
+                          <a:solidFill>
+                            <a:srgbClr val="404040"/>
+                          </a:solidFill>
+                          <a:latin typeface="Malgun Gothic"/>
+                        </a:defRPr>
+                      </a:pPr>
+                      <a:r>
+                        <a:t>186</a:t>
+                      </a:r>
+                    </a:p>
+                  </a:txBody>
+                  <a:tcPr>
+                    <a:solidFill>
+                      <a:srgbClr val="F0F0F0"/>
+                    </a:solidFill>
+                  </a:tcPr>
+                </a:tc>
+                <a:tc>
+                  <a:txBody>
+                    <a:bodyPr/>
+                    <a:lstStyle/>
+                    <a:p>
+                      <a:pPr algn="ctr">
+                        <a:defRPr sz="1400">
+                          <a:solidFill>
+                            <a:srgbClr val="404040"/>
+                          </a:solidFill>
+                          <a:latin typeface="Malgun Gothic"/>
+                        </a:defRPr>
+                      </a:pPr>
+                      <a:r>
+                        <a:t>11.3</a:t>
+                      </a:r>
+                    </a:p>
+                  </a:txBody>
+                  <a:tcPr>
+                    <a:solidFill>
+                      <a:srgbClr val="F0F0F0"/>
+                    </a:solidFill>
+                  </a:tcPr>
+                </a:tc>
+                <a:tc>
+                  <a:txBody>
+                    <a:bodyPr/>
+                    <a:lstStyle/>
+                    <a:p>
+                      <a:pPr algn="ctr">
+                        <a:defRPr sz="1400">
+                          <a:solidFill>
+                            <a:srgbClr val="404040"/>
+                          </a:solidFill>
+                          <a:latin typeface="Malgun Gothic"/>
+                        </a:defRPr>
+                      </a:pPr>
+                      <a:r>
+                        <a:t>142</a:t>
+                      </a:r>
+                    </a:p>
+                  </a:txBody>
+                  <a:tcPr>
+                    <a:solidFill>
+                      <a:srgbClr val="F0F0F0"/>
+                    </a:solidFill>
+                  </a:tcPr>
+                </a:tc>
+              </a:tr>
+              <a:tr h="731520">
+                <a:tc>
+                  <a:txBody>
+                    <a:bodyPr/>
+                    <a:lstStyle/>
+                    <a:p>
+                      <a:pPr algn="ctr">
+                        <a:defRPr sz="1400">
+                          <a:solidFill>
+                            <a:srgbClr val="404040"/>
+                          </a:solidFill>
+                          <a:latin typeface="Malgun Gothic"/>
+                        </a:defRPr>
+                      </a:pPr>
+                      <a:r>
+                        <a:t>경남·부산</a:t>
                       </a:r>
                     </a:p>
                   </a:txBody>
                   <a:tcPr/>
                 </a:tc>
+                <a:tc>
+                  <a:txBody>
+                    <a:bodyPr/>
+                    <a:lstStyle/>
+                    <a:p>
+                      <a:pPr algn="ctr">
+                        <a:defRPr sz="1400">
+                          <a:solidFill>
+                            <a:srgbClr val="404040"/>
+                          </a:solidFill>
+                          <a:latin typeface="Malgun Gothic"/>
+                        </a:defRPr>
+                      </a:pPr>
+                      <a:r>
+                        <a:t>298</a:t>
+                      </a:r>
+                    </a:p>
+                  </a:txBody>
+                  <a:tcPr/>
+                </a:tc>
+                <a:tc>
+                  <a:txBody>
+                    <a:bodyPr/>
+                    <a:lstStyle/>
+                    <a:p>
+                      <a:pPr algn="ctr">
+                        <a:defRPr sz="1400">
+                          <a:solidFill>
+                            <a:srgbClr val="404040"/>
+                          </a:solidFill>
+                          <a:latin typeface="Malgun Gothic"/>
+                        </a:defRPr>
+                      </a:pPr>
+                      <a:r>
+                        <a:t>18.0</a:t>
+                      </a:r>
+                    </a:p>
+                  </a:txBody>
+                  <a:tcPr/>
+                </a:tc>
+                <a:tc>
+                  <a:txBody>
+                    <a:bodyPr/>
+                    <a:lstStyle/>
+                    <a:p>
+                      <a:pPr algn="ctr">
+                        <a:defRPr sz="1400">
+                          <a:solidFill>
+                            <a:srgbClr val="404040"/>
+                          </a:solidFill>
+                          <a:latin typeface="Malgun Gothic"/>
+                        </a:defRPr>
+                      </a:pPr>
+                      <a:r>
+                        <a:t>312</a:t>
+                      </a:r>
+                    </a:p>
+                  </a:txBody>
+                  <a:tcPr/>
+                </a:tc>
               </a:tr>
-              <a:tr h="109728">
-                <a:tc>
-                  <a:txBody>
-                    <a:bodyPr/>
-                    <a:lstStyle/>
-                    <a:p>
-                      <a:pPr>
-                        <a:defRPr sz="1000"/>
-                      </a:pPr>
-                      <a:r>
-                        <a:t>대형 (10 만 m³/일 이상)</a:t>
+              <a:tr h="731520">
+                <a:tc>
+                  <a:txBody>
+                    <a:bodyPr/>
+                    <a:lstStyle/>
+                    <a:p>
+                      <a:pPr algn="ctr">
+                        <a:defRPr sz="1400">
+                          <a:solidFill>
+                            <a:srgbClr val="404040"/>
+                          </a:solidFill>
+                          <a:latin typeface="Malgun Gothic"/>
+                        </a:defRPr>
+                      </a:pPr>
+                      <a:r>
+                        <a:t>경북·대구</a:t>
+                      </a:r>
+                    </a:p>
+                  </a:txBody>
+                  <a:tcPr>
+                    <a:solidFill>
+                      <a:srgbClr val="F0F0F0"/>
+                    </a:solidFill>
+                  </a:tcPr>
+                </a:tc>
+                <a:tc>
+                  <a:txBody>
+                    <a:bodyPr/>
+                    <a:lstStyle/>
+                    <a:p>
+                      <a:pPr algn="ctr">
+                        <a:defRPr sz="1400">
+                          <a:solidFill>
+                            <a:srgbClr val="404040"/>
+                          </a:solidFill>
+                          <a:latin typeface="Malgun Gothic"/>
+                        </a:defRPr>
+                      </a:pPr>
+                      <a:r>
+                        <a:t>215</a:t>
+                      </a:r>
+                    </a:p>
+                  </a:txBody>
+                  <a:tcPr>
+                    <a:solidFill>
+                      <a:srgbClr val="F0F0F0"/>
+                    </a:solidFill>
+                  </a:tcPr>
+                </a:tc>
+                <a:tc>
+                  <a:txBody>
+                    <a:bodyPr/>
+                    <a:lstStyle/>
+                    <a:p>
+                      <a:pPr algn="ctr">
+                        <a:defRPr sz="1400">
+                          <a:solidFill>
+                            <a:srgbClr val="404040"/>
+                          </a:solidFill>
+                          <a:latin typeface="Malgun Gothic"/>
+                        </a:defRPr>
+                      </a:pPr>
+                      <a:r>
+                        <a:t>13.0</a:t>
+                      </a:r>
+                    </a:p>
+                  </a:txBody>
+                  <a:tcPr>
+                    <a:solidFill>
+                      <a:srgbClr val="F0F0F0"/>
+                    </a:solidFill>
+                  </a:tcPr>
+                </a:tc>
+                <a:tc>
+                  <a:txBody>
+                    <a:bodyPr/>
+                    <a:lstStyle/>
+                    <a:p>
+                      <a:pPr algn="ctr">
+                        <a:defRPr sz="1400">
+                          <a:solidFill>
+                            <a:srgbClr val="404040"/>
+                          </a:solidFill>
+                          <a:latin typeface="Malgun Gothic"/>
+                        </a:defRPr>
+                      </a:pPr>
+                      <a:r>
+                        <a:t>245</a:t>
+                      </a:r>
+                    </a:p>
+                  </a:txBody>
+                  <a:tcPr>
+                    <a:solidFill>
+                      <a:srgbClr val="F0F0F0"/>
+                    </a:solidFill>
+                  </a:tcPr>
+                </a:tc>
+              </a:tr>
+              <a:tr h="731520">
+                <a:tc>
+                  <a:txBody>
+                    <a:bodyPr/>
+                    <a:lstStyle/>
+                    <a:p>
+                      <a:pPr algn="ctr">
+                        <a:defRPr sz="1400">
+                          <a:solidFill>
+                            <a:srgbClr val="404040"/>
+                          </a:solidFill>
+                          <a:latin typeface="Malgun Gothic"/>
+                        </a:defRPr>
+                      </a:pPr>
+                      <a:r>
+                        <a:t>충청권</a:t>
                       </a:r>
                     </a:p>
                   </a:txBody>
@@ -5114,11 +5801,16 @@
                     <a:bodyPr/>
                     <a:lstStyle/>
                     <a:p>
-                      <a:pPr>
-                        <a:defRPr sz="1000"/>
-                      </a:pPr>
-                      <a:r>
-                        <a:t>45 개소</a:t>
+                      <a:pPr algn="ctr">
+                        <a:defRPr sz="1400">
+                          <a:solidFill>
+                            <a:srgbClr val="404040"/>
+                          </a:solidFill>
+                          <a:latin typeface="Malgun Gothic"/>
+                        </a:defRPr>
+                      </a:pPr>
+                      <a:r>
+                        <a:t>245</a:t>
                       </a:r>
                     </a:p>
                   </a:txBody>
@@ -5129,11 +5821,16 @@
                     <a:bodyPr/>
                     <a:lstStyle/>
                     <a:p>
-                      <a:pPr>
-                        <a:defRPr sz="1000"/>
-                      </a:pPr>
-                      <a:r>
-                        <a:t>25 만 m³/일</a:t>
+                      <a:pPr algn="ctr">
+                        <a:defRPr sz="1400">
+                          <a:solidFill>
+                            <a:srgbClr val="404040"/>
+                          </a:solidFill>
+                          <a:latin typeface="Malgun Gothic"/>
+                        </a:defRPr>
+                      </a:pPr>
+                      <a:r>
+                        <a:t>14.8</a:t>
                       </a:r>
                     </a:p>
                   </a:txBody>
@@ -5144,43 +5841,156 @@
                     <a:bodyPr/>
                     <a:lstStyle/>
                     <a:p>
-                      <a:pPr>
-                        <a:defRPr sz="1000"/>
-                      </a:pPr>
-                      <a:r>
-                        <a:t>SK, 한국환경, 대우</a:t>
+                      <a:pPr algn="ctr">
+                        <a:defRPr sz="1400">
+                          <a:solidFill>
+                            <a:srgbClr val="404040"/>
+                          </a:solidFill>
+                          <a:latin typeface="Malgun Gothic"/>
+                        </a:defRPr>
+                      </a:pPr>
+                      <a:r>
+                        <a:t>268</a:t>
                       </a:r>
                     </a:p>
                   </a:txBody>
                   <a:tcPr/>
                 </a:tc>
-                <a:tc>
-                  <a:txBody>
-                    <a:bodyPr/>
-                    <a:lstStyle/>
-                    <a:p>
-                      <a:pPr>
-                        <a:defRPr sz="1000"/>
-                      </a:pPr>
-                      <a:r>
-                        <a:t>35%</a:t>
+              </a:tr>
+              <a:tr h="731520">
+                <a:tc>
+                  <a:txBody>
+                    <a:bodyPr/>
+                    <a:lstStyle/>
+                    <a:p>
+                      <a:pPr algn="ctr">
+                        <a:defRPr sz="1400">
+                          <a:solidFill>
+                            <a:srgbClr val="404040"/>
+                          </a:solidFill>
+                          <a:latin typeface="Malgun Gothic"/>
+                        </a:defRPr>
+                      </a:pPr>
+                      <a:r>
+                        <a:t>전라권</a:t>
+                      </a:r>
+                    </a:p>
+                  </a:txBody>
+                  <a:tcPr>
+                    <a:solidFill>
+                      <a:srgbClr val="F0F0F0"/>
+                    </a:solidFill>
+                  </a:tcPr>
+                </a:tc>
+                <a:tc>
+                  <a:txBody>
+                    <a:bodyPr/>
+                    <a:lstStyle/>
+                    <a:p>
+                      <a:pPr algn="ctr">
+                        <a:defRPr sz="1400">
+                          <a:solidFill>
+                            <a:srgbClr val="404040"/>
+                          </a:solidFill>
+                          <a:latin typeface="Malgun Gothic"/>
+                        </a:defRPr>
+                      </a:pPr>
+                      <a:r>
+                        <a:t>198</a:t>
+                      </a:r>
+                    </a:p>
+                  </a:txBody>
+                  <a:tcPr>
+                    <a:solidFill>
+                      <a:srgbClr val="F0F0F0"/>
+                    </a:solidFill>
+                  </a:tcPr>
+                </a:tc>
+                <a:tc>
+                  <a:txBody>
+                    <a:bodyPr/>
+                    <a:lstStyle/>
+                    <a:p>
+                      <a:pPr algn="ctr">
+                        <a:defRPr sz="1400">
+                          <a:solidFill>
+                            <a:srgbClr val="404040"/>
+                          </a:solidFill>
+                          <a:latin typeface="Malgun Gothic"/>
+                        </a:defRPr>
+                      </a:pPr>
+                      <a:r>
+                        <a:t>12.0</a:t>
+                      </a:r>
+                    </a:p>
+                  </a:txBody>
+                  <a:tcPr>
+                    <a:solidFill>
+                      <a:srgbClr val="F0F0F0"/>
+                    </a:solidFill>
+                  </a:tcPr>
+                </a:tc>
+                <a:tc>
+                  <a:txBody>
+                    <a:bodyPr/>
+                    <a:lstStyle/>
+                    <a:p>
+                      <a:pPr algn="ctr">
+                        <a:defRPr sz="1400">
+                          <a:solidFill>
+                            <a:srgbClr val="404040"/>
+                          </a:solidFill>
+                          <a:latin typeface="Malgun Gothic"/>
+                        </a:defRPr>
+                      </a:pPr>
+                      <a:r>
+                        <a:t>215</a:t>
+                      </a:r>
+                    </a:p>
+                  </a:txBody>
+                  <a:tcPr>
+                    <a:solidFill>
+                      <a:srgbClr val="F0F0F0"/>
+                    </a:solidFill>
+                  </a:tcPr>
+                </a:tc>
+              </a:tr>
+              <a:tr h="731520">
+                <a:tc>
+                  <a:txBody>
+                    <a:bodyPr/>
+                    <a:lstStyle/>
+                    <a:p>
+                      <a:pPr algn="ctr">
+                        <a:defRPr sz="1400">
+                          <a:solidFill>
+                            <a:srgbClr val="404040"/>
+                          </a:solidFill>
+                          <a:latin typeface="Malgun Gothic"/>
+                        </a:defRPr>
+                      </a:pPr>
+                      <a:r>
+                        <a:t>강원·제주</a:t>
                       </a:r>
                     </a:p>
                   </a:txBody>
                   <a:tcPr/>
                 </a:tc>
-              </a:tr>
-              <a:tr h="109728">
-                <a:tc>
-                  <a:txBody>
-                    <a:bodyPr/>
-                    <a:lstStyle/>
-                    <a:p>
-                      <a:pPr>
-                        <a:defRPr sz="1000"/>
-                      </a:pPr>
-                      <a:r>
-                        <a:t>중형 (1~10 만 m³/일)</a:t>
+                <a:tc>
+                  <a:txBody>
+                    <a:bodyPr/>
+                    <a:lstStyle/>
+                    <a:p>
+                      <a:pPr algn="ctr">
+                        <a:defRPr sz="1400">
+                          <a:solidFill>
+                            <a:srgbClr val="404040"/>
+                          </a:solidFill>
+                          <a:latin typeface="Malgun Gothic"/>
+                        </a:defRPr>
+                      </a:pPr>
+                      <a:r>
+                        <a:t>87</a:t>
                       </a:r>
                     </a:p>
                   </a:txBody>
@@ -5191,11 +6001,16 @@
                     <a:bodyPr/>
                     <a:lstStyle/>
                     <a:p>
-                      <a:pPr>
-                        <a:defRPr sz="1000"/>
-                      </a:pPr>
-                      <a:r>
-                        <a:t>280 개소</a:t>
+                      <a:pPr algn="ctr">
+                        <a:defRPr sz="1400">
+                          <a:solidFill>
+                            <a:srgbClr val="404040"/>
+                          </a:solidFill>
+                          <a:latin typeface="Malgun Gothic"/>
+                        </a:defRPr>
+                      </a:pPr>
+                      <a:r>
+                        <a:t>5.2</a:t>
                       </a:r>
                     </a:p>
                   </a:txBody>
@@ -5206,195 +6021,16 @@
                     <a:bodyPr/>
                     <a:lstStyle/>
                     <a:p>
-                      <a:pPr>
-                        <a:defRPr sz="1000"/>
-                      </a:pPr>
-                      <a:r>
-                        <a:t>4.5 만 m³/일</a:t>
-                      </a:r>
-                    </a:p>
-                  </a:txBody>
-                  <a:tcPr/>
-                </a:tc>
-                <a:tc>
-                  <a:txBody>
-                    <a:bodyPr/>
-                    <a:lstStyle/>
-                    <a:p>
-                      <a:pPr>
-                        <a:defRPr sz="1000"/>
-                      </a:pPr>
-                      <a:r>
-                        <a:t>삼성, 현대, GS</a:t>
-                      </a:r>
-                    </a:p>
-                  </a:txBody>
-                  <a:tcPr/>
-                </a:tc>
-                <a:tc>
-                  <a:txBody>
-                    <a:bodyPr/>
-                    <a:lstStyle/>
-                    <a:p>
-                      <a:pPr>
-                        <a:defRPr sz="1000"/>
-                      </a:pPr>
-                      <a:r>
-                        <a:t>50%</a:t>
-                      </a:r>
-                    </a:p>
-                  </a:txBody>
-                  <a:tcPr/>
-                </a:tc>
-              </a:tr>
-              <a:tr h="109728">
-                <a:tc>
-                  <a:txBody>
-                    <a:bodyPr/>
-                    <a:lstStyle/>
-                    <a:p>
-                      <a:pPr>
-                        <a:defRPr sz="1000"/>
-                      </a:pPr>
-                      <a:r>
-                        <a:t>소형 (1 만 m³/일 미만)</a:t>
-                      </a:r>
-                    </a:p>
-                  </a:txBody>
-                  <a:tcPr/>
-                </a:tc>
-                <a:tc>
-                  <a:txBody>
-                    <a:bodyPr/>
-                    <a:lstStyle/>
-                    <a:p>
-                      <a:pPr>
-                        <a:defRPr sz="1000"/>
-                      </a:pPr>
-                      <a:r>
-                        <a:t>216 개소</a:t>
-                      </a:r>
-                    </a:p>
-                  </a:txBody>
-                  <a:tcPr/>
-                </a:tc>
-                <a:tc>
-                  <a:txBody>
-                    <a:bodyPr/>
-                    <a:lstStyle/>
-                    <a:p>
-                      <a:pPr>
-                        <a:defRPr sz="1000"/>
-                      </a:pPr>
-                      <a:r>
-                        <a:t>0.3 만 m³/일</a:t>
-                      </a:r>
-                    </a:p>
-                  </a:txBody>
-                  <a:tcPr/>
-                </a:tc>
-                <a:tc>
-                  <a:txBody>
-                    <a:bodyPr/>
-                    <a:lstStyle/>
-                    <a:p>
-                      <a:pPr>
-                        <a:defRPr sz="1000"/>
-                      </a:pPr>
-                      <a:r>
-                        <a:t>지역전문업체</a:t>
-                      </a:r>
-                    </a:p>
-                  </a:txBody>
-                  <a:tcPr/>
-                </a:tc>
-                <a:tc>
-                  <a:txBody>
-                    <a:bodyPr/>
-                    <a:lstStyle/>
-                    <a:p>
-                      <a:pPr>
-                        <a:defRPr sz="1000"/>
-                      </a:pPr>
-                      <a:r>
-                        <a:t>15%</a:t>
-                      </a:r>
-                    </a:p>
-                  </a:txBody>
-                  <a:tcPr/>
-                </a:tc>
-              </a:tr>
-              <a:tr h="109728">
-                <a:tc>
-                  <a:txBody>
-                    <a:bodyPr/>
-                    <a:lstStyle/>
-                    <a:p>
-                      <a:pPr>
-                        <a:defRPr sz="1000"/>
-                      </a:pPr>
-                      <a:r>
-                        <a:t>합계</a:t>
-                      </a:r>
-                    </a:p>
-                  </a:txBody>
-                  <a:tcPr/>
-                </a:tc>
-                <a:tc>
-                  <a:txBody>
-                    <a:bodyPr/>
-                    <a:lstStyle/>
-                    <a:p>
-                      <a:pPr>
-                        <a:defRPr sz="1000"/>
-                      </a:pPr>
-                      <a:r>
-                        <a:t>541 개소</a:t>
-                      </a:r>
-                    </a:p>
-                  </a:txBody>
-                  <a:tcPr/>
-                </a:tc>
-                <a:tc>
-                  <a:txBody>
-                    <a:bodyPr/>
-                    <a:lstStyle/>
-                    <a:p>
-                      <a:pPr>
-                        <a:defRPr sz="1000"/>
-                      </a:pPr>
-                      <a:r>
-                        <a:t>5.2 만 m³/일</a:t>
-                      </a:r>
-                    </a:p>
-                  </a:txBody>
-                  <a:tcPr/>
-                </a:tc>
-                <a:tc>
-                  <a:txBody>
-                    <a:bodyPr/>
-                    <a:lstStyle/>
-                    <a:p>
-                      <a:pPr>
-                        <a:defRPr sz="1000"/>
-                      </a:pPr>
-                      <a:r>
-                        <a:t>-</a:t>
-                      </a:r>
-                    </a:p>
-                  </a:txBody>
-                  <a:tcPr/>
-                </a:tc>
-                <a:tc>
-                  <a:txBody>
-                    <a:bodyPr/>
-                    <a:lstStyle/>
-                    <a:p>
-                      <a:pPr>
-                        <a:defRPr sz="1000"/>
-                      </a:pPr>
-                      <a:r>
-                        <a:t>100%</a:t>
+                      <a:pPr algn="ctr">
+                        <a:defRPr sz="1400">
+                          <a:solidFill>
+                            <a:srgbClr val="404040"/>
+                          </a:solidFill>
+                          <a:latin typeface="Malgun Gothic"/>
+                        </a:defRPr>
+                      </a:pPr>
+                      <a:r>
+                        <a:t>80</a:t>
                       </a:r>
                     </a:p>
                   </a:txBody>
@@ -5437,90 +6073,434 @@
         <p:txBody>
           <a:bodyPr/>
           <a:lstStyle/>
-          <a:p>
-            <a:r>
-              <a:t>입찰 동향</a:t>
-            </a:r>
-          </a:p>
-        </p:txBody>
-      </p:sp>
-      <p:sp>
-        <p:nvSpPr>
-          <p:cNvPr id="3" name="Content Placeholder 2"/>
-          <p:cNvSpPr>
-            <a:spLocks noGrp="1"/>
-          </p:cNvSpPr>
-          <p:nvPr>
-            <p:ph idx="1"/>
-          </p:nvPr>
-        </p:nvSpPr>
-        <p:spPr/>
-        <p:txBody>
-          <a:bodyPr/>
+          <a:p/>
+        </p:txBody>
+      </p:sp>
+      <p:sp>
+        <p:nvSpPr>
+          <p:cNvPr id="3" name="TextBox 2"/>
+          <p:cNvSpPr txBox="1"/>
+          <p:nvPr/>
+        </p:nvSpPr>
+        <p:spPr>
+          <a:xfrm>
+            <a:off x="457200" y="274320"/>
+            <a:ext cx="8229600" cy="731520"/>
+          </a:xfrm>
+          <a:prstGeom prst="rect">
+            <a:avLst/>
+          </a:prstGeom>
+          <a:noFill/>
+        </p:spPr>
+        <p:txBody>
+          <a:bodyPr wrap="none">
+            <a:spAutoFit/>
+          </a:bodyPr>
           <a:lstStyle/>
-          <a:p>
-            <a:r>
-              <a:t>입찰 방식 변화</a:t>
-            </a:r>
-          </a:p>
-          <a:p>
-            <a:pPr lvl="1"/>
-            <a:r>
-              <a:t>• 종합평가낙찰제 확대 (기술력 60% + 가격 40%)</a:t>
-            </a:r>
-          </a:p>
-          <a:p>
-            <a:pPr lvl="1"/>
-            <a:r>
-              <a:t>• 최저가 입찰 제한 (품질 저하 방지)</a:t>
-            </a:r>
-          </a:p>
           <a:p/>
           <a:p>
-            <a:pPr/>
-            <a:r>
-              <a:t>계약 기간</a:t>
-            </a:r>
-          </a:p>
-          <a:p>
-            <a:pPr lvl="1"/>
-            <a:r>
-              <a:t>• 기본: 3 년 (1 년 연장 가능)</a:t>
-            </a:r>
-          </a:p>
-          <a:p>
-            <a:pPr lvl="1"/>
-            <a:r>
-              <a:t>• 대형 처리장: 5 년 계약 증가 추세</a:t>
-            </a:r>
-          </a:p>
-          <a:p/>
-          <a:p>
-            <a:pPr/>
-            <a:r>
-              <a:t>최근 주요 입찰 사례</a:t>
-            </a:r>
-          </a:p>
-          <a:p>
-            <a:pPr lvl="1"/>
-            <a:r>
-              <a:t>• 2023 년 서울 서남하수처리장: SK 에코플랜트 수주 (5,200 억 원)</a:t>
-            </a:r>
-          </a:p>
-          <a:p>
-            <a:pPr lvl="1"/>
-            <a:r>
-              <a:t>• 2023 년 부산 하수처리장: 한국환경산업 수주 (3,800 억 원)</a:t>
-            </a:r>
-          </a:p>
-          <a:p>
-            <a:pPr lvl="1"/>
-            <a:r>
-              <a:t>• 2024 년 경기 남부 처리장: 삼성 C&amp;T 수주 (2,900 억 원)</a:t>
-            </a:r>
-          </a:p>
-        </p:txBody>
-      </p:sp>
+            <a:pPr>
+              <a:defRPr sz="2800" b="1">
+                <a:solidFill>
+                  <a:srgbClr val="003366"/>
+                </a:solidFill>
+                <a:latin typeface="Malgun Gothic"/>
+              </a:defRPr>
+            </a:pPr>
+            <a:r>
+              <a:t>처리장 규모별 현황</a:t>
+            </a:r>
+          </a:p>
+        </p:txBody>
+      </p:sp>
+      <p:graphicFrame>
+        <p:nvGraphicFramePr>
+          <p:cNvPr id="4" name="Table 3"/>
+          <p:cNvGraphicFramePr>
+            <a:graphicFrameLocks noGrp="1"/>
+          </p:cNvGraphicFramePr>
+          <p:nvPr/>
+        </p:nvGraphicFramePr>
+        <p:xfrm>
+          <a:off x="457200" y="1097280"/>
+          <a:ext cx="8229600" cy="2926080"/>
+        </p:xfrm>
+        <a:graphic>
+          <a:graphicData uri="http://schemas.openxmlformats.org/drawingml/2006/table">
+            <a:tbl>
+              <a:tblPr firstRow="1" bandRow="1">
+                <a:tableStyleId>{5C22544A-7EE6-4342-B048-85BDC9FD1C3A}</a:tableStyleId>
+              </a:tblPr>
+              <a:tblGrid>
+                <a:gridCol w="2743200"/>
+                <a:gridCol w="1828800"/>
+                <a:gridCol w="1828800"/>
+                <a:gridCol w="1828800"/>
+              </a:tblGrid>
+              <a:tr h="731520">
+                <a:tc>
+                  <a:txBody>
+                    <a:bodyPr/>
+                    <a:lstStyle/>
+                    <a:p>
+                      <a:pPr algn="ctr">
+                        <a:defRPr sz="1600" b="1">
+                          <a:solidFill>
+                            <a:srgbClr val="FFFFFF"/>
+                          </a:solidFill>
+                          <a:latin typeface="Malgun Gothic"/>
+                        </a:defRPr>
+                      </a:pPr>
+                      <a:r>
+                        <a:t>규모 구분</a:t>
+                      </a:r>
+                    </a:p>
+                  </a:txBody>
+                  <a:tcPr>
+                    <a:solidFill>
+                      <a:srgbClr val="003366"/>
+                    </a:solidFill>
+                  </a:tcPr>
+                </a:tc>
+                <a:tc>
+                  <a:txBody>
+                    <a:bodyPr/>
+                    <a:lstStyle/>
+                    <a:p>
+                      <a:pPr algn="ctr">
+                        <a:defRPr sz="1600" b="1">
+                          <a:solidFill>
+                            <a:srgbClr val="FFFFFF"/>
+                          </a:solidFill>
+                          <a:latin typeface="Malgun Gothic"/>
+                        </a:defRPr>
+                      </a:pPr>
+                      <a:r>
+                        <a:t>업체 수</a:t>
+                      </a:r>
+                    </a:p>
+                  </a:txBody>
+                  <a:tcPr>
+                    <a:solidFill>
+                      <a:srgbClr val="003366"/>
+                    </a:solidFill>
+                  </a:tcPr>
+                </a:tc>
+                <a:tc>
+                  <a:txBody>
+                    <a:bodyPr/>
+                    <a:lstStyle/>
+                    <a:p>
+                      <a:pPr algn="ctr">
+                        <a:defRPr sz="1600" b="1">
+                          <a:solidFill>
+                            <a:srgbClr val="FFFFFF"/>
+                          </a:solidFill>
+                          <a:latin typeface="Malgun Gothic"/>
+                        </a:defRPr>
+                      </a:pPr>
+                      <a:r>
+                        <a:t>비중 (%)</a:t>
+                      </a:r>
+                    </a:p>
+                  </a:txBody>
+                  <a:tcPr>
+                    <a:solidFill>
+                      <a:srgbClr val="003366"/>
+                    </a:solidFill>
+                  </a:tcPr>
+                </a:tc>
+                <a:tc>
+                  <a:txBody>
+                    <a:bodyPr/>
+                    <a:lstStyle/>
+                    <a:p>
+                      <a:pPr algn="ctr">
+                        <a:defRPr sz="1600" b="1">
+                          <a:solidFill>
+                            <a:srgbClr val="FFFFFF"/>
+                          </a:solidFill>
+                          <a:latin typeface="Malgun Gothic"/>
+                        </a:defRPr>
+                      </a:pPr>
+                      <a:r>
+                        <a:t>처리 용량 비중 (%)</a:t>
+                      </a:r>
+                    </a:p>
+                  </a:txBody>
+                  <a:tcPr>
+                    <a:solidFill>
+                      <a:srgbClr val="003366"/>
+                    </a:solidFill>
+                  </a:tcPr>
+                </a:tc>
+              </a:tr>
+              <a:tr h="731520">
+                <a:tc>
+                  <a:txBody>
+                    <a:bodyPr/>
+                    <a:lstStyle/>
+                    <a:p>
+                      <a:pPr algn="ctr">
+                        <a:defRPr sz="1400">
+                          <a:solidFill>
+                            <a:srgbClr val="404040"/>
+                          </a:solidFill>
+                          <a:latin typeface="Malgun Gothic"/>
+                        </a:defRPr>
+                      </a:pPr>
+                      <a:r>
+                        <a:t>대규모 (50,000톤/일 이상)</a:t>
+                      </a:r>
+                    </a:p>
+                  </a:txBody>
+                  <a:tcPr/>
+                </a:tc>
+                <a:tc>
+                  <a:txBody>
+                    <a:bodyPr/>
+                    <a:lstStyle/>
+                    <a:p>
+                      <a:pPr algn="ctr">
+                        <a:defRPr sz="1400">
+                          <a:solidFill>
+                            <a:srgbClr val="404040"/>
+                          </a:solidFill>
+                          <a:latin typeface="Malgun Gothic"/>
+                        </a:defRPr>
+                      </a:pPr>
+                      <a:r>
+                        <a:t>145</a:t>
+                      </a:r>
+                    </a:p>
+                  </a:txBody>
+                  <a:tcPr/>
+                </a:tc>
+                <a:tc>
+                  <a:txBody>
+                    <a:bodyPr/>
+                    <a:lstStyle/>
+                    <a:p>
+                      <a:pPr algn="ctr">
+                        <a:defRPr sz="1400">
+                          <a:solidFill>
+                            <a:srgbClr val="404040"/>
+                          </a:solidFill>
+                          <a:latin typeface="Malgun Gothic"/>
+                        </a:defRPr>
+                      </a:pPr>
+                      <a:r>
+                        <a:t>8.8</a:t>
+                      </a:r>
+                    </a:p>
+                  </a:txBody>
+                  <a:tcPr/>
+                </a:tc>
+                <a:tc>
+                  <a:txBody>
+                    <a:bodyPr/>
+                    <a:lstStyle/>
+                    <a:p>
+                      <a:pPr algn="ctr">
+                        <a:defRPr sz="1400">
+                          <a:solidFill>
+                            <a:srgbClr val="404040"/>
+                          </a:solidFill>
+                          <a:latin typeface="Malgun Gothic"/>
+                        </a:defRPr>
+                      </a:pPr>
+                      <a:r>
+                        <a:t>52.3</a:t>
+                      </a:r>
+                    </a:p>
+                  </a:txBody>
+                  <a:tcPr/>
+                </a:tc>
+              </a:tr>
+              <a:tr h="731520">
+                <a:tc>
+                  <a:txBody>
+                    <a:bodyPr/>
+                    <a:lstStyle/>
+                    <a:p>
+                      <a:pPr algn="ctr">
+                        <a:defRPr sz="1400">
+                          <a:solidFill>
+                            <a:srgbClr val="404040"/>
+                          </a:solidFill>
+                          <a:latin typeface="Malgun Gothic"/>
+                        </a:defRPr>
+                      </a:pPr>
+                      <a:r>
+                        <a:t>중규모 (10,000~50,000톤)</a:t>
+                      </a:r>
+                    </a:p>
+                  </a:txBody>
+                  <a:tcPr>
+                    <a:solidFill>
+                      <a:srgbClr val="F0F0F0"/>
+                    </a:solidFill>
+                  </a:tcPr>
+                </a:tc>
+                <a:tc>
+                  <a:txBody>
+                    <a:bodyPr/>
+                    <a:lstStyle/>
+                    <a:p>
+                      <a:pPr algn="ctr">
+                        <a:defRPr sz="1400">
+                          <a:solidFill>
+                            <a:srgbClr val="404040"/>
+                          </a:solidFill>
+                          <a:latin typeface="Malgun Gothic"/>
+                        </a:defRPr>
+                      </a:pPr>
+                      <a:r>
+                        <a:t>562</a:t>
+                      </a:r>
+                    </a:p>
+                  </a:txBody>
+                  <a:tcPr>
+                    <a:solidFill>
+                      <a:srgbClr val="F0F0F0"/>
+                    </a:solidFill>
+                  </a:tcPr>
+                </a:tc>
+                <a:tc>
+                  <a:txBody>
+                    <a:bodyPr/>
+                    <a:lstStyle/>
+                    <a:p>
+                      <a:pPr algn="ctr">
+                        <a:defRPr sz="1400">
+                          <a:solidFill>
+                            <a:srgbClr val="404040"/>
+                          </a:solidFill>
+                          <a:latin typeface="Malgun Gothic"/>
+                        </a:defRPr>
+                      </a:pPr>
+                      <a:r>
+                        <a:t>34.0</a:t>
+                      </a:r>
+                    </a:p>
+                  </a:txBody>
+                  <a:tcPr>
+                    <a:solidFill>
+                      <a:srgbClr val="F0F0F0"/>
+                    </a:solidFill>
+                  </a:tcPr>
+                </a:tc>
+                <a:tc>
+                  <a:txBody>
+                    <a:bodyPr/>
+                    <a:lstStyle/>
+                    <a:p>
+                      <a:pPr algn="ctr">
+                        <a:defRPr sz="1400">
+                          <a:solidFill>
+                            <a:srgbClr val="404040"/>
+                          </a:solidFill>
+                          <a:latin typeface="Malgun Gothic"/>
+                        </a:defRPr>
+                      </a:pPr>
+                      <a:r>
+                        <a:t>35.8</a:t>
+                      </a:r>
+                    </a:p>
+                  </a:txBody>
+                  <a:tcPr>
+                    <a:solidFill>
+                      <a:srgbClr val="F0F0F0"/>
+                    </a:solidFill>
+                  </a:tcPr>
+                </a:tc>
+              </a:tr>
+              <a:tr h="731520">
+                <a:tc>
+                  <a:txBody>
+                    <a:bodyPr/>
+                    <a:lstStyle/>
+                    <a:p>
+                      <a:pPr algn="ctr">
+                        <a:defRPr sz="1400">
+                          <a:solidFill>
+                            <a:srgbClr val="404040"/>
+                          </a:solidFill>
+                          <a:latin typeface="Malgun Gothic"/>
+                        </a:defRPr>
+                      </a:pPr>
+                      <a:r>
+                        <a:t>소규모 (10,000톤 미만)</a:t>
+                      </a:r>
+                    </a:p>
+                  </a:txBody>
+                  <a:tcPr/>
+                </a:tc>
+                <a:tc>
+                  <a:txBody>
+                    <a:bodyPr/>
+                    <a:lstStyle/>
+                    <a:p>
+                      <a:pPr algn="ctr">
+                        <a:defRPr sz="1400">
+                          <a:solidFill>
+                            <a:srgbClr val="404040"/>
+                          </a:solidFill>
+                          <a:latin typeface="Malgun Gothic"/>
+                        </a:defRPr>
+                      </a:pPr>
+                      <a:r>
+                        <a:t>947</a:t>
+                      </a:r>
+                    </a:p>
+                  </a:txBody>
+                  <a:tcPr/>
+                </a:tc>
+                <a:tc>
+                  <a:txBody>
+                    <a:bodyPr/>
+                    <a:lstStyle/>
+                    <a:p>
+                      <a:pPr algn="ctr">
+                        <a:defRPr sz="1400">
+                          <a:solidFill>
+                            <a:srgbClr val="404040"/>
+                          </a:solidFill>
+                          <a:latin typeface="Malgun Gothic"/>
+                        </a:defRPr>
+                      </a:pPr>
+                      <a:r>
+                        <a:t>57.2</a:t>
+                      </a:r>
+                    </a:p>
+                  </a:txBody>
+                  <a:tcPr/>
+                </a:tc>
+                <a:tc>
+                  <a:txBody>
+                    <a:bodyPr/>
+                    <a:lstStyle/>
+                    <a:p>
+                      <a:pPr algn="ctr">
+                        <a:defRPr sz="1400">
+                          <a:solidFill>
+                            <a:srgbClr val="404040"/>
+                          </a:solidFill>
+                          <a:latin typeface="Malgun Gothic"/>
+                        </a:defRPr>
+                      </a:pPr>
+                      <a:r>
+                        <a:t>11.9</a:t>
+                      </a:r>
+                    </a:p>
+                  </a:txBody>
+                  <a:tcPr/>
+                </a:tc>
+              </a:tr>
+            </a:tbl>
+          </a:graphicData>
+        </a:graphic>
+      </p:graphicFrame>
     </p:spTree>
   </p:cSld>
   <p:clrMapOvr>
@@ -5553,96 +6533,532 @@
         <p:txBody>
           <a:bodyPr/>
           <a:lstStyle/>
-          <a:p>
-            <a:r>
-              <a:t>기술 개발 현황</a:t>
-            </a:r>
-          </a:p>
-        </p:txBody>
-      </p:sp>
-      <p:sp>
-        <p:nvSpPr>
-          <p:cNvPr id="3" name="Content Placeholder 2"/>
-          <p:cNvSpPr>
-            <a:spLocks noGrp="1"/>
-          </p:cNvSpPr>
-          <p:nvPr>
-            <p:ph idx="1"/>
-          </p:nvPr>
-        </p:nvSpPr>
-        <p:spPr/>
-        <p:txBody>
-          <a:bodyPr/>
+          <a:p/>
+        </p:txBody>
+      </p:sp>
+      <p:sp>
+        <p:nvSpPr>
+          <p:cNvPr id="3" name="TextBox 2"/>
+          <p:cNvSpPr txBox="1"/>
+          <p:nvPr/>
+        </p:nvSpPr>
+        <p:spPr>
+          <a:xfrm>
+            <a:off x="457200" y="274320"/>
+            <a:ext cx="8229600" cy="731520"/>
+          </a:xfrm>
+          <a:prstGeom prst="rect">
+            <a:avLst/>
+          </a:prstGeom>
+          <a:noFill/>
+        </p:spPr>
+        <p:txBody>
+          <a:bodyPr wrap="none">
+            <a:spAutoFit/>
+          </a:bodyPr>
           <a:lstStyle/>
-          <a:p>
-            <a:r>
-              <a:t>AI 기반 관제 시스템</a:t>
-            </a:r>
-          </a:p>
-          <a:p>
-            <a:pPr lvl="1"/>
-            <a:r>
-              <a:t>• 실시간 수질 모니터링 및 예측</a:t>
-            </a:r>
-          </a:p>
-          <a:p>
-            <a:pPr lvl="1"/>
-            <a:r>
-              <a:t>• 이상 징후 조기 발견 (사고 예방)</a:t>
-            </a:r>
-          </a:p>
-          <a:p>
-            <a:pPr lvl="1"/>
-            <a:r>
-              <a:t>• SK 에코플랜트, 삼성 C&amp;T 선도</a:t>
-            </a:r>
-          </a:p>
           <a:p/>
           <a:p>
-            <a:pPr/>
-            <a:r>
-              <a:t>에너지 자립화 기술</a:t>
-            </a:r>
-          </a:p>
-          <a:p>
-            <a:pPr lvl="1"/>
-            <a:r>
-              <a:t>• 바이오가스 발전 (전기 자급률 60% 이상)</a:t>
-            </a:r>
-          </a:p>
-          <a:p>
-            <a:pPr lvl="1"/>
-            <a:r>
-              <a:t>• 태양광 연계 하이브리드 시스템</a:t>
-            </a:r>
-          </a:p>
-          <a:p>
-            <a:pPr lvl="1"/>
-            <a:r>
-              <a:t>• 현대건설, 대우건설 주도</a:t>
-            </a:r>
-          </a:p>
-          <a:p/>
-          <a:p>
-            <a:pPr/>
-            <a:r>
-              <a:t>디지털 트윈</a:t>
-            </a:r>
-          </a:p>
-          <a:p>
-            <a:pPr lvl="1"/>
-            <a:r>
-              <a:t>• 가상 공간에서 시뮬레이션 최적화</a:t>
-            </a:r>
-          </a:p>
-          <a:p>
-            <a:pPr lvl="1"/>
-            <a:r>
-              <a:t>• 유지보수 효율성 향상</a:t>
-            </a:r>
-          </a:p>
-        </p:txBody>
-      </p:sp>
+            <a:pPr>
+              <a:defRPr sz="2800" b="1">
+                <a:solidFill>
+                  <a:srgbClr val="003366"/>
+                </a:solidFill>
+                <a:latin typeface="Malgun Gothic"/>
+              </a:defRPr>
+            </a:pPr>
+            <a:r>
+              <a:t>입찰 동향 (최근 2년간)</a:t>
+            </a:r>
+          </a:p>
+        </p:txBody>
+      </p:sp>
+      <p:graphicFrame>
+        <p:nvGraphicFramePr>
+          <p:cNvPr id="4" name="Table 3"/>
+          <p:cNvGraphicFramePr>
+            <a:graphicFrameLocks noGrp="1"/>
+          </p:cNvGraphicFramePr>
+          <p:nvPr/>
+        </p:nvGraphicFramePr>
+        <p:xfrm>
+          <a:off x="457200" y="1097280"/>
+          <a:ext cx="8229600" cy="3657600"/>
+        </p:xfrm>
+        <a:graphic>
+          <a:graphicData uri="http://schemas.openxmlformats.org/drawingml/2006/table">
+            <a:tbl>
+              <a:tblPr firstRow="1" bandRow="1">
+                <a:tableStyleId>{5C22544A-7EE6-4342-B048-85BDC9FD1C3A}</a:tableStyleId>
+              </a:tblPr>
+              <a:tblGrid>
+                <a:gridCol w="2286000"/>
+                <a:gridCol w="2011680"/>
+                <a:gridCol w="2011680"/>
+                <a:gridCol w="1920240"/>
+              </a:tblGrid>
+              <a:tr h="731520">
+                <a:tc>
+                  <a:txBody>
+                    <a:bodyPr/>
+                    <a:lstStyle/>
+                    <a:p>
+                      <a:pPr algn="ctr">
+                        <a:defRPr sz="1600" b="1">
+                          <a:solidFill>
+                            <a:srgbClr val="FFFFFF"/>
+                          </a:solidFill>
+                          <a:latin typeface="Malgun Gothic"/>
+                        </a:defRPr>
+                      </a:pPr>
+                      <a:r>
+                        <a:t>구분</a:t>
+                      </a:r>
+                    </a:p>
+                  </a:txBody>
+                  <a:tcPr>
+                    <a:solidFill>
+                      <a:srgbClr val="003366"/>
+                    </a:solidFill>
+                  </a:tcPr>
+                </a:tc>
+                <a:tc>
+                  <a:txBody>
+                    <a:bodyPr/>
+                    <a:lstStyle/>
+                    <a:p>
+                      <a:pPr algn="ctr">
+                        <a:defRPr sz="1600" b="1">
+                          <a:solidFill>
+                            <a:srgbClr val="FFFFFF"/>
+                          </a:solidFill>
+                          <a:latin typeface="Malgun Gothic"/>
+                        </a:defRPr>
+                      </a:pPr>
+                      <a:r>
+                        <a:t>2023년</a:t>
+                      </a:r>
+                    </a:p>
+                  </a:txBody>
+                  <a:tcPr>
+                    <a:solidFill>
+                      <a:srgbClr val="003366"/>
+                    </a:solidFill>
+                  </a:tcPr>
+                </a:tc>
+                <a:tc>
+                  <a:txBody>
+                    <a:bodyPr/>
+                    <a:lstStyle/>
+                    <a:p>
+                      <a:pPr algn="ctr">
+                        <a:defRPr sz="1600" b="1">
+                          <a:solidFill>
+                            <a:srgbClr val="FFFFFF"/>
+                          </a:solidFill>
+                          <a:latin typeface="Malgun Gothic"/>
+                        </a:defRPr>
+                      </a:pPr>
+                      <a:r>
+                        <a:t>2024년</a:t>
+                      </a:r>
+                    </a:p>
+                  </a:txBody>
+                  <a:tcPr>
+                    <a:solidFill>
+                      <a:srgbClr val="003366"/>
+                    </a:solidFill>
+                  </a:tcPr>
+                </a:tc>
+                <a:tc>
+                  <a:txBody>
+                    <a:bodyPr/>
+                    <a:lstStyle/>
+                    <a:p>
+                      <a:pPr algn="ctr">
+                        <a:defRPr sz="1600" b="1">
+                          <a:solidFill>
+                            <a:srgbClr val="FFFFFF"/>
+                          </a:solidFill>
+                          <a:latin typeface="Malgun Gothic"/>
+                        </a:defRPr>
+                      </a:pPr>
+                      <a:r>
+                        <a:t>변동률 (%)</a:t>
+                      </a:r>
+                    </a:p>
+                  </a:txBody>
+                  <a:tcPr>
+                    <a:solidFill>
+                      <a:srgbClr val="003366"/>
+                    </a:solidFill>
+                  </a:tcPr>
+                </a:tc>
+              </a:tr>
+              <a:tr h="731520">
+                <a:tc>
+                  <a:txBody>
+                    <a:bodyPr/>
+                    <a:lstStyle/>
+                    <a:p>
+                      <a:pPr algn="ctr">
+                        <a:defRPr sz="1400">
+                          <a:solidFill>
+                            <a:srgbClr val="404040"/>
+                          </a:solidFill>
+                          <a:latin typeface="Malgun Gothic"/>
+                        </a:defRPr>
+                      </a:pPr>
+                      <a:r>
+                        <a:t>평균 입찰 금액 (억원)</a:t>
+                      </a:r>
+                    </a:p>
+                  </a:txBody>
+                  <a:tcPr/>
+                </a:tc>
+                <a:tc>
+                  <a:txBody>
+                    <a:bodyPr/>
+                    <a:lstStyle/>
+                    <a:p>
+                      <a:pPr algn="ctr">
+                        <a:defRPr sz="1400">
+                          <a:solidFill>
+                            <a:srgbClr val="404040"/>
+                          </a:solidFill>
+                          <a:latin typeface="Malgun Gothic"/>
+                        </a:defRPr>
+                      </a:pPr>
+                      <a:r>
+                        <a:t>45.8</a:t>
+                      </a:r>
+                    </a:p>
+                  </a:txBody>
+                  <a:tcPr/>
+                </a:tc>
+                <a:tc>
+                  <a:txBody>
+                    <a:bodyPr/>
+                    <a:lstStyle/>
+                    <a:p>
+                      <a:pPr algn="ctr">
+                        <a:defRPr sz="1400">
+                          <a:solidFill>
+                            <a:srgbClr val="404040"/>
+                          </a:solidFill>
+                          <a:latin typeface="Malgun Gothic"/>
+                        </a:defRPr>
+                      </a:pPr>
+                      <a:r>
+                        <a:t>48.2</a:t>
+                      </a:r>
+                    </a:p>
+                  </a:txBody>
+                  <a:tcPr/>
+                </a:tc>
+                <a:tc>
+                  <a:txBody>
+                    <a:bodyPr/>
+                    <a:lstStyle/>
+                    <a:p>
+                      <a:pPr algn="ctr">
+                        <a:defRPr sz="1400">
+                          <a:solidFill>
+                            <a:srgbClr val="404040"/>
+                          </a:solidFill>
+                          <a:latin typeface="Malgun Gothic"/>
+                        </a:defRPr>
+                      </a:pPr>
+                      <a:r>
+                        <a:t>+5.2</a:t>
+                      </a:r>
+                    </a:p>
+                  </a:txBody>
+                  <a:tcPr/>
+                </a:tc>
+              </a:tr>
+              <a:tr h="731520">
+                <a:tc>
+                  <a:txBody>
+                    <a:bodyPr/>
+                    <a:lstStyle/>
+                    <a:p>
+                      <a:pPr algn="ctr">
+                        <a:defRPr sz="1400">
+                          <a:solidFill>
+                            <a:srgbClr val="404040"/>
+                          </a:solidFill>
+                          <a:latin typeface="Malgun Gothic"/>
+                        </a:defRPr>
+                      </a:pPr>
+                      <a:r>
+                        <a:t>평균 낙찰률 (%)</a:t>
+                      </a:r>
+                    </a:p>
+                  </a:txBody>
+                  <a:tcPr>
+                    <a:solidFill>
+                      <a:srgbClr val="F0F0F0"/>
+                    </a:solidFill>
+                  </a:tcPr>
+                </a:tc>
+                <a:tc>
+                  <a:txBody>
+                    <a:bodyPr/>
+                    <a:lstStyle/>
+                    <a:p>
+                      <a:pPr algn="ctr">
+                        <a:defRPr sz="1400">
+                          <a:solidFill>
+                            <a:srgbClr val="404040"/>
+                          </a:solidFill>
+                          <a:latin typeface="Malgun Gothic"/>
+                        </a:defRPr>
+                      </a:pPr>
+                      <a:r>
+                        <a:t>87.5</a:t>
+                      </a:r>
+                    </a:p>
+                  </a:txBody>
+                  <a:tcPr>
+                    <a:solidFill>
+                      <a:srgbClr val="F0F0F0"/>
+                    </a:solidFill>
+                  </a:tcPr>
+                </a:tc>
+                <a:tc>
+                  <a:txBody>
+                    <a:bodyPr/>
+                    <a:lstStyle/>
+                    <a:p>
+                      <a:pPr algn="ctr">
+                        <a:defRPr sz="1400">
+                          <a:solidFill>
+                            <a:srgbClr val="404040"/>
+                          </a:solidFill>
+                          <a:latin typeface="Malgun Gothic"/>
+                        </a:defRPr>
+                      </a:pPr>
+                      <a:r>
+                        <a:t>89.2</a:t>
+                      </a:r>
+                    </a:p>
+                  </a:txBody>
+                  <a:tcPr>
+                    <a:solidFill>
+                      <a:srgbClr val="F0F0F0"/>
+                    </a:solidFill>
+                  </a:tcPr>
+                </a:tc>
+                <a:tc>
+                  <a:txBody>
+                    <a:bodyPr/>
+                    <a:lstStyle/>
+                    <a:p>
+                      <a:pPr algn="ctr">
+                        <a:defRPr sz="1400">
+                          <a:solidFill>
+                            <a:srgbClr val="404040"/>
+                          </a:solidFill>
+                          <a:latin typeface="Malgun Gothic"/>
+                        </a:defRPr>
+                      </a:pPr>
+                      <a:r>
+                        <a:t>+1.7</a:t>
+                      </a:r>
+                    </a:p>
+                  </a:txBody>
+                  <a:tcPr>
+                    <a:solidFill>
+                      <a:srgbClr val="F0F0F0"/>
+                    </a:solidFill>
+                  </a:tcPr>
+                </a:tc>
+              </a:tr>
+              <a:tr h="731520">
+                <a:tc>
+                  <a:txBody>
+                    <a:bodyPr/>
+                    <a:lstStyle/>
+                    <a:p>
+                      <a:pPr algn="ctr">
+                        <a:defRPr sz="1400">
+                          <a:solidFill>
+                            <a:srgbClr val="404040"/>
+                          </a:solidFill>
+                          <a:latin typeface="Malgun Gothic"/>
+                        </a:defRPr>
+                      </a:pPr>
+                      <a:r>
+                        <a:t>입찰 참여 업체 수 (사)</a:t>
+                      </a:r>
+                    </a:p>
+                  </a:txBody>
+                  <a:tcPr/>
+                </a:tc>
+                <a:tc>
+                  <a:txBody>
+                    <a:bodyPr/>
+                    <a:lstStyle/>
+                    <a:p>
+                      <a:pPr algn="ctr">
+                        <a:defRPr sz="1400">
+                          <a:solidFill>
+                            <a:srgbClr val="404040"/>
+                          </a:solidFill>
+                          <a:latin typeface="Malgun Gothic"/>
+                        </a:defRPr>
+                      </a:pPr>
+                      <a:r>
+                        <a:t>12.3</a:t>
+                      </a:r>
+                    </a:p>
+                  </a:txBody>
+                  <a:tcPr/>
+                </a:tc>
+                <a:tc>
+                  <a:txBody>
+                    <a:bodyPr/>
+                    <a:lstStyle/>
+                    <a:p>
+                      <a:pPr algn="ctr">
+                        <a:defRPr sz="1400">
+                          <a:solidFill>
+                            <a:srgbClr val="404040"/>
+                          </a:solidFill>
+                          <a:latin typeface="Malgun Gothic"/>
+                        </a:defRPr>
+                      </a:pPr>
+                      <a:r>
+                        <a:t>14.1</a:t>
+                      </a:r>
+                    </a:p>
+                  </a:txBody>
+                  <a:tcPr/>
+                </a:tc>
+                <a:tc>
+                  <a:txBody>
+                    <a:bodyPr/>
+                    <a:lstStyle/>
+                    <a:p>
+                      <a:pPr algn="ctr">
+                        <a:defRPr sz="1400">
+                          <a:solidFill>
+                            <a:srgbClr val="404040"/>
+                          </a:solidFill>
+                          <a:latin typeface="Malgun Gothic"/>
+                        </a:defRPr>
+                      </a:pPr>
+                      <a:r>
+                        <a:t>+14.6</a:t>
+                      </a:r>
+                    </a:p>
+                  </a:txBody>
+                  <a:tcPr/>
+                </a:tc>
+              </a:tr>
+              <a:tr h="731520">
+                <a:tc>
+                  <a:txBody>
+                    <a:bodyPr/>
+                    <a:lstStyle/>
+                    <a:p>
+                      <a:pPr algn="ctr">
+                        <a:defRPr sz="1400">
+                          <a:solidFill>
+                            <a:srgbClr val="404040"/>
+                          </a:solidFill>
+                          <a:latin typeface="Malgun Gothic"/>
+                        </a:defRPr>
+                      </a:pPr>
+                      <a:r>
+                        <a:t>기술평가 비중 (%)</a:t>
+                      </a:r>
+                    </a:p>
+                  </a:txBody>
+                  <a:tcPr>
+                    <a:solidFill>
+                      <a:srgbClr val="F0F0F0"/>
+                    </a:solidFill>
+                  </a:tcPr>
+                </a:tc>
+                <a:tc>
+                  <a:txBody>
+                    <a:bodyPr/>
+                    <a:lstStyle/>
+                    <a:p>
+                      <a:pPr algn="ctr">
+                        <a:defRPr sz="1400">
+                          <a:solidFill>
+                            <a:srgbClr val="404040"/>
+                          </a:solidFill>
+                          <a:latin typeface="Malgun Gothic"/>
+                        </a:defRPr>
+                      </a:pPr>
+                      <a:r>
+                        <a:t>45.0</a:t>
+                      </a:r>
+                    </a:p>
+                  </a:txBody>
+                  <a:tcPr>
+                    <a:solidFill>
+                      <a:srgbClr val="F0F0F0"/>
+                    </a:solidFill>
+                  </a:tcPr>
+                </a:tc>
+                <a:tc>
+                  <a:txBody>
+                    <a:bodyPr/>
+                    <a:lstStyle/>
+                    <a:p>
+                      <a:pPr algn="ctr">
+                        <a:defRPr sz="1400">
+                          <a:solidFill>
+                            <a:srgbClr val="404040"/>
+                          </a:solidFill>
+                          <a:latin typeface="Malgun Gothic"/>
+                        </a:defRPr>
+                      </a:pPr>
+                      <a:r>
+                        <a:t>50.0</a:t>
+                      </a:r>
+                    </a:p>
+                  </a:txBody>
+                  <a:tcPr>
+                    <a:solidFill>
+                      <a:srgbClr val="F0F0F0"/>
+                    </a:solidFill>
+                  </a:tcPr>
+                </a:tc>
+                <a:tc>
+                  <a:txBody>
+                    <a:bodyPr/>
+                    <a:lstStyle/>
+                    <a:p>
+                      <a:pPr algn="ctr">
+                        <a:defRPr sz="1400">
+                          <a:solidFill>
+                            <a:srgbClr val="404040"/>
+                          </a:solidFill>
+                          <a:latin typeface="Malgun Gothic"/>
+                        </a:defRPr>
+                      </a:pPr>
+                      <a:r>
+                        <a:t>+5.0</a:t>
+                      </a:r>
+                    </a:p>
+                  </a:txBody>
+                  <a:tcPr>
+                    <a:solidFill>
+                      <a:srgbClr val="F0F0F0"/>
+                    </a:solidFill>
+                  </a:tcPr>
+                </a:tc>
+              </a:tr>
+            </a:tbl>
+          </a:graphicData>
+        </a:graphic>
+      </p:graphicFrame>
     </p:spTree>
   </p:cSld>
   <p:clrMapOvr>
@@ -5676,8 +7092,16 @@
           <a:bodyPr/>
           <a:lstStyle/>
           <a:p>
-            <a:r>
-              <a:t>시장 전망 및 과제</a:t>
+            <a:pPr>
+              <a:defRPr sz="2800" b="1">
+                <a:solidFill>
+                  <a:srgbClr val="003366"/>
+                </a:solidFill>
+                <a:latin typeface="Malgun Gothic"/>
+              </a:defRPr>
+            </a:pPr>
+            <a:r>
+              <a:t>기술 개발 현황</a:t>
             </a:r>
           </a:p>
         </p:txBody>
@@ -5696,71 +7120,70 @@
         <p:txBody>
           <a:bodyPr/>
           <a:lstStyle/>
-          <a:p>
-            <a:r>
-              <a:t>향후 전망</a:t>
-            </a:r>
-          </a:p>
-          <a:p>
-            <a:pPr lvl="1"/>
-            <a:r>
-              <a:t>• 대형 사업자 중심 재편 가속화</a:t>
-            </a:r>
-          </a:p>
-          <a:p>
-            <a:pPr lvl="1"/>
-            <a:r>
-              <a:t>• 연평균 3~4% 시장 성장 예상</a:t>
-            </a:r>
-          </a:p>
-          <a:p>
-            <a:pPr lvl="1"/>
-            <a:r>
-              <a:t>• 스마트 물관리 기술 도입 확대</a:t>
-            </a:r>
-          </a:p>
           <a:p/>
           <a:p>
-            <a:pPr/>
-            <a:r>
-              <a:t>주요 과제</a:t>
-            </a:r>
-          </a:p>
-          <a:p>
-            <a:pPr lvl="1"/>
-            <a:r>
-              <a:t>• 노후 처리장 현대화 (30 년 이상 120 개소)</a:t>
-            </a:r>
-          </a:p>
-          <a:p>
-            <a:pPr lvl="1"/>
-            <a:r>
-              <a:t>• 인력 부족 및 전문성 강화 필요</a:t>
-            </a:r>
-          </a:p>
-          <a:p>
-            <a:pPr lvl="1"/>
-            <a:r>
-              <a:t>• 기후변화 대응 (집중호우 등)</a:t>
-            </a:r>
-          </a:p>
-          <a:p/>
-          <a:p>
-            <a:pPr/>
-            <a:r>
-              <a:t>ESG 경영</a:t>
-            </a:r>
-          </a:p>
-          <a:p>
-            <a:pPr lvl="1"/>
-            <a:r>
-              <a:t>• 탄소중립 목표 (2050 년)</a:t>
-            </a:r>
-          </a:p>
-          <a:p>
-            <a:pPr lvl="1"/>
-            <a:r>
-              <a:t>• 에너지 효율 개선 필수 요소</a:t>
+            <a:pPr>
+              <a:defRPr sz="1800">
+                <a:solidFill>
+                  <a:srgbClr val="404040"/>
+                </a:solidFill>
+                <a:latin typeface="Malgun Gothic"/>
+              </a:defRPr>
+            </a:pPr>
+            <a:r>
+              <a:t>• AI 기반 운영 최적화: 실시간 수질 예측 및 에너지 효율화 시스템 도입 확대</a:t>
+            </a:r>
+          </a:p>
+          <a:p>
+            <a:pPr>
+              <a:defRPr sz="1800">
+                <a:solidFill>
+                  <a:srgbClr val="404040"/>
+                </a:solidFill>
+                <a:latin typeface="Malgun Gothic"/>
+              </a:defRPr>
+            </a:pPr>
+            <a:r>
+              <a:t>• 에너지 자립화: 태양광, 수소연료전지 등 재생에너지 활용 시설 증가</a:t>
+            </a:r>
+          </a:p>
+          <a:p>
+            <a:pPr>
+              <a:defRPr sz="1800">
+                <a:solidFill>
+                  <a:srgbClr val="404040"/>
+                </a:solidFill>
+                <a:latin typeface="Malgun Gothic"/>
+              </a:defRPr>
+            </a:pPr>
+            <a:r>
+              <a:t>• 슬러지 감량화: 고도처리 기술 및 자원화 기술 개발 활발</a:t>
+            </a:r>
+          </a:p>
+          <a:p>
+            <a:pPr>
+              <a:defRPr sz="1800">
+                <a:solidFill>
+                  <a:srgbClr val="404040"/>
+                </a:solidFill>
+                <a:latin typeface="Malgun Gothic"/>
+              </a:defRPr>
+            </a:pPr>
+            <a:r>
+              <a:t>• 스마트 워터그리드: IoT 센서 기반 원격 모니터링 시스템 구축</a:t>
+            </a:r>
+          </a:p>
+          <a:p>
+            <a:pPr>
+              <a:defRPr sz="1800">
+                <a:solidFill>
+                  <a:srgbClr val="404040"/>
+                </a:solidFill>
+                <a:latin typeface="Malgun Gothic"/>
+              </a:defRPr>
+            </a:pPr>
+            <a:r>
+              <a:t>• 탄소중립 대응: 온실가스 배출 저감 기술 및 LCA 평가 도입</a:t>
             </a:r>
           </a:p>
         </p:txBody>

--- a/하수처리장_관리대행_업체_현황.pptx
+++ b/하수처리장_관리대행_업체_현황.pptx
@@ -16,7 +16,7 @@
     <p:sldId id="264" r:id="rId15"/>
     <p:sldId id="265" r:id="rId16"/>
   </p:sldIdLst>
-  <p:sldSz cx="9144000" cy="6858000" type="screen4x3"/>
+  <p:sldSz cx="12191695" cy="6858000" type="screen4x3"/>
   <p:notesSz cx="6858000" cy="9144000"/>
   <p:defaultTextStyle>
     <a:defPPr>
@@ -114,6 +114,642 @@
     </a:lvl9pPr>
   </p:defaultTextStyle>
 </p:presentation>
+</file>
+
+<file path=ppt/charts/chart1.xml><?xml version="1.0" encoding="utf-8"?>
+<c:chartSpace xmlns:c="http://schemas.openxmlformats.org/drawingml/2006/chart" xmlns:a="http://schemas.openxmlformats.org/drawingml/2006/main" xmlns:r="http://schemas.openxmlformats.org/officeDocument/2006/relationships">
+  <c:date1904 val="0"/>
+  <c:chart>
+    <c:autoTitleDeleted val="0"/>
+    <c:plotArea>
+      <c:barChart>
+        <c:barDir val="bar"/>
+        <c:grouping val="clustered"/>
+        <c:ser>
+          <c:idx val="0"/>
+          <c:order val="0"/>
+          <c:tx>
+            <c:strRef>
+              <c:f>Sheet1!$B$1</c:f>
+              <c:strCache>
+                <c:ptCount val="1"/>
+                <c:pt idx="0">
+                  <c:v>2022 년</c:v>
+                </c:pt>
+              </c:strCache>
+            </c:strRef>
+          </c:tx>
+          <c:spPr>
+            <a:solidFill>
+              <a:srgbClr val="ADD8E6"/>
+            </a:solidFill>
+          </c:spPr>
+          <c:dLbls>
+            <c:numFmt formatCode="#,##0" sourceLinked="0"/>
+            <c:txPr>
+              <a:bodyPr/>
+              <a:lstStyle/>
+              <a:p>
+                <a:pPr>
+                  <a:defRPr sz="1000">
+                    <a:solidFill>
+                      <a:srgbClr val="333333"/>
+                    </a:solidFill>
+                  </a:defRPr>
+                </a:pPr>
+              </a:p>
+            </c:txPr>
+            <c:dLblPos val="outEnd"/>
+            <c:showLegendKey val="0"/>
+            <c:showVal val="0"/>
+            <c:showCatName val="0"/>
+            <c:showSerName val="0"/>
+            <c:showPercent val="0"/>
+            <c:showBubbleSize val="0"/>
+            <c:showLeaderLines val="1"/>
+          </c:dLbls>
+          <c:cat>
+            <c:strRef>
+              <c:f>Sheet1!$A$2:$A$6</c:f>
+              <c:strCache>
+                <c:ptCount val="5"/>
+                <c:pt idx="0">
+                  <c:v>A 환경그룹</c:v>
+                </c:pt>
+                <c:pt idx="1">
+                  <c:v>B 워터테크</c:v>
+                </c:pt>
+                <c:pt idx="2">
+                  <c:v>C 그린시스템</c:v>
+                </c:pt>
+                <c:pt idx="3">
+                  <c:v>D 에코서비스</c:v>
+                </c:pt>
+                <c:pt idx="4">
+                  <c:v>E 클린워터</c:v>
+                </c:pt>
+              </c:strCache>
+            </c:strRef>
+          </c:cat>
+          <c:val>
+            <c:numRef>
+              <c:f>Sheet1!$B$2:$B$6</c:f>
+              <c:numCache>
+                <c:formatCode>General</c:formatCode>
+                <c:ptCount val="5"/>
+                <c:pt idx="0">
+                  <c:v>3200</c:v>
+                </c:pt>
+                <c:pt idx="1">
+                  <c:v>2850</c:v>
+                </c:pt>
+                <c:pt idx="2">
+                  <c:v>2100</c:v>
+                </c:pt>
+                <c:pt idx="3">
+                  <c:v>1950</c:v>
+                </c:pt>
+                <c:pt idx="4">
+                  <c:v>1600</c:v>
+                </c:pt>
+              </c:numCache>
+            </c:numRef>
+          </c:val>
+        </c:ser>
+        <c:ser>
+          <c:idx val="1"/>
+          <c:order val="1"/>
+          <c:tx>
+            <c:strRef>
+              <c:f>Sheet1!$C$1</c:f>
+              <c:strCache>
+                <c:ptCount val="1"/>
+                <c:pt idx="0">
+                  <c:v>2023 년</c:v>
+                </c:pt>
+              </c:strCache>
+            </c:strRef>
+          </c:tx>
+          <c:spPr>
+            <a:solidFill>
+              <a:srgbClr val="4682B4"/>
+            </a:solidFill>
+          </c:spPr>
+          <c:dLbls>
+            <c:numFmt formatCode="#,##0" sourceLinked="0"/>
+            <c:txPr>
+              <a:bodyPr/>
+              <a:lstStyle/>
+              <a:p>
+                <a:pPr>
+                  <a:defRPr sz="1000">
+                    <a:solidFill>
+                      <a:srgbClr val="333333"/>
+                    </a:solidFill>
+                  </a:defRPr>
+                </a:pPr>
+              </a:p>
+            </c:txPr>
+            <c:dLblPos val="outEnd"/>
+            <c:showLegendKey val="0"/>
+            <c:showVal val="0"/>
+            <c:showCatName val="0"/>
+            <c:showSerName val="0"/>
+            <c:showPercent val="0"/>
+            <c:showBubbleSize val="0"/>
+            <c:showLeaderLines val="1"/>
+          </c:dLbls>
+          <c:cat>
+            <c:strRef>
+              <c:f>Sheet1!$A$2:$A$6</c:f>
+              <c:strCache>
+                <c:ptCount val="5"/>
+                <c:pt idx="0">
+                  <c:v>A 환경그룹</c:v>
+                </c:pt>
+                <c:pt idx="1">
+                  <c:v>B 워터테크</c:v>
+                </c:pt>
+                <c:pt idx="2">
+                  <c:v>C 그린시스템</c:v>
+                </c:pt>
+                <c:pt idx="3">
+                  <c:v>D 에코서비스</c:v>
+                </c:pt>
+                <c:pt idx="4">
+                  <c:v>E 클린워터</c:v>
+                </c:pt>
+              </c:strCache>
+            </c:strRef>
+          </c:cat>
+          <c:val>
+            <c:numRef>
+              <c:f>Sheet1!$C$2:$C$6</c:f>
+              <c:numCache>
+                <c:formatCode>General</c:formatCode>
+                <c:ptCount val="5"/>
+                <c:pt idx="0">
+                  <c:v>3450</c:v>
+                </c:pt>
+                <c:pt idx="1">
+                  <c:v>3050</c:v>
+                </c:pt>
+                <c:pt idx="2">
+                  <c:v>2280</c:v>
+                </c:pt>
+                <c:pt idx="3">
+                  <c:v>2100</c:v>
+                </c:pt>
+                <c:pt idx="4">
+                  <c:v>1750</c:v>
+                </c:pt>
+              </c:numCache>
+            </c:numRef>
+          </c:val>
+        </c:ser>
+        <c:ser>
+          <c:idx val="2"/>
+          <c:order val="2"/>
+          <c:tx>
+            <c:strRef>
+              <c:f>Sheet1!$D$1</c:f>
+              <c:strCache>
+                <c:ptCount val="1"/>
+                <c:pt idx="0">
+                  <c:v>2024 년</c:v>
+                </c:pt>
+              </c:strCache>
+            </c:strRef>
+          </c:tx>
+          <c:spPr>
+            <a:solidFill>
+              <a:srgbClr val="003366"/>
+            </a:solidFill>
+          </c:spPr>
+          <c:dLbls>
+            <c:numFmt formatCode="#,##0" sourceLinked="0"/>
+            <c:txPr>
+              <a:bodyPr/>
+              <a:lstStyle/>
+              <a:p>
+                <a:pPr>
+                  <a:defRPr sz="1000">
+                    <a:solidFill>
+                      <a:srgbClr val="333333"/>
+                    </a:solidFill>
+                  </a:defRPr>
+                </a:pPr>
+              </a:p>
+            </c:txPr>
+            <c:dLblPos val="outEnd"/>
+            <c:showLegendKey val="0"/>
+            <c:showVal val="0"/>
+            <c:showCatName val="0"/>
+            <c:showSerName val="0"/>
+            <c:showPercent val="0"/>
+            <c:showBubbleSize val="0"/>
+            <c:showLeaderLines val="1"/>
+          </c:dLbls>
+          <c:cat>
+            <c:strRef>
+              <c:f>Sheet1!$A$2:$A$6</c:f>
+              <c:strCache>
+                <c:ptCount val="5"/>
+                <c:pt idx="0">
+                  <c:v>A 환경그룹</c:v>
+                </c:pt>
+                <c:pt idx="1">
+                  <c:v>B 워터테크</c:v>
+                </c:pt>
+                <c:pt idx="2">
+                  <c:v>C 그린시스템</c:v>
+                </c:pt>
+                <c:pt idx="3">
+                  <c:v>D 에코서비스</c:v>
+                </c:pt>
+                <c:pt idx="4">
+                  <c:v>E 클린워터</c:v>
+                </c:pt>
+              </c:strCache>
+            </c:strRef>
+          </c:cat>
+          <c:val>
+            <c:numRef>
+              <c:f>Sheet1!$D$2:$D$6</c:f>
+              <c:numCache>
+                <c:formatCode>General</c:formatCode>
+                <c:ptCount val="5"/>
+                <c:pt idx="0">
+                  <c:v>3680</c:v>
+                </c:pt>
+                <c:pt idx="1">
+                  <c:v>3250</c:v>
+                </c:pt>
+                <c:pt idx="2">
+                  <c:v>2450</c:v>
+                </c:pt>
+                <c:pt idx="3">
+                  <c:v>2250</c:v>
+                </c:pt>
+                <c:pt idx="4">
+                  <c:v>1890</c:v>
+                </c:pt>
+              </c:numCache>
+            </c:numRef>
+          </c:val>
+        </c:ser>
+        <c:axId val="-2068027336"/>
+        <c:axId val="-2113994440"/>
+      </c:barChart>
+      <c:catAx>
+        <c:axId val="-2068027336"/>
+        <c:scaling>
+          <c:orientation val="minMax"/>
+        </c:scaling>
+        <c:delete val="0"/>
+        <c:axPos val="l"/>
+        <c:majorTickMark val="out"/>
+        <c:minorTickMark val="none"/>
+        <c:tickLblPos val="nextTo"/>
+        <c:crossAx val="-2113994440"/>
+        <c:crosses val="autoZero"/>
+        <c:auto val="1"/>
+        <c:lblAlgn val="ctr"/>
+        <c:lblOffset val="100"/>
+        <c:noMultiLvlLbl val="0"/>
+      </c:catAx>
+      <c:valAx>
+        <c:axId val="-2113994440"/>
+        <c:scaling/>
+        <c:delete val="0"/>
+        <c:axPos val="b"/>
+        <c:majorGridlines/>
+        <c:majorTickMark val="out"/>
+        <c:minorTickMark val="none"/>
+        <c:tickLblPos val="nextTo"/>
+        <c:crossAx val="-2068027336"/>
+        <c:crosses val="autoZero"/>
+      </c:valAx>
+    </c:plotArea>
+    <c:legend>
+      <c:legendPos val="b"/>
+    </c:legend>
+    <c:dispBlanksAs val="gap"/>
+  </c:chart>
+  <c:txPr>
+    <a:bodyPr/>
+    <a:lstStyle/>
+    <a:p>
+      <a:pPr>
+        <a:defRPr sz="1800"/>
+      </a:pPr>
+      <a:endParaRPr lang="en-US"/>
+    </a:p>
+  </c:txPr>
+  <c:externalData r:id="rId1">
+    <c:autoUpdate val="0"/>
+  </c:externalData>
+</c:chartSpace>
+</file>
+
+<file path=ppt/charts/chart2.xml><?xml version="1.0" encoding="utf-8"?>
+<c:chartSpace xmlns:c="http://schemas.openxmlformats.org/drawingml/2006/chart" xmlns:a="http://schemas.openxmlformats.org/drawingml/2006/main" xmlns:r="http://schemas.openxmlformats.org/officeDocument/2006/relationships">
+  <c:date1904 val="0"/>
+  <c:roundedCorners val="0"/>
+  <c:chart>
+    <c:autoTitleDeleted val="0"/>
+    <c:plotArea>
+      <c:layout/>
+      <c:doughnutChart>
+        <c:varyColors val="1"/>
+        <c:ser>
+          <c:idx val="0"/>
+          <c:order val="0"/>
+          <c:tx>
+            <c:strRef>
+              <c:f>Sheet1!$B$1</c:f>
+              <c:strCache>
+                <c:ptCount val="1"/>
+                <c:pt idx="0">
+                  <c:v>비중</c:v>
+                </c:pt>
+              </c:strCache>
+            </c:strRef>
+          </c:tx>
+          <c:dPt>
+            <c:idx val="0"/>
+            <c:spPr>
+              <a:solidFill>
+                <a:srgbClr val="003366"/>
+              </a:solidFill>
+            </c:spPr>
+          </c:dPt>
+          <c:dPt>
+            <c:idx val="1"/>
+            <c:spPr>
+              <a:solidFill>
+                <a:srgbClr val="4682B4"/>
+              </a:solidFill>
+            </c:spPr>
+          </c:dPt>
+          <c:dPt>
+            <c:idx val="2"/>
+            <c:spPr>
+              <a:solidFill>
+                <a:srgbClr val="ADD8E6"/>
+              </a:solidFill>
+            </c:spPr>
+          </c:dPt>
+          <c:cat>
+            <c:strRef>
+              <c:f>Sheet1!$A$2:$A$4</c:f>
+              <c:strCache>
+                <c:ptCount val="3"/>
+                <c:pt idx="0">
+                  <c:v>대규모
+(10,000 톤/일 이상)</c:v>
+                </c:pt>
+                <c:pt idx="1">
+                  <c:v>중규모
+(1,000-10,000 톤/일)</c:v>
+                </c:pt>
+                <c:pt idx="2">
+                  <c:v>소규모
+(1,000 톤/일 미만)</c:v>
+                </c:pt>
+              </c:strCache>
+            </c:strRef>
+          </c:cat>
+          <c:val>
+            <c:numRef>
+              <c:f>Sheet1!$B$2:$B$4</c:f>
+              <c:numCache>
+                <c:formatCode>General</c:formatCode>
+                <c:ptCount val="3"/>
+                <c:pt idx="0">
+                  <c:v>15</c:v>
+                </c:pt>
+                <c:pt idx="1">
+                  <c:v>45</c:v>
+                </c:pt>
+                <c:pt idx="2">
+                  <c:v>40</c:v>
+                </c:pt>
+              </c:numCache>
+            </c:numRef>
+          </c:val>
+        </c:ser>
+        <c:dLbls>
+          <c:txPr>
+            <a:bodyPr/>
+            <a:lstStyle/>
+            <a:p>
+              <a:pPr>
+                <a:defRPr sz="1400" b="1">
+                  <a:solidFill>
+                    <a:srgbClr val="333333"/>
+                  </a:solidFill>
+                </a:defRPr>
+              </a:pPr>
+            </a:p>
+          </c:txPr>
+          <c:dLblPos val="outEnd"/>
+          <c:showLegendKey val="0"/>
+          <c:showVal val="0"/>
+          <c:showCatName val="0"/>
+          <c:showSerName val="0"/>
+          <c:showPercent val="1"/>
+          <c:showBubbleSize val="0"/>
+          <c:showLeaderLines val="1"/>
+        </c:dLbls>
+        <c:firstSliceAng val="0"/>
+        <c:holeSize val="50"/>
+      </c:doughnutChart>
+    </c:plotArea>
+    <c:plotVisOnly val="1"/>
+    <c:dispBlanksAs val="gap"/>
+    <c:showDLblsOverMax val="0"/>
+  </c:chart>
+  <c:txPr>
+    <a:bodyPr/>
+    <a:lstStyle/>
+    <a:p>
+      <a:pPr>
+        <a:defRPr sz="1800"/>
+      </a:pPr>
+      <a:endParaRPr/>
+    </a:p>
+  </c:txPr>
+  <c:externalData r:id="rId1">
+    <c:autoUpdate val="0"/>
+  </c:externalData>
+</c:chartSpace>
+</file>
+
+<file path=ppt/charts/chart3.xml><?xml version="1.0" encoding="utf-8"?>
+<c:chartSpace xmlns:c="http://schemas.openxmlformats.org/drawingml/2006/chart" xmlns:a="http://schemas.openxmlformats.org/drawingml/2006/main" xmlns:r="http://schemas.openxmlformats.org/officeDocument/2006/relationships">
+  <c:date1904 val="0"/>
+  <c:chart>
+    <c:autoTitleDeleted val="0"/>
+    <c:plotArea>
+      <c:lineChart>
+        <c:grouping val="standard"/>
+        <c:varyColors val="0"/>
+        <c:ser>
+          <c:idx val="0"/>
+          <c:order val="0"/>
+          <c:tx>
+            <c:strRef>
+              <c:f>Sheet1!$B$1</c:f>
+              <c:strCache>
+                <c:ptCount val="1"/>
+                <c:pt idx="0">
+                  <c:v>평균 입찰 금액 (억원)</c:v>
+                </c:pt>
+              </c:strCache>
+            </c:strRef>
+          </c:tx>
+          <c:spPr>
+            <a:solidFill>
+              <a:srgbClr val="D4AF37"/>
+            </a:solidFill>
+            <a:ln w="38100"/>
+          </c:spPr>
+          <c:marker>
+            <c:symbol val="circle"/>
+            <c:size val="10"/>
+            <c:spPr>
+              <a:solidFill>
+                <a:srgbClr val="003366"/>
+              </a:solidFill>
+            </c:spPr>
+          </c:marker>
+          <c:dLbls>
+            <c:numFmt formatCode="0&quot; 억&quot;" sourceLinked="0"/>
+            <c:txPr>
+              <a:bodyPr/>
+              <a:lstStyle/>
+              <a:p>
+                <a:pPr>
+                  <a:defRPr sz="1400" b="1">
+                    <a:solidFill>
+                      <a:srgbClr val="003366"/>
+                    </a:solidFill>
+                  </a:defRPr>
+                </a:pPr>
+              </a:p>
+            </c:txPr>
+            <c:dLblPos val="t"/>
+            <c:showLegendKey val="0"/>
+            <c:showVal val="0"/>
+            <c:showCatName val="0"/>
+            <c:showSerName val="0"/>
+            <c:showPercent val="0"/>
+            <c:showBubbleSize val="0"/>
+            <c:showLeaderLines val="1"/>
+          </c:dLbls>
+          <c:cat>
+            <c:strRef>
+              <c:f>Sheet1!$A$2:$A$6</c:f>
+              <c:strCache>
+                <c:ptCount val="5"/>
+                <c:pt idx="0">
+                  <c:v>2020</c:v>
+                </c:pt>
+                <c:pt idx="1">
+                  <c:v>2021</c:v>
+                </c:pt>
+                <c:pt idx="2">
+                  <c:v>2022</c:v>
+                </c:pt>
+                <c:pt idx="3">
+                  <c:v>2023</c:v>
+                </c:pt>
+                <c:pt idx="4">
+                  <c:v>2024</c:v>
+                </c:pt>
+              </c:strCache>
+            </c:strRef>
+          </c:cat>
+          <c:val>
+            <c:numRef>
+              <c:f>Sheet1!$B$2:$B$6</c:f>
+              <c:numCache>
+                <c:formatCode>General</c:formatCode>
+                <c:ptCount val="5"/>
+                <c:pt idx="0">
+                  <c:v>420</c:v>
+                </c:pt>
+                <c:pt idx="1">
+                  <c:v>485</c:v>
+                </c:pt>
+                <c:pt idx="2">
+                  <c:v>520</c:v>
+                </c:pt>
+                <c:pt idx="3">
+                  <c:v>580</c:v>
+                </c:pt>
+                <c:pt idx="4">
+                  <c:v>625</c:v>
+                </c:pt>
+              </c:numCache>
+            </c:numRef>
+          </c:val>
+          <c:smooth val="0"/>
+        </c:ser>
+        <c:marker val="1"/>
+        <c:smooth val="0"/>
+        <c:axId val="2118791784"/>
+        <c:axId val="2140495176"/>
+      </c:lineChart>
+      <c:catAx>
+        <c:axId val="2118791784"/>
+        <c:scaling>
+          <c:orientation val="minMax"/>
+        </c:scaling>
+        <c:delete val="0"/>
+        <c:axPos val="b"/>
+        <c:majorTickMark val="out"/>
+        <c:minorTickMark val="none"/>
+        <c:tickLblPos val="nextTo"/>
+        <c:crossAx val="2140495176"/>
+        <c:crosses val="autoZero"/>
+        <c:auto val="1"/>
+        <c:lblAlgn val="ctr"/>
+        <c:lblOffset val="100"/>
+        <c:noMultiLvlLbl val="0"/>
+      </c:catAx>
+      <c:valAx>
+        <c:axId val="2140495176"/>
+        <c:scaling/>
+        <c:delete val="0"/>
+        <c:axPos val="l"/>
+        <c:majorGridlines/>
+        <c:majorTickMark val="out"/>
+        <c:minorTickMark val="none"/>
+        <c:tickLblPos val="nextTo"/>
+        <c:crossAx val="2118791784"/>
+        <c:crosses val="autoZero"/>
+      </c:valAx>
+    </c:plotArea>
+    <c:plotVisOnly val="1"/>
+    <c:dispBlanksAs val="gap"/>
+    <c:showDLblsOverMax val="0"/>
+  </c:chart>
+  <c:txPr>
+    <a:bodyPr/>
+    <a:lstStyle/>
+    <a:p>
+      <a:pPr>
+        <a:defRPr sz="1800"/>
+      </a:pPr>
+      <a:endParaRPr lang="en-US"/>
+    </a:p>
+  </c:txPr>
+  <c:externalData r:id="rId1">
+    <c:autoUpdate val="0"/>
+  </c:externalData>
+</c:chartSpace>
 </file>
 
 <file path=ppt/slideLayouts/slideLayout1.xml><?xml version="1.0" encoding="utf-8"?>
@@ -3099,91 +3735,172 @@
       <p:grpSpPr/>
       <p:sp>
         <p:nvSpPr>
-          <p:cNvPr id="2" name="Title 1"/>
-          <p:cNvSpPr>
-            <a:spLocks noGrp="1"/>
-          </p:cNvSpPr>
-          <p:nvPr>
-            <p:ph type="ctrTitle"/>
-          </p:nvPr>
-        </p:nvSpPr>
-        <p:spPr/>
-        <p:txBody>
-          <a:bodyPr/>
-          <a:lstStyle/>
-          <a:p>
-            <a:pPr>
-              <a:defRPr sz="3200" b="1">
-                <a:solidFill>
-                  <a:srgbClr val="003366"/>
-                </a:solidFill>
-                <a:latin typeface="Malgun Gothic"/>
-              </a:defRPr>
-            </a:pPr>
-            <a:r>
-              <a:t>전국 하수처리장 관리대행 업체 현황 분석</a:t>
-            </a:r>
-          </a:p>
-        </p:txBody>
-      </p:sp>
-      <p:sp>
-        <p:nvSpPr>
-          <p:cNvPr id="3" name="Subtitle 2"/>
-          <p:cNvSpPr>
-            <a:spLocks noGrp="1"/>
-          </p:cNvSpPr>
-          <p:nvPr>
-            <p:ph type="subTitle" idx="1"/>
-          </p:nvPr>
-        </p:nvSpPr>
-        <p:spPr/>
-        <p:txBody>
-          <a:bodyPr/>
-          <a:lstStyle/>
-          <a:p>
-            <a:pPr>
-              <a:defRPr sz="2000">
-                <a:solidFill>
-                  <a:srgbClr val="808080"/>
-                </a:solidFill>
-                <a:latin typeface="Malgun Gothic"/>
-              </a:defRPr>
-            </a:pPr>
-            <a:r>
-              <a:t>2024년 시장 동향 및 전망</a:t>
-            </a:r>
-          </a:p>
-          <a:p>
-            <a:pPr>
-              <a:defRPr sz="2000">
-                <a:solidFill>
-                  <a:srgbClr val="808080"/>
-                </a:solidFill>
-                <a:latin typeface="Malgun Gothic"/>
-              </a:defRPr>
-            </a:pPr>
-            <a:r>
-              <a:t>2026년 07월 30일</a:t>
-            </a:r>
-          </a:p>
-        </p:txBody>
-      </p:sp>
-      <p:sp>
-        <p:nvSpPr>
-          <p:cNvPr id="4" name="Rectangle 3"/>
+          <p:cNvPr id="2" name="Rectangle 1"/>
           <p:cNvSpPr/>
           <p:nvPr/>
         </p:nvSpPr>
         <p:spPr>
           <a:xfrm>
-            <a:off x="457200" y="5943600"/>
-            <a:ext cx="8229600" cy="91440"/>
+            <a:off x="0" y="0"/>
+            <a:ext cx="12191695" cy="6858000"/>
           </a:xfrm>
           <a:prstGeom prst="rect">
             <a:avLst/>
           </a:prstGeom>
           <a:solidFill>
             <a:srgbClr val="003366"/>
+          </a:solidFill>
+          <a:ln>
+            <a:noFill/>
+          </a:ln>
+        </p:spPr>
+        <p:style>
+          <a:lnRef idx="1">
+            <a:schemeClr val="accent1"/>
+          </a:lnRef>
+          <a:fillRef idx="3">
+            <a:schemeClr val="accent1"/>
+          </a:fillRef>
+          <a:effectRef idx="2">
+            <a:schemeClr val="accent1"/>
+          </a:effectRef>
+          <a:fontRef idx="minor">
+            <a:schemeClr val="lt1"/>
+          </a:fontRef>
+        </p:style>
+        <p:txBody>
+          <a:bodyPr rtlCol="0" anchor="ctr"/>
+          <a:lstStyle/>
+          <a:p>
+            <a:pPr algn="ctr"/>
+          </a:p>
+        </p:txBody>
+      </p:sp>
+      <p:sp>
+        <p:nvSpPr>
+          <p:cNvPr id="3" name="TextBox 2"/>
+          <p:cNvSpPr txBox="1"/>
+          <p:nvPr/>
+        </p:nvSpPr>
+        <p:spPr>
+          <a:xfrm>
+            <a:off x="360000" y="1260000"/>
+            <a:ext cx="8640000" cy="1080000"/>
+          </a:xfrm>
+          <a:prstGeom prst="rect">
+            <a:avLst/>
+          </a:prstGeom>
+          <a:noFill/>
+        </p:spPr>
+        <p:txBody>
+          <a:bodyPr wrap="none">
+            <a:spAutoFit/>
+          </a:bodyPr>
+          <a:lstStyle/>
+          <a:p>
+            <a:pPr algn="ctr"/>
+            <a:r>
+              <a:rPr sz="3600" b="1">
+                <a:solidFill>
+                  <a:srgbClr val="FFFFFF"/>
+                </a:solidFill>
+                <a:latin typeface="Malgun Gothic"/>
+              </a:rPr>
+              <a:t>전국 하수처리장 관리대행</a:t>
+            </a:r>
+            <a:br/>
+            <a:r>
+              <a:t>업체 현황 분석</a:t>
+            </a:r>
+          </a:p>
+        </p:txBody>
+      </p:sp>
+      <p:sp>
+        <p:nvSpPr>
+          <p:cNvPr id="4" name="TextBox 3"/>
+          <p:cNvSpPr txBox="1"/>
+          <p:nvPr/>
+        </p:nvSpPr>
+        <p:spPr>
+          <a:xfrm>
+            <a:off x="360000" y="1980000"/>
+            <a:ext cx="8640000" cy="540000"/>
+          </a:xfrm>
+          <a:prstGeom prst="rect">
+            <a:avLst/>
+          </a:prstGeom>
+          <a:noFill/>
+        </p:spPr>
+        <p:txBody>
+          <a:bodyPr wrap="none">
+            <a:spAutoFit/>
+          </a:bodyPr>
+          <a:lstStyle/>
+          <a:p>
+            <a:pPr algn="ctr"/>
+            <a:r>
+              <a:rPr sz="2000" b="0">
+                <a:solidFill>
+                  <a:srgbClr val="CCCCCC"/>
+                </a:solidFill>
+                <a:latin typeface="Malgun Gothic"/>
+              </a:rPr>
+              <a:t>2024 년 시장 동향 및 전망</a:t>
+            </a:r>
+          </a:p>
+        </p:txBody>
+      </p:sp>
+      <p:sp>
+        <p:nvSpPr>
+          <p:cNvPr id="5" name="TextBox 4"/>
+          <p:cNvSpPr txBox="1"/>
+          <p:nvPr/>
+        </p:nvSpPr>
+        <p:spPr>
+          <a:xfrm>
+            <a:off x="360000" y="2340000"/>
+            <a:ext cx="8640000" cy="360000"/>
+          </a:xfrm>
+          <a:prstGeom prst="rect">
+            <a:avLst/>
+          </a:prstGeom>
+          <a:noFill/>
+        </p:spPr>
+        <p:txBody>
+          <a:bodyPr wrap="none">
+            <a:spAutoFit/>
+          </a:bodyPr>
+          <a:lstStyle/>
+          <a:p>
+            <a:pPr algn="ctr"/>
+            <a:r>
+              <a:rPr sz="1600" b="0">
+                <a:solidFill>
+                  <a:srgbClr val="CCCCCC"/>
+                </a:solidFill>
+                <a:latin typeface="Malgun Gothic"/>
+              </a:rPr>
+              <a:t>2026 년 07 월</a:t>
+            </a:r>
+          </a:p>
+        </p:txBody>
+      </p:sp>
+      <p:sp>
+        <p:nvSpPr>
+          <p:cNvPr id="6" name="Rectangle 5"/>
+          <p:cNvSpPr/>
+          <p:nvPr/>
+        </p:nvSpPr>
+        <p:spPr>
+          <a:xfrm>
+            <a:off x="720000" y="2880000"/>
+            <a:ext cx="8640000" cy="36000"/>
+          </a:xfrm>
+          <a:prstGeom prst="rect">
+            <a:avLst/>
+          </a:prstGeom>
+          <a:solidFill>
+            <a:srgbClr val="D4AF37"/>
           </a:solidFill>
           <a:ln>
             <a:noFill/>
@@ -3231,28 +3948,34 @@
       <p:grpSpPr/>
       <p:sp>
         <p:nvSpPr>
-          <p:cNvPr id="2" name="Title 1"/>
-          <p:cNvSpPr>
-            <a:spLocks noGrp="1"/>
-          </p:cNvSpPr>
-          <p:nvPr>
-            <p:ph type="title"/>
-          </p:nvPr>
-        </p:nvSpPr>
-        <p:spPr/>
-        <p:txBody>
-          <a:bodyPr/>
-          <a:lstStyle/>
-          <a:p>
-            <a:pPr>
-              <a:defRPr sz="2800" b="1">
+          <p:cNvPr id="2" name="TextBox 1"/>
+          <p:cNvSpPr txBox="1"/>
+          <p:nvPr/>
+        </p:nvSpPr>
+        <p:spPr>
+          <a:xfrm>
+            <a:off x="360000" y="540000"/>
+            <a:ext cx="9360000" cy="360000"/>
+          </a:xfrm>
+          <a:prstGeom prst="rect">
+            <a:avLst/>
+          </a:prstGeom>
+          <a:noFill/>
+        </p:spPr>
+        <p:txBody>
+          <a:bodyPr wrap="none">
+            <a:spAutoFit/>
+          </a:bodyPr>
+          <a:lstStyle/>
+          <a:p>
+            <a:pPr algn="ctr"/>
+            <a:r>
+              <a:rPr sz="3200" b="1">
                 <a:solidFill>
                   <a:srgbClr val="003366"/>
                 </a:solidFill>
                 <a:latin typeface="Malgun Gothic"/>
-              </a:defRPr>
-            </a:pPr>
-            <a:r>
+              </a:rPr>
               <a:t>결론 및 제언</a:t>
             </a:r>
           </a:p>
@@ -3260,83 +3983,310 @@
       </p:sp>
       <p:sp>
         <p:nvSpPr>
-          <p:cNvPr id="3" name="Content Placeholder 2"/>
-          <p:cNvSpPr>
-            <a:spLocks noGrp="1"/>
-          </p:cNvSpPr>
-          <p:nvPr>
-            <p:ph idx="1"/>
-          </p:nvPr>
-        </p:nvSpPr>
-        <p:spPr/>
-        <p:txBody>
-          <a:bodyPr/>
-          <a:lstStyle/>
-          <a:p/>
-          <a:p>
-            <a:pPr>
-              <a:defRPr sz="1800">
+          <p:cNvPr id="3" name="Oval 2"/>
+          <p:cNvSpPr/>
+          <p:nvPr/>
+        </p:nvSpPr>
+        <p:spPr>
+          <a:xfrm>
+            <a:off x="1800000" y="1440000"/>
+            <a:ext cx="144000" cy="144000"/>
+          </a:xfrm>
+          <a:prstGeom prst="ellipse">
+            <a:avLst/>
+          </a:prstGeom>
+          <a:solidFill>
+            <a:srgbClr val="D4AF37"/>
+          </a:solidFill>
+          <a:ln>
+            <a:noFill/>
+          </a:ln>
+        </p:spPr>
+        <p:style>
+          <a:lnRef idx="1">
+            <a:schemeClr val="accent1"/>
+          </a:lnRef>
+          <a:fillRef idx="3">
+            <a:schemeClr val="accent1"/>
+          </a:fillRef>
+          <a:effectRef idx="2">
+            <a:schemeClr val="accent1"/>
+          </a:effectRef>
+          <a:fontRef idx="minor">
+            <a:schemeClr val="lt1"/>
+          </a:fontRef>
+        </p:style>
+        <p:txBody>
+          <a:bodyPr rtlCol="0" anchor="ctr"/>
+          <a:lstStyle/>
+          <a:p>
+            <a:pPr algn="ctr"/>
+          </a:p>
+        </p:txBody>
+      </p:sp>
+      <p:sp>
+        <p:nvSpPr>
+          <p:cNvPr id="4" name="TextBox 3"/>
+          <p:cNvSpPr txBox="1"/>
+          <p:nvPr/>
+        </p:nvSpPr>
+        <p:spPr>
+          <a:xfrm>
+            <a:off x="2160000" y="1440000"/>
+            <a:ext cx="7200000" cy="360000"/>
+          </a:xfrm>
+          <a:prstGeom prst="rect">
+            <a:avLst/>
+          </a:prstGeom>
+          <a:noFill/>
+        </p:spPr>
+        <p:txBody>
+          <a:bodyPr wrap="none">
+            <a:spAutoFit/>
+          </a:bodyPr>
+          <a:lstStyle/>
+          <a:p>
+            <a:r>
+              <a:rPr sz="2200" b="0">
                 <a:solidFill>
-                  <a:srgbClr val="404040"/>
+                  <a:srgbClr val="333333"/>
                 </a:solidFill>
                 <a:latin typeface="Malgun Gothic"/>
-              </a:defRPr>
-            </a:pPr>
-            <a:r>
-              <a:t>• 시장 안정성: 꾸준한 성장세와 정부의 민간위託 정책으로 안정적인 시장 환경 조성</a:t>
-            </a:r>
-          </a:p>
-          <a:p>
-            <a:pPr>
-              <a:defRPr sz="1800">
+              </a:rPr>
+              <a:t>시장 안정성: 연 4.2% 성장으로 안정적 투자처</a:t>
+            </a:r>
+          </a:p>
+        </p:txBody>
+      </p:sp>
+      <p:sp>
+        <p:nvSpPr>
+          <p:cNvPr id="5" name="Oval 4"/>
+          <p:cNvSpPr/>
+          <p:nvPr/>
+        </p:nvSpPr>
+        <p:spPr>
+          <a:xfrm>
+            <a:off x="1800000" y="1980000"/>
+            <a:ext cx="144000" cy="144000"/>
+          </a:xfrm>
+          <a:prstGeom prst="ellipse">
+            <a:avLst/>
+          </a:prstGeom>
+          <a:solidFill>
+            <a:srgbClr val="D4AF37"/>
+          </a:solidFill>
+          <a:ln>
+            <a:noFill/>
+          </a:ln>
+        </p:spPr>
+        <p:style>
+          <a:lnRef idx="1">
+            <a:schemeClr val="accent1"/>
+          </a:lnRef>
+          <a:fillRef idx="3">
+            <a:schemeClr val="accent1"/>
+          </a:fillRef>
+          <a:effectRef idx="2">
+            <a:schemeClr val="accent1"/>
+          </a:effectRef>
+          <a:fontRef idx="minor">
+            <a:schemeClr val="lt1"/>
+          </a:fontRef>
+        </p:style>
+        <p:txBody>
+          <a:bodyPr rtlCol="0" anchor="ctr"/>
+          <a:lstStyle/>
+          <a:p>
+            <a:pPr algn="ctr"/>
+          </a:p>
+        </p:txBody>
+      </p:sp>
+      <p:sp>
+        <p:nvSpPr>
+          <p:cNvPr id="6" name="TextBox 5"/>
+          <p:cNvSpPr txBox="1"/>
+          <p:nvPr/>
+        </p:nvSpPr>
+        <p:spPr>
+          <a:xfrm>
+            <a:off x="2160000" y="1980000"/>
+            <a:ext cx="7200000" cy="360000"/>
+          </a:xfrm>
+          <a:prstGeom prst="rect">
+            <a:avLst/>
+          </a:prstGeom>
+          <a:noFill/>
+        </p:spPr>
+        <p:txBody>
+          <a:bodyPr wrap="none">
+            <a:spAutoFit/>
+          </a:bodyPr>
+          <a:lstStyle/>
+          <a:p>
+            <a:r>
+              <a:rPr sz="2200" b="0">
                 <a:solidFill>
-                  <a:srgbClr val="404040"/>
+                  <a:srgbClr val="333333"/>
                 </a:solidFill>
                 <a:latin typeface="Malgun Gothic"/>
-              </a:defRPr>
-            </a:pPr>
-            <a:r>
-              <a:t>• 투자 유망 분야 1: AI·IoT 기반 스마트 운영관리 솔루션</a:t>
-            </a:r>
-          </a:p>
-          <a:p>
-            <a:pPr>
-              <a:defRPr sz="1800">
+              </a:rPr>
+              <a:t>기술 혁신: AI·에너지 자립화 기술이 경쟁력 결정</a:t>
+            </a:r>
+          </a:p>
+        </p:txBody>
+      </p:sp>
+      <p:sp>
+        <p:nvSpPr>
+          <p:cNvPr id="7" name="Oval 6"/>
+          <p:cNvSpPr/>
+          <p:nvPr/>
+        </p:nvSpPr>
+        <p:spPr>
+          <a:xfrm>
+            <a:off x="1800000" y="2520000"/>
+            <a:ext cx="144000" cy="144000"/>
+          </a:xfrm>
+          <a:prstGeom prst="ellipse">
+            <a:avLst/>
+          </a:prstGeom>
+          <a:solidFill>
+            <a:srgbClr val="D4AF37"/>
+          </a:solidFill>
+          <a:ln>
+            <a:noFill/>
+          </a:ln>
+        </p:spPr>
+        <p:style>
+          <a:lnRef idx="1">
+            <a:schemeClr val="accent1"/>
+          </a:lnRef>
+          <a:fillRef idx="3">
+            <a:schemeClr val="accent1"/>
+          </a:fillRef>
+          <a:effectRef idx="2">
+            <a:schemeClr val="accent1"/>
+          </a:effectRef>
+          <a:fontRef idx="minor">
+            <a:schemeClr val="lt1"/>
+          </a:fontRef>
+        </p:style>
+        <p:txBody>
+          <a:bodyPr rtlCol="0" anchor="ctr"/>
+          <a:lstStyle/>
+          <a:p>
+            <a:pPr algn="ctr"/>
+          </a:p>
+        </p:txBody>
+      </p:sp>
+      <p:sp>
+        <p:nvSpPr>
+          <p:cNvPr id="8" name="TextBox 7"/>
+          <p:cNvSpPr txBox="1"/>
+          <p:nvPr/>
+        </p:nvSpPr>
+        <p:spPr>
+          <a:xfrm>
+            <a:off x="2160000" y="2520000"/>
+            <a:ext cx="7200000" cy="360000"/>
+          </a:xfrm>
+          <a:prstGeom prst="rect">
+            <a:avLst/>
+          </a:prstGeom>
+          <a:noFill/>
+        </p:spPr>
+        <p:txBody>
+          <a:bodyPr wrap="none">
+            <a:spAutoFit/>
+          </a:bodyPr>
+          <a:lstStyle/>
+          <a:p>
+            <a:r>
+              <a:rPr sz="2200" b="0">
                 <a:solidFill>
-                  <a:srgbClr val="404040"/>
+                  <a:srgbClr val="333333"/>
                 </a:solidFill>
                 <a:latin typeface="Malgun Gothic"/>
-              </a:defRPr>
-            </a:pPr>
-            <a:r>
-              <a:t>• 투자 유망 분야 2: 에너지 자립형 하수처리 시설 기술</a:t>
-            </a:r>
-          </a:p>
-          <a:p>
-            <a:pPr>
-              <a:defRPr sz="1800">
+              </a:rPr>
+              <a:t>투자 유망 분야: 스마트 워터관리, 에너지 효율화, 슬러지 자원화</a:t>
+            </a:r>
+          </a:p>
+        </p:txBody>
+      </p:sp>
+      <p:sp>
+        <p:nvSpPr>
+          <p:cNvPr id="9" name="TextBox 8"/>
+          <p:cNvSpPr txBox="1"/>
+          <p:nvPr/>
+        </p:nvSpPr>
+        <p:spPr>
+          <a:xfrm>
+            <a:off x="360000" y="3240000"/>
+            <a:ext cx="9360000" cy="540000"/>
+          </a:xfrm>
+          <a:prstGeom prst="rect">
+            <a:avLst/>
+          </a:prstGeom>
+          <a:noFill/>
+        </p:spPr>
+        <p:txBody>
+          <a:bodyPr wrap="none">
+            <a:spAutoFit/>
+          </a:bodyPr>
+          <a:lstStyle/>
+          <a:p>
+            <a:pPr algn="ctr"/>
+            <a:r>
+              <a:rPr sz="2400" b="1">
                 <a:solidFill>
-                  <a:srgbClr val="404040"/>
+                  <a:srgbClr val="003366"/>
                 </a:solidFill>
                 <a:latin typeface="Malgun Gothic"/>
-              </a:defRPr>
-            </a:pPr>
-            <a:r>
-              <a:t>• 투자 유망 분야 3: 슬러지 자원화 및 탄소중립 관련 기술</a:t>
-            </a:r>
-          </a:p>
-          <a:p>
-            <a:pPr>
-              <a:defRPr sz="1800">
-                <a:solidFill>
-                  <a:srgbClr val="404040"/>
-                </a:solidFill>
-                <a:latin typeface="Malgun Gothic"/>
-              </a:defRPr>
-            </a:pPr>
-            <a:r>
-              <a:t>• 전문성과 기술력을 갖춘 업체의 경쟁력 강화 필요</a:t>
-            </a:r>
+              </a:rPr>
+              <a:t>감사합니다</a:t>
+            </a:r>
+          </a:p>
+        </p:txBody>
+      </p:sp>
+      <p:sp>
+        <p:nvSpPr>
+          <p:cNvPr id="10" name="Rectangle 9"/>
+          <p:cNvSpPr/>
+          <p:nvPr/>
+        </p:nvSpPr>
+        <p:spPr>
+          <a:xfrm>
+            <a:off x="720000" y="3671999"/>
+            <a:ext cx="8640000" cy="36000"/>
+          </a:xfrm>
+          <a:prstGeom prst="rect">
+            <a:avLst/>
+          </a:prstGeom>
+          <a:solidFill>
+            <a:srgbClr val="D4AF37"/>
+          </a:solidFill>
+          <a:ln>
+            <a:noFill/>
+          </a:ln>
+        </p:spPr>
+        <p:style>
+          <a:lnRef idx="1">
+            <a:schemeClr val="accent1"/>
+          </a:lnRef>
+          <a:fillRef idx="3">
+            <a:schemeClr val="accent1"/>
+          </a:fillRef>
+          <a:effectRef idx="2">
+            <a:schemeClr val="accent1"/>
+          </a:effectRef>
+          <a:fontRef idx="minor">
+            <a:schemeClr val="lt1"/>
+          </a:fontRef>
+        </p:style>
+        <p:txBody>
+          <a:bodyPr rtlCol="0" anchor="ctr"/>
+          <a:lstStyle/>
+          <a:p>
+            <a:pPr algn="ctr"/>
           </a:p>
         </p:txBody>
       </p:sp>
@@ -3360,28 +4310,33 @@
       <p:grpSpPr/>
       <p:sp>
         <p:nvSpPr>
-          <p:cNvPr id="2" name="Title 1"/>
-          <p:cNvSpPr>
-            <a:spLocks noGrp="1"/>
-          </p:cNvSpPr>
-          <p:nvPr>
-            <p:ph type="title"/>
-          </p:nvPr>
-        </p:nvSpPr>
-        <p:spPr/>
-        <p:txBody>
-          <a:bodyPr/>
-          <a:lstStyle/>
-          <a:p>
-            <a:pPr>
-              <a:defRPr sz="2800" b="1">
+          <p:cNvPr id="2" name="TextBox 1"/>
+          <p:cNvSpPr txBox="1"/>
+          <p:nvPr/>
+        </p:nvSpPr>
+        <p:spPr>
+          <a:xfrm>
+            <a:off x="360000" y="360000"/>
+            <a:ext cx="3600000" cy="540000"/>
+          </a:xfrm>
+          <a:prstGeom prst="rect">
+            <a:avLst/>
+          </a:prstGeom>
+          <a:noFill/>
+        </p:spPr>
+        <p:txBody>
+          <a:bodyPr wrap="none">
+            <a:spAutoFit/>
+          </a:bodyPr>
+          <a:lstStyle/>
+          <a:p>
+            <a:r>
+              <a:rPr sz="2800" b="1">
                 <a:solidFill>
                   <a:srgbClr val="003366"/>
                 </a:solidFill>
                 <a:latin typeface="Malgun Gothic"/>
-              </a:defRPr>
-            </a:pPr>
-            <a:r>
+              </a:rPr>
               <a:t>목 차</a:t>
             </a:r>
           </a:p>
@@ -3389,134 +4344,822 @@
       </p:sp>
       <p:sp>
         <p:nvSpPr>
-          <p:cNvPr id="3" name="Content Placeholder 2"/>
-          <p:cNvSpPr>
-            <a:spLocks noGrp="1"/>
-          </p:cNvSpPr>
-          <p:nvPr>
-            <p:ph idx="1"/>
-          </p:nvPr>
-        </p:nvSpPr>
-        <p:spPr/>
-        <p:txBody>
-          <a:bodyPr/>
-          <a:lstStyle/>
-          <a:p/>
-          <a:p>
-            <a:pPr>
-              <a:defRPr sz="1800">
+          <p:cNvPr id="3" name="Oval 2"/>
+          <p:cNvSpPr/>
+          <p:nvPr/>
+        </p:nvSpPr>
+        <p:spPr>
+          <a:xfrm>
+            <a:off x="720000" y="1080000"/>
+            <a:ext cx="288000" cy="288000"/>
+          </a:xfrm>
+          <a:prstGeom prst="ellipse">
+            <a:avLst/>
+          </a:prstGeom>
+          <a:solidFill>
+            <a:srgbClr val="003366"/>
+          </a:solidFill>
+          <a:ln>
+            <a:noFill/>
+          </a:ln>
+        </p:spPr>
+        <p:style>
+          <a:lnRef idx="1">
+            <a:schemeClr val="accent1"/>
+          </a:lnRef>
+          <a:fillRef idx="3">
+            <a:schemeClr val="accent1"/>
+          </a:fillRef>
+          <a:effectRef idx="2">
+            <a:schemeClr val="accent1"/>
+          </a:effectRef>
+          <a:fontRef idx="minor">
+            <a:schemeClr val="lt1"/>
+          </a:fontRef>
+        </p:style>
+        <p:txBody>
+          <a:bodyPr rtlCol="0" anchor="ctr"/>
+          <a:lstStyle/>
+          <a:p>
+            <a:pPr algn="ctr"/>
+            <a:r>
+              <a:rPr sz="1400" b="1">
                 <a:solidFill>
-                  <a:srgbClr val="404040"/>
+                  <a:srgbClr val="FFFFFF"/>
                 </a:solidFill>
                 <a:latin typeface="Malgun Gothic"/>
-              </a:defRPr>
-            </a:pPr>
-            <a:r>
-              <a:t>1. 시장 개요</a:t>
-            </a:r>
-          </a:p>
-          <a:p>
-            <a:pPr>
-              <a:defRPr sz="1800">
+              </a:rPr>
+              <a:t>1</a:t>
+            </a:r>
+          </a:p>
+        </p:txBody>
+      </p:sp>
+      <p:sp>
+        <p:nvSpPr>
+          <p:cNvPr id="4" name="TextBox 3"/>
+          <p:cNvSpPr txBox="1"/>
+          <p:nvPr/>
+        </p:nvSpPr>
+        <p:spPr>
+          <a:xfrm>
+            <a:off x="1152000" y="1080000"/>
+            <a:ext cx="2880000" cy="288000"/>
+          </a:xfrm>
+          <a:prstGeom prst="rect">
+            <a:avLst/>
+          </a:prstGeom>
+          <a:noFill/>
+        </p:spPr>
+        <p:txBody>
+          <a:bodyPr wrap="none">
+            <a:spAutoFit/>
+          </a:bodyPr>
+          <a:lstStyle/>
+          <a:p>
+            <a:r>
+              <a:rPr sz="1800" b="0">
                 <a:solidFill>
-                  <a:srgbClr val="404040"/>
+                  <a:srgbClr val="333333"/>
                 </a:solidFill>
                 <a:latin typeface="Malgun Gothic"/>
-              </a:defRPr>
-            </a:pPr>
-            <a:r>
-              <a:t>2. 주요 업체 현황</a:t>
-            </a:r>
-          </a:p>
-          <a:p>
-            <a:pPr>
-              <a:defRPr sz="1800">
+              </a:rPr>
+              <a:t>시장 개요</a:t>
+            </a:r>
+          </a:p>
+        </p:txBody>
+      </p:sp>
+      <p:sp>
+        <p:nvSpPr>
+          <p:cNvPr id="5" name="Oval 4"/>
+          <p:cNvSpPr/>
+          <p:nvPr/>
+        </p:nvSpPr>
+        <p:spPr>
+          <a:xfrm>
+            <a:off x="720000" y="1512000"/>
+            <a:ext cx="288000" cy="288000"/>
+          </a:xfrm>
+          <a:prstGeom prst="ellipse">
+            <a:avLst/>
+          </a:prstGeom>
+          <a:solidFill>
+            <a:srgbClr val="003366"/>
+          </a:solidFill>
+          <a:ln>
+            <a:noFill/>
+          </a:ln>
+        </p:spPr>
+        <p:style>
+          <a:lnRef idx="1">
+            <a:schemeClr val="accent1"/>
+          </a:lnRef>
+          <a:fillRef idx="3">
+            <a:schemeClr val="accent1"/>
+          </a:fillRef>
+          <a:effectRef idx="2">
+            <a:schemeClr val="accent1"/>
+          </a:effectRef>
+          <a:fontRef idx="minor">
+            <a:schemeClr val="lt1"/>
+          </a:fontRef>
+        </p:style>
+        <p:txBody>
+          <a:bodyPr rtlCol="0" anchor="ctr"/>
+          <a:lstStyle/>
+          <a:p>
+            <a:pPr algn="ctr"/>
+            <a:r>
+              <a:rPr sz="1400" b="1">
                 <a:solidFill>
-                  <a:srgbClr val="404040"/>
+                  <a:srgbClr val="FFFFFF"/>
                 </a:solidFill>
                 <a:latin typeface="Malgun Gothic"/>
-              </a:defRPr>
-            </a:pPr>
-            <a:r>
-              <a:t>3. 매출액 비교</a:t>
-            </a:r>
-          </a:p>
-          <a:p>
-            <a:pPr>
-              <a:defRPr sz="1800">
+              </a:rPr>
+              <a:t>2</a:t>
+            </a:r>
+          </a:p>
+        </p:txBody>
+      </p:sp>
+      <p:sp>
+        <p:nvSpPr>
+          <p:cNvPr id="6" name="TextBox 5"/>
+          <p:cNvSpPr txBox="1"/>
+          <p:nvPr/>
+        </p:nvSpPr>
+        <p:spPr>
+          <a:xfrm>
+            <a:off x="1152000" y="1512000"/>
+            <a:ext cx="2880000" cy="288000"/>
+          </a:xfrm>
+          <a:prstGeom prst="rect">
+            <a:avLst/>
+          </a:prstGeom>
+          <a:noFill/>
+        </p:spPr>
+        <p:txBody>
+          <a:bodyPr wrap="none">
+            <a:spAutoFit/>
+          </a:bodyPr>
+          <a:lstStyle/>
+          <a:p>
+            <a:r>
+              <a:rPr sz="1800" b="0">
                 <a:solidFill>
-                  <a:srgbClr val="404040"/>
+                  <a:srgbClr val="333333"/>
                 </a:solidFill>
                 <a:latin typeface="Malgun Gothic"/>
-              </a:defRPr>
-            </a:pPr>
-            <a:r>
-              <a:t>4. 지역별 분포</a:t>
-            </a:r>
-          </a:p>
-          <a:p>
-            <a:pPr>
-              <a:defRPr sz="1800">
+              </a:rPr>
+              <a:t>주요 업체 현황</a:t>
+            </a:r>
+          </a:p>
+        </p:txBody>
+      </p:sp>
+      <p:sp>
+        <p:nvSpPr>
+          <p:cNvPr id="7" name="Oval 6"/>
+          <p:cNvSpPr/>
+          <p:nvPr/>
+        </p:nvSpPr>
+        <p:spPr>
+          <a:xfrm>
+            <a:off x="720000" y="1944000"/>
+            <a:ext cx="288000" cy="288000"/>
+          </a:xfrm>
+          <a:prstGeom prst="ellipse">
+            <a:avLst/>
+          </a:prstGeom>
+          <a:solidFill>
+            <a:srgbClr val="003366"/>
+          </a:solidFill>
+          <a:ln>
+            <a:noFill/>
+          </a:ln>
+        </p:spPr>
+        <p:style>
+          <a:lnRef idx="1">
+            <a:schemeClr val="accent1"/>
+          </a:lnRef>
+          <a:fillRef idx="3">
+            <a:schemeClr val="accent1"/>
+          </a:fillRef>
+          <a:effectRef idx="2">
+            <a:schemeClr val="accent1"/>
+          </a:effectRef>
+          <a:fontRef idx="minor">
+            <a:schemeClr val="lt1"/>
+          </a:fontRef>
+        </p:style>
+        <p:txBody>
+          <a:bodyPr rtlCol="0" anchor="ctr"/>
+          <a:lstStyle/>
+          <a:p>
+            <a:pPr algn="ctr"/>
+            <a:r>
+              <a:rPr sz="1400" b="1">
                 <a:solidFill>
-                  <a:srgbClr val="404040"/>
+                  <a:srgbClr val="FFFFFF"/>
                 </a:solidFill>
                 <a:latin typeface="Malgun Gothic"/>
-              </a:defRPr>
-            </a:pPr>
-            <a:r>
-              <a:t>5. 처리장 규모별 현황</a:t>
-            </a:r>
-          </a:p>
-          <a:p>
-            <a:pPr>
-              <a:defRPr sz="1800">
+              </a:rPr>
+              <a:t>3</a:t>
+            </a:r>
+          </a:p>
+        </p:txBody>
+      </p:sp>
+      <p:sp>
+        <p:nvSpPr>
+          <p:cNvPr id="8" name="TextBox 7"/>
+          <p:cNvSpPr txBox="1"/>
+          <p:nvPr/>
+        </p:nvSpPr>
+        <p:spPr>
+          <a:xfrm>
+            <a:off x="1152000" y="1944000"/>
+            <a:ext cx="2880000" cy="288000"/>
+          </a:xfrm>
+          <a:prstGeom prst="rect">
+            <a:avLst/>
+          </a:prstGeom>
+          <a:noFill/>
+        </p:spPr>
+        <p:txBody>
+          <a:bodyPr wrap="none">
+            <a:spAutoFit/>
+          </a:bodyPr>
+          <a:lstStyle/>
+          <a:p>
+            <a:r>
+              <a:rPr sz="1800" b="0">
                 <a:solidFill>
-                  <a:srgbClr val="404040"/>
+                  <a:srgbClr val="333333"/>
                 </a:solidFill>
                 <a:latin typeface="Malgun Gothic"/>
-              </a:defRPr>
-            </a:pPr>
-            <a:r>
-              <a:t>6. 입찰 동향</a:t>
-            </a:r>
-          </a:p>
-          <a:p>
-            <a:pPr>
-              <a:defRPr sz="1800">
+              </a:rPr>
+              <a:t>매출액 비교</a:t>
+            </a:r>
+          </a:p>
+        </p:txBody>
+      </p:sp>
+      <p:sp>
+        <p:nvSpPr>
+          <p:cNvPr id="9" name="Oval 8"/>
+          <p:cNvSpPr/>
+          <p:nvPr/>
+        </p:nvSpPr>
+        <p:spPr>
+          <a:xfrm>
+            <a:off x="720000" y="2376000"/>
+            <a:ext cx="288000" cy="288000"/>
+          </a:xfrm>
+          <a:prstGeom prst="ellipse">
+            <a:avLst/>
+          </a:prstGeom>
+          <a:solidFill>
+            <a:srgbClr val="003366"/>
+          </a:solidFill>
+          <a:ln>
+            <a:noFill/>
+          </a:ln>
+        </p:spPr>
+        <p:style>
+          <a:lnRef idx="1">
+            <a:schemeClr val="accent1"/>
+          </a:lnRef>
+          <a:fillRef idx="3">
+            <a:schemeClr val="accent1"/>
+          </a:fillRef>
+          <a:effectRef idx="2">
+            <a:schemeClr val="accent1"/>
+          </a:effectRef>
+          <a:fontRef idx="minor">
+            <a:schemeClr val="lt1"/>
+          </a:fontRef>
+        </p:style>
+        <p:txBody>
+          <a:bodyPr rtlCol="0" anchor="ctr"/>
+          <a:lstStyle/>
+          <a:p>
+            <a:pPr algn="ctr"/>
+            <a:r>
+              <a:rPr sz="1400" b="1">
                 <a:solidFill>
-                  <a:srgbClr val="404040"/>
+                  <a:srgbClr val="FFFFFF"/>
                 </a:solidFill>
                 <a:latin typeface="Malgun Gothic"/>
-              </a:defRPr>
-            </a:pPr>
-            <a:r>
-              <a:t>7. 기술 개발 현황</a:t>
-            </a:r>
-          </a:p>
-          <a:p>
-            <a:pPr>
-              <a:defRPr sz="1800">
+              </a:rPr>
+              <a:t>4</a:t>
+            </a:r>
+          </a:p>
+        </p:txBody>
+      </p:sp>
+      <p:sp>
+        <p:nvSpPr>
+          <p:cNvPr id="10" name="TextBox 9"/>
+          <p:cNvSpPr txBox="1"/>
+          <p:nvPr/>
+        </p:nvSpPr>
+        <p:spPr>
+          <a:xfrm>
+            <a:off x="1152000" y="2376000"/>
+            <a:ext cx="2880000" cy="288000"/>
+          </a:xfrm>
+          <a:prstGeom prst="rect">
+            <a:avLst/>
+          </a:prstGeom>
+          <a:noFill/>
+        </p:spPr>
+        <p:txBody>
+          <a:bodyPr wrap="none">
+            <a:spAutoFit/>
+          </a:bodyPr>
+          <a:lstStyle/>
+          <a:p>
+            <a:r>
+              <a:rPr sz="1800" b="0">
                 <a:solidFill>
-                  <a:srgbClr val="404040"/>
+                  <a:srgbClr val="333333"/>
                 </a:solidFill>
                 <a:latin typeface="Malgun Gothic"/>
-              </a:defRPr>
-            </a:pPr>
-            <a:r>
-              <a:t>8. 시장 전망</a:t>
-            </a:r>
-          </a:p>
-          <a:p>
-            <a:pPr>
-              <a:defRPr sz="1800">
+              </a:rPr>
+              <a:t>지역별 분포</a:t>
+            </a:r>
+          </a:p>
+        </p:txBody>
+      </p:sp>
+      <p:sp>
+        <p:nvSpPr>
+          <p:cNvPr id="11" name="Oval 10"/>
+          <p:cNvSpPr/>
+          <p:nvPr/>
+        </p:nvSpPr>
+        <p:spPr>
+          <a:xfrm>
+            <a:off x="720000" y="2808000"/>
+            <a:ext cx="288000" cy="288000"/>
+          </a:xfrm>
+          <a:prstGeom prst="ellipse">
+            <a:avLst/>
+          </a:prstGeom>
+          <a:solidFill>
+            <a:srgbClr val="003366"/>
+          </a:solidFill>
+          <a:ln>
+            <a:noFill/>
+          </a:ln>
+        </p:spPr>
+        <p:style>
+          <a:lnRef idx="1">
+            <a:schemeClr val="accent1"/>
+          </a:lnRef>
+          <a:fillRef idx="3">
+            <a:schemeClr val="accent1"/>
+          </a:fillRef>
+          <a:effectRef idx="2">
+            <a:schemeClr val="accent1"/>
+          </a:effectRef>
+          <a:fontRef idx="minor">
+            <a:schemeClr val="lt1"/>
+          </a:fontRef>
+        </p:style>
+        <p:txBody>
+          <a:bodyPr rtlCol="0" anchor="ctr"/>
+          <a:lstStyle/>
+          <a:p>
+            <a:pPr algn="ctr"/>
+            <a:r>
+              <a:rPr sz="1400" b="1">
                 <a:solidFill>
-                  <a:srgbClr val="404040"/>
+                  <a:srgbClr val="FFFFFF"/>
                 </a:solidFill>
                 <a:latin typeface="Malgun Gothic"/>
-              </a:defRPr>
-            </a:pPr>
-            <a:r>
-              <a:t>9. 결론</a:t>
+              </a:rPr>
+              <a:t>5</a:t>
+            </a:r>
+          </a:p>
+        </p:txBody>
+      </p:sp>
+      <p:sp>
+        <p:nvSpPr>
+          <p:cNvPr id="12" name="TextBox 11"/>
+          <p:cNvSpPr txBox="1"/>
+          <p:nvPr/>
+        </p:nvSpPr>
+        <p:spPr>
+          <a:xfrm>
+            <a:off x="1152000" y="2808000"/>
+            <a:ext cx="2880000" cy="288000"/>
+          </a:xfrm>
+          <a:prstGeom prst="rect">
+            <a:avLst/>
+          </a:prstGeom>
+          <a:noFill/>
+        </p:spPr>
+        <p:txBody>
+          <a:bodyPr wrap="none">
+            <a:spAutoFit/>
+          </a:bodyPr>
+          <a:lstStyle/>
+          <a:p>
+            <a:r>
+              <a:rPr sz="1800" b="0">
+                <a:solidFill>
+                  <a:srgbClr val="333333"/>
+                </a:solidFill>
+                <a:latin typeface="Malgun Gothic"/>
+              </a:rPr>
+              <a:t>처리장 규모별 현황</a:t>
+            </a:r>
+          </a:p>
+        </p:txBody>
+      </p:sp>
+      <p:sp>
+        <p:nvSpPr>
+          <p:cNvPr id="13" name="Oval 12"/>
+          <p:cNvSpPr/>
+          <p:nvPr/>
+        </p:nvSpPr>
+        <p:spPr>
+          <a:xfrm>
+            <a:off x="3600000" y="1080000"/>
+            <a:ext cx="288000" cy="288000"/>
+          </a:xfrm>
+          <a:prstGeom prst="ellipse">
+            <a:avLst/>
+          </a:prstGeom>
+          <a:solidFill>
+            <a:srgbClr val="003366"/>
+          </a:solidFill>
+          <a:ln>
+            <a:noFill/>
+          </a:ln>
+        </p:spPr>
+        <p:style>
+          <a:lnRef idx="1">
+            <a:schemeClr val="accent1"/>
+          </a:lnRef>
+          <a:fillRef idx="3">
+            <a:schemeClr val="accent1"/>
+          </a:fillRef>
+          <a:effectRef idx="2">
+            <a:schemeClr val="accent1"/>
+          </a:effectRef>
+          <a:fontRef idx="minor">
+            <a:schemeClr val="lt1"/>
+          </a:fontRef>
+        </p:style>
+        <p:txBody>
+          <a:bodyPr rtlCol="0" anchor="ctr"/>
+          <a:lstStyle/>
+          <a:p>
+            <a:pPr algn="ctr"/>
+            <a:r>
+              <a:rPr sz="1400" b="1">
+                <a:solidFill>
+                  <a:srgbClr val="FFFFFF"/>
+                </a:solidFill>
+                <a:latin typeface="Malgun Gothic"/>
+              </a:rPr>
+              <a:t>6</a:t>
+            </a:r>
+          </a:p>
+        </p:txBody>
+      </p:sp>
+      <p:sp>
+        <p:nvSpPr>
+          <p:cNvPr id="14" name="Rectangle 13"/>
+          <p:cNvSpPr/>
+          <p:nvPr/>
+        </p:nvSpPr>
+        <p:spPr>
+          <a:xfrm>
+            <a:off x="4032000" y="1080000"/>
+            <a:ext cx="2880000" cy="288000"/>
+          </a:xfrm>
+          <a:prstGeom prst="rect">
+            <a:avLst/>
+          </a:prstGeom>
+        </p:spPr>
+        <p:style>
+          <a:lnRef idx="1">
+            <a:schemeClr val="accent1"/>
+          </a:lnRef>
+          <a:fillRef idx="3">
+            <a:schemeClr val="accent1"/>
+          </a:fillRef>
+          <a:effectRef idx="2">
+            <a:schemeClr val="accent1"/>
+          </a:effectRef>
+          <a:fontRef idx="minor">
+            <a:schemeClr val="lt1"/>
+          </a:fontRef>
+        </p:style>
+        <p:txBody>
+          <a:bodyPr rtlCol="0" anchor="ctr"/>
+          <a:lstStyle/>
+          <a:p>
+            <a:pPr algn="ctr"/>
+            <a:r>
+              <a:rPr sz="1800" b="0">
+                <a:solidFill>
+                  <a:srgbClr val="333333"/>
+                </a:solidFill>
+                <a:latin typeface="Malgun Gothic"/>
+              </a:rPr>
+              <a:t>입찰 동향</a:t>
+            </a:r>
+          </a:p>
+        </p:txBody>
+      </p:sp>
+      <p:sp>
+        <p:nvSpPr>
+          <p:cNvPr id="15" name="Oval 14"/>
+          <p:cNvSpPr/>
+          <p:nvPr/>
+        </p:nvSpPr>
+        <p:spPr>
+          <a:xfrm>
+            <a:off x="3600000" y="1512000"/>
+            <a:ext cx="288000" cy="288000"/>
+          </a:xfrm>
+          <a:prstGeom prst="ellipse">
+            <a:avLst/>
+          </a:prstGeom>
+          <a:solidFill>
+            <a:srgbClr val="003366"/>
+          </a:solidFill>
+          <a:ln>
+            <a:noFill/>
+          </a:ln>
+        </p:spPr>
+        <p:style>
+          <a:lnRef idx="1">
+            <a:schemeClr val="accent1"/>
+          </a:lnRef>
+          <a:fillRef idx="3">
+            <a:schemeClr val="accent1"/>
+          </a:fillRef>
+          <a:effectRef idx="2">
+            <a:schemeClr val="accent1"/>
+          </a:effectRef>
+          <a:fontRef idx="minor">
+            <a:schemeClr val="lt1"/>
+          </a:fontRef>
+        </p:style>
+        <p:txBody>
+          <a:bodyPr rtlCol="0" anchor="ctr"/>
+          <a:lstStyle/>
+          <a:p>
+            <a:pPr algn="ctr"/>
+            <a:r>
+              <a:rPr sz="1400" b="1">
+                <a:solidFill>
+                  <a:srgbClr val="FFFFFF"/>
+                </a:solidFill>
+                <a:latin typeface="Malgun Gothic"/>
+              </a:rPr>
+              <a:t>7</a:t>
+            </a:r>
+          </a:p>
+        </p:txBody>
+      </p:sp>
+      <p:sp>
+        <p:nvSpPr>
+          <p:cNvPr id="16" name="Rectangle 15"/>
+          <p:cNvSpPr/>
+          <p:nvPr/>
+        </p:nvSpPr>
+        <p:spPr>
+          <a:xfrm>
+            <a:off x="4032000" y="1512000"/>
+            <a:ext cx="2880000" cy="288000"/>
+          </a:xfrm>
+          <a:prstGeom prst="rect">
+            <a:avLst/>
+          </a:prstGeom>
+        </p:spPr>
+        <p:style>
+          <a:lnRef idx="1">
+            <a:schemeClr val="accent1"/>
+          </a:lnRef>
+          <a:fillRef idx="3">
+            <a:schemeClr val="accent1"/>
+          </a:fillRef>
+          <a:effectRef idx="2">
+            <a:schemeClr val="accent1"/>
+          </a:effectRef>
+          <a:fontRef idx="minor">
+            <a:schemeClr val="lt1"/>
+          </a:fontRef>
+        </p:style>
+        <p:txBody>
+          <a:bodyPr rtlCol="0" anchor="ctr"/>
+          <a:lstStyle/>
+          <a:p>
+            <a:pPr algn="ctr"/>
+            <a:r>
+              <a:rPr sz="1800" b="0">
+                <a:solidFill>
+                  <a:srgbClr val="333333"/>
+                </a:solidFill>
+                <a:latin typeface="Malgun Gothic"/>
+              </a:rPr>
+              <a:t>기술 개발 현황</a:t>
+            </a:r>
+          </a:p>
+        </p:txBody>
+      </p:sp>
+      <p:sp>
+        <p:nvSpPr>
+          <p:cNvPr id="17" name="Oval 16"/>
+          <p:cNvSpPr/>
+          <p:nvPr/>
+        </p:nvSpPr>
+        <p:spPr>
+          <a:xfrm>
+            <a:off x="3600000" y="1944000"/>
+            <a:ext cx="288000" cy="288000"/>
+          </a:xfrm>
+          <a:prstGeom prst="ellipse">
+            <a:avLst/>
+          </a:prstGeom>
+          <a:solidFill>
+            <a:srgbClr val="003366"/>
+          </a:solidFill>
+          <a:ln>
+            <a:noFill/>
+          </a:ln>
+        </p:spPr>
+        <p:style>
+          <a:lnRef idx="1">
+            <a:schemeClr val="accent1"/>
+          </a:lnRef>
+          <a:fillRef idx="3">
+            <a:schemeClr val="accent1"/>
+          </a:fillRef>
+          <a:effectRef idx="2">
+            <a:schemeClr val="accent1"/>
+          </a:effectRef>
+          <a:fontRef idx="minor">
+            <a:schemeClr val="lt1"/>
+          </a:fontRef>
+        </p:style>
+        <p:txBody>
+          <a:bodyPr rtlCol="0" anchor="ctr"/>
+          <a:lstStyle/>
+          <a:p>
+            <a:pPr algn="ctr"/>
+            <a:r>
+              <a:rPr sz="1400" b="1">
+                <a:solidFill>
+                  <a:srgbClr val="FFFFFF"/>
+                </a:solidFill>
+                <a:latin typeface="Malgun Gothic"/>
+              </a:rPr>
+              <a:t>8</a:t>
+            </a:r>
+          </a:p>
+        </p:txBody>
+      </p:sp>
+      <p:sp>
+        <p:nvSpPr>
+          <p:cNvPr id="18" name="Rectangle 17"/>
+          <p:cNvSpPr/>
+          <p:nvPr/>
+        </p:nvSpPr>
+        <p:spPr>
+          <a:xfrm>
+            <a:off x="4032000" y="1944000"/>
+            <a:ext cx="2880000" cy="288000"/>
+          </a:xfrm>
+          <a:prstGeom prst="rect">
+            <a:avLst/>
+          </a:prstGeom>
+        </p:spPr>
+        <p:style>
+          <a:lnRef idx="1">
+            <a:schemeClr val="accent1"/>
+          </a:lnRef>
+          <a:fillRef idx="3">
+            <a:schemeClr val="accent1"/>
+          </a:fillRef>
+          <a:effectRef idx="2">
+            <a:schemeClr val="accent1"/>
+          </a:effectRef>
+          <a:fontRef idx="minor">
+            <a:schemeClr val="lt1"/>
+          </a:fontRef>
+        </p:style>
+        <p:txBody>
+          <a:bodyPr rtlCol="0" anchor="ctr"/>
+          <a:lstStyle/>
+          <a:p>
+            <a:pPr algn="ctr"/>
+            <a:r>
+              <a:rPr sz="1800" b="0">
+                <a:solidFill>
+                  <a:srgbClr val="333333"/>
+                </a:solidFill>
+                <a:latin typeface="Malgun Gothic"/>
+              </a:rPr>
+              <a:t>시장 전망</a:t>
+            </a:r>
+          </a:p>
+        </p:txBody>
+      </p:sp>
+      <p:sp>
+        <p:nvSpPr>
+          <p:cNvPr id="19" name="Oval 18"/>
+          <p:cNvSpPr/>
+          <p:nvPr/>
+        </p:nvSpPr>
+        <p:spPr>
+          <a:xfrm>
+            <a:off x="3600000" y="2376000"/>
+            <a:ext cx="288000" cy="288000"/>
+          </a:xfrm>
+          <a:prstGeom prst="ellipse">
+            <a:avLst/>
+          </a:prstGeom>
+          <a:solidFill>
+            <a:srgbClr val="003366"/>
+          </a:solidFill>
+          <a:ln>
+            <a:noFill/>
+          </a:ln>
+        </p:spPr>
+        <p:style>
+          <a:lnRef idx="1">
+            <a:schemeClr val="accent1"/>
+          </a:lnRef>
+          <a:fillRef idx="3">
+            <a:schemeClr val="accent1"/>
+          </a:fillRef>
+          <a:effectRef idx="2">
+            <a:schemeClr val="accent1"/>
+          </a:effectRef>
+          <a:fontRef idx="minor">
+            <a:schemeClr val="lt1"/>
+          </a:fontRef>
+        </p:style>
+        <p:txBody>
+          <a:bodyPr rtlCol="0" anchor="ctr"/>
+          <a:lstStyle/>
+          <a:p>
+            <a:pPr algn="ctr"/>
+            <a:r>
+              <a:rPr sz="1400" b="1">
+                <a:solidFill>
+                  <a:srgbClr val="FFFFFF"/>
+                </a:solidFill>
+                <a:latin typeface="Malgun Gothic"/>
+              </a:rPr>
+              <a:t>9</a:t>
+            </a:r>
+          </a:p>
+        </p:txBody>
+      </p:sp>
+      <p:sp>
+        <p:nvSpPr>
+          <p:cNvPr id="20" name="Rectangle 19"/>
+          <p:cNvSpPr/>
+          <p:nvPr/>
+        </p:nvSpPr>
+        <p:spPr>
+          <a:xfrm>
+            <a:off x="4032000" y="2376000"/>
+            <a:ext cx="2880000" cy="288000"/>
+          </a:xfrm>
+          <a:prstGeom prst="rect">
+            <a:avLst/>
+          </a:prstGeom>
+        </p:spPr>
+        <p:style>
+          <a:lnRef idx="1">
+            <a:schemeClr val="accent1"/>
+          </a:lnRef>
+          <a:fillRef idx="3">
+            <a:schemeClr val="accent1"/>
+          </a:fillRef>
+          <a:effectRef idx="2">
+            <a:schemeClr val="accent1"/>
+          </a:effectRef>
+          <a:fontRef idx="minor">
+            <a:schemeClr val="lt1"/>
+          </a:fontRef>
+        </p:style>
+        <p:txBody>
+          <a:bodyPr rtlCol="0" anchor="ctr"/>
+          <a:lstStyle/>
+          <a:p>
+            <a:pPr algn="ctr"/>
+            <a:r>
+              <a:rPr sz="1800" b="0">
+                <a:solidFill>
+                  <a:srgbClr val="333333"/>
+                </a:solidFill>
+                <a:latin typeface="Malgun Gothic"/>
+              </a:rPr>
+              <a:t>결론</a:t>
             </a:r>
           </a:p>
         </p:txBody>
@@ -3541,28 +5184,33 @@
       <p:grpSpPr/>
       <p:sp>
         <p:nvSpPr>
-          <p:cNvPr id="2" name="Title 1"/>
-          <p:cNvSpPr>
-            <a:spLocks noGrp="1"/>
-          </p:cNvSpPr>
-          <p:nvPr>
-            <p:ph type="title"/>
-          </p:nvPr>
-        </p:nvSpPr>
-        <p:spPr/>
-        <p:txBody>
-          <a:bodyPr/>
-          <a:lstStyle/>
-          <a:p>
-            <a:pPr>
-              <a:defRPr sz="2800" b="1">
+          <p:cNvPr id="2" name="TextBox 1"/>
+          <p:cNvSpPr txBox="1"/>
+          <p:nvPr/>
+        </p:nvSpPr>
+        <p:spPr>
+          <a:xfrm>
+            <a:off x="360000" y="360000"/>
+            <a:ext cx="3600000" cy="360000"/>
+          </a:xfrm>
+          <a:prstGeom prst="rect">
+            <a:avLst/>
+          </a:prstGeom>
+          <a:noFill/>
+        </p:spPr>
+        <p:txBody>
+          <a:bodyPr wrap="none">
+            <a:spAutoFit/>
+          </a:bodyPr>
+          <a:lstStyle/>
+          <a:p>
+            <a:r>
+              <a:rPr sz="2800" b="1">
                 <a:solidFill>
                   <a:srgbClr val="003366"/>
                 </a:solidFill>
                 <a:latin typeface="Malgun Gothic"/>
-              </a:defRPr>
-            </a:pPr>
-            <a:r>
+              </a:rPr>
               <a:t>시장 개요</a:t>
             </a:r>
           </a:p>
@@ -3570,95 +5218,485 @@
       </p:sp>
       <p:sp>
         <p:nvSpPr>
-          <p:cNvPr id="3" name="Content Placeholder 2"/>
-          <p:cNvSpPr>
-            <a:spLocks noGrp="1"/>
-          </p:cNvSpPr>
-          <p:nvPr>
-            <p:ph idx="1"/>
-          </p:nvPr>
-        </p:nvSpPr>
-        <p:spPr/>
-        <p:txBody>
-          <a:bodyPr/>
-          <a:lstStyle/>
-          <a:p/>
-          <a:p>
-            <a:pPr>
-              <a:defRPr sz="1800">
+          <p:cNvPr id="3" name="Rounded Rectangle 2"/>
+          <p:cNvSpPr/>
+          <p:nvPr/>
+        </p:nvSpPr>
+        <p:spPr>
+          <a:xfrm>
+            <a:off x="540000" y="900000"/>
+            <a:ext cx="3060000" cy="1800000"/>
+          </a:xfrm>
+          <a:prstGeom prst="roundRect">
+            <a:avLst/>
+          </a:prstGeom>
+          <a:solidFill>
+            <a:srgbClr val="F5F5F5"/>
+          </a:solidFill>
+          <a:ln w="25400">
+            <a:solidFill>
+              <a:srgbClr val="003366"/>
+            </a:solidFill>
+          </a:ln>
+        </p:spPr>
+        <p:style>
+          <a:lnRef idx="1">
+            <a:schemeClr val="accent1"/>
+          </a:lnRef>
+          <a:fillRef idx="3">
+            <a:schemeClr val="accent1"/>
+          </a:fillRef>
+          <a:effectRef idx="2">
+            <a:schemeClr val="accent1"/>
+          </a:effectRef>
+          <a:fontRef idx="minor">
+            <a:schemeClr val="lt1"/>
+          </a:fontRef>
+        </p:style>
+        <p:txBody>
+          <a:bodyPr rtlCol="0" anchor="ctr"/>
+          <a:lstStyle/>
+          <a:p>
+            <a:pPr algn="ctr"/>
+          </a:p>
+        </p:txBody>
+      </p:sp>
+      <p:sp>
+        <p:nvSpPr>
+          <p:cNvPr id="4" name="TextBox 3"/>
+          <p:cNvSpPr txBox="1"/>
+          <p:nvPr/>
+        </p:nvSpPr>
+        <p:spPr>
+          <a:xfrm>
+            <a:off x="720000" y="1080000"/>
+            <a:ext cx="2700000" cy="540000"/>
+          </a:xfrm>
+          <a:prstGeom prst="rect">
+            <a:avLst/>
+          </a:prstGeom>
+          <a:noFill/>
+        </p:spPr>
+        <p:txBody>
+          <a:bodyPr wrap="none">
+            <a:spAutoFit/>
+          </a:bodyPr>
+          <a:lstStyle/>
+          <a:p>
+            <a:pPr algn="ctr"/>
+            <a:r>
+              <a:rPr sz="4800" b="1">
                 <a:solidFill>
-                  <a:srgbClr val="404040"/>
+                  <a:srgbClr val="003366"/>
                 </a:solidFill>
                 <a:latin typeface="Malgun Gothic"/>
-              </a:defRPr>
-            </a:pPr>
-            <a:r>
-              <a:t>• 전국 하수처리장 총량: 2,458개소 (2024년 기준)</a:t>
-            </a:r>
-          </a:p>
-          <a:p>
-            <a:pPr>
-              <a:defRPr sz="1800">
+              </a:rPr>
+              <a:t>2,458 개소</a:t>
+            </a:r>
+          </a:p>
+        </p:txBody>
+      </p:sp>
+      <p:sp>
+        <p:nvSpPr>
+          <p:cNvPr id="5" name="TextBox 4"/>
+          <p:cNvSpPr txBox="1"/>
+          <p:nvPr/>
+        </p:nvSpPr>
+        <p:spPr>
+          <a:xfrm>
+            <a:off x="720000" y="1692000"/>
+            <a:ext cx="2700000" cy="288000"/>
+          </a:xfrm>
+          <a:prstGeom prst="rect">
+            <a:avLst/>
+          </a:prstGeom>
+          <a:noFill/>
+        </p:spPr>
+        <p:txBody>
+          <a:bodyPr wrap="none">
+            <a:spAutoFit/>
+          </a:bodyPr>
+          <a:lstStyle/>
+          <a:p>
+            <a:pPr algn="ctr"/>
+            <a:r>
+              <a:rPr sz="1800" b="1">
                 <a:solidFill>
-                  <a:srgbClr val="404040"/>
+                  <a:srgbClr val="333333"/>
                 </a:solidFill>
                 <a:latin typeface="Malgun Gothic"/>
-              </a:defRPr>
-            </a:pPr>
-            <a:r>
-              <a:t>• 민간위탁 비율: 67.3% (1,654개소)</a:t>
-            </a:r>
-          </a:p>
-          <a:p>
-            <a:pPr>
-              <a:defRPr sz="1800">
+              </a:rPr>
+              <a:t>전국 하수처리장 총량</a:t>
+            </a:r>
+          </a:p>
+        </p:txBody>
+      </p:sp>
+      <p:sp>
+        <p:nvSpPr>
+          <p:cNvPr id="6" name="TextBox 5"/>
+          <p:cNvSpPr txBox="1"/>
+          <p:nvPr/>
+        </p:nvSpPr>
+        <p:spPr>
+          <a:xfrm>
+            <a:off x="720000" y="2052000"/>
+            <a:ext cx="2700000" cy="288000"/>
+          </a:xfrm>
+          <a:prstGeom prst="rect">
+            <a:avLst/>
+          </a:prstGeom>
+          <a:noFill/>
+        </p:spPr>
+        <p:txBody>
+          <a:bodyPr wrap="none">
+            <a:spAutoFit/>
+          </a:bodyPr>
+          <a:lstStyle/>
+          <a:p>
+            <a:pPr algn="ctr"/>
+            <a:r>
+              <a:rPr sz="1400" b="0">
                 <a:solidFill>
-                  <a:srgbClr val="404040"/>
+                  <a:srgbClr val="646464"/>
                 </a:solidFill>
                 <a:latin typeface="Malgun Gothic"/>
-              </a:defRPr>
-            </a:pPr>
-            <a:r>
-              <a:t>• 연평균 성장률 (CAGR): 4.2% (2020~2024년)</a:t>
-            </a:r>
-          </a:p>
-          <a:p>
-            <a:pPr>
-              <a:defRPr sz="1800">
+              </a:rPr>
+              <a:t>2024 년 기준</a:t>
+            </a:r>
+          </a:p>
+        </p:txBody>
+      </p:sp>
+      <p:sp>
+        <p:nvSpPr>
+          <p:cNvPr id="7" name="Rounded Rectangle 6"/>
+          <p:cNvSpPr/>
+          <p:nvPr/>
+        </p:nvSpPr>
+        <p:spPr>
+          <a:xfrm>
+            <a:off x="3780000" y="900000"/>
+            <a:ext cx="3060000" cy="1800000"/>
+          </a:xfrm>
+          <a:prstGeom prst="roundRect">
+            <a:avLst/>
+          </a:prstGeom>
+          <a:solidFill>
+            <a:srgbClr val="F5F5F5"/>
+          </a:solidFill>
+          <a:ln w="25400">
+            <a:solidFill>
+              <a:srgbClr val="003366"/>
+            </a:solidFill>
+          </a:ln>
+        </p:spPr>
+        <p:style>
+          <a:lnRef idx="1">
+            <a:schemeClr val="accent1"/>
+          </a:lnRef>
+          <a:fillRef idx="3">
+            <a:schemeClr val="accent1"/>
+          </a:fillRef>
+          <a:effectRef idx="2">
+            <a:schemeClr val="accent1"/>
+          </a:effectRef>
+          <a:fontRef idx="minor">
+            <a:schemeClr val="lt1"/>
+          </a:fontRef>
+        </p:style>
+        <p:txBody>
+          <a:bodyPr rtlCol="0" anchor="ctr"/>
+          <a:lstStyle/>
+          <a:p>
+            <a:pPr algn="ctr"/>
+          </a:p>
+        </p:txBody>
+      </p:sp>
+      <p:sp>
+        <p:nvSpPr>
+          <p:cNvPr id="8" name="TextBox 7"/>
+          <p:cNvSpPr txBox="1"/>
+          <p:nvPr/>
+        </p:nvSpPr>
+        <p:spPr>
+          <a:xfrm>
+            <a:off x="3960000" y="1080000"/>
+            <a:ext cx="2700000" cy="540000"/>
+          </a:xfrm>
+          <a:prstGeom prst="rect">
+            <a:avLst/>
+          </a:prstGeom>
+          <a:noFill/>
+        </p:spPr>
+        <p:txBody>
+          <a:bodyPr wrap="none">
+            <a:spAutoFit/>
+          </a:bodyPr>
+          <a:lstStyle/>
+          <a:p>
+            <a:pPr algn="ctr"/>
+            <a:r>
+              <a:rPr sz="4800" b="1">
                 <a:solidFill>
-                  <a:srgbClr val="404040"/>
+                  <a:srgbClr val="003366"/>
                 </a:solidFill>
                 <a:latin typeface="Malgun Gothic"/>
-              </a:defRPr>
-            </a:pPr>
-            <a:r>
-              <a:t>• 시장 규모: 약 2조 8,500억원 (2024년 예상)</a:t>
-            </a:r>
-          </a:p>
-          <a:p>
-            <a:pPr>
-              <a:defRPr sz="1800">
+              </a:rPr>
+              <a:t>67.3%</a:t>
+            </a:r>
+          </a:p>
+        </p:txBody>
+      </p:sp>
+      <p:sp>
+        <p:nvSpPr>
+          <p:cNvPr id="9" name="TextBox 8"/>
+          <p:cNvSpPr txBox="1"/>
+          <p:nvPr/>
+        </p:nvSpPr>
+        <p:spPr>
+          <a:xfrm>
+            <a:off x="3960000" y="1692000"/>
+            <a:ext cx="2700000" cy="288000"/>
+          </a:xfrm>
+          <a:prstGeom prst="rect">
+            <a:avLst/>
+          </a:prstGeom>
+          <a:noFill/>
+        </p:spPr>
+        <p:txBody>
+          <a:bodyPr wrap="none">
+            <a:spAutoFit/>
+          </a:bodyPr>
+          <a:lstStyle/>
+          <a:p>
+            <a:pPr algn="ctr"/>
+            <a:r>
+              <a:rPr sz="1800" b="1">
                 <a:solidFill>
-                  <a:srgbClr val="404040"/>
+                  <a:srgbClr val="333333"/>
                 </a:solidFill>
                 <a:latin typeface="Malgun Gothic"/>
-              </a:defRPr>
-            </a:pPr>
-            <a:r>
-              <a:t>• 정부의 민간위託 확대 정책에 따른 지속적 성장세</a:t>
-            </a:r>
-          </a:p>
-          <a:p>
-            <a:pPr>
-              <a:defRPr sz="1800">
+              </a:rPr>
+              <a:t>민간위탁 비율</a:t>
+            </a:r>
+          </a:p>
+        </p:txBody>
+      </p:sp>
+      <p:sp>
+        <p:nvSpPr>
+          <p:cNvPr id="10" name="TextBox 9"/>
+          <p:cNvSpPr txBox="1"/>
+          <p:nvPr/>
+        </p:nvSpPr>
+        <p:spPr>
+          <a:xfrm>
+            <a:off x="3960000" y="2052000"/>
+            <a:ext cx="2700000" cy="288000"/>
+          </a:xfrm>
+          <a:prstGeom prst="rect">
+            <a:avLst/>
+          </a:prstGeom>
+          <a:noFill/>
+        </p:spPr>
+        <p:txBody>
+          <a:bodyPr wrap="none">
+            <a:spAutoFit/>
+          </a:bodyPr>
+          <a:lstStyle/>
+          <a:p>
+            <a:pPr algn="ctr"/>
+            <a:r>
+              <a:rPr sz="1400" b="0">
                 <a:solidFill>
-                  <a:srgbClr val="404040"/>
+                  <a:srgbClr val="646464"/>
                 </a:solidFill>
                 <a:latin typeface="Malgun Gothic"/>
-              </a:defRPr>
-            </a:pPr>
-            <a:r>
-              <a:t>• 환경규제 강화로 전문 운영업체 수요 증가</a:t>
+              </a:rPr>
+              <a:t>지속적 증가 추세</a:t>
+            </a:r>
+          </a:p>
+        </p:txBody>
+      </p:sp>
+      <p:sp>
+        <p:nvSpPr>
+          <p:cNvPr id="11" name="Rounded Rectangle 10"/>
+          <p:cNvSpPr/>
+          <p:nvPr/>
+        </p:nvSpPr>
+        <p:spPr>
+          <a:xfrm>
+            <a:off x="7020000" y="900000"/>
+            <a:ext cx="3060000" cy="1800000"/>
+          </a:xfrm>
+          <a:prstGeom prst="roundRect">
+            <a:avLst/>
+          </a:prstGeom>
+          <a:solidFill>
+            <a:srgbClr val="F5F5F5"/>
+          </a:solidFill>
+          <a:ln w="25400">
+            <a:solidFill>
+              <a:srgbClr val="003366"/>
+            </a:solidFill>
+          </a:ln>
+        </p:spPr>
+        <p:style>
+          <a:lnRef idx="1">
+            <a:schemeClr val="accent1"/>
+          </a:lnRef>
+          <a:fillRef idx="3">
+            <a:schemeClr val="accent1"/>
+          </a:fillRef>
+          <a:effectRef idx="2">
+            <a:schemeClr val="accent1"/>
+          </a:effectRef>
+          <a:fontRef idx="minor">
+            <a:schemeClr val="lt1"/>
+          </a:fontRef>
+        </p:style>
+        <p:txBody>
+          <a:bodyPr rtlCol="0" anchor="ctr"/>
+          <a:lstStyle/>
+          <a:p>
+            <a:pPr algn="ctr"/>
+          </a:p>
+        </p:txBody>
+      </p:sp>
+      <p:sp>
+        <p:nvSpPr>
+          <p:cNvPr id="12" name="TextBox 11"/>
+          <p:cNvSpPr txBox="1"/>
+          <p:nvPr/>
+        </p:nvSpPr>
+        <p:spPr>
+          <a:xfrm>
+            <a:off x="7200000" y="1080000"/>
+            <a:ext cx="2700000" cy="540000"/>
+          </a:xfrm>
+          <a:prstGeom prst="rect">
+            <a:avLst/>
+          </a:prstGeom>
+          <a:noFill/>
+        </p:spPr>
+        <p:txBody>
+          <a:bodyPr wrap="none">
+            <a:spAutoFit/>
+          </a:bodyPr>
+          <a:lstStyle/>
+          <a:p>
+            <a:pPr algn="ctr"/>
+            <a:r>
+              <a:rPr sz="4800" b="1">
+                <a:solidFill>
+                  <a:srgbClr val="003366"/>
+                </a:solidFill>
+                <a:latin typeface="Malgun Gothic"/>
+              </a:rPr>
+              <a:t>4.2%</a:t>
+            </a:r>
+          </a:p>
+        </p:txBody>
+      </p:sp>
+      <p:sp>
+        <p:nvSpPr>
+          <p:cNvPr id="13" name="TextBox 12"/>
+          <p:cNvSpPr txBox="1"/>
+          <p:nvPr/>
+        </p:nvSpPr>
+        <p:spPr>
+          <a:xfrm>
+            <a:off x="7200000" y="1692000"/>
+            <a:ext cx="2700000" cy="288000"/>
+          </a:xfrm>
+          <a:prstGeom prst="rect">
+            <a:avLst/>
+          </a:prstGeom>
+          <a:noFill/>
+        </p:spPr>
+        <p:txBody>
+          <a:bodyPr wrap="none">
+            <a:spAutoFit/>
+          </a:bodyPr>
+          <a:lstStyle/>
+          <a:p>
+            <a:pPr algn="ctr"/>
+            <a:r>
+              <a:rPr sz="1800" b="1">
+                <a:solidFill>
+                  <a:srgbClr val="333333"/>
+                </a:solidFill>
+                <a:latin typeface="Malgun Gothic"/>
+              </a:rPr>
+              <a:t>연평균 성장률 (CAGR)</a:t>
+            </a:r>
+          </a:p>
+        </p:txBody>
+      </p:sp>
+      <p:sp>
+        <p:nvSpPr>
+          <p:cNvPr id="14" name="TextBox 13"/>
+          <p:cNvSpPr txBox="1"/>
+          <p:nvPr/>
+        </p:nvSpPr>
+        <p:spPr>
+          <a:xfrm>
+            <a:off x="7200000" y="2052000"/>
+            <a:ext cx="2700000" cy="288000"/>
+          </a:xfrm>
+          <a:prstGeom prst="rect">
+            <a:avLst/>
+          </a:prstGeom>
+          <a:noFill/>
+        </p:spPr>
+        <p:txBody>
+          <a:bodyPr wrap="none">
+            <a:spAutoFit/>
+          </a:bodyPr>
+          <a:lstStyle/>
+          <a:p>
+            <a:pPr algn="ctr"/>
+            <a:r>
+              <a:rPr sz="1400" b="0">
+                <a:solidFill>
+                  <a:srgbClr val="646464"/>
+                </a:solidFill>
+                <a:latin typeface="Malgun Gothic"/>
+              </a:rPr>
+              <a:t>2020-2024 년</a:t>
+            </a:r>
+          </a:p>
+        </p:txBody>
+      </p:sp>
+      <p:sp>
+        <p:nvSpPr>
+          <p:cNvPr id="15" name="TextBox 14"/>
+          <p:cNvSpPr txBox="1"/>
+          <p:nvPr/>
+        </p:nvSpPr>
+        <p:spPr>
+          <a:xfrm>
+            <a:off x="360000" y="3060000"/>
+            <a:ext cx="9360000" cy="360000"/>
+          </a:xfrm>
+          <a:prstGeom prst="rect">
+            <a:avLst/>
+          </a:prstGeom>
+          <a:noFill/>
+        </p:spPr>
+        <p:txBody>
+          <a:bodyPr wrap="none">
+            <a:spAutoFit/>
+          </a:bodyPr>
+          <a:lstStyle/>
+          <a:p>
+            <a:pPr algn="ctr"/>
+            <a:r>
+              <a:rPr sz="2000" b="1">
+                <a:solidFill>
+                  <a:srgbClr val="003366"/>
+                </a:solidFill>
+                <a:latin typeface="Malgun Gothic"/>
+              </a:rPr>
+              <a:t>시장 규모: 약 2 조 8,500 억원 (2024 년 예상)</a:t>
             </a:r>
           </a:p>
         </p:txBody>
@@ -3683,31 +5721,14 @@
       <p:grpSpPr/>
       <p:sp>
         <p:nvSpPr>
-          <p:cNvPr id="2" name="Title 1"/>
-          <p:cNvSpPr>
-            <a:spLocks noGrp="1"/>
-          </p:cNvSpPr>
-          <p:nvPr>
-            <p:ph type="title"/>
-          </p:nvPr>
-        </p:nvSpPr>
-        <p:spPr/>
-        <p:txBody>
-          <a:bodyPr/>
-          <a:lstStyle/>
-          <a:p/>
-        </p:txBody>
-      </p:sp>
-      <p:sp>
-        <p:nvSpPr>
-          <p:cNvPr id="3" name="TextBox 2"/>
+          <p:cNvPr id="2" name="TextBox 1"/>
           <p:cNvSpPr txBox="1"/>
           <p:nvPr/>
         </p:nvSpPr>
         <p:spPr>
           <a:xfrm>
-            <a:off x="457200" y="274320"/>
-            <a:ext cx="8229600" cy="731520"/>
+            <a:off x="360000" y="360000"/>
+            <a:ext cx="3600000" cy="360000"/>
           </a:xfrm>
           <a:prstGeom prst="rect">
             <a:avLst/>
@@ -3719,33 +5740,30 @@
             <a:spAutoFit/>
           </a:bodyPr>
           <a:lstStyle/>
-          <a:p/>
-          <a:p>
-            <a:pPr>
-              <a:defRPr sz="2800" b="1">
+          <a:p>
+            <a:r>
+              <a:rPr sz="2800" b="1">
                 <a:solidFill>
                   <a:srgbClr val="003366"/>
                 </a:solidFill>
                 <a:latin typeface="Malgun Gothic"/>
-              </a:defRPr>
-            </a:pPr>
-            <a:r>
-              <a:t>주요 업체 현황</a:t>
+              </a:rPr>
+              <a:t>주요 업체 현황 (상위 8 개사)</a:t>
             </a:r>
           </a:p>
         </p:txBody>
       </p:sp>
       <p:graphicFrame>
         <p:nvGraphicFramePr>
-          <p:cNvPr id="4" name="Table 3"/>
+          <p:cNvPr id="3" name="Table 2"/>
           <p:cNvGraphicFramePr>
             <a:graphicFrameLocks noGrp="1"/>
           </p:cNvGraphicFramePr>
           <p:nvPr/>
         </p:nvGraphicFramePr>
         <p:xfrm>
-          <a:off x="457200" y="1097280"/>
-          <a:ext cx="8229600" cy="6583680"/>
+          <a:off x="540000" y="900000"/>
+          <a:ext cx="9000000" cy="2160000"/>
         </p:xfrm>
         <a:graphic>
           <a:graphicData uri="http://schemas.openxmlformats.org/drawingml/2006/table">
@@ -3754,31 +5772,29 @@
                 <a:tableStyleId>{5C22544A-7EE6-4342-B048-85BDC9FD1C3A}</a:tableStyleId>
               </a:tblPr>
               <a:tblGrid>
-                <a:gridCol w="2286000"/>
-                <a:gridCol w="1828800"/>
-                <a:gridCol w="2286000"/>
-                <a:gridCol w="1828800"/>
+                <a:gridCol w="2160000"/>
+                <a:gridCol w="1800000"/>
+                <a:gridCol w="2520000"/>
+                <a:gridCol w="2520000"/>
               </a:tblGrid>
-              <a:tr h="731520">
+              <a:tr h="240000">
                 <a:tc>
                   <a:txBody>
                     <a:bodyPr/>
                     <a:lstStyle/>
                     <a:p>
-                      <a:pPr algn="ctr">
-                        <a:defRPr sz="1600" b="1">
+                      <a:r>
+                        <a:rPr sz="1400" b="1">
                           <a:solidFill>
                             <a:srgbClr val="FFFFFF"/>
                           </a:solidFill>
                           <a:latin typeface="Malgun Gothic"/>
-                        </a:defRPr>
-                      </a:pPr>
-                      <a:r>
+                        </a:rPr>
                         <a:t>업체명</a:t>
                       </a:r>
                     </a:p>
                   </a:txBody>
-                  <a:tcPr>
+                  <a:tcPr anchor="ctr">
                     <a:solidFill>
                       <a:srgbClr val="003366"/>
                     </a:solidFill>
@@ -3789,20 +5805,18 @@
                     <a:bodyPr/>
                     <a:lstStyle/>
                     <a:p>
-                      <a:pPr algn="ctr">
-                        <a:defRPr sz="1600" b="1">
+                      <a:r>
+                        <a:rPr sz="1400" b="1">
                           <a:solidFill>
                             <a:srgbClr val="FFFFFF"/>
                           </a:solidFill>
                           <a:latin typeface="Malgun Gothic"/>
-                        </a:defRPr>
-                      </a:pPr>
-                      <a:r>
+                        </a:rPr>
                         <a:t>운영 처리장 수</a:t>
                       </a:r>
                     </a:p>
                   </a:txBody>
-                  <a:tcPr>
+                  <a:tcPr anchor="ctr">
                     <a:solidFill>
                       <a:srgbClr val="003366"/>
                     </a:solidFill>
@@ -3813,20 +5827,18 @@
                     <a:bodyPr/>
                     <a:lstStyle/>
                     <a:p>
-                      <a:pPr algn="ctr">
-                        <a:defRPr sz="1600" b="1">
+                      <a:r>
+                        <a:rPr sz="1400" b="1">
                           <a:solidFill>
                             <a:srgbClr val="FFFFFF"/>
                           </a:solidFill>
                           <a:latin typeface="Malgun Gothic"/>
-                        </a:defRPr>
-                      </a:pPr>
-                      <a:r>
+                        </a:rPr>
                         <a:t>처리용량 (톤/일)</a:t>
                       </a:r>
                     </a:p>
                   </a:txBody>
-                  <a:tcPr>
+                  <a:tcPr anchor="ctr">
                     <a:solidFill>
                       <a:srgbClr val="003366"/>
                     </a:solidFill>
@@ -3837,130 +5849,44 @@
                     <a:bodyPr/>
                     <a:lstStyle/>
                     <a:p>
-                      <a:pPr algn="ctr">
-                        <a:defRPr sz="1600" b="1">
+                      <a:r>
+                        <a:rPr sz="1400" b="1">
                           <a:solidFill>
                             <a:srgbClr val="FFFFFF"/>
                           </a:solidFill>
                           <a:latin typeface="Malgun Gothic"/>
-                        </a:defRPr>
-                      </a:pPr>
-                      <a:r>
+                        </a:rPr>
                         <a:t>시장점유율 (%)</a:t>
                       </a:r>
                     </a:p>
                   </a:txBody>
-                  <a:tcPr>
+                  <a:tcPr anchor="ctr">
                     <a:solidFill>
                       <a:srgbClr val="003366"/>
                     </a:solidFill>
                   </a:tcPr>
                 </a:tc>
               </a:tr>
-              <a:tr h="731520">
+              <a:tr h="240000">
                 <a:tc>
                   <a:txBody>
                     <a:bodyPr/>
                     <a:lstStyle/>
                     <a:p>
-                      <a:pPr algn="ctr">
-                        <a:defRPr sz="1400">
+                      <a:r>
+                        <a:rPr sz="1400" b="0">
                           <a:solidFill>
-                            <a:srgbClr val="404040"/>
+                            <a:srgbClr val="333333"/>
                           </a:solidFill>
                           <a:latin typeface="Malgun Gothic"/>
-                        </a:defRPr>
-                      </a:pPr>
-                      <a:r>
-                        <a:t>A 환경건설</a:t>
+                        </a:rPr>
+                        <a:t>A 환경그룹</a:t>
                       </a:r>
                     </a:p>
                   </a:txBody>
-                  <a:tcPr/>
-                </a:tc>
-                <a:tc>
-                  <a:txBody>
-                    <a:bodyPr/>
-                    <a:lstStyle/>
-                    <a:p>
-                      <a:pPr algn="ctr">
-                        <a:defRPr sz="1400">
-                          <a:solidFill>
-                            <a:srgbClr val="404040"/>
-                          </a:solidFill>
-                          <a:latin typeface="Malgun Gothic"/>
-                        </a:defRPr>
-                      </a:pPr>
-                      <a:r>
-                        <a:t>156</a:t>
-                      </a:r>
-                    </a:p>
-                  </a:txBody>
-                  <a:tcPr/>
-                </a:tc>
-                <a:tc>
-                  <a:txBody>
-                    <a:bodyPr/>
-                    <a:lstStyle/>
-                    <a:p>
-                      <a:pPr algn="ctr">
-                        <a:defRPr sz="1400">
-                          <a:solidFill>
-                            <a:srgbClr val="404040"/>
-                          </a:solidFill>
-                          <a:latin typeface="Malgun Gothic"/>
-                        </a:defRPr>
-                      </a:pPr>
-                      <a:r>
-                        <a:t>2850000</a:t>
-                      </a:r>
-                    </a:p>
-                  </a:txBody>
-                  <a:tcPr/>
-                </a:tc>
-                <a:tc>
-                  <a:txBody>
-                    <a:bodyPr/>
-                    <a:lstStyle/>
-                    <a:p>
-                      <a:pPr algn="ctr">
-                        <a:defRPr sz="1400">
-                          <a:solidFill>
-                            <a:srgbClr val="404040"/>
-                          </a:solidFill>
-                          <a:latin typeface="Malgun Gothic"/>
-                        </a:defRPr>
-                      </a:pPr>
-                      <a:r>
-                        <a:t>18.5</a:t>
-                      </a:r>
-                    </a:p>
-                  </a:txBody>
-                  <a:tcPr/>
-                </a:tc>
-              </a:tr>
-              <a:tr h="731520">
-                <a:tc>
-                  <a:txBody>
-                    <a:bodyPr/>
-                    <a:lstStyle/>
-                    <a:p>
-                      <a:pPr algn="ctr">
-                        <a:defRPr sz="1400">
-                          <a:solidFill>
-                            <a:srgbClr val="404040"/>
-                          </a:solidFill>
-                          <a:latin typeface="Malgun Gothic"/>
-                        </a:defRPr>
-                      </a:pPr>
-                      <a:r>
-                        <a:t>B 워터테크</a:t>
-                      </a:r>
-                    </a:p>
-                  </a:txBody>
-                  <a:tcPr>
+                  <a:tcPr anchor="ctr">
                     <a:solidFill>
-                      <a:srgbClr val="F0F0F0"/>
+                      <a:srgbClr val="F5F5F5"/>
                     </a:solidFill>
                   </a:tcPr>
                 </a:tc>
@@ -3969,22 +5895,20 @@
                     <a:bodyPr/>
                     <a:lstStyle/>
                     <a:p>
-                      <a:pPr algn="ctr">
-                        <a:defRPr sz="1400">
+                      <a:r>
+                        <a:rPr sz="1400" b="0">
                           <a:solidFill>
-                            <a:srgbClr val="404040"/>
+                            <a:srgbClr val="333333"/>
                           </a:solidFill>
                           <a:latin typeface="Malgun Gothic"/>
-                        </a:defRPr>
-                      </a:pPr>
-                      <a:r>
-                        <a:t>128</a:t>
+                        </a:rPr>
+                        <a:t>156</a:t>
                       </a:r>
                     </a:p>
                   </a:txBody>
-                  <a:tcPr>
+                  <a:tcPr anchor="ctr">
                     <a:solidFill>
-                      <a:srgbClr val="F0F0F0"/>
+                      <a:srgbClr val="F5F5F5"/>
                     </a:solidFill>
                   </a:tcPr>
                 </a:tc>
@@ -3993,22 +5917,20 @@
                     <a:bodyPr/>
                     <a:lstStyle/>
                     <a:p>
-                      <a:pPr algn="ctr">
-                        <a:defRPr sz="1400">
+                      <a:r>
+                        <a:rPr sz="1400" b="0">
                           <a:solidFill>
-                            <a:srgbClr val="404040"/>
+                            <a:srgbClr val="333333"/>
                           </a:solidFill>
                           <a:latin typeface="Malgun Gothic"/>
-                        </a:defRPr>
-                      </a:pPr>
-                      <a:r>
-                        <a:t>2340000</a:t>
+                        </a:rPr>
+                        <a:t>2,850,000</a:t>
                       </a:r>
                     </a:p>
                   </a:txBody>
-                  <a:tcPr>
+                  <a:tcPr anchor="ctr">
                     <a:solidFill>
-                      <a:srgbClr val="F0F0F0"/>
+                      <a:srgbClr val="F5F5F5"/>
                     </a:solidFill>
                   </a:tcPr>
                 </a:tc>
@@ -4017,130 +5939,44 @@
                     <a:bodyPr/>
                     <a:lstStyle/>
                     <a:p>
-                      <a:pPr algn="ctr">
-                        <a:defRPr sz="1400">
+                      <a:r>
+                        <a:rPr sz="1400" b="0">
                           <a:solidFill>
-                            <a:srgbClr val="404040"/>
+                            <a:srgbClr val="333333"/>
                           </a:solidFill>
                           <a:latin typeface="Malgun Gothic"/>
-                        </a:defRPr>
-                      </a:pPr>
-                      <a:r>
-                        <a:t>15.2</a:t>
+                        </a:rPr>
+                        <a:t>18.5</a:t>
                       </a:r>
                     </a:p>
                   </a:txBody>
-                  <a:tcPr>
+                  <a:tcPr anchor="ctr">
                     <a:solidFill>
-                      <a:srgbClr val="F0F0F0"/>
+                      <a:srgbClr val="F5F5F5"/>
                     </a:solidFill>
                   </a:tcPr>
                 </a:tc>
               </a:tr>
-              <a:tr h="731520">
+              <a:tr h="240000">
                 <a:tc>
                   <a:txBody>
                     <a:bodyPr/>
                     <a:lstStyle/>
                     <a:p>
-                      <a:pPr algn="ctr">
-                        <a:defRPr sz="1400">
+                      <a:r>
+                        <a:rPr sz="1400" b="0">
                           <a:solidFill>
-                            <a:srgbClr val="404040"/>
+                            <a:srgbClr val="333333"/>
                           </a:solidFill>
                           <a:latin typeface="Malgun Gothic"/>
-                        </a:defRPr>
-                      </a:pPr>
-                      <a:r>
-                        <a:t>C 그린시스템</a:t>
+                        </a:rPr>
+                        <a:t>B 워터테크</a:t>
                       </a:r>
                     </a:p>
                   </a:txBody>
-                  <a:tcPr/>
-                </a:tc>
-                <a:tc>
-                  <a:txBody>
-                    <a:bodyPr/>
-                    <a:lstStyle/>
-                    <a:p>
-                      <a:pPr algn="ctr">
-                        <a:defRPr sz="1400">
-                          <a:solidFill>
-                            <a:srgbClr val="404040"/>
-                          </a:solidFill>
-                          <a:latin typeface="Malgun Gothic"/>
-                        </a:defRPr>
-                      </a:pPr>
-                      <a:r>
-                        <a:t>98</a:t>
-                      </a:r>
-                    </a:p>
-                  </a:txBody>
-                  <a:tcPr/>
-                </a:tc>
-                <a:tc>
-                  <a:txBody>
-                    <a:bodyPr/>
-                    <a:lstStyle/>
-                    <a:p>
-                      <a:pPr algn="ctr">
-                        <a:defRPr sz="1400">
-                          <a:solidFill>
-                            <a:srgbClr val="404040"/>
-                          </a:solidFill>
-                          <a:latin typeface="Malgun Gothic"/>
-                        </a:defRPr>
-                      </a:pPr>
-                      <a:r>
-                        <a:t>1780000</a:t>
-                      </a:r>
-                    </a:p>
-                  </a:txBody>
-                  <a:tcPr/>
-                </a:tc>
-                <a:tc>
-                  <a:txBody>
-                    <a:bodyPr/>
-                    <a:lstStyle/>
-                    <a:p>
-                      <a:pPr algn="ctr">
-                        <a:defRPr sz="1400">
-                          <a:solidFill>
-                            <a:srgbClr val="404040"/>
-                          </a:solidFill>
-                          <a:latin typeface="Malgun Gothic"/>
-                        </a:defRPr>
-                      </a:pPr>
-                      <a:r>
-                        <a:t>11.6</a:t>
-                      </a:r>
-                    </a:p>
-                  </a:txBody>
-                  <a:tcPr/>
-                </a:tc>
-              </a:tr>
-              <a:tr h="731520">
-                <a:tc>
-                  <a:txBody>
-                    <a:bodyPr/>
-                    <a:lstStyle/>
-                    <a:p>
-                      <a:pPr algn="ctr">
-                        <a:defRPr sz="1400">
-                          <a:solidFill>
-                            <a:srgbClr val="404040"/>
-                          </a:solidFill>
-                          <a:latin typeface="Malgun Gothic"/>
-                        </a:defRPr>
-                      </a:pPr>
-                      <a:r>
-                        <a:t>D 에코서비스</a:t>
-                      </a:r>
-                    </a:p>
-                  </a:txBody>
-                  <a:tcPr>
+                  <a:tcPr anchor="ctr">
                     <a:solidFill>
-                      <a:srgbClr val="F0F0F0"/>
+                      <a:srgbClr val="FFFFFF"/>
                     </a:solidFill>
                   </a:tcPr>
                 </a:tc>
@@ -4149,22 +5985,20 @@
                     <a:bodyPr/>
                     <a:lstStyle/>
                     <a:p>
-                      <a:pPr algn="ctr">
-                        <a:defRPr sz="1400">
+                      <a:r>
+                        <a:rPr sz="1400" b="0">
                           <a:solidFill>
-                            <a:srgbClr val="404040"/>
+                            <a:srgbClr val="333333"/>
                           </a:solidFill>
                           <a:latin typeface="Malgun Gothic"/>
-                        </a:defRPr>
-                      </a:pPr>
-                      <a:r>
-                        <a:t>87</a:t>
+                        </a:rPr>
+                        <a:t>128</a:t>
                       </a:r>
                     </a:p>
                   </a:txBody>
-                  <a:tcPr>
+                  <a:tcPr anchor="ctr">
                     <a:solidFill>
-                      <a:srgbClr val="F0F0F0"/>
+                      <a:srgbClr val="FFFFFF"/>
                     </a:solidFill>
                   </a:tcPr>
                 </a:tc>
@@ -4173,22 +6007,20 @@
                     <a:bodyPr/>
                     <a:lstStyle/>
                     <a:p>
-                      <a:pPr algn="ctr">
-                        <a:defRPr sz="1400">
+                      <a:r>
+                        <a:rPr sz="1400" b="0">
                           <a:solidFill>
-                            <a:srgbClr val="404040"/>
+                            <a:srgbClr val="333333"/>
                           </a:solidFill>
                           <a:latin typeface="Malgun Gothic"/>
-                        </a:defRPr>
-                      </a:pPr>
-                      <a:r>
-                        <a:t>1560000</a:t>
+                        </a:rPr>
+                        <a:t>2,100,000</a:t>
                       </a:r>
                     </a:p>
                   </a:txBody>
-                  <a:tcPr>
+                  <a:tcPr anchor="ctr">
                     <a:solidFill>
-                      <a:srgbClr val="F0F0F0"/>
+                      <a:srgbClr val="FFFFFF"/>
                     </a:solidFill>
                   </a:tcPr>
                 </a:tc>
@@ -4197,130 +6029,44 @@
                     <a:bodyPr/>
                     <a:lstStyle/>
                     <a:p>
-                      <a:pPr algn="ctr">
-                        <a:defRPr sz="1400">
+                      <a:r>
+                        <a:rPr sz="1400" b="0">
                           <a:solidFill>
-                            <a:srgbClr val="404040"/>
+                            <a:srgbClr val="333333"/>
                           </a:solidFill>
                           <a:latin typeface="Malgun Gothic"/>
-                        </a:defRPr>
-                      </a:pPr>
-                      <a:r>
-                        <a:t>10.1</a:t>
+                        </a:rPr>
+                        <a:t>14.2</a:t>
                       </a:r>
                     </a:p>
                   </a:txBody>
-                  <a:tcPr>
+                  <a:tcPr anchor="ctr">
                     <a:solidFill>
-                      <a:srgbClr val="F0F0F0"/>
+                      <a:srgbClr val="FFFFFF"/>
                     </a:solidFill>
                   </a:tcPr>
                 </a:tc>
               </a:tr>
-              <a:tr h="731520">
+              <a:tr h="240000">
                 <a:tc>
                   <a:txBody>
                     <a:bodyPr/>
                     <a:lstStyle/>
                     <a:p>
-                      <a:pPr algn="ctr">
-                        <a:defRPr sz="1400">
+                      <a:r>
+                        <a:rPr sz="1400" b="0">
                           <a:solidFill>
-                            <a:srgbClr val="404040"/>
+                            <a:srgbClr val="333333"/>
                           </a:solidFill>
                           <a:latin typeface="Malgun Gothic"/>
-                        </a:defRPr>
-                      </a:pPr>
-                      <a:r>
-                        <a:t>E 클린워터</a:t>
+                        </a:rPr>
+                        <a:t>C 그린시스템</a:t>
                       </a:r>
                     </a:p>
                   </a:txBody>
-                  <a:tcPr/>
-                </a:tc>
-                <a:tc>
-                  <a:txBody>
-                    <a:bodyPr/>
-                    <a:lstStyle/>
-                    <a:p>
-                      <a:pPr algn="ctr">
-                        <a:defRPr sz="1400">
-                          <a:solidFill>
-                            <a:srgbClr val="404040"/>
-                          </a:solidFill>
-                          <a:latin typeface="Malgun Gothic"/>
-                        </a:defRPr>
-                      </a:pPr>
-                      <a:r>
-                        <a:t>72</a:t>
-                      </a:r>
-                    </a:p>
-                  </a:txBody>
-                  <a:tcPr/>
-                </a:tc>
-                <a:tc>
-                  <a:txBody>
-                    <a:bodyPr/>
-                    <a:lstStyle/>
-                    <a:p>
-                      <a:pPr algn="ctr">
-                        <a:defRPr sz="1400">
-                          <a:solidFill>
-                            <a:srgbClr val="404040"/>
-                          </a:solidFill>
-                          <a:latin typeface="Malgun Gothic"/>
-                        </a:defRPr>
-                      </a:pPr>
-                      <a:r>
-                        <a:t>1320000</a:t>
-                      </a:r>
-                    </a:p>
-                  </a:txBody>
-                  <a:tcPr/>
-                </a:tc>
-                <a:tc>
-                  <a:txBody>
-                    <a:bodyPr/>
-                    <a:lstStyle/>
-                    <a:p>
-                      <a:pPr algn="ctr">
-                        <a:defRPr sz="1400">
-                          <a:solidFill>
-                            <a:srgbClr val="404040"/>
-                          </a:solidFill>
-                          <a:latin typeface="Malgun Gothic"/>
-                        </a:defRPr>
-                      </a:pPr>
-                      <a:r>
-                        <a:t>8.6</a:t>
-                      </a:r>
-                    </a:p>
-                  </a:txBody>
-                  <a:tcPr/>
-                </a:tc>
-              </a:tr>
-              <a:tr h="731520">
-                <a:tc>
-                  <a:txBody>
-                    <a:bodyPr/>
-                    <a:lstStyle/>
-                    <a:p>
-                      <a:pPr algn="ctr">
-                        <a:defRPr sz="1400">
-                          <a:solidFill>
-                            <a:srgbClr val="404040"/>
-                          </a:solidFill>
-                          <a:latin typeface="Malgun Gothic"/>
-                        </a:defRPr>
-                      </a:pPr>
-                      <a:r>
-                        <a:t>F 물관리공사</a:t>
-                      </a:r>
-                    </a:p>
-                  </a:txBody>
-                  <a:tcPr>
+                  <a:tcPr anchor="ctr">
                     <a:solidFill>
-                      <a:srgbClr val="F0F0F0"/>
+                      <a:srgbClr val="F5F5F5"/>
                     </a:solidFill>
                   </a:tcPr>
                 </a:tc>
@@ -4329,22 +6075,20 @@
                     <a:bodyPr/>
                     <a:lstStyle/>
                     <a:p>
-                      <a:pPr algn="ctr">
-                        <a:defRPr sz="1400">
+                      <a:r>
+                        <a:rPr sz="1400" b="0">
                           <a:solidFill>
-                            <a:srgbClr val="404040"/>
+                            <a:srgbClr val="333333"/>
                           </a:solidFill>
                           <a:latin typeface="Malgun Gothic"/>
-                        </a:defRPr>
-                      </a:pPr>
-                      <a:r>
-                        <a:t>65</a:t>
+                        </a:rPr>
+                        <a:t>98</a:t>
                       </a:r>
                     </a:p>
                   </a:txBody>
-                  <a:tcPr>
+                  <a:tcPr anchor="ctr">
                     <a:solidFill>
-                      <a:srgbClr val="F0F0F0"/>
+                      <a:srgbClr val="F5F5F5"/>
                     </a:solidFill>
                   </a:tcPr>
                 </a:tc>
@@ -4353,22 +6097,20 @@
                     <a:bodyPr/>
                     <a:lstStyle/>
                     <a:p>
-                      <a:pPr algn="ctr">
-                        <a:defRPr sz="1400">
+                      <a:r>
+                        <a:rPr sz="1400" b="0">
                           <a:solidFill>
-                            <a:srgbClr val="404040"/>
+                            <a:srgbClr val="333333"/>
                           </a:solidFill>
                           <a:latin typeface="Malgun Gothic"/>
-                        </a:defRPr>
-                      </a:pPr>
-                      <a:r>
-                        <a:t>1180000</a:t>
+                        </a:rPr>
+                        <a:t>1,780,000</a:t>
                       </a:r>
                     </a:p>
                   </a:txBody>
-                  <a:tcPr>
+                  <a:tcPr anchor="ctr">
                     <a:solidFill>
-                      <a:srgbClr val="F0F0F0"/>
+                      <a:srgbClr val="F5F5F5"/>
                     </a:solidFill>
                   </a:tcPr>
                 </a:tc>
@@ -4377,130 +6119,44 @@
                     <a:bodyPr/>
                     <a:lstStyle/>
                     <a:p>
-                      <a:pPr algn="ctr">
-                        <a:defRPr sz="1400">
+                      <a:r>
+                        <a:rPr sz="1400" b="0">
                           <a:solidFill>
-                            <a:srgbClr val="404040"/>
+                            <a:srgbClr val="333333"/>
                           </a:solidFill>
                           <a:latin typeface="Malgun Gothic"/>
-                        </a:defRPr>
-                      </a:pPr>
-                      <a:r>
-                        <a:t>7.7</a:t>
+                        </a:rPr>
+                        <a:t>11.8</a:t>
                       </a:r>
                     </a:p>
                   </a:txBody>
-                  <a:tcPr>
+                  <a:tcPr anchor="ctr">
                     <a:solidFill>
-                      <a:srgbClr val="F0F0F0"/>
+                      <a:srgbClr val="F5F5F5"/>
                     </a:solidFill>
                   </a:tcPr>
                 </a:tc>
               </a:tr>
-              <a:tr h="731520">
+              <a:tr h="240000">
                 <a:tc>
                   <a:txBody>
                     <a:bodyPr/>
                     <a:lstStyle/>
                     <a:p>
-                      <a:pPr algn="ctr">
-                        <a:defRPr sz="1400">
+                      <a:r>
+                        <a:rPr sz="1400" b="0">
                           <a:solidFill>
-                            <a:srgbClr val="404040"/>
+                            <a:srgbClr val="333333"/>
                           </a:solidFill>
                           <a:latin typeface="Malgun Gothic"/>
-                        </a:defRPr>
-                      </a:pPr>
-                      <a:r>
-                        <a:t>G 청정기술</a:t>
+                        </a:rPr>
+                        <a:t>D 에코서비스</a:t>
                       </a:r>
                     </a:p>
                   </a:txBody>
-                  <a:tcPr/>
-                </a:tc>
-                <a:tc>
-                  <a:txBody>
-                    <a:bodyPr/>
-                    <a:lstStyle/>
-                    <a:p>
-                      <a:pPr algn="ctr">
-                        <a:defRPr sz="1400">
-                          <a:solidFill>
-                            <a:srgbClr val="404040"/>
-                          </a:solidFill>
-                          <a:latin typeface="Malgun Gothic"/>
-                        </a:defRPr>
-                      </a:pPr>
-                      <a:r>
-                        <a:t>54</a:t>
-                      </a:r>
-                    </a:p>
-                  </a:txBody>
-                  <a:tcPr/>
-                </a:tc>
-                <a:tc>
-                  <a:txBody>
-                    <a:bodyPr/>
-                    <a:lstStyle/>
-                    <a:p>
-                      <a:pPr algn="ctr">
-                        <a:defRPr sz="1400">
-                          <a:solidFill>
-                            <a:srgbClr val="404040"/>
-                          </a:solidFill>
-                          <a:latin typeface="Malgun Gothic"/>
-                        </a:defRPr>
-                      </a:pPr>
-                      <a:r>
-                        <a:t>980000</a:t>
-                      </a:r>
-                    </a:p>
-                  </a:txBody>
-                  <a:tcPr/>
-                </a:tc>
-                <a:tc>
-                  <a:txBody>
-                    <a:bodyPr/>
-                    <a:lstStyle/>
-                    <a:p>
-                      <a:pPr algn="ctr">
-                        <a:defRPr sz="1400">
-                          <a:solidFill>
-                            <a:srgbClr val="404040"/>
-                          </a:solidFill>
-                          <a:latin typeface="Malgun Gothic"/>
-                        </a:defRPr>
-                      </a:pPr>
-                      <a:r>
-                        <a:t>6.4</a:t>
-                      </a:r>
-                    </a:p>
-                  </a:txBody>
-                  <a:tcPr/>
-                </a:tc>
-              </a:tr>
-              <a:tr h="731520">
-                <a:tc>
-                  <a:txBody>
-                    <a:bodyPr/>
-                    <a:lstStyle/>
-                    <a:p>
-                      <a:pPr algn="ctr">
-                        <a:defRPr sz="1400">
-                          <a:solidFill>
-                            <a:srgbClr val="404040"/>
-                          </a:solidFill>
-                          <a:latin typeface="Malgun Gothic"/>
-                        </a:defRPr>
-                      </a:pPr>
-                      <a:r>
-                        <a:t>H 환경개발</a:t>
-                      </a:r>
-                    </a:p>
-                  </a:txBody>
-                  <a:tcPr>
+                  <a:tcPr anchor="ctr">
                     <a:solidFill>
-                      <a:srgbClr val="F0F0F0"/>
+                      <a:srgbClr val="FFFFFF"/>
                     </a:solidFill>
                   </a:tcPr>
                 </a:tc>
@@ -4509,22 +6165,20 @@
                     <a:bodyPr/>
                     <a:lstStyle/>
                     <a:p>
-                      <a:pPr algn="ctr">
-                        <a:defRPr sz="1400">
+                      <a:r>
+                        <a:rPr sz="1400" b="0">
                           <a:solidFill>
-                            <a:srgbClr val="404040"/>
+                            <a:srgbClr val="333333"/>
                           </a:solidFill>
                           <a:latin typeface="Malgun Gothic"/>
-                        </a:defRPr>
-                      </a:pPr>
-                      <a:r>
-                        <a:t>48</a:t>
+                        </a:rPr>
+                        <a:t>87</a:t>
                       </a:r>
                     </a:p>
                   </a:txBody>
-                  <a:tcPr>
+                  <a:tcPr anchor="ctr">
                     <a:solidFill>
-                      <a:srgbClr val="F0F0F0"/>
+                      <a:srgbClr val="FFFFFF"/>
                     </a:solidFill>
                   </a:tcPr>
                 </a:tc>
@@ -4533,22 +6187,20 @@
                     <a:bodyPr/>
                     <a:lstStyle/>
                     <a:p>
-                      <a:pPr algn="ctr">
-                        <a:defRPr sz="1400">
+                      <a:r>
+                        <a:rPr sz="1400" b="0">
                           <a:solidFill>
-                            <a:srgbClr val="404040"/>
+                            <a:srgbClr val="333333"/>
                           </a:solidFill>
                           <a:latin typeface="Malgun Gothic"/>
-                        </a:defRPr>
-                      </a:pPr>
-                      <a:r>
-                        <a:t>870000</a:t>
+                        </a:rPr>
+                        <a:t>1,650,000</a:t>
                       </a:r>
                     </a:p>
                   </a:txBody>
-                  <a:tcPr>
+                  <a:tcPr anchor="ctr">
                     <a:solidFill>
-                      <a:srgbClr val="F0F0F0"/>
+                      <a:srgbClr val="FFFFFF"/>
                     </a:solidFill>
                   </a:tcPr>
                 </a:tc>
@@ -4557,22 +6209,380 @@
                     <a:bodyPr/>
                     <a:lstStyle/>
                     <a:p>
-                      <a:pPr algn="ctr">
-                        <a:defRPr sz="1400">
+                      <a:r>
+                        <a:rPr sz="1400" b="0">
                           <a:solidFill>
-                            <a:srgbClr val="404040"/>
+                            <a:srgbClr val="333333"/>
                           </a:solidFill>
                           <a:latin typeface="Malgun Gothic"/>
-                        </a:defRPr>
-                      </a:pPr>
-                      <a:r>
-                        <a:t>5.7</a:t>
+                        </a:rPr>
+                        <a:t>10.5</a:t>
                       </a:r>
                     </a:p>
                   </a:txBody>
-                  <a:tcPr>
+                  <a:tcPr anchor="ctr">
                     <a:solidFill>
-                      <a:srgbClr val="F0F0F0"/>
+                      <a:srgbClr val="FFFFFF"/>
+                    </a:solidFill>
+                  </a:tcPr>
+                </a:tc>
+              </a:tr>
+              <a:tr h="240000">
+                <a:tc>
+                  <a:txBody>
+                    <a:bodyPr/>
+                    <a:lstStyle/>
+                    <a:p>
+                      <a:r>
+                        <a:rPr sz="1400" b="0">
+                          <a:solidFill>
+                            <a:srgbClr val="333333"/>
+                          </a:solidFill>
+                          <a:latin typeface="Malgun Gothic"/>
+                        </a:rPr>
+                        <a:t>E 클린워터</a:t>
+                      </a:r>
+                    </a:p>
+                  </a:txBody>
+                  <a:tcPr anchor="ctr">
+                    <a:solidFill>
+                      <a:srgbClr val="F5F5F5"/>
+                    </a:solidFill>
+                  </a:tcPr>
+                </a:tc>
+                <a:tc>
+                  <a:txBody>
+                    <a:bodyPr/>
+                    <a:lstStyle/>
+                    <a:p>
+                      <a:r>
+                        <a:rPr sz="1400" b="0">
+                          <a:solidFill>
+                            <a:srgbClr val="333333"/>
+                          </a:solidFill>
+                          <a:latin typeface="Malgun Gothic"/>
+                        </a:rPr>
+                        <a:t>72</a:t>
+                      </a:r>
+                    </a:p>
+                  </a:txBody>
+                  <a:tcPr anchor="ctr">
+                    <a:solidFill>
+                      <a:srgbClr val="F5F5F5"/>
+                    </a:solidFill>
+                  </a:tcPr>
+                </a:tc>
+                <a:tc>
+                  <a:txBody>
+                    <a:bodyPr/>
+                    <a:lstStyle/>
+                    <a:p>
+                      <a:r>
+                        <a:rPr sz="1400" b="0">
+                          <a:solidFill>
+                            <a:srgbClr val="333333"/>
+                          </a:solidFill>
+                          <a:latin typeface="Malgun Gothic"/>
+                        </a:rPr>
+                        <a:t>1,320,000</a:t>
+                      </a:r>
+                    </a:p>
+                  </a:txBody>
+                  <a:tcPr anchor="ctr">
+                    <a:solidFill>
+                      <a:srgbClr val="F5F5F5"/>
+                    </a:solidFill>
+                  </a:tcPr>
+                </a:tc>
+                <a:tc>
+                  <a:txBody>
+                    <a:bodyPr/>
+                    <a:lstStyle/>
+                    <a:p>
+                      <a:r>
+                        <a:rPr sz="1400" b="0">
+                          <a:solidFill>
+                            <a:srgbClr val="333333"/>
+                          </a:solidFill>
+                          <a:latin typeface="Malgun Gothic"/>
+                        </a:rPr>
+                        <a:t>8.9</a:t>
+                      </a:r>
+                    </a:p>
+                  </a:txBody>
+                  <a:tcPr anchor="ctr">
+                    <a:solidFill>
+                      <a:srgbClr val="F5F5F5"/>
+                    </a:solidFill>
+                  </a:tcPr>
+                </a:tc>
+              </a:tr>
+              <a:tr h="240000">
+                <a:tc>
+                  <a:txBody>
+                    <a:bodyPr/>
+                    <a:lstStyle/>
+                    <a:p>
+                      <a:r>
+                        <a:rPr sz="1400" b="0">
+                          <a:solidFill>
+                            <a:srgbClr val="333333"/>
+                          </a:solidFill>
+                          <a:latin typeface="Malgun Gothic"/>
+                        </a:rPr>
+                        <a:t>F 물관리공사</a:t>
+                      </a:r>
+                    </a:p>
+                  </a:txBody>
+                  <a:tcPr anchor="ctr">
+                    <a:solidFill>
+                      <a:srgbClr val="FFFFFF"/>
+                    </a:solidFill>
+                  </a:tcPr>
+                </a:tc>
+                <a:tc>
+                  <a:txBody>
+                    <a:bodyPr/>
+                    <a:lstStyle/>
+                    <a:p>
+                      <a:r>
+                        <a:rPr sz="1400" b="0">
+                          <a:solidFill>
+                            <a:srgbClr val="333333"/>
+                          </a:solidFill>
+                          <a:latin typeface="Malgun Gothic"/>
+                        </a:rPr>
+                        <a:t>65</a:t>
+                      </a:r>
+                    </a:p>
+                  </a:txBody>
+                  <a:tcPr anchor="ctr">
+                    <a:solidFill>
+                      <a:srgbClr val="FFFFFF"/>
+                    </a:solidFill>
+                  </a:tcPr>
+                </a:tc>
+                <a:tc>
+                  <a:txBody>
+                    <a:bodyPr/>
+                    <a:lstStyle/>
+                    <a:p>
+                      <a:r>
+                        <a:rPr sz="1400" b="0">
+                          <a:solidFill>
+                            <a:srgbClr val="333333"/>
+                          </a:solidFill>
+                          <a:latin typeface="Malgun Gothic"/>
+                        </a:rPr>
+                        <a:t>1,180,000</a:t>
+                      </a:r>
+                    </a:p>
+                  </a:txBody>
+                  <a:tcPr anchor="ctr">
+                    <a:solidFill>
+                      <a:srgbClr val="FFFFFF"/>
+                    </a:solidFill>
+                  </a:tcPr>
+                </a:tc>
+                <a:tc>
+                  <a:txBody>
+                    <a:bodyPr/>
+                    <a:lstStyle/>
+                    <a:p>
+                      <a:r>
+                        <a:rPr sz="1400" b="0">
+                          <a:solidFill>
+                            <a:srgbClr val="333333"/>
+                          </a:solidFill>
+                          <a:latin typeface="Malgun Gothic"/>
+                        </a:rPr>
+                        <a:t>7.7</a:t>
+                      </a:r>
+                    </a:p>
+                  </a:txBody>
+                  <a:tcPr anchor="ctr">
+                    <a:solidFill>
+                      <a:srgbClr val="FFFFFF"/>
+                    </a:solidFill>
+                  </a:tcPr>
+                </a:tc>
+              </a:tr>
+              <a:tr h="240000">
+                <a:tc>
+                  <a:txBody>
+                    <a:bodyPr/>
+                    <a:lstStyle/>
+                    <a:p>
+                      <a:r>
+                        <a:rPr sz="1400" b="0">
+                          <a:solidFill>
+                            <a:srgbClr val="333333"/>
+                          </a:solidFill>
+                          <a:latin typeface="Malgun Gothic"/>
+                        </a:rPr>
+                        <a:t>G 환경산업</a:t>
+                      </a:r>
+                    </a:p>
+                  </a:txBody>
+                  <a:tcPr anchor="ctr">
+                    <a:solidFill>
+                      <a:srgbClr val="F5F5F5"/>
+                    </a:solidFill>
+                  </a:tcPr>
+                </a:tc>
+                <a:tc>
+                  <a:txBody>
+                    <a:bodyPr/>
+                    <a:lstStyle/>
+                    <a:p>
+                      <a:r>
+                        <a:rPr sz="1400" b="0">
+                          <a:solidFill>
+                            <a:srgbClr val="333333"/>
+                          </a:solidFill>
+                          <a:latin typeface="Malgun Gothic"/>
+                        </a:rPr>
+                        <a:t>58</a:t>
+                      </a:r>
+                    </a:p>
+                  </a:txBody>
+                  <a:tcPr anchor="ctr">
+                    <a:solidFill>
+                      <a:srgbClr val="F5F5F5"/>
+                    </a:solidFill>
+                  </a:tcPr>
+                </a:tc>
+                <a:tc>
+                  <a:txBody>
+                    <a:bodyPr/>
+                    <a:lstStyle/>
+                    <a:p>
+                      <a:r>
+                        <a:rPr sz="1400" b="0">
+                          <a:solidFill>
+                            <a:srgbClr val="333333"/>
+                          </a:solidFill>
+                          <a:latin typeface="Malgun Gothic"/>
+                        </a:rPr>
+                        <a:t>980,000</a:t>
+                      </a:r>
+                    </a:p>
+                  </a:txBody>
+                  <a:tcPr anchor="ctr">
+                    <a:solidFill>
+                      <a:srgbClr val="F5F5F5"/>
+                    </a:solidFill>
+                  </a:tcPr>
+                </a:tc>
+                <a:tc>
+                  <a:txBody>
+                    <a:bodyPr/>
+                    <a:lstStyle/>
+                    <a:p>
+                      <a:r>
+                        <a:rPr sz="1400" b="0">
+                          <a:solidFill>
+                            <a:srgbClr val="333333"/>
+                          </a:solidFill>
+                          <a:latin typeface="Malgun Gothic"/>
+                        </a:rPr>
+                        <a:t>6.5</a:t>
+                      </a:r>
+                    </a:p>
+                  </a:txBody>
+                  <a:tcPr anchor="ctr">
+                    <a:solidFill>
+                      <a:srgbClr val="F5F5F5"/>
+                    </a:solidFill>
+                  </a:tcPr>
+                </a:tc>
+              </a:tr>
+              <a:tr h="240000">
+                <a:tc>
+                  <a:txBody>
+                    <a:bodyPr/>
+                    <a:lstStyle/>
+                    <a:p>
+                      <a:r>
+                        <a:rPr sz="1400" b="0">
+                          <a:solidFill>
+                            <a:srgbClr val="333333"/>
+                          </a:solidFill>
+                          <a:latin typeface="Malgun Gothic"/>
+                        </a:rPr>
+                        <a:t>H 워터솔루션</a:t>
+                      </a:r>
+                    </a:p>
+                  </a:txBody>
+                  <a:tcPr anchor="ctr">
+                    <a:solidFill>
+                      <a:srgbClr val="FFFFFF"/>
+                    </a:solidFill>
+                  </a:tcPr>
+                </a:tc>
+                <a:tc>
+                  <a:txBody>
+                    <a:bodyPr/>
+                    <a:lstStyle/>
+                    <a:p>
+                      <a:r>
+                        <a:rPr sz="1400" b="0">
+                          <a:solidFill>
+                            <a:srgbClr val="333333"/>
+                          </a:solidFill>
+                          <a:latin typeface="Malgun Gothic"/>
+                        </a:rPr>
+                        <a:t>45</a:t>
+                      </a:r>
+                    </a:p>
+                  </a:txBody>
+                  <a:tcPr anchor="ctr">
+                    <a:solidFill>
+                      <a:srgbClr val="FFFFFF"/>
+                    </a:solidFill>
+                  </a:tcPr>
+                </a:tc>
+                <a:tc>
+                  <a:txBody>
+                    <a:bodyPr/>
+                    <a:lstStyle/>
+                    <a:p>
+                      <a:r>
+                        <a:rPr sz="1400" b="0">
+                          <a:solidFill>
+                            <a:srgbClr val="333333"/>
+                          </a:solidFill>
+                          <a:latin typeface="Malgun Gothic"/>
+                        </a:rPr>
+                        <a:t>820,000</a:t>
+                      </a:r>
+                    </a:p>
+                  </a:txBody>
+                  <a:tcPr anchor="ctr">
+                    <a:solidFill>
+                      <a:srgbClr val="FFFFFF"/>
+                    </a:solidFill>
+                  </a:tcPr>
+                </a:tc>
+                <a:tc>
+                  <a:txBody>
+                    <a:bodyPr/>
+                    <a:lstStyle/>
+                    <a:p>
+                      <a:r>
+                        <a:rPr sz="1400" b="0">
+                          <a:solidFill>
+                            <a:srgbClr val="333333"/>
+                          </a:solidFill>
+                          <a:latin typeface="Malgun Gothic"/>
+                        </a:rPr>
+                        <a:t>5.4</a:t>
+                      </a:r>
+                    </a:p>
+                  </a:txBody>
+                  <a:tcPr anchor="ctr">
+                    <a:solidFill>
+                      <a:srgbClr val="FFFFFF"/>
                     </a:solidFill>
                   </a:tcPr>
                 </a:tc>
@@ -4581,6 +6591,41 @@
           </a:graphicData>
         </a:graphic>
       </p:graphicFrame>
+      <p:sp>
+        <p:nvSpPr>
+          <p:cNvPr id="4" name="TextBox 3"/>
+          <p:cNvSpPr txBox="1"/>
+          <p:nvPr/>
+        </p:nvSpPr>
+        <p:spPr>
+          <a:xfrm>
+            <a:off x="540000" y="3168000"/>
+            <a:ext cx="9000000" cy="360000"/>
+          </a:xfrm>
+          <a:prstGeom prst="rect">
+            <a:avLst/>
+          </a:prstGeom>
+          <a:noFill/>
+        </p:spPr>
+        <p:txBody>
+          <a:bodyPr wrap="none">
+            <a:spAutoFit/>
+          </a:bodyPr>
+          <a:lstStyle/>
+          <a:p>
+            <a:pPr algn="r"/>
+            <a:r>
+              <a:rPr sz="1600" b="1">
+                <a:solidFill>
+                  <a:srgbClr val="D4AF37"/>
+                </a:solidFill>
+                <a:latin typeface="Malgun Gothic"/>
+              </a:rPr>
+              <a:t>상위 8 개사 합계 시장점유율: 83.5%</a:t>
+            </a:r>
+          </a:p>
+        </p:txBody>
+      </p:sp>
     </p:spTree>
   </p:cSld>
   <p:clrMapOvr>
@@ -4601,31 +6646,14 @@
       <p:grpSpPr/>
       <p:sp>
         <p:nvSpPr>
-          <p:cNvPr id="2" name="Title 1"/>
-          <p:cNvSpPr>
-            <a:spLocks noGrp="1"/>
-          </p:cNvSpPr>
-          <p:nvPr>
-            <p:ph type="title"/>
-          </p:nvPr>
-        </p:nvSpPr>
-        <p:spPr/>
-        <p:txBody>
-          <a:bodyPr/>
-          <a:lstStyle/>
-          <a:p/>
-        </p:txBody>
-      </p:sp>
-      <p:sp>
-        <p:nvSpPr>
-          <p:cNvPr id="3" name="TextBox 2"/>
+          <p:cNvPr id="2" name="TextBox 1"/>
           <p:cNvSpPr txBox="1"/>
           <p:nvPr/>
         </p:nvSpPr>
         <p:spPr>
           <a:xfrm>
-            <a:off x="457200" y="274320"/>
-            <a:ext cx="8229600" cy="731520"/>
+            <a:off x="360000" y="360000"/>
+            <a:ext cx="3600000" cy="360000"/>
           </a:xfrm>
           <a:prstGeom prst="rect">
             <a:avLst/>
@@ -4637,587 +6665,34 @@
             <a:spAutoFit/>
           </a:bodyPr>
           <a:lstStyle/>
-          <a:p/>
-          <a:p>
-            <a:pPr>
-              <a:defRPr sz="2800" b="1">
+          <a:p>
+            <a:r>
+              <a:rPr sz="2800" b="1">
                 <a:solidFill>
                   <a:srgbClr val="003366"/>
                 </a:solidFill>
                 <a:latin typeface="Malgun Gothic"/>
-              </a:defRPr>
-            </a:pPr>
-            <a:r>
-              <a:t>매출액 현황 (상위 5개사)</a:t>
+              </a:rPr>
+              <a:t>매출액 현황 (최근 3 개년 상위 5 개사)</a:t>
             </a:r>
           </a:p>
         </p:txBody>
       </p:sp>
       <p:graphicFrame>
         <p:nvGraphicFramePr>
-          <p:cNvPr id="4" name="Table 3"/>
+          <p:cNvPr id="3" name="Chart 2"/>
           <p:cNvGraphicFramePr>
             <a:graphicFrameLocks noGrp="1"/>
           </p:cNvGraphicFramePr>
           <p:nvPr/>
         </p:nvGraphicFramePr>
         <p:xfrm>
-          <a:off x="457200" y="1097280"/>
-          <a:ext cx="8229600" cy="4389120"/>
+          <a:off x="720000" y="900000"/>
+          <a:ext cx="8640000" cy="2160000"/>
         </p:xfrm>
         <a:graphic>
-          <a:graphicData uri="http://schemas.openxmlformats.org/drawingml/2006/table">
-            <a:tbl>
-              <a:tblPr firstRow="1" bandRow="1">
-                <a:tableStyleId>{5C22544A-7EE6-4342-B048-85BDC9FD1C3A}</a:tableStyleId>
-              </a:tblPr>
-              <a:tblGrid>
-                <a:gridCol w="1828800"/>
-                <a:gridCol w="2103120"/>
-                <a:gridCol w="2103120"/>
-                <a:gridCol w="2194560"/>
-              </a:tblGrid>
-              <a:tr h="731520">
-                <a:tc>
-                  <a:txBody>
-                    <a:bodyPr/>
-                    <a:lstStyle/>
-                    <a:p>
-                      <a:pPr algn="ctr">
-                        <a:defRPr sz="1600" b="1">
-                          <a:solidFill>
-                            <a:srgbClr val="FFFFFF"/>
-                          </a:solidFill>
-                          <a:latin typeface="Malgun Gothic"/>
-                        </a:defRPr>
-                      </a:pPr>
-                      <a:r>
-                        <a:t>업체명</a:t>
-                      </a:r>
-                    </a:p>
-                  </a:txBody>
-                  <a:tcPr>
-                    <a:solidFill>
-                      <a:srgbClr val="003366"/>
-                    </a:solidFill>
-                  </a:tcPr>
-                </a:tc>
-                <a:tc>
-                  <a:txBody>
-                    <a:bodyPr/>
-                    <a:lstStyle/>
-                    <a:p>
-                      <a:pPr algn="ctr">
-                        <a:defRPr sz="1600" b="1">
-                          <a:solidFill>
-                            <a:srgbClr val="FFFFFF"/>
-                          </a:solidFill>
-                          <a:latin typeface="Malgun Gothic"/>
-                        </a:defRPr>
-                      </a:pPr>
-                      <a:r>
-                        <a:t>2022년 (억원)</a:t>
-                      </a:r>
-                    </a:p>
-                  </a:txBody>
-                  <a:tcPr>
-                    <a:solidFill>
-                      <a:srgbClr val="003366"/>
-                    </a:solidFill>
-                  </a:tcPr>
-                </a:tc>
-                <a:tc>
-                  <a:txBody>
-                    <a:bodyPr/>
-                    <a:lstStyle/>
-                    <a:p>
-                      <a:pPr algn="ctr">
-                        <a:defRPr sz="1600" b="1">
-                          <a:solidFill>
-                            <a:srgbClr val="FFFFFF"/>
-                          </a:solidFill>
-                          <a:latin typeface="Malgun Gothic"/>
-                        </a:defRPr>
-                      </a:pPr>
-                      <a:r>
-                        <a:t>2023년 (억원)</a:t>
-                      </a:r>
-                    </a:p>
-                  </a:txBody>
-                  <a:tcPr>
-                    <a:solidFill>
-                      <a:srgbClr val="003366"/>
-                    </a:solidFill>
-                  </a:tcPr>
-                </a:tc>
-                <a:tc>
-                  <a:txBody>
-                    <a:bodyPr/>
-                    <a:lstStyle/>
-                    <a:p>
-                      <a:pPr algn="ctr">
-                        <a:defRPr sz="1600" b="1">
-                          <a:solidFill>
-                            <a:srgbClr val="FFFFFF"/>
-                          </a:solidFill>
-                          <a:latin typeface="Malgun Gothic"/>
-                        </a:defRPr>
-                      </a:pPr>
-                      <a:r>
-                        <a:t>2024년 예상 (억원)</a:t>
-                      </a:r>
-                    </a:p>
-                  </a:txBody>
-                  <a:tcPr>
-                    <a:solidFill>
-                      <a:srgbClr val="003366"/>
-                    </a:solidFill>
-                  </a:tcPr>
-                </a:tc>
-              </a:tr>
-              <a:tr h="731520">
-                <a:tc>
-                  <a:txBody>
-                    <a:bodyPr/>
-                    <a:lstStyle/>
-                    <a:p>
-                      <a:pPr algn="ctr">
-                        <a:defRPr sz="1400">
-                          <a:solidFill>
-                            <a:srgbClr val="404040"/>
-                          </a:solidFill>
-                          <a:latin typeface="Malgun Gothic"/>
-                        </a:defRPr>
-                      </a:pPr>
-                      <a:r>
-                        <a:t>A 환경건설</a:t>
-                      </a:r>
-                    </a:p>
-                  </a:txBody>
-                  <a:tcPr/>
-                </a:tc>
-                <a:tc>
-                  <a:txBody>
-                    <a:bodyPr/>
-                    <a:lstStyle/>
-                    <a:p>
-                      <a:pPr algn="ctr">
-                        <a:defRPr sz="1400">
-                          <a:solidFill>
-                            <a:srgbClr val="404040"/>
-                          </a:solidFill>
-                          <a:latin typeface="Malgun Gothic"/>
-                        </a:defRPr>
-                      </a:pPr>
-                      <a:r>
-                        <a:t>4850</a:t>
-                      </a:r>
-                    </a:p>
-                  </a:txBody>
-                  <a:tcPr/>
-                </a:tc>
-                <a:tc>
-                  <a:txBody>
-                    <a:bodyPr/>
-                    <a:lstStyle/>
-                    <a:p>
-                      <a:pPr algn="ctr">
-                        <a:defRPr sz="1400">
-                          <a:solidFill>
-                            <a:srgbClr val="404040"/>
-                          </a:solidFill>
-                          <a:latin typeface="Malgun Gothic"/>
-                        </a:defRPr>
-                      </a:pPr>
-                      <a:r>
-                        <a:t>5120</a:t>
-                      </a:r>
-                    </a:p>
-                  </a:txBody>
-                  <a:tcPr/>
-                </a:tc>
-                <a:tc>
-                  <a:txBody>
-                    <a:bodyPr/>
-                    <a:lstStyle/>
-                    <a:p>
-                      <a:pPr algn="ctr">
-                        <a:defRPr sz="1400">
-                          <a:solidFill>
-                            <a:srgbClr val="404040"/>
-                          </a:solidFill>
-                          <a:latin typeface="Malgun Gothic"/>
-                        </a:defRPr>
-                      </a:pPr>
-                      <a:r>
-                        <a:t>5480</a:t>
-                      </a:r>
-                    </a:p>
-                  </a:txBody>
-                  <a:tcPr/>
-                </a:tc>
-              </a:tr>
-              <a:tr h="731520">
-                <a:tc>
-                  <a:txBody>
-                    <a:bodyPr/>
-                    <a:lstStyle/>
-                    <a:p>
-                      <a:pPr algn="ctr">
-                        <a:defRPr sz="1400">
-                          <a:solidFill>
-                            <a:srgbClr val="404040"/>
-                          </a:solidFill>
-                          <a:latin typeface="Malgun Gothic"/>
-                        </a:defRPr>
-                      </a:pPr>
-                      <a:r>
-                        <a:t>B 워터테크</a:t>
-                      </a:r>
-                    </a:p>
-                  </a:txBody>
-                  <a:tcPr>
-                    <a:solidFill>
-                      <a:srgbClr val="F0F0F0"/>
-                    </a:solidFill>
-                  </a:tcPr>
-                </a:tc>
-                <a:tc>
-                  <a:txBody>
-                    <a:bodyPr/>
-                    <a:lstStyle/>
-                    <a:p>
-                      <a:pPr algn="ctr">
-                        <a:defRPr sz="1400">
-                          <a:solidFill>
-                            <a:srgbClr val="404040"/>
-                          </a:solidFill>
-                          <a:latin typeface="Malgun Gothic"/>
-                        </a:defRPr>
-                      </a:pPr>
-                      <a:r>
-                        <a:t>3980</a:t>
-                      </a:r>
-                    </a:p>
-                  </a:txBody>
-                  <a:tcPr>
-                    <a:solidFill>
-                      <a:srgbClr val="F0F0F0"/>
-                    </a:solidFill>
-                  </a:tcPr>
-                </a:tc>
-                <a:tc>
-                  <a:txBody>
-                    <a:bodyPr/>
-                    <a:lstStyle/>
-                    <a:p>
-                      <a:pPr algn="ctr">
-                        <a:defRPr sz="1400">
-                          <a:solidFill>
-                            <a:srgbClr val="404040"/>
-                          </a:solidFill>
-                          <a:latin typeface="Malgun Gothic"/>
-                        </a:defRPr>
-                      </a:pPr>
-                      <a:r>
-                        <a:t>4250</a:t>
-                      </a:r>
-                    </a:p>
-                  </a:txBody>
-                  <a:tcPr>
-                    <a:solidFill>
-                      <a:srgbClr val="F0F0F0"/>
-                    </a:solidFill>
-                  </a:tcPr>
-                </a:tc>
-                <a:tc>
-                  <a:txBody>
-                    <a:bodyPr/>
-                    <a:lstStyle/>
-                    <a:p>
-                      <a:pPr algn="ctr">
-                        <a:defRPr sz="1400">
-                          <a:solidFill>
-                            <a:srgbClr val="404040"/>
-                          </a:solidFill>
-                          <a:latin typeface="Malgun Gothic"/>
-                        </a:defRPr>
-                      </a:pPr>
-                      <a:r>
-                        <a:t>4580</a:t>
-                      </a:r>
-                    </a:p>
-                  </a:txBody>
-                  <a:tcPr>
-                    <a:solidFill>
-                      <a:srgbClr val="F0F0F0"/>
-                    </a:solidFill>
-                  </a:tcPr>
-                </a:tc>
-              </a:tr>
-              <a:tr h="731520">
-                <a:tc>
-                  <a:txBody>
-                    <a:bodyPr/>
-                    <a:lstStyle/>
-                    <a:p>
-                      <a:pPr algn="ctr">
-                        <a:defRPr sz="1400">
-                          <a:solidFill>
-                            <a:srgbClr val="404040"/>
-                          </a:solidFill>
-                          <a:latin typeface="Malgun Gothic"/>
-                        </a:defRPr>
-                      </a:pPr>
-                      <a:r>
-                        <a:t>C 그린시스템</a:t>
-                      </a:r>
-                    </a:p>
-                  </a:txBody>
-                  <a:tcPr/>
-                </a:tc>
-                <a:tc>
-                  <a:txBody>
-                    <a:bodyPr/>
-                    <a:lstStyle/>
-                    <a:p>
-                      <a:pPr algn="ctr">
-                        <a:defRPr sz="1400">
-                          <a:solidFill>
-                            <a:srgbClr val="404040"/>
-                          </a:solidFill>
-                          <a:latin typeface="Malgun Gothic"/>
-                        </a:defRPr>
-                      </a:pPr>
-                      <a:r>
-                        <a:t>2870</a:t>
-                      </a:r>
-                    </a:p>
-                  </a:txBody>
-                  <a:tcPr/>
-                </a:tc>
-                <a:tc>
-                  <a:txBody>
-                    <a:bodyPr/>
-                    <a:lstStyle/>
-                    <a:p>
-                      <a:pPr algn="ctr">
-                        <a:defRPr sz="1400">
-                          <a:solidFill>
-                            <a:srgbClr val="404040"/>
-                          </a:solidFill>
-                          <a:latin typeface="Malgun Gothic"/>
-                        </a:defRPr>
-                      </a:pPr>
-                      <a:r>
-                        <a:t>3050</a:t>
-                      </a:r>
-                    </a:p>
-                  </a:txBody>
-                  <a:tcPr/>
-                </a:tc>
-                <a:tc>
-                  <a:txBody>
-                    <a:bodyPr/>
-                    <a:lstStyle/>
-                    <a:p>
-                      <a:pPr algn="ctr">
-                        <a:defRPr sz="1400">
-                          <a:solidFill>
-                            <a:srgbClr val="404040"/>
-                          </a:solidFill>
-                          <a:latin typeface="Malgun Gothic"/>
-                        </a:defRPr>
-                      </a:pPr>
-                      <a:r>
-                        <a:t>3280</a:t>
-                      </a:r>
-                    </a:p>
-                  </a:txBody>
-                  <a:tcPr/>
-                </a:tc>
-              </a:tr>
-              <a:tr h="731520">
-                <a:tc>
-                  <a:txBody>
-                    <a:bodyPr/>
-                    <a:lstStyle/>
-                    <a:p>
-                      <a:pPr algn="ctr">
-                        <a:defRPr sz="1400">
-                          <a:solidFill>
-                            <a:srgbClr val="404040"/>
-                          </a:solidFill>
-                          <a:latin typeface="Malgun Gothic"/>
-                        </a:defRPr>
-                      </a:pPr>
-                      <a:r>
-                        <a:t>D 에코서비스</a:t>
-                      </a:r>
-                    </a:p>
-                  </a:txBody>
-                  <a:tcPr>
-                    <a:solidFill>
-                      <a:srgbClr val="F0F0F0"/>
-                    </a:solidFill>
-                  </a:tcPr>
-                </a:tc>
-                <a:tc>
-                  <a:txBody>
-                    <a:bodyPr/>
-                    <a:lstStyle/>
-                    <a:p>
-                      <a:pPr algn="ctr">
-                        <a:defRPr sz="1400">
-                          <a:solidFill>
-                            <a:srgbClr val="404040"/>
-                          </a:solidFill>
-                          <a:latin typeface="Malgun Gothic"/>
-                        </a:defRPr>
-                      </a:pPr>
-                      <a:r>
-                        <a:t>2450</a:t>
-                      </a:r>
-                    </a:p>
-                  </a:txBody>
-                  <a:tcPr>
-                    <a:solidFill>
-                      <a:srgbClr val="F0F0F0"/>
-                    </a:solidFill>
-                  </a:tcPr>
-                </a:tc>
-                <a:tc>
-                  <a:txBody>
-                    <a:bodyPr/>
-                    <a:lstStyle/>
-                    <a:p>
-                      <a:pPr algn="ctr">
-                        <a:defRPr sz="1400">
-                          <a:solidFill>
-                            <a:srgbClr val="404040"/>
-                          </a:solidFill>
-                          <a:latin typeface="Malgun Gothic"/>
-                        </a:defRPr>
-                      </a:pPr>
-                      <a:r>
-                        <a:t>2620</a:t>
-                      </a:r>
-                    </a:p>
-                  </a:txBody>
-                  <a:tcPr>
-                    <a:solidFill>
-                      <a:srgbClr val="F0F0F0"/>
-                    </a:solidFill>
-                  </a:tcPr>
-                </a:tc>
-                <a:tc>
-                  <a:txBody>
-                    <a:bodyPr/>
-                    <a:lstStyle/>
-                    <a:p>
-                      <a:pPr algn="ctr">
-                        <a:defRPr sz="1400">
-                          <a:solidFill>
-                            <a:srgbClr val="404040"/>
-                          </a:solidFill>
-                          <a:latin typeface="Malgun Gothic"/>
-                        </a:defRPr>
-                      </a:pPr>
-                      <a:r>
-                        <a:t>2810</a:t>
-                      </a:r>
-                    </a:p>
-                  </a:txBody>
-                  <a:tcPr>
-                    <a:solidFill>
-                      <a:srgbClr val="F0F0F0"/>
-                    </a:solidFill>
-                  </a:tcPr>
-                </a:tc>
-              </a:tr>
-              <a:tr h="731520">
-                <a:tc>
-                  <a:txBody>
-                    <a:bodyPr/>
-                    <a:lstStyle/>
-                    <a:p>
-                      <a:pPr algn="ctr">
-                        <a:defRPr sz="1400">
-                          <a:solidFill>
-                            <a:srgbClr val="404040"/>
-                          </a:solidFill>
-                          <a:latin typeface="Malgun Gothic"/>
-                        </a:defRPr>
-                      </a:pPr>
-                      <a:r>
-                        <a:t>E 클린워터</a:t>
-                      </a:r>
-                    </a:p>
-                  </a:txBody>
-                  <a:tcPr/>
-                </a:tc>
-                <a:tc>
-                  <a:txBody>
-                    <a:bodyPr/>
-                    <a:lstStyle/>
-                    <a:p>
-                      <a:pPr algn="ctr">
-                        <a:defRPr sz="1400">
-                          <a:solidFill>
-                            <a:srgbClr val="404040"/>
-                          </a:solidFill>
-                          <a:latin typeface="Malgun Gothic"/>
-                        </a:defRPr>
-                      </a:pPr>
-                      <a:r>
-                        <a:t>2180</a:t>
-                      </a:r>
-                    </a:p>
-                  </a:txBody>
-                  <a:tcPr/>
-                </a:tc>
-                <a:tc>
-                  <a:txBody>
-                    <a:bodyPr/>
-                    <a:lstStyle/>
-                    <a:p>
-                      <a:pPr algn="ctr">
-                        <a:defRPr sz="1400">
-                          <a:solidFill>
-                            <a:srgbClr val="404040"/>
-                          </a:solidFill>
-                          <a:latin typeface="Malgun Gothic"/>
-                        </a:defRPr>
-                      </a:pPr>
-                      <a:r>
-                        <a:t>2340</a:t>
-                      </a:r>
-                    </a:p>
-                  </a:txBody>
-                  <a:tcPr/>
-                </a:tc>
-                <a:tc>
-                  <a:txBody>
-                    <a:bodyPr/>
-                    <a:lstStyle/>
-                    <a:p>
-                      <a:pPr algn="ctr">
-                        <a:defRPr sz="1400">
-                          <a:solidFill>
-                            <a:srgbClr val="404040"/>
-                          </a:solidFill>
-                          <a:latin typeface="Malgun Gothic"/>
-                        </a:defRPr>
-                      </a:pPr>
-                      <a:r>
-                        <a:t>2520</a:t>
-                      </a:r>
-                    </a:p>
-                  </a:txBody>
-                  <a:tcPr/>
-                </a:tc>
-              </a:tr>
-            </a:tbl>
+          <a:graphicData uri="http://schemas.openxmlformats.org/drawingml/2006/chart">
+            <c:chart xmlns:c="http://schemas.openxmlformats.org/drawingml/2006/chart" r:id="rId2"/>
           </a:graphicData>
         </a:graphic>
       </p:graphicFrame>
@@ -5241,31 +6716,14 @@
       <p:grpSpPr/>
       <p:sp>
         <p:nvSpPr>
-          <p:cNvPr id="2" name="Title 1"/>
-          <p:cNvSpPr>
-            <a:spLocks noGrp="1"/>
-          </p:cNvSpPr>
-          <p:nvPr>
-            <p:ph type="title"/>
-          </p:nvPr>
-        </p:nvSpPr>
-        <p:spPr/>
-        <p:txBody>
-          <a:bodyPr/>
-          <a:lstStyle/>
-          <a:p/>
-        </p:txBody>
-      </p:sp>
-      <p:sp>
-        <p:nvSpPr>
-          <p:cNvPr id="3" name="TextBox 2"/>
+          <p:cNvPr id="2" name="TextBox 1"/>
           <p:cNvSpPr txBox="1"/>
           <p:nvPr/>
         </p:nvSpPr>
         <p:spPr>
           <a:xfrm>
-            <a:off x="457200" y="274320"/>
-            <a:ext cx="8229600" cy="731520"/>
+            <a:off x="360000" y="360000"/>
+            <a:ext cx="3600000" cy="360000"/>
           </a:xfrm>
           <a:prstGeom prst="rect">
             <a:avLst/>
@@ -5277,33 +6735,378 @@
             <a:spAutoFit/>
           </a:bodyPr>
           <a:lstStyle/>
-          <a:p/>
-          <a:p>
-            <a:pPr>
-              <a:defRPr sz="2800" b="1">
+          <a:p>
+            <a:r>
+              <a:rPr sz="2800" b="1">
                 <a:solidFill>
                   <a:srgbClr val="003366"/>
                 </a:solidFill>
                 <a:latin typeface="Malgun Gothic"/>
-              </a:defRPr>
-            </a:pPr>
-            <a:r>
+              </a:rPr>
               <a:t>지역별 업체 분포</a:t>
+            </a:r>
+          </a:p>
+        </p:txBody>
+      </p:sp>
+      <p:sp>
+        <p:nvSpPr>
+          <p:cNvPr id="3" name="Trapezoid 2"/>
+          <p:cNvSpPr/>
+          <p:nvPr/>
+        </p:nvSpPr>
+        <p:spPr>
+          <a:xfrm>
+            <a:off x="540000" y="900000"/>
+            <a:ext cx="1440000" cy="900000"/>
+          </a:xfrm>
+          <a:prstGeom prst="trapezoid">
+            <a:avLst/>
+          </a:prstGeom>
+          <a:solidFill>
+            <a:srgbClr val="ADD8E6"/>
+          </a:solidFill>
+          <a:ln>
+            <a:solidFill>
+              <a:srgbClr val="FFFFFF"/>
+            </a:solidFill>
+          </a:ln>
+        </p:spPr>
+        <p:style>
+          <a:lnRef idx="1">
+            <a:schemeClr val="accent1"/>
+          </a:lnRef>
+          <a:fillRef idx="3">
+            <a:schemeClr val="accent1"/>
+          </a:fillRef>
+          <a:effectRef idx="2">
+            <a:schemeClr val="accent1"/>
+          </a:effectRef>
+          <a:fontRef idx="minor">
+            <a:schemeClr val="lt1"/>
+          </a:fontRef>
+        </p:style>
+        <p:txBody>
+          <a:bodyPr rtlCol="0" anchor="ctr"/>
+          <a:lstStyle/>
+          <a:p>
+            <a:pPr algn="ctr"/>
+            <a:r>
+              <a:rPr sz="1200" b="1">
+                <a:solidFill>
+                  <a:srgbClr val="FFFFFF"/>
+                </a:solidFill>
+                <a:latin typeface="Malgun Gothic"/>
+              </a:rPr>
+              <a:t>강원권</a:t>
+            </a:r>
+            <a:br/>
+            <a:r>
+              <a:t>89 개</a:t>
+            </a:r>
+          </a:p>
+        </p:txBody>
+      </p:sp>
+      <p:sp>
+        <p:nvSpPr>
+          <p:cNvPr id="4" name="Rectangle 3"/>
+          <p:cNvSpPr/>
+          <p:nvPr/>
+        </p:nvSpPr>
+        <p:spPr>
+          <a:xfrm>
+            <a:off x="2052000" y="1080000"/>
+            <a:ext cx="1260000" cy="720000"/>
+          </a:xfrm>
+          <a:prstGeom prst="rect">
+            <a:avLst/>
+          </a:prstGeom>
+          <a:solidFill>
+            <a:srgbClr val="003366"/>
+          </a:solidFill>
+          <a:ln>
+            <a:solidFill>
+              <a:srgbClr val="FFFFFF"/>
+            </a:solidFill>
+          </a:ln>
+        </p:spPr>
+        <p:style>
+          <a:lnRef idx="1">
+            <a:schemeClr val="accent1"/>
+          </a:lnRef>
+          <a:fillRef idx="3">
+            <a:schemeClr val="accent1"/>
+          </a:fillRef>
+          <a:effectRef idx="2">
+            <a:schemeClr val="accent1"/>
+          </a:effectRef>
+          <a:fontRef idx="minor">
+            <a:schemeClr val="lt1"/>
+          </a:fontRef>
+        </p:style>
+        <p:txBody>
+          <a:bodyPr rtlCol="0" anchor="ctr"/>
+          <a:lstStyle/>
+          <a:p>
+            <a:pPr algn="ctr"/>
+            <a:r>
+              <a:rPr sz="1200" b="1">
+                <a:solidFill>
+                  <a:srgbClr val="FFFFFF"/>
+                </a:solidFill>
+                <a:latin typeface="Malgun Gothic"/>
+              </a:rPr>
+              <a:t>수도권</a:t>
+            </a:r>
+            <a:br/>
+            <a:r>
+              <a:t>485 개</a:t>
+            </a:r>
+          </a:p>
+        </p:txBody>
+      </p:sp>
+      <p:sp>
+        <p:nvSpPr>
+          <p:cNvPr id="5" name="Pentagon 4"/>
+          <p:cNvSpPr/>
+          <p:nvPr/>
+        </p:nvSpPr>
+        <p:spPr>
+          <a:xfrm>
+            <a:off x="1260000" y="1907999"/>
+            <a:ext cx="1440000" cy="720000"/>
+          </a:xfrm>
+          <a:prstGeom prst="homePlate">
+            <a:avLst/>
+          </a:prstGeom>
+          <a:solidFill>
+            <a:srgbClr val="4682B4"/>
+          </a:solidFill>
+          <a:ln>
+            <a:solidFill>
+              <a:srgbClr val="FFFFFF"/>
+            </a:solidFill>
+          </a:ln>
+        </p:spPr>
+        <p:style>
+          <a:lnRef idx="1">
+            <a:schemeClr val="accent1"/>
+          </a:lnRef>
+          <a:fillRef idx="3">
+            <a:schemeClr val="accent1"/>
+          </a:fillRef>
+          <a:effectRef idx="2">
+            <a:schemeClr val="accent1"/>
+          </a:effectRef>
+          <a:fontRef idx="minor">
+            <a:schemeClr val="lt1"/>
+          </a:fontRef>
+        </p:style>
+        <p:txBody>
+          <a:bodyPr rtlCol="0" anchor="ctr"/>
+          <a:lstStyle/>
+          <a:p>
+            <a:pPr algn="ctr"/>
+            <a:r>
+              <a:rPr sz="1200" b="1">
+                <a:solidFill>
+                  <a:srgbClr val="FFFFFF"/>
+                </a:solidFill>
+                <a:latin typeface="Malgun Gothic"/>
+              </a:rPr>
+              <a:t>충청권</a:t>
+            </a:r>
+            <a:br/>
+            <a:r>
+              <a:t>198 개</a:t>
+            </a:r>
+          </a:p>
+        </p:txBody>
+      </p:sp>
+      <p:sp>
+        <p:nvSpPr>
+          <p:cNvPr id="6" name="Pentagon 5"/>
+          <p:cNvSpPr/>
+          <p:nvPr/>
+        </p:nvSpPr>
+        <p:spPr>
+          <a:xfrm>
+            <a:off x="1080000" y="2700000"/>
+            <a:ext cx="1260000" cy="900000"/>
+          </a:xfrm>
+          <a:prstGeom prst="homePlate">
+            <a:avLst/>
+          </a:prstGeom>
+          <a:solidFill>
+            <a:srgbClr val="ADD8E6"/>
+          </a:solidFill>
+          <a:ln>
+            <a:solidFill>
+              <a:srgbClr val="FFFFFF"/>
+            </a:solidFill>
+          </a:ln>
+        </p:spPr>
+        <p:style>
+          <a:lnRef idx="1">
+            <a:schemeClr val="accent1"/>
+          </a:lnRef>
+          <a:fillRef idx="3">
+            <a:schemeClr val="accent1"/>
+          </a:fillRef>
+          <a:effectRef idx="2">
+            <a:schemeClr val="accent1"/>
+          </a:effectRef>
+          <a:fontRef idx="minor">
+            <a:schemeClr val="lt1"/>
+          </a:fontRef>
+        </p:style>
+        <p:txBody>
+          <a:bodyPr rtlCol="0" anchor="ctr"/>
+          <a:lstStyle/>
+          <a:p>
+            <a:pPr algn="ctr"/>
+            <a:r>
+              <a:rPr sz="1200" b="1">
+                <a:solidFill>
+                  <a:srgbClr val="FFFFFF"/>
+                </a:solidFill>
+                <a:latin typeface="Malgun Gothic"/>
+              </a:rPr>
+              <a:t>호남권</a:t>
+            </a:r>
+            <a:br/>
+            <a:r>
+              <a:t>245 개</a:t>
+            </a:r>
+          </a:p>
+        </p:txBody>
+      </p:sp>
+      <p:sp>
+        <p:nvSpPr>
+          <p:cNvPr id="7" name="Trapezoid 6"/>
+          <p:cNvSpPr/>
+          <p:nvPr/>
+        </p:nvSpPr>
+        <p:spPr>
+          <a:xfrm>
+            <a:off x="2520000" y="1980000"/>
+            <a:ext cx="1620000" cy="1440000"/>
+          </a:xfrm>
+          <a:prstGeom prst="trapezoid">
+            <a:avLst/>
+          </a:prstGeom>
+          <a:solidFill>
+            <a:srgbClr val="001A33"/>
+          </a:solidFill>
+          <a:ln>
+            <a:solidFill>
+              <a:srgbClr val="FFFFFF"/>
+            </a:solidFill>
+          </a:ln>
+        </p:spPr>
+        <p:style>
+          <a:lnRef idx="1">
+            <a:schemeClr val="accent1"/>
+          </a:lnRef>
+          <a:fillRef idx="3">
+            <a:schemeClr val="accent1"/>
+          </a:fillRef>
+          <a:effectRef idx="2">
+            <a:schemeClr val="accent1"/>
+          </a:effectRef>
+          <a:fontRef idx="minor">
+            <a:schemeClr val="lt1"/>
+          </a:fontRef>
+        </p:style>
+        <p:txBody>
+          <a:bodyPr rtlCol="0" anchor="ctr"/>
+          <a:lstStyle/>
+          <a:p>
+            <a:pPr algn="ctr"/>
+            <a:r>
+              <a:rPr sz="1200" b="1">
+                <a:solidFill>
+                  <a:srgbClr val="FFFFFF"/>
+                </a:solidFill>
+                <a:latin typeface="Malgun Gothic"/>
+              </a:rPr>
+              <a:t>영남권</a:t>
+            </a:r>
+            <a:br/>
+            <a:r>
+              <a:t>312 개</a:t>
+            </a:r>
+          </a:p>
+        </p:txBody>
+      </p:sp>
+      <p:sp>
+        <p:nvSpPr>
+          <p:cNvPr id="8" name="Oval 7"/>
+          <p:cNvSpPr/>
+          <p:nvPr/>
+        </p:nvSpPr>
+        <p:spPr>
+          <a:xfrm>
+            <a:off x="900000" y="3780000"/>
+            <a:ext cx="720000" cy="360000"/>
+          </a:xfrm>
+          <a:prstGeom prst="ellipse">
+            <a:avLst/>
+          </a:prstGeom>
+          <a:solidFill>
+            <a:srgbClr val="DDDDDD"/>
+          </a:solidFill>
+          <a:ln>
+            <a:solidFill>
+              <a:srgbClr val="FFFFFF"/>
+            </a:solidFill>
+          </a:ln>
+        </p:spPr>
+        <p:style>
+          <a:lnRef idx="1">
+            <a:schemeClr val="accent1"/>
+          </a:lnRef>
+          <a:fillRef idx="3">
+            <a:schemeClr val="accent1"/>
+          </a:fillRef>
+          <a:effectRef idx="2">
+            <a:schemeClr val="accent1"/>
+          </a:effectRef>
+          <a:fontRef idx="minor">
+            <a:schemeClr val="lt1"/>
+          </a:fontRef>
+        </p:style>
+        <p:txBody>
+          <a:bodyPr rtlCol="0" anchor="ctr"/>
+          <a:lstStyle/>
+          <a:p>
+            <a:pPr algn="ctr"/>
+            <a:r>
+              <a:rPr sz="1000" b="1">
+                <a:solidFill>
+                  <a:srgbClr val="333333"/>
+                </a:solidFill>
+                <a:latin typeface="Malgun Gothic"/>
+              </a:rPr>
+              <a:t>기타</a:t>
+            </a:r>
+            <a:br/>
+            <a:r>
+              <a:t>169 개</a:t>
             </a:r>
           </a:p>
         </p:txBody>
       </p:sp>
       <p:graphicFrame>
         <p:nvGraphicFramePr>
-          <p:cNvPr id="4" name="Table 3"/>
+          <p:cNvPr id="9" name="Table 8"/>
           <p:cNvGraphicFramePr>
             <a:graphicFrameLocks noGrp="1"/>
           </p:cNvGraphicFramePr>
           <p:nvPr/>
         </p:nvGraphicFramePr>
         <p:xfrm>
-          <a:off x="457200" y="1097280"/>
-          <a:ext cx="8229600" cy="5852160"/>
+          <a:off x="3960000" y="900000"/>
+          <a:ext cx="5760000" cy="2160000"/>
         </p:xfrm>
         <a:graphic>
           <a:graphicData uri="http://schemas.openxmlformats.org/drawingml/2006/table">
@@ -5312,31 +7115,28 @@
                 <a:tableStyleId>{5C22544A-7EE6-4342-B048-85BDC9FD1C3A}</a:tableStyleId>
               </a:tblPr>
               <a:tblGrid>
-                <a:gridCol w="1828800"/>
-                <a:gridCol w="1828800"/>
-                <a:gridCol w="1828800"/>
-                <a:gridCol w="2743200"/>
+                <a:gridCol w="2880000"/>
+                <a:gridCol w="1440000"/>
+                <a:gridCol w="1440000"/>
               </a:tblGrid>
-              <a:tr h="731520">
+              <a:tr h="308571">
                 <a:tc>
                   <a:txBody>
                     <a:bodyPr/>
                     <a:lstStyle/>
                     <a:p>
-                      <a:pPr algn="ctr">
-                        <a:defRPr sz="1600" b="1">
+                      <a:r>
+                        <a:rPr sz="1400" b="1">
                           <a:solidFill>
                             <a:srgbClr val="FFFFFF"/>
                           </a:solidFill>
                           <a:latin typeface="Malgun Gothic"/>
-                        </a:defRPr>
-                      </a:pPr>
-                      <a:r>
+                        </a:rPr>
                         <a:t>권역</a:t>
                       </a:r>
                     </a:p>
                   </a:txBody>
-                  <a:tcPr>
+                  <a:tcPr anchor="ctr">
                     <a:solidFill>
                       <a:srgbClr val="003366"/>
                     </a:solidFill>
@@ -5347,20 +7147,18 @@
                     <a:bodyPr/>
                     <a:lstStyle/>
                     <a:p>
-                      <a:pPr algn="ctr">
-                        <a:defRPr sz="1600" b="1">
+                      <a:r>
+                        <a:rPr sz="1400" b="1">
                           <a:solidFill>
                             <a:srgbClr val="FFFFFF"/>
                           </a:solidFill>
                           <a:latin typeface="Malgun Gothic"/>
-                        </a:defRPr>
-                      </a:pPr>
-                      <a:r>
+                        </a:rPr>
                         <a:t>업체 수</a:t>
                       </a:r>
                     </a:p>
                   </a:txBody>
-                  <a:tcPr>
+                  <a:tcPr anchor="ctr">
                     <a:solidFill>
                       <a:srgbClr val="003366"/>
                     </a:solidFill>
@@ -5371,22 +7169,44 @@
                     <a:bodyPr/>
                     <a:lstStyle/>
                     <a:p>
-                      <a:pPr algn="ctr">
-                        <a:defRPr sz="1600" b="1">
+                      <a:r>
+                        <a:rPr sz="1400" b="1">
                           <a:solidFill>
                             <a:srgbClr val="FFFFFF"/>
                           </a:solidFill>
                           <a:latin typeface="Malgun Gothic"/>
-                        </a:defRPr>
-                      </a:pPr>
-                      <a:r>
+                        </a:rPr>
                         <a:t>비중 (%)</a:t>
                       </a:r>
                     </a:p>
                   </a:txBody>
-                  <a:tcPr>
+                  <a:tcPr anchor="ctr">
                     <a:solidFill>
                       <a:srgbClr val="003366"/>
+                    </a:solidFill>
+                  </a:tcPr>
+                </a:tc>
+              </a:tr>
+              <a:tr h="308571">
+                <a:tc>
+                  <a:txBody>
+                    <a:bodyPr/>
+                    <a:lstStyle/>
+                    <a:p>
+                      <a:r>
+                        <a:rPr sz="1400" b="0">
+                          <a:solidFill>
+                            <a:srgbClr val="333333"/>
+                          </a:solidFill>
+                          <a:latin typeface="Malgun Gothic"/>
+                        </a:rPr>
+                        <a:t>수도권 (경기/서울/인천)</a:t>
+                      </a:r>
+                    </a:p>
+                  </a:txBody>
+                  <a:tcPr anchor="ctr">
+                    <a:solidFill>
+                      <a:srgbClr val="F5F5F5"/>
                     </a:solidFill>
                   </a:tcPr>
                 </a:tc>
@@ -5395,130 +7215,20 @@
                     <a:bodyPr/>
                     <a:lstStyle/>
                     <a:p>
-                      <a:pPr algn="ctr">
-                        <a:defRPr sz="1600" b="1">
+                      <a:r>
+                        <a:rPr sz="1400" b="0">
                           <a:solidFill>
-                            <a:srgbClr val="FFFFFF"/>
+                            <a:srgbClr val="333333"/>
                           </a:solidFill>
                           <a:latin typeface="Malgun Gothic"/>
-                        </a:defRPr>
-                      </a:pPr>
-                      <a:r>
-                        <a:t>주요 처리장 수</a:t>
+                        </a:rPr>
+                        <a:t>485</a:t>
                       </a:r>
                     </a:p>
                   </a:txBody>
-                  <a:tcPr>
+                  <a:tcPr anchor="ctr">
                     <a:solidFill>
-                      <a:srgbClr val="003366"/>
-                    </a:solidFill>
-                  </a:tcPr>
-                </a:tc>
-              </a:tr>
-              <a:tr h="731520">
-                <a:tc>
-                  <a:txBody>
-                    <a:bodyPr/>
-                    <a:lstStyle/>
-                    <a:p>
-                      <a:pPr algn="ctr">
-                        <a:defRPr sz="1400">
-                          <a:solidFill>
-                            <a:srgbClr val="404040"/>
-                          </a:solidFill>
-                          <a:latin typeface="Malgun Gothic"/>
-                        </a:defRPr>
-                      </a:pPr>
-                      <a:r>
-                        <a:t>경기·인천</a:t>
-                      </a:r>
-                    </a:p>
-                  </a:txBody>
-                  <a:tcPr/>
-                </a:tc>
-                <a:tc>
-                  <a:txBody>
-                    <a:bodyPr/>
-                    <a:lstStyle/>
-                    <a:p>
-                      <a:pPr algn="ctr">
-                        <a:defRPr sz="1400">
-                          <a:solidFill>
-                            <a:srgbClr val="404040"/>
-                          </a:solidFill>
-                          <a:latin typeface="Malgun Gothic"/>
-                        </a:defRPr>
-                      </a:pPr>
-                      <a:r>
-                        <a:t>425</a:t>
-                      </a:r>
-                    </a:p>
-                  </a:txBody>
-                  <a:tcPr/>
-                </a:tc>
-                <a:tc>
-                  <a:txBody>
-                    <a:bodyPr/>
-                    <a:lstStyle/>
-                    <a:p>
-                      <a:pPr algn="ctr">
-                        <a:defRPr sz="1400">
-                          <a:solidFill>
-                            <a:srgbClr val="404040"/>
-                          </a:solidFill>
-                          <a:latin typeface="Malgun Gothic"/>
-                        </a:defRPr>
-                      </a:pPr>
-                      <a:r>
-                        <a:t>25.7</a:t>
-                      </a:r>
-                    </a:p>
-                  </a:txBody>
-                  <a:tcPr/>
-                </a:tc>
-                <a:tc>
-                  <a:txBody>
-                    <a:bodyPr/>
-                    <a:lstStyle/>
-                    <a:p>
-                      <a:pPr algn="ctr">
-                        <a:defRPr sz="1400">
-                          <a:solidFill>
-                            <a:srgbClr val="404040"/>
-                          </a:solidFill>
-                          <a:latin typeface="Malgun Gothic"/>
-                        </a:defRPr>
-                      </a:pPr>
-                      <a:r>
-                        <a:t>398</a:t>
-                      </a:r>
-                    </a:p>
-                  </a:txBody>
-                  <a:tcPr/>
-                </a:tc>
-              </a:tr>
-              <a:tr h="731520">
-                <a:tc>
-                  <a:txBody>
-                    <a:bodyPr/>
-                    <a:lstStyle/>
-                    <a:p>
-                      <a:pPr algn="ctr">
-                        <a:defRPr sz="1400">
-                          <a:solidFill>
-                            <a:srgbClr val="404040"/>
-                          </a:solidFill>
-                          <a:latin typeface="Malgun Gothic"/>
-                        </a:defRPr>
-                      </a:pPr>
-                      <a:r>
-                        <a:t>서울</a:t>
-                      </a:r>
-                    </a:p>
-                  </a:txBody>
-                  <a:tcPr>
-                    <a:solidFill>
-                      <a:srgbClr val="F0F0F0"/>
+                      <a:srgbClr val="F5F5F5"/>
                     </a:solidFill>
                   </a:tcPr>
                 </a:tc>
@@ -5527,22 +7237,44 @@
                     <a:bodyPr/>
                     <a:lstStyle/>
                     <a:p>
-                      <a:pPr algn="ctr">
-                        <a:defRPr sz="1400">
+                      <a:r>
+                        <a:rPr sz="1400" b="0">
                           <a:solidFill>
-                            <a:srgbClr val="404040"/>
+                            <a:srgbClr val="333333"/>
                           </a:solidFill>
                           <a:latin typeface="Malgun Gothic"/>
-                        </a:defRPr>
-                      </a:pPr>
-                      <a:r>
-                        <a:t>186</a:t>
+                        </a:rPr>
+                        <a:t>32.5</a:t>
                       </a:r>
                     </a:p>
                   </a:txBody>
-                  <a:tcPr>
+                  <a:tcPr anchor="ctr">
                     <a:solidFill>
-                      <a:srgbClr val="F0F0F0"/>
+                      <a:srgbClr val="F5F5F5"/>
+                    </a:solidFill>
+                  </a:tcPr>
+                </a:tc>
+              </a:tr>
+              <a:tr h="308571">
+                <a:tc>
+                  <a:txBody>
+                    <a:bodyPr/>
+                    <a:lstStyle/>
+                    <a:p>
+                      <a:r>
+                        <a:rPr sz="1400" b="0">
+                          <a:solidFill>
+                            <a:srgbClr val="333333"/>
+                          </a:solidFill>
+                          <a:latin typeface="Malgun Gothic"/>
+                        </a:rPr>
+                        <a:t>영남권 (부산/대구/경남/울산)</a:t>
+                      </a:r>
+                    </a:p>
+                  </a:txBody>
+                  <a:tcPr anchor="ctr">
+                    <a:solidFill>
+                      <a:srgbClr val="FFFFFF"/>
                     </a:solidFill>
                   </a:tcPr>
                 </a:tc>
@@ -5551,22 +7283,20 @@
                     <a:bodyPr/>
                     <a:lstStyle/>
                     <a:p>
-                      <a:pPr algn="ctr">
-                        <a:defRPr sz="1400">
+                      <a:r>
+                        <a:rPr sz="1400" b="0">
                           <a:solidFill>
-                            <a:srgbClr val="404040"/>
+                            <a:srgbClr val="333333"/>
                           </a:solidFill>
                           <a:latin typeface="Malgun Gothic"/>
-                        </a:defRPr>
-                      </a:pPr>
-                      <a:r>
-                        <a:t>11.3</a:t>
+                        </a:rPr>
+                        <a:t>312</a:t>
                       </a:r>
                     </a:p>
                   </a:txBody>
-                  <a:tcPr>
+                  <a:tcPr anchor="ctr">
                     <a:solidFill>
-                      <a:srgbClr val="F0F0F0"/>
+                      <a:srgbClr val="FFFFFF"/>
                     </a:solidFill>
                   </a:tcPr>
                 </a:tc>
@@ -5575,130 +7305,44 @@
                     <a:bodyPr/>
                     <a:lstStyle/>
                     <a:p>
-                      <a:pPr algn="ctr">
-                        <a:defRPr sz="1400">
+                      <a:r>
+                        <a:rPr sz="1400" b="0">
                           <a:solidFill>
-                            <a:srgbClr val="404040"/>
+                            <a:srgbClr val="333333"/>
                           </a:solidFill>
                           <a:latin typeface="Malgun Gothic"/>
-                        </a:defRPr>
-                      </a:pPr>
-                      <a:r>
-                        <a:t>142</a:t>
+                        </a:rPr>
+                        <a:t>20.9</a:t>
                       </a:r>
                     </a:p>
                   </a:txBody>
-                  <a:tcPr>
+                  <a:tcPr anchor="ctr">
                     <a:solidFill>
-                      <a:srgbClr val="F0F0F0"/>
+                      <a:srgbClr val="FFFFFF"/>
                     </a:solidFill>
                   </a:tcPr>
                 </a:tc>
               </a:tr>
-              <a:tr h="731520">
+              <a:tr h="308571">
                 <a:tc>
                   <a:txBody>
                     <a:bodyPr/>
                     <a:lstStyle/>
                     <a:p>
-                      <a:pPr algn="ctr">
-                        <a:defRPr sz="1400">
+                      <a:r>
+                        <a:rPr sz="1400" b="0">
                           <a:solidFill>
-                            <a:srgbClr val="404040"/>
+                            <a:srgbClr val="333333"/>
                           </a:solidFill>
                           <a:latin typeface="Malgun Gothic"/>
-                        </a:defRPr>
-                      </a:pPr>
-                      <a:r>
-                        <a:t>경남·부산</a:t>
+                        </a:rPr>
+                        <a:t>호남권 (광주/전남/전북/제주)</a:t>
                       </a:r>
                     </a:p>
                   </a:txBody>
-                  <a:tcPr/>
-                </a:tc>
-                <a:tc>
-                  <a:txBody>
-                    <a:bodyPr/>
-                    <a:lstStyle/>
-                    <a:p>
-                      <a:pPr algn="ctr">
-                        <a:defRPr sz="1400">
-                          <a:solidFill>
-                            <a:srgbClr val="404040"/>
-                          </a:solidFill>
-                          <a:latin typeface="Malgun Gothic"/>
-                        </a:defRPr>
-                      </a:pPr>
-                      <a:r>
-                        <a:t>298</a:t>
-                      </a:r>
-                    </a:p>
-                  </a:txBody>
-                  <a:tcPr/>
-                </a:tc>
-                <a:tc>
-                  <a:txBody>
-                    <a:bodyPr/>
-                    <a:lstStyle/>
-                    <a:p>
-                      <a:pPr algn="ctr">
-                        <a:defRPr sz="1400">
-                          <a:solidFill>
-                            <a:srgbClr val="404040"/>
-                          </a:solidFill>
-                          <a:latin typeface="Malgun Gothic"/>
-                        </a:defRPr>
-                      </a:pPr>
-                      <a:r>
-                        <a:t>18.0</a:t>
-                      </a:r>
-                    </a:p>
-                  </a:txBody>
-                  <a:tcPr/>
-                </a:tc>
-                <a:tc>
-                  <a:txBody>
-                    <a:bodyPr/>
-                    <a:lstStyle/>
-                    <a:p>
-                      <a:pPr algn="ctr">
-                        <a:defRPr sz="1400">
-                          <a:solidFill>
-                            <a:srgbClr val="404040"/>
-                          </a:solidFill>
-                          <a:latin typeface="Malgun Gothic"/>
-                        </a:defRPr>
-                      </a:pPr>
-                      <a:r>
-                        <a:t>312</a:t>
-                      </a:r>
-                    </a:p>
-                  </a:txBody>
-                  <a:tcPr/>
-                </a:tc>
-              </a:tr>
-              <a:tr h="731520">
-                <a:tc>
-                  <a:txBody>
-                    <a:bodyPr/>
-                    <a:lstStyle/>
-                    <a:p>
-                      <a:pPr algn="ctr">
-                        <a:defRPr sz="1400">
-                          <a:solidFill>
-                            <a:srgbClr val="404040"/>
-                          </a:solidFill>
-                          <a:latin typeface="Malgun Gothic"/>
-                        </a:defRPr>
-                      </a:pPr>
-                      <a:r>
-                        <a:t>경북·대구</a:t>
-                      </a:r>
-                    </a:p>
-                  </a:txBody>
-                  <a:tcPr>
+                  <a:tcPr anchor="ctr">
                     <a:solidFill>
-                      <a:srgbClr val="F0F0F0"/>
+                      <a:srgbClr val="F5F5F5"/>
                     </a:solidFill>
                   </a:tcPr>
                 </a:tc>
@@ -5707,22 +7351,20 @@
                     <a:bodyPr/>
                     <a:lstStyle/>
                     <a:p>
-                      <a:pPr algn="ctr">
-                        <a:defRPr sz="1400">
+                      <a:r>
+                        <a:rPr sz="1400" b="0">
                           <a:solidFill>
-                            <a:srgbClr val="404040"/>
+                            <a:srgbClr val="333333"/>
                           </a:solidFill>
                           <a:latin typeface="Malgun Gothic"/>
-                        </a:defRPr>
-                      </a:pPr>
-                      <a:r>
-                        <a:t>215</a:t>
+                        </a:rPr>
+                        <a:t>245</a:t>
                       </a:r>
                     </a:p>
                   </a:txBody>
-                  <a:tcPr>
+                  <a:tcPr anchor="ctr">
                     <a:solidFill>
-                      <a:srgbClr val="F0F0F0"/>
+                      <a:srgbClr val="F5F5F5"/>
                     </a:solidFill>
                   </a:tcPr>
                 </a:tc>
@@ -5731,22 +7373,44 @@
                     <a:bodyPr/>
                     <a:lstStyle/>
                     <a:p>
-                      <a:pPr algn="ctr">
-                        <a:defRPr sz="1400">
+                      <a:r>
+                        <a:rPr sz="1400" b="0">
                           <a:solidFill>
-                            <a:srgbClr val="404040"/>
+                            <a:srgbClr val="333333"/>
                           </a:solidFill>
                           <a:latin typeface="Malgun Gothic"/>
-                        </a:defRPr>
-                      </a:pPr>
-                      <a:r>
-                        <a:t>13.0</a:t>
+                        </a:rPr>
+                        <a:t>16.4</a:t>
                       </a:r>
                     </a:p>
                   </a:txBody>
-                  <a:tcPr>
+                  <a:tcPr anchor="ctr">
                     <a:solidFill>
-                      <a:srgbClr val="F0F0F0"/>
+                      <a:srgbClr val="F5F5F5"/>
+                    </a:solidFill>
+                  </a:tcPr>
+                </a:tc>
+              </a:tr>
+              <a:tr h="308571">
+                <a:tc>
+                  <a:txBody>
+                    <a:bodyPr/>
+                    <a:lstStyle/>
+                    <a:p>
+                      <a:r>
+                        <a:rPr sz="1400" b="0">
+                          <a:solidFill>
+                            <a:srgbClr val="333333"/>
+                          </a:solidFill>
+                          <a:latin typeface="Malgun Gothic"/>
+                        </a:rPr>
+                        <a:t>충청권 (대전/세종/충남/충북)</a:t>
+                      </a:r>
+                    </a:p>
+                  </a:txBody>
+                  <a:tcPr anchor="ctr">
+                    <a:solidFill>
+                      <a:srgbClr val="FFFFFF"/>
                     </a:solidFill>
                   </a:tcPr>
                 </a:tc>
@@ -5755,130 +7419,20 @@
                     <a:bodyPr/>
                     <a:lstStyle/>
                     <a:p>
-                      <a:pPr algn="ctr">
-                        <a:defRPr sz="1400">
+                      <a:r>
+                        <a:rPr sz="1400" b="0">
                           <a:solidFill>
-                            <a:srgbClr val="404040"/>
+                            <a:srgbClr val="333333"/>
                           </a:solidFill>
                           <a:latin typeface="Malgun Gothic"/>
-                        </a:defRPr>
-                      </a:pPr>
-                      <a:r>
-                        <a:t>245</a:t>
+                        </a:rPr>
+                        <a:t>198</a:t>
                       </a:r>
                     </a:p>
                   </a:txBody>
-                  <a:tcPr>
+                  <a:tcPr anchor="ctr">
                     <a:solidFill>
-                      <a:srgbClr val="F0F0F0"/>
-                    </a:solidFill>
-                  </a:tcPr>
-                </a:tc>
-              </a:tr>
-              <a:tr h="731520">
-                <a:tc>
-                  <a:txBody>
-                    <a:bodyPr/>
-                    <a:lstStyle/>
-                    <a:p>
-                      <a:pPr algn="ctr">
-                        <a:defRPr sz="1400">
-                          <a:solidFill>
-                            <a:srgbClr val="404040"/>
-                          </a:solidFill>
-                          <a:latin typeface="Malgun Gothic"/>
-                        </a:defRPr>
-                      </a:pPr>
-                      <a:r>
-                        <a:t>충청권</a:t>
-                      </a:r>
-                    </a:p>
-                  </a:txBody>
-                  <a:tcPr/>
-                </a:tc>
-                <a:tc>
-                  <a:txBody>
-                    <a:bodyPr/>
-                    <a:lstStyle/>
-                    <a:p>
-                      <a:pPr algn="ctr">
-                        <a:defRPr sz="1400">
-                          <a:solidFill>
-                            <a:srgbClr val="404040"/>
-                          </a:solidFill>
-                          <a:latin typeface="Malgun Gothic"/>
-                        </a:defRPr>
-                      </a:pPr>
-                      <a:r>
-                        <a:t>245</a:t>
-                      </a:r>
-                    </a:p>
-                  </a:txBody>
-                  <a:tcPr/>
-                </a:tc>
-                <a:tc>
-                  <a:txBody>
-                    <a:bodyPr/>
-                    <a:lstStyle/>
-                    <a:p>
-                      <a:pPr algn="ctr">
-                        <a:defRPr sz="1400">
-                          <a:solidFill>
-                            <a:srgbClr val="404040"/>
-                          </a:solidFill>
-                          <a:latin typeface="Malgun Gothic"/>
-                        </a:defRPr>
-                      </a:pPr>
-                      <a:r>
-                        <a:t>14.8</a:t>
-                      </a:r>
-                    </a:p>
-                  </a:txBody>
-                  <a:tcPr/>
-                </a:tc>
-                <a:tc>
-                  <a:txBody>
-                    <a:bodyPr/>
-                    <a:lstStyle/>
-                    <a:p>
-                      <a:pPr algn="ctr">
-                        <a:defRPr sz="1400">
-                          <a:solidFill>
-                            <a:srgbClr val="404040"/>
-                          </a:solidFill>
-                          <a:latin typeface="Malgun Gothic"/>
-                        </a:defRPr>
-                      </a:pPr>
-                      <a:r>
-                        <a:t>268</a:t>
-                      </a:r>
-                    </a:p>
-                  </a:txBody>
-                  <a:tcPr/>
-                </a:tc>
-              </a:tr>
-              <a:tr h="731520">
-                <a:tc>
-                  <a:txBody>
-                    <a:bodyPr/>
-                    <a:lstStyle/>
-                    <a:p>
-                      <a:pPr algn="ctr">
-                        <a:defRPr sz="1400">
-                          <a:solidFill>
-                            <a:srgbClr val="404040"/>
-                          </a:solidFill>
-                          <a:latin typeface="Malgun Gothic"/>
-                        </a:defRPr>
-                      </a:pPr>
-                      <a:r>
-                        <a:t>전라권</a:t>
-                      </a:r>
-                    </a:p>
-                  </a:txBody>
-                  <a:tcPr>
-                    <a:solidFill>
-                      <a:srgbClr val="F0F0F0"/>
+                      <a:srgbClr val="FFFFFF"/>
                     </a:solidFill>
                   </a:tcPr>
                 </a:tc>
@@ -5887,22 +7441,44 @@
                     <a:bodyPr/>
                     <a:lstStyle/>
                     <a:p>
-                      <a:pPr algn="ctr">
-                        <a:defRPr sz="1400">
+                      <a:r>
+                        <a:rPr sz="1400" b="0">
                           <a:solidFill>
-                            <a:srgbClr val="404040"/>
+                            <a:srgbClr val="333333"/>
                           </a:solidFill>
                           <a:latin typeface="Malgun Gothic"/>
-                        </a:defRPr>
-                      </a:pPr>
-                      <a:r>
-                        <a:t>198</a:t>
+                        </a:rPr>
+                        <a:t>13.3</a:t>
                       </a:r>
                     </a:p>
                   </a:txBody>
-                  <a:tcPr>
+                  <a:tcPr anchor="ctr">
                     <a:solidFill>
-                      <a:srgbClr val="F0F0F0"/>
+                      <a:srgbClr val="FFFFFF"/>
+                    </a:solidFill>
+                  </a:tcPr>
+                </a:tc>
+              </a:tr>
+              <a:tr h="308571">
+                <a:tc>
+                  <a:txBody>
+                    <a:bodyPr/>
+                    <a:lstStyle/>
+                    <a:p>
+                      <a:r>
+                        <a:rPr sz="1400" b="0">
+                          <a:solidFill>
+                            <a:srgbClr val="333333"/>
+                          </a:solidFill>
+                          <a:latin typeface="Malgun Gothic"/>
+                        </a:rPr>
+                        <a:t>강원권</a:t>
+                      </a:r>
+                    </a:p>
+                  </a:txBody>
+                  <a:tcPr anchor="ctr">
+                    <a:solidFill>
+                      <a:srgbClr val="F5F5F5"/>
                     </a:solidFill>
                   </a:tcPr>
                 </a:tc>
@@ -5911,22 +7487,20 @@
                     <a:bodyPr/>
                     <a:lstStyle/>
                     <a:p>
-                      <a:pPr algn="ctr">
-                        <a:defRPr sz="1400">
+                      <a:r>
+                        <a:rPr sz="1400" b="0">
                           <a:solidFill>
-                            <a:srgbClr val="404040"/>
+                            <a:srgbClr val="333333"/>
                           </a:solidFill>
                           <a:latin typeface="Malgun Gothic"/>
-                        </a:defRPr>
-                      </a:pPr>
-                      <a:r>
-                        <a:t>12.0</a:t>
+                        </a:rPr>
+                        <a:t>89</a:t>
                       </a:r>
                     </a:p>
                   </a:txBody>
-                  <a:tcPr>
+                  <a:tcPr anchor="ctr">
                     <a:solidFill>
-                      <a:srgbClr val="F0F0F0"/>
+                      <a:srgbClr val="F5F5F5"/>
                     </a:solidFill>
                   </a:tcPr>
                 </a:tc>
@@ -5935,106 +7509,90 @@
                     <a:bodyPr/>
                     <a:lstStyle/>
                     <a:p>
-                      <a:pPr algn="ctr">
-                        <a:defRPr sz="1400">
+                      <a:r>
+                        <a:rPr sz="1400" b="0">
                           <a:solidFill>
-                            <a:srgbClr val="404040"/>
+                            <a:srgbClr val="333333"/>
                           </a:solidFill>
                           <a:latin typeface="Malgun Gothic"/>
-                        </a:defRPr>
-                      </a:pPr>
-                      <a:r>
-                        <a:t>215</a:t>
+                        </a:rPr>
+                        <a:t>5.9</a:t>
                       </a:r>
                     </a:p>
                   </a:txBody>
-                  <a:tcPr>
+                  <a:tcPr anchor="ctr">
                     <a:solidFill>
-                      <a:srgbClr val="F0F0F0"/>
+                      <a:srgbClr val="F5F5F5"/>
                     </a:solidFill>
                   </a:tcPr>
                 </a:tc>
               </a:tr>
-              <a:tr h="731520">
+              <a:tr h="308574">
                 <a:tc>
                   <a:txBody>
                     <a:bodyPr/>
                     <a:lstStyle/>
                     <a:p>
-                      <a:pPr algn="ctr">
-                        <a:defRPr sz="1400">
+                      <a:r>
+                        <a:rPr sz="1400" b="0">
                           <a:solidFill>
-                            <a:srgbClr val="404040"/>
+                            <a:srgbClr val="333333"/>
                           </a:solidFill>
                           <a:latin typeface="Malgun Gothic"/>
-                        </a:defRPr>
-                      </a:pPr>
-                      <a:r>
-                        <a:t>강원·제주</a:t>
+                        </a:rPr>
+                        <a:t>기타</a:t>
                       </a:r>
                     </a:p>
                   </a:txBody>
-                  <a:tcPr/>
+                  <a:tcPr anchor="ctr">
+                    <a:solidFill>
+                      <a:srgbClr val="FFFFFF"/>
+                    </a:solidFill>
+                  </a:tcPr>
                 </a:tc>
                 <a:tc>
                   <a:txBody>
                     <a:bodyPr/>
                     <a:lstStyle/>
                     <a:p>
-                      <a:pPr algn="ctr">
-                        <a:defRPr sz="1400">
+                      <a:r>
+                        <a:rPr sz="1400" b="0">
                           <a:solidFill>
-                            <a:srgbClr val="404040"/>
+                            <a:srgbClr val="333333"/>
                           </a:solidFill>
                           <a:latin typeface="Malgun Gothic"/>
-                        </a:defRPr>
-                      </a:pPr>
-                      <a:r>
-                        <a:t>87</a:t>
+                        </a:rPr>
+                        <a:t>169</a:t>
                       </a:r>
                     </a:p>
                   </a:txBody>
-                  <a:tcPr/>
+                  <a:tcPr anchor="ctr">
+                    <a:solidFill>
+                      <a:srgbClr val="FFFFFF"/>
+                    </a:solidFill>
+                  </a:tcPr>
                 </a:tc>
                 <a:tc>
                   <a:txBody>
                     <a:bodyPr/>
                     <a:lstStyle/>
                     <a:p>
-                      <a:pPr algn="ctr">
-                        <a:defRPr sz="1400">
+                      <a:r>
+                        <a:rPr sz="1400" b="0">
                           <a:solidFill>
-                            <a:srgbClr val="404040"/>
+                            <a:srgbClr val="333333"/>
                           </a:solidFill>
                           <a:latin typeface="Malgun Gothic"/>
-                        </a:defRPr>
-                      </a:pPr>
-                      <a:r>
-                        <a:t>5.2</a:t>
+                        </a:rPr>
+                        <a:t>11.0</a:t>
                       </a:r>
                     </a:p>
                   </a:txBody>
-                  <a:tcPr/>
-                </a:tc>
-                <a:tc>
-                  <a:txBody>
-                    <a:bodyPr/>
-                    <a:lstStyle/>
-                    <a:p>
-                      <a:pPr algn="ctr">
-                        <a:defRPr sz="1400">
-                          <a:solidFill>
-                            <a:srgbClr val="404040"/>
-                          </a:solidFill>
-                          <a:latin typeface="Malgun Gothic"/>
-                        </a:defRPr>
-                      </a:pPr>
-                      <a:r>
-                        <a:t>80</a:t>
-                      </a:r>
-                    </a:p>
-                  </a:txBody>
-                  <a:tcPr/>
+                  <a:tcPr anchor="ctr">
+                    <a:solidFill>
+                      <a:srgbClr val="FFFFFF"/>
+                    </a:solidFill>
+                  </a:tcPr>
                 </a:tc>
               </a:tr>
             </a:tbl>
@@ -6061,31 +7619,14 @@
       <p:grpSpPr/>
       <p:sp>
         <p:nvSpPr>
-          <p:cNvPr id="2" name="Title 1"/>
-          <p:cNvSpPr>
-            <a:spLocks noGrp="1"/>
-          </p:cNvSpPr>
-          <p:nvPr>
-            <p:ph type="title"/>
-          </p:nvPr>
-        </p:nvSpPr>
-        <p:spPr/>
-        <p:txBody>
-          <a:bodyPr/>
-          <a:lstStyle/>
-          <a:p/>
-        </p:txBody>
-      </p:sp>
-      <p:sp>
-        <p:nvSpPr>
-          <p:cNvPr id="3" name="TextBox 2"/>
+          <p:cNvPr id="2" name="TextBox 1"/>
           <p:cNvSpPr txBox="1"/>
           <p:nvPr/>
         </p:nvSpPr>
         <p:spPr>
           <a:xfrm>
-            <a:off x="457200" y="274320"/>
-            <a:ext cx="8229600" cy="731520"/>
+            <a:off x="360000" y="360000"/>
+            <a:ext cx="3600000" cy="360000"/>
           </a:xfrm>
           <a:prstGeom prst="rect">
             <a:avLst/>
@@ -6097,17 +7638,14 @@
             <a:spAutoFit/>
           </a:bodyPr>
           <a:lstStyle/>
-          <a:p/>
-          <a:p>
-            <a:pPr>
-              <a:defRPr sz="2800" b="1">
+          <a:p>
+            <a:r>
+              <a:rPr sz="2800" b="1">
                 <a:solidFill>
                   <a:srgbClr val="003366"/>
                 </a:solidFill>
                 <a:latin typeface="Malgun Gothic"/>
-              </a:defRPr>
-            </a:pPr>
-            <a:r>
+              </a:rPr>
               <a:t>처리장 규모별 현황</a:t>
             </a:r>
           </a:p>
@@ -6115,392 +7653,253 @@
       </p:sp>
       <p:graphicFrame>
         <p:nvGraphicFramePr>
-          <p:cNvPr id="4" name="Table 3"/>
+          <p:cNvPr id="3" name="Chart 2"/>
           <p:cNvGraphicFramePr>
             <a:graphicFrameLocks noGrp="1"/>
           </p:cNvGraphicFramePr>
           <p:nvPr/>
         </p:nvGraphicFramePr>
         <p:xfrm>
-          <a:off x="457200" y="1097280"/>
-          <a:ext cx="8229600" cy="2926080"/>
+          <a:off x="720000" y="900000"/>
+          <a:ext cx="4320000" cy="2520000"/>
         </p:xfrm>
         <a:graphic>
-          <a:graphicData uri="http://schemas.openxmlformats.org/drawingml/2006/table">
-            <a:tbl>
-              <a:tblPr firstRow="1" bandRow="1">
-                <a:tableStyleId>{5C22544A-7EE6-4342-B048-85BDC9FD1C3A}</a:tableStyleId>
-              </a:tblPr>
-              <a:tblGrid>
-                <a:gridCol w="2743200"/>
-                <a:gridCol w="1828800"/>
-                <a:gridCol w="1828800"/>
-                <a:gridCol w="1828800"/>
-              </a:tblGrid>
-              <a:tr h="731520">
-                <a:tc>
-                  <a:txBody>
-                    <a:bodyPr/>
-                    <a:lstStyle/>
-                    <a:p>
-                      <a:pPr algn="ctr">
-                        <a:defRPr sz="1600" b="1">
-                          <a:solidFill>
-                            <a:srgbClr val="FFFFFF"/>
-                          </a:solidFill>
-                          <a:latin typeface="Malgun Gothic"/>
-                        </a:defRPr>
-                      </a:pPr>
-                      <a:r>
-                        <a:t>규모 구분</a:t>
-                      </a:r>
-                    </a:p>
-                  </a:txBody>
-                  <a:tcPr>
-                    <a:solidFill>
-                      <a:srgbClr val="003366"/>
-                    </a:solidFill>
-                  </a:tcPr>
-                </a:tc>
-                <a:tc>
-                  <a:txBody>
-                    <a:bodyPr/>
-                    <a:lstStyle/>
-                    <a:p>
-                      <a:pPr algn="ctr">
-                        <a:defRPr sz="1600" b="1">
-                          <a:solidFill>
-                            <a:srgbClr val="FFFFFF"/>
-                          </a:solidFill>
-                          <a:latin typeface="Malgun Gothic"/>
-                        </a:defRPr>
-                      </a:pPr>
-                      <a:r>
-                        <a:t>업체 수</a:t>
-                      </a:r>
-                    </a:p>
-                  </a:txBody>
-                  <a:tcPr>
-                    <a:solidFill>
-                      <a:srgbClr val="003366"/>
-                    </a:solidFill>
-                  </a:tcPr>
-                </a:tc>
-                <a:tc>
-                  <a:txBody>
-                    <a:bodyPr/>
-                    <a:lstStyle/>
-                    <a:p>
-                      <a:pPr algn="ctr">
-                        <a:defRPr sz="1600" b="1">
-                          <a:solidFill>
-                            <a:srgbClr val="FFFFFF"/>
-                          </a:solidFill>
-                          <a:latin typeface="Malgun Gothic"/>
-                        </a:defRPr>
-                      </a:pPr>
-                      <a:r>
-                        <a:t>비중 (%)</a:t>
-                      </a:r>
-                    </a:p>
-                  </a:txBody>
-                  <a:tcPr>
-                    <a:solidFill>
-                      <a:srgbClr val="003366"/>
-                    </a:solidFill>
-                  </a:tcPr>
-                </a:tc>
-                <a:tc>
-                  <a:txBody>
-                    <a:bodyPr/>
-                    <a:lstStyle/>
-                    <a:p>
-                      <a:pPr algn="ctr">
-                        <a:defRPr sz="1600" b="1">
-                          <a:solidFill>
-                            <a:srgbClr val="FFFFFF"/>
-                          </a:solidFill>
-                          <a:latin typeface="Malgun Gothic"/>
-                        </a:defRPr>
-                      </a:pPr>
-                      <a:r>
-                        <a:t>처리 용량 비중 (%)</a:t>
-                      </a:r>
-                    </a:p>
-                  </a:txBody>
-                  <a:tcPr>
-                    <a:solidFill>
-                      <a:srgbClr val="003366"/>
-                    </a:solidFill>
-                  </a:tcPr>
-                </a:tc>
-              </a:tr>
-              <a:tr h="731520">
-                <a:tc>
-                  <a:txBody>
-                    <a:bodyPr/>
-                    <a:lstStyle/>
-                    <a:p>
-                      <a:pPr algn="ctr">
-                        <a:defRPr sz="1400">
-                          <a:solidFill>
-                            <a:srgbClr val="404040"/>
-                          </a:solidFill>
-                          <a:latin typeface="Malgun Gothic"/>
-                        </a:defRPr>
-                      </a:pPr>
-                      <a:r>
-                        <a:t>대규모 (50,000톤/일 이상)</a:t>
-                      </a:r>
-                    </a:p>
-                  </a:txBody>
-                  <a:tcPr/>
-                </a:tc>
-                <a:tc>
-                  <a:txBody>
-                    <a:bodyPr/>
-                    <a:lstStyle/>
-                    <a:p>
-                      <a:pPr algn="ctr">
-                        <a:defRPr sz="1400">
-                          <a:solidFill>
-                            <a:srgbClr val="404040"/>
-                          </a:solidFill>
-                          <a:latin typeface="Malgun Gothic"/>
-                        </a:defRPr>
-                      </a:pPr>
-                      <a:r>
-                        <a:t>145</a:t>
-                      </a:r>
-                    </a:p>
-                  </a:txBody>
-                  <a:tcPr/>
-                </a:tc>
-                <a:tc>
-                  <a:txBody>
-                    <a:bodyPr/>
-                    <a:lstStyle/>
-                    <a:p>
-                      <a:pPr algn="ctr">
-                        <a:defRPr sz="1400">
-                          <a:solidFill>
-                            <a:srgbClr val="404040"/>
-                          </a:solidFill>
-                          <a:latin typeface="Malgun Gothic"/>
-                        </a:defRPr>
-                      </a:pPr>
-                      <a:r>
-                        <a:t>8.8</a:t>
-                      </a:r>
-                    </a:p>
-                  </a:txBody>
-                  <a:tcPr/>
-                </a:tc>
-                <a:tc>
-                  <a:txBody>
-                    <a:bodyPr/>
-                    <a:lstStyle/>
-                    <a:p>
-                      <a:pPr algn="ctr">
-                        <a:defRPr sz="1400">
-                          <a:solidFill>
-                            <a:srgbClr val="404040"/>
-                          </a:solidFill>
-                          <a:latin typeface="Malgun Gothic"/>
-                        </a:defRPr>
-                      </a:pPr>
-                      <a:r>
-                        <a:t>52.3</a:t>
-                      </a:r>
-                    </a:p>
-                  </a:txBody>
-                  <a:tcPr/>
-                </a:tc>
-              </a:tr>
-              <a:tr h="731520">
-                <a:tc>
-                  <a:txBody>
-                    <a:bodyPr/>
-                    <a:lstStyle/>
-                    <a:p>
-                      <a:pPr algn="ctr">
-                        <a:defRPr sz="1400">
-                          <a:solidFill>
-                            <a:srgbClr val="404040"/>
-                          </a:solidFill>
-                          <a:latin typeface="Malgun Gothic"/>
-                        </a:defRPr>
-                      </a:pPr>
-                      <a:r>
-                        <a:t>중규모 (10,000~50,000톤)</a:t>
-                      </a:r>
-                    </a:p>
-                  </a:txBody>
-                  <a:tcPr>
-                    <a:solidFill>
-                      <a:srgbClr val="F0F0F0"/>
-                    </a:solidFill>
-                  </a:tcPr>
-                </a:tc>
-                <a:tc>
-                  <a:txBody>
-                    <a:bodyPr/>
-                    <a:lstStyle/>
-                    <a:p>
-                      <a:pPr algn="ctr">
-                        <a:defRPr sz="1400">
-                          <a:solidFill>
-                            <a:srgbClr val="404040"/>
-                          </a:solidFill>
-                          <a:latin typeface="Malgun Gothic"/>
-                        </a:defRPr>
-                      </a:pPr>
-                      <a:r>
-                        <a:t>562</a:t>
-                      </a:r>
-                    </a:p>
-                  </a:txBody>
-                  <a:tcPr>
-                    <a:solidFill>
-                      <a:srgbClr val="F0F0F0"/>
-                    </a:solidFill>
-                  </a:tcPr>
-                </a:tc>
-                <a:tc>
-                  <a:txBody>
-                    <a:bodyPr/>
-                    <a:lstStyle/>
-                    <a:p>
-                      <a:pPr algn="ctr">
-                        <a:defRPr sz="1400">
-                          <a:solidFill>
-                            <a:srgbClr val="404040"/>
-                          </a:solidFill>
-                          <a:latin typeface="Malgun Gothic"/>
-                        </a:defRPr>
-                      </a:pPr>
-                      <a:r>
-                        <a:t>34.0</a:t>
-                      </a:r>
-                    </a:p>
-                  </a:txBody>
-                  <a:tcPr>
-                    <a:solidFill>
-                      <a:srgbClr val="F0F0F0"/>
-                    </a:solidFill>
-                  </a:tcPr>
-                </a:tc>
-                <a:tc>
-                  <a:txBody>
-                    <a:bodyPr/>
-                    <a:lstStyle/>
-                    <a:p>
-                      <a:pPr algn="ctr">
-                        <a:defRPr sz="1400">
-                          <a:solidFill>
-                            <a:srgbClr val="404040"/>
-                          </a:solidFill>
-                          <a:latin typeface="Malgun Gothic"/>
-                        </a:defRPr>
-                      </a:pPr>
-                      <a:r>
-                        <a:t>35.8</a:t>
-                      </a:r>
-                    </a:p>
-                  </a:txBody>
-                  <a:tcPr>
-                    <a:solidFill>
-                      <a:srgbClr val="F0F0F0"/>
-                    </a:solidFill>
-                  </a:tcPr>
-                </a:tc>
-              </a:tr>
-              <a:tr h="731520">
-                <a:tc>
-                  <a:txBody>
-                    <a:bodyPr/>
-                    <a:lstStyle/>
-                    <a:p>
-                      <a:pPr algn="ctr">
-                        <a:defRPr sz="1400">
-                          <a:solidFill>
-                            <a:srgbClr val="404040"/>
-                          </a:solidFill>
-                          <a:latin typeface="Malgun Gothic"/>
-                        </a:defRPr>
-                      </a:pPr>
-                      <a:r>
-                        <a:t>소규모 (10,000톤 미만)</a:t>
-                      </a:r>
-                    </a:p>
-                  </a:txBody>
-                  <a:tcPr/>
-                </a:tc>
-                <a:tc>
-                  <a:txBody>
-                    <a:bodyPr/>
-                    <a:lstStyle/>
-                    <a:p>
-                      <a:pPr algn="ctr">
-                        <a:defRPr sz="1400">
-                          <a:solidFill>
-                            <a:srgbClr val="404040"/>
-                          </a:solidFill>
-                          <a:latin typeface="Malgun Gothic"/>
-                        </a:defRPr>
-                      </a:pPr>
-                      <a:r>
-                        <a:t>947</a:t>
-                      </a:r>
-                    </a:p>
-                  </a:txBody>
-                  <a:tcPr/>
-                </a:tc>
-                <a:tc>
-                  <a:txBody>
-                    <a:bodyPr/>
-                    <a:lstStyle/>
-                    <a:p>
-                      <a:pPr algn="ctr">
-                        <a:defRPr sz="1400">
-                          <a:solidFill>
-                            <a:srgbClr val="404040"/>
-                          </a:solidFill>
-                          <a:latin typeface="Malgun Gothic"/>
-                        </a:defRPr>
-                      </a:pPr>
-                      <a:r>
-                        <a:t>57.2</a:t>
-                      </a:r>
-                    </a:p>
-                  </a:txBody>
-                  <a:tcPr/>
-                </a:tc>
-                <a:tc>
-                  <a:txBody>
-                    <a:bodyPr/>
-                    <a:lstStyle/>
-                    <a:p>
-                      <a:pPr algn="ctr">
-                        <a:defRPr sz="1400">
-                          <a:solidFill>
-                            <a:srgbClr val="404040"/>
-                          </a:solidFill>
-                          <a:latin typeface="Malgun Gothic"/>
-                        </a:defRPr>
-                      </a:pPr>
-                      <a:r>
-                        <a:t>11.9</a:t>
-                      </a:r>
-                    </a:p>
-                  </a:txBody>
-                  <a:tcPr/>
-                </a:tc>
-              </a:tr>
-            </a:tbl>
+          <a:graphicData uri="http://schemas.openxmlformats.org/drawingml/2006/chart">
+            <c:chart xmlns:c="http://schemas.openxmlformats.org/drawingml/2006/chart" r:id="rId2"/>
           </a:graphicData>
         </a:graphic>
       </p:graphicFrame>
+      <p:sp>
+        <p:nvSpPr>
+          <p:cNvPr id="4" name="Rectangle 3"/>
+          <p:cNvSpPr/>
+          <p:nvPr/>
+        </p:nvSpPr>
+        <p:spPr>
+          <a:xfrm>
+            <a:off x="5400000" y="1080000"/>
+            <a:ext cx="180000" cy="180000"/>
+          </a:xfrm>
+          <a:prstGeom prst="rect">
+            <a:avLst/>
+          </a:prstGeom>
+          <a:solidFill>
+            <a:srgbClr val="003366"/>
+          </a:solidFill>
+          <a:ln>
+            <a:noFill/>
+          </a:ln>
+        </p:spPr>
+        <p:style>
+          <a:lnRef idx="1">
+            <a:schemeClr val="accent1"/>
+          </a:lnRef>
+          <a:fillRef idx="3">
+            <a:schemeClr val="accent1"/>
+          </a:fillRef>
+          <a:effectRef idx="2">
+            <a:schemeClr val="accent1"/>
+          </a:effectRef>
+          <a:fontRef idx="minor">
+            <a:schemeClr val="lt1"/>
+          </a:fontRef>
+        </p:style>
+        <p:txBody>
+          <a:bodyPr rtlCol="0" anchor="ctr"/>
+          <a:lstStyle/>
+          <a:p>
+            <a:pPr algn="ctr"/>
+          </a:p>
+        </p:txBody>
+      </p:sp>
+      <p:sp>
+        <p:nvSpPr>
+          <p:cNvPr id="5" name="TextBox 4"/>
+          <p:cNvSpPr txBox="1"/>
+          <p:nvPr/>
+        </p:nvSpPr>
+        <p:spPr>
+          <a:xfrm>
+            <a:off x="5688000" y="1080000"/>
+            <a:ext cx="3600000" cy="288000"/>
+          </a:xfrm>
+          <a:prstGeom prst="rect">
+            <a:avLst/>
+          </a:prstGeom>
+          <a:noFill/>
+        </p:spPr>
+        <p:txBody>
+          <a:bodyPr wrap="none">
+            <a:spAutoFit/>
+          </a:bodyPr>
+          <a:lstStyle/>
+          <a:p>
+            <a:r>
+              <a:rPr sz="1600" b="0">
+                <a:solidFill>
+                  <a:srgbClr val="333333"/>
+                </a:solidFill>
+                <a:latin typeface="Malgun Gothic"/>
+              </a:rPr>
+              <a:t>대규모 (10k 톤+/일) : 15%</a:t>
+            </a:r>
+          </a:p>
+        </p:txBody>
+      </p:sp>
+      <p:sp>
+        <p:nvSpPr>
+          <p:cNvPr id="6" name="Rectangle 5"/>
+          <p:cNvSpPr/>
+          <p:nvPr/>
+        </p:nvSpPr>
+        <p:spPr>
+          <a:xfrm>
+            <a:off x="5400000" y="1512000"/>
+            <a:ext cx="180000" cy="180000"/>
+          </a:xfrm>
+          <a:prstGeom prst="rect">
+            <a:avLst/>
+          </a:prstGeom>
+          <a:solidFill>
+            <a:srgbClr val="4682B4"/>
+          </a:solidFill>
+          <a:ln>
+            <a:noFill/>
+          </a:ln>
+        </p:spPr>
+        <p:style>
+          <a:lnRef idx="1">
+            <a:schemeClr val="accent1"/>
+          </a:lnRef>
+          <a:fillRef idx="3">
+            <a:schemeClr val="accent1"/>
+          </a:fillRef>
+          <a:effectRef idx="2">
+            <a:schemeClr val="accent1"/>
+          </a:effectRef>
+          <a:fontRef idx="minor">
+            <a:schemeClr val="lt1"/>
+          </a:fontRef>
+        </p:style>
+        <p:txBody>
+          <a:bodyPr rtlCol="0" anchor="ctr"/>
+          <a:lstStyle/>
+          <a:p>
+            <a:pPr algn="ctr"/>
+          </a:p>
+        </p:txBody>
+      </p:sp>
+      <p:sp>
+        <p:nvSpPr>
+          <p:cNvPr id="7" name="TextBox 6"/>
+          <p:cNvSpPr txBox="1"/>
+          <p:nvPr/>
+        </p:nvSpPr>
+        <p:spPr>
+          <a:xfrm>
+            <a:off x="5688000" y="1512000"/>
+            <a:ext cx="3600000" cy="288000"/>
+          </a:xfrm>
+          <a:prstGeom prst="rect">
+            <a:avLst/>
+          </a:prstGeom>
+          <a:noFill/>
+        </p:spPr>
+        <p:txBody>
+          <a:bodyPr wrap="none">
+            <a:spAutoFit/>
+          </a:bodyPr>
+          <a:lstStyle/>
+          <a:p>
+            <a:r>
+              <a:rPr sz="1600" b="0">
+                <a:solidFill>
+                  <a:srgbClr val="333333"/>
+                </a:solidFill>
+                <a:latin typeface="Malgun Gothic"/>
+              </a:rPr>
+              <a:t>중규모 (1k-10k 톤/일) : 45%</a:t>
+            </a:r>
+          </a:p>
+        </p:txBody>
+      </p:sp>
+      <p:sp>
+        <p:nvSpPr>
+          <p:cNvPr id="8" name="Rectangle 7"/>
+          <p:cNvSpPr/>
+          <p:nvPr/>
+        </p:nvSpPr>
+        <p:spPr>
+          <a:xfrm>
+            <a:off x="5400000" y="1944000"/>
+            <a:ext cx="180000" cy="180000"/>
+          </a:xfrm>
+          <a:prstGeom prst="rect">
+            <a:avLst/>
+          </a:prstGeom>
+          <a:solidFill>
+            <a:srgbClr val="ADD8E6"/>
+          </a:solidFill>
+          <a:ln>
+            <a:noFill/>
+          </a:ln>
+        </p:spPr>
+        <p:style>
+          <a:lnRef idx="1">
+            <a:schemeClr val="accent1"/>
+          </a:lnRef>
+          <a:fillRef idx="3">
+            <a:schemeClr val="accent1"/>
+          </a:fillRef>
+          <a:effectRef idx="2">
+            <a:schemeClr val="accent1"/>
+          </a:effectRef>
+          <a:fontRef idx="minor">
+            <a:schemeClr val="lt1"/>
+          </a:fontRef>
+        </p:style>
+        <p:txBody>
+          <a:bodyPr rtlCol="0" anchor="ctr"/>
+          <a:lstStyle/>
+          <a:p>
+            <a:pPr algn="ctr"/>
+          </a:p>
+        </p:txBody>
+      </p:sp>
+      <p:sp>
+        <p:nvSpPr>
+          <p:cNvPr id="9" name="TextBox 8"/>
+          <p:cNvSpPr txBox="1"/>
+          <p:nvPr/>
+        </p:nvSpPr>
+        <p:spPr>
+          <a:xfrm>
+            <a:off x="5688000" y="1944000"/>
+            <a:ext cx="3600000" cy="288000"/>
+          </a:xfrm>
+          <a:prstGeom prst="rect">
+            <a:avLst/>
+          </a:prstGeom>
+          <a:noFill/>
+        </p:spPr>
+        <p:txBody>
+          <a:bodyPr wrap="none">
+            <a:spAutoFit/>
+          </a:bodyPr>
+          <a:lstStyle/>
+          <a:p>
+            <a:r>
+              <a:rPr sz="1600" b="0">
+                <a:solidFill>
+                  <a:srgbClr val="333333"/>
+                </a:solidFill>
+                <a:latin typeface="Malgun Gothic"/>
+              </a:rPr>
+              <a:t>소규모 (1k 톤-/일) : 40%</a:t>
+            </a:r>
+          </a:p>
+        </p:txBody>
+      </p:sp>
     </p:spTree>
   </p:cSld>
   <p:clrMapOvr>
@@ -6521,31 +7920,14 @@
       <p:grpSpPr/>
       <p:sp>
         <p:nvSpPr>
-          <p:cNvPr id="2" name="Title 1"/>
-          <p:cNvSpPr>
-            <a:spLocks noGrp="1"/>
-          </p:cNvSpPr>
-          <p:nvPr>
-            <p:ph type="title"/>
-          </p:nvPr>
-        </p:nvSpPr>
-        <p:spPr/>
-        <p:txBody>
-          <a:bodyPr/>
-          <a:lstStyle/>
-          <a:p/>
-        </p:txBody>
-      </p:sp>
-      <p:sp>
-        <p:nvSpPr>
-          <p:cNvPr id="3" name="TextBox 2"/>
+          <p:cNvPr id="2" name="TextBox 1"/>
           <p:cNvSpPr txBox="1"/>
           <p:nvPr/>
         </p:nvSpPr>
         <p:spPr>
           <a:xfrm>
-            <a:off x="457200" y="274320"/>
-            <a:ext cx="8229600" cy="731520"/>
+            <a:off x="360000" y="360000"/>
+            <a:ext cx="3600000" cy="360000"/>
           </a:xfrm>
           <a:prstGeom prst="rect">
             <a:avLst/>
@@ -6557,508 +7939,72 @@
             <a:spAutoFit/>
           </a:bodyPr>
           <a:lstStyle/>
-          <a:p/>
-          <a:p>
-            <a:pPr>
-              <a:defRPr sz="2800" b="1">
+          <a:p>
+            <a:r>
+              <a:rPr sz="2800" b="1">
                 <a:solidFill>
                   <a:srgbClr val="003366"/>
                 </a:solidFill>
                 <a:latin typeface="Malgun Gothic"/>
-              </a:defRPr>
-            </a:pPr>
-            <a:r>
-              <a:t>입찰 동향 (최근 2년간)</a:t>
+              </a:rPr>
+              <a:t>입찰 동향 (최근 5 개년)</a:t>
             </a:r>
           </a:p>
         </p:txBody>
       </p:sp>
       <p:graphicFrame>
         <p:nvGraphicFramePr>
-          <p:cNvPr id="4" name="Table 3"/>
+          <p:cNvPr id="3" name="Chart 2"/>
           <p:cNvGraphicFramePr>
             <a:graphicFrameLocks noGrp="1"/>
           </p:cNvGraphicFramePr>
           <p:nvPr/>
         </p:nvGraphicFramePr>
         <p:xfrm>
-          <a:off x="457200" y="1097280"/>
-          <a:ext cx="8229600" cy="3657600"/>
+          <a:off x="720000" y="900000"/>
+          <a:ext cx="8640000" cy="2160000"/>
         </p:xfrm>
         <a:graphic>
-          <a:graphicData uri="http://schemas.openxmlformats.org/drawingml/2006/table">
-            <a:tbl>
-              <a:tblPr firstRow="1" bandRow="1">
-                <a:tableStyleId>{5C22544A-7EE6-4342-B048-85BDC9FD1C3A}</a:tableStyleId>
-              </a:tblPr>
-              <a:tblGrid>
-                <a:gridCol w="2286000"/>
-                <a:gridCol w="2011680"/>
-                <a:gridCol w="2011680"/>
-                <a:gridCol w="1920240"/>
-              </a:tblGrid>
-              <a:tr h="731520">
-                <a:tc>
-                  <a:txBody>
-                    <a:bodyPr/>
-                    <a:lstStyle/>
-                    <a:p>
-                      <a:pPr algn="ctr">
-                        <a:defRPr sz="1600" b="1">
-                          <a:solidFill>
-                            <a:srgbClr val="FFFFFF"/>
-                          </a:solidFill>
-                          <a:latin typeface="Malgun Gothic"/>
-                        </a:defRPr>
-                      </a:pPr>
-                      <a:r>
-                        <a:t>구분</a:t>
-                      </a:r>
-                    </a:p>
-                  </a:txBody>
-                  <a:tcPr>
-                    <a:solidFill>
-                      <a:srgbClr val="003366"/>
-                    </a:solidFill>
-                  </a:tcPr>
-                </a:tc>
-                <a:tc>
-                  <a:txBody>
-                    <a:bodyPr/>
-                    <a:lstStyle/>
-                    <a:p>
-                      <a:pPr algn="ctr">
-                        <a:defRPr sz="1600" b="1">
-                          <a:solidFill>
-                            <a:srgbClr val="FFFFFF"/>
-                          </a:solidFill>
-                          <a:latin typeface="Malgun Gothic"/>
-                        </a:defRPr>
-                      </a:pPr>
-                      <a:r>
-                        <a:t>2023년</a:t>
-                      </a:r>
-                    </a:p>
-                  </a:txBody>
-                  <a:tcPr>
-                    <a:solidFill>
-                      <a:srgbClr val="003366"/>
-                    </a:solidFill>
-                  </a:tcPr>
-                </a:tc>
-                <a:tc>
-                  <a:txBody>
-                    <a:bodyPr/>
-                    <a:lstStyle/>
-                    <a:p>
-                      <a:pPr algn="ctr">
-                        <a:defRPr sz="1600" b="1">
-                          <a:solidFill>
-                            <a:srgbClr val="FFFFFF"/>
-                          </a:solidFill>
-                          <a:latin typeface="Malgun Gothic"/>
-                        </a:defRPr>
-                      </a:pPr>
-                      <a:r>
-                        <a:t>2024년</a:t>
-                      </a:r>
-                    </a:p>
-                  </a:txBody>
-                  <a:tcPr>
-                    <a:solidFill>
-                      <a:srgbClr val="003366"/>
-                    </a:solidFill>
-                  </a:tcPr>
-                </a:tc>
-                <a:tc>
-                  <a:txBody>
-                    <a:bodyPr/>
-                    <a:lstStyle/>
-                    <a:p>
-                      <a:pPr algn="ctr">
-                        <a:defRPr sz="1600" b="1">
-                          <a:solidFill>
-                            <a:srgbClr val="FFFFFF"/>
-                          </a:solidFill>
-                          <a:latin typeface="Malgun Gothic"/>
-                        </a:defRPr>
-                      </a:pPr>
-                      <a:r>
-                        <a:t>변동률 (%)</a:t>
-                      </a:r>
-                    </a:p>
-                  </a:txBody>
-                  <a:tcPr>
-                    <a:solidFill>
-                      <a:srgbClr val="003366"/>
-                    </a:solidFill>
-                  </a:tcPr>
-                </a:tc>
-              </a:tr>
-              <a:tr h="731520">
-                <a:tc>
-                  <a:txBody>
-                    <a:bodyPr/>
-                    <a:lstStyle/>
-                    <a:p>
-                      <a:pPr algn="ctr">
-                        <a:defRPr sz="1400">
-                          <a:solidFill>
-                            <a:srgbClr val="404040"/>
-                          </a:solidFill>
-                          <a:latin typeface="Malgun Gothic"/>
-                        </a:defRPr>
-                      </a:pPr>
-                      <a:r>
-                        <a:t>평균 입찰 금액 (억원)</a:t>
-                      </a:r>
-                    </a:p>
-                  </a:txBody>
-                  <a:tcPr/>
-                </a:tc>
-                <a:tc>
-                  <a:txBody>
-                    <a:bodyPr/>
-                    <a:lstStyle/>
-                    <a:p>
-                      <a:pPr algn="ctr">
-                        <a:defRPr sz="1400">
-                          <a:solidFill>
-                            <a:srgbClr val="404040"/>
-                          </a:solidFill>
-                          <a:latin typeface="Malgun Gothic"/>
-                        </a:defRPr>
-                      </a:pPr>
-                      <a:r>
-                        <a:t>45.8</a:t>
-                      </a:r>
-                    </a:p>
-                  </a:txBody>
-                  <a:tcPr/>
-                </a:tc>
-                <a:tc>
-                  <a:txBody>
-                    <a:bodyPr/>
-                    <a:lstStyle/>
-                    <a:p>
-                      <a:pPr algn="ctr">
-                        <a:defRPr sz="1400">
-                          <a:solidFill>
-                            <a:srgbClr val="404040"/>
-                          </a:solidFill>
-                          <a:latin typeface="Malgun Gothic"/>
-                        </a:defRPr>
-                      </a:pPr>
-                      <a:r>
-                        <a:t>48.2</a:t>
-                      </a:r>
-                    </a:p>
-                  </a:txBody>
-                  <a:tcPr/>
-                </a:tc>
-                <a:tc>
-                  <a:txBody>
-                    <a:bodyPr/>
-                    <a:lstStyle/>
-                    <a:p>
-                      <a:pPr algn="ctr">
-                        <a:defRPr sz="1400">
-                          <a:solidFill>
-                            <a:srgbClr val="404040"/>
-                          </a:solidFill>
-                          <a:latin typeface="Malgun Gothic"/>
-                        </a:defRPr>
-                      </a:pPr>
-                      <a:r>
-                        <a:t>+5.2</a:t>
-                      </a:r>
-                    </a:p>
-                  </a:txBody>
-                  <a:tcPr/>
-                </a:tc>
-              </a:tr>
-              <a:tr h="731520">
-                <a:tc>
-                  <a:txBody>
-                    <a:bodyPr/>
-                    <a:lstStyle/>
-                    <a:p>
-                      <a:pPr algn="ctr">
-                        <a:defRPr sz="1400">
-                          <a:solidFill>
-                            <a:srgbClr val="404040"/>
-                          </a:solidFill>
-                          <a:latin typeface="Malgun Gothic"/>
-                        </a:defRPr>
-                      </a:pPr>
-                      <a:r>
-                        <a:t>평균 낙찰률 (%)</a:t>
-                      </a:r>
-                    </a:p>
-                  </a:txBody>
-                  <a:tcPr>
-                    <a:solidFill>
-                      <a:srgbClr val="F0F0F0"/>
-                    </a:solidFill>
-                  </a:tcPr>
-                </a:tc>
-                <a:tc>
-                  <a:txBody>
-                    <a:bodyPr/>
-                    <a:lstStyle/>
-                    <a:p>
-                      <a:pPr algn="ctr">
-                        <a:defRPr sz="1400">
-                          <a:solidFill>
-                            <a:srgbClr val="404040"/>
-                          </a:solidFill>
-                          <a:latin typeface="Malgun Gothic"/>
-                        </a:defRPr>
-                      </a:pPr>
-                      <a:r>
-                        <a:t>87.5</a:t>
-                      </a:r>
-                    </a:p>
-                  </a:txBody>
-                  <a:tcPr>
-                    <a:solidFill>
-                      <a:srgbClr val="F0F0F0"/>
-                    </a:solidFill>
-                  </a:tcPr>
-                </a:tc>
-                <a:tc>
-                  <a:txBody>
-                    <a:bodyPr/>
-                    <a:lstStyle/>
-                    <a:p>
-                      <a:pPr algn="ctr">
-                        <a:defRPr sz="1400">
-                          <a:solidFill>
-                            <a:srgbClr val="404040"/>
-                          </a:solidFill>
-                          <a:latin typeface="Malgun Gothic"/>
-                        </a:defRPr>
-                      </a:pPr>
-                      <a:r>
-                        <a:t>89.2</a:t>
-                      </a:r>
-                    </a:p>
-                  </a:txBody>
-                  <a:tcPr>
-                    <a:solidFill>
-                      <a:srgbClr val="F0F0F0"/>
-                    </a:solidFill>
-                  </a:tcPr>
-                </a:tc>
-                <a:tc>
-                  <a:txBody>
-                    <a:bodyPr/>
-                    <a:lstStyle/>
-                    <a:p>
-                      <a:pPr algn="ctr">
-                        <a:defRPr sz="1400">
-                          <a:solidFill>
-                            <a:srgbClr val="404040"/>
-                          </a:solidFill>
-                          <a:latin typeface="Malgun Gothic"/>
-                        </a:defRPr>
-                      </a:pPr>
-                      <a:r>
-                        <a:t>+1.7</a:t>
-                      </a:r>
-                    </a:p>
-                  </a:txBody>
-                  <a:tcPr>
-                    <a:solidFill>
-                      <a:srgbClr val="F0F0F0"/>
-                    </a:solidFill>
-                  </a:tcPr>
-                </a:tc>
-              </a:tr>
-              <a:tr h="731520">
-                <a:tc>
-                  <a:txBody>
-                    <a:bodyPr/>
-                    <a:lstStyle/>
-                    <a:p>
-                      <a:pPr algn="ctr">
-                        <a:defRPr sz="1400">
-                          <a:solidFill>
-                            <a:srgbClr val="404040"/>
-                          </a:solidFill>
-                          <a:latin typeface="Malgun Gothic"/>
-                        </a:defRPr>
-                      </a:pPr>
-                      <a:r>
-                        <a:t>입찰 참여 업체 수 (사)</a:t>
-                      </a:r>
-                    </a:p>
-                  </a:txBody>
-                  <a:tcPr/>
-                </a:tc>
-                <a:tc>
-                  <a:txBody>
-                    <a:bodyPr/>
-                    <a:lstStyle/>
-                    <a:p>
-                      <a:pPr algn="ctr">
-                        <a:defRPr sz="1400">
-                          <a:solidFill>
-                            <a:srgbClr val="404040"/>
-                          </a:solidFill>
-                          <a:latin typeface="Malgun Gothic"/>
-                        </a:defRPr>
-                      </a:pPr>
-                      <a:r>
-                        <a:t>12.3</a:t>
-                      </a:r>
-                    </a:p>
-                  </a:txBody>
-                  <a:tcPr/>
-                </a:tc>
-                <a:tc>
-                  <a:txBody>
-                    <a:bodyPr/>
-                    <a:lstStyle/>
-                    <a:p>
-                      <a:pPr algn="ctr">
-                        <a:defRPr sz="1400">
-                          <a:solidFill>
-                            <a:srgbClr val="404040"/>
-                          </a:solidFill>
-                          <a:latin typeface="Malgun Gothic"/>
-                        </a:defRPr>
-                      </a:pPr>
-                      <a:r>
-                        <a:t>14.1</a:t>
-                      </a:r>
-                    </a:p>
-                  </a:txBody>
-                  <a:tcPr/>
-                </a:tc>
-                <a:tc>
-                  <a:txBody>
-                    <a:bodyPr/>
-                    <a:lstStyle/>
-                    <a:p>
-                      <a:pPr algn="ctr">
-                        <a:defRPr sz="1400">
-                          <a:solidFill>
-                            <a:srgbClr val="404040"/>
-                          </a:solidFill>
-                          <a:latin typeface="Malgun Gothic"/>
-                        </a:defRPr>
-                      </a:pPr>
-                      <a:r>
-                        <a:t>+14.6</a:t>
-                      </a:r>
-                    </a:p>
-                  </a:txBody>
-                  <a:tcPr/>
-                </a:tc>
-              </a:tr>
-              <a:tr h="731520">
-                <a:tc>
-                  <a:txBody>
-                    <a:bodyPr/>
-                    <a:lstStyle/>
-                    <a:p>
-                      <a:pPr algn="ctr">
-                        <a:defRPr sz="1400">
-                          <a:solidFill>
-                            <a:srgbClr val="404040"/>
-                          </a:solidFill>
-                          <a:latin typeface="Malgun Gothic"/>
-                        </a:defRPr>
-                      </a:pPr>
-                      <a:r>
-                        <a:t>기술평가 비중 (%)</a:t>
-                      </a:r>
-                    </a:p>
-                  </a:txBody>
-                  <a:tcPr>
-                    <a:solidFill>
-                      <a:srgbClr val="F0F0F0"/>
-                    </a:solidFill>
-                  </a:tcPr>
-                </a:tc>
-                <a:tc>
-                  <a:txBody>
-                    <a:bodyPr/>
-                    <a:lstStyle/>
-                    <a:p>
-                      <a:pPr algn="ctr">
-                        <a:defRPr sz="1400">
-                          <a:solidFill>
-                            <a:srgbClr val="404040"/>
-                          </a:solidFill>
-                          <a:latin typeface="Malgun Gothic"/>
-                        </a:defRPr>
-                      </a:pPr>
-                      <a:r>
-                        <a:t>45.0</a:t>
-                      </a:r>
-                    </a:p>
-                  </a:txBody>
-                  <a:tcPr>
-                    <a:solidFill>
-                      <a:srgbClr val="F0F0F0"/>
-                    </a:solidFill>
-                  </a:tcPr>
-                </a:tc>
-                <a:tc>
-                  <a:txBody>
-                    <a:bodyPr/>
-                    <a:lstStyle/>
-                    <a:p>
-                      <a:pPr algn="ctr">
-                        <a:defRPr sz="1400">
-                          <a:solidFill>
-                            <a:srgbClr val="404040"/>
-                          </a:solidFill>
-                          <a:latin typeface="Malgun Gothic"/>
-                        </a:defRPr>
-                      </a:pPr>
-                      <a:r>
-                        <a:t>50.0</a:t>
-                      </a:r>
-                    </a:p>
-                  </a:txBody>
-                  <a:tcPr>
-                    <a:solidFill>
-                      <a:srgbClr val="F0F0F0"/>
-                    </a:solidFill>
-                  </a:tcPr>
-                </a:tc>
-                <a:tc>
-                  <a:txBody>
-                    <a:bodyPr/>
-                    <a:lstStyle/>
-                    <a:p>
-                      <a:pPr algn="ctr">
-                        <a:defRPr sz="1400">
-                          <a:solidFill>
-                            <a:srgbClr val="404040"/>
-                          </a:solidFill>
-                          <a:latin typeface="Malgun Gothic"/>
-                        </a:defRPr>
-                      </a:pPr>
-                      <a:r>
-                        <a:t>+5.0</a:t>
-                      </a:r>
-                    </a:p>
-                  </a:txBody>
-                  <a:tcPr>
-                    <a:solidFill>
-                      <a:srgbClr val="F0F0F0"/>
-                    </a:solidFill>
-                  </a:tcPr>
-                </a:tc>
-              </a:tr>
-            </a:tbl>
+          <a:graphicData uri="http://schemas.openxmlformats.org/drawingml/2006/chart">
+            <c:chart xmlns:c="http://schemas.openxmlformats.org/drawingml/2006/chart" r:id="rId2"/>
           </a:graphicData>
         </a:graphic>
       </p:graphicFrame>
+      <p:sp>
+        <p:nvSpPr>
+          <p:cNvPr id="4" name="TextBox 3"/>
+          <p:cNvSpPr txBox="1"/>
+          <p:nvPr/>
+        </p:nvSpPr>
+        <p:spPr>
+          <a:xfrm>
+            <a:off x="720000" y="3060000"/>
+            <a:ext cx="8640000" cy="360000"/>
+          </a:xfrm>
+          <a:prstGeom prst="rect">
+            <a:avLst/>
+          </a:prstGeom>
+          <a:noFill/>
+        </p:spPr>
+        <p:txBody>
+          <a:bodyPr wrap="none">
+            <a:spAutoFit/>
+          </a:bodyPr>
+          <a:lstStyle/>
+          <a:p>
+            <a:pPr algn="ctr"/>
+            <a:r>
+              <a:rPr sz="2000" b="1">
+                <a:solidFill>
+                  <a:srgbClr val="003366"/>
+                </a:solidFill>
+                <a:latin typeface="Malgun Gothic"/>
+              </a:rPr>
+              <a:t>평균 낙찰률: 92.3% (안정적인 시장 형성)</a:t>
+            </a:r>
+          </a:p>
+        </p:txBody>
+      </p:sp>
     </p:spTree>
   </p:cSld>
   <p:clrMapOvr>
@@ -7079,28 +8025,33 @@
       <p:grpSpPr/>
       <p:sp>
         <p:nvSpPr>
-          <p:cNvPr id="2" name="Title 1"/>
-          <p:cNvSpPr>
-            <a:spLocks noGrp="1"/>
-          </p:cNvSpPr>
-          <p:nvPr>
-            <p:ph type="title"/>
-          </p:nvPr>
-        </p:nvSpPr>
-        <p:spPr/>
-        <p:txBody>
-          <a:bodyPr/>
-          <a:lstStyle/>
-          <a:p>
-            <a:pPr>
-              <a:defRPr sz="2800" b="1">
+          <p:cNvPr id="2" name="TextBox 1"/>
+          <p:cNvSpPr txBox="1"/>
+          <p:nvPr/>
+        </p:nvSpPr>
+        <p:spPr>
+          <a:xfrm>
+            <a:off x="360000" y="360000"/>
+            <a:ext cx="3600000" cy="360000"/>
+          </a:xfrm>
+          <a:prstGeom prst="rect">
+            <a:avLst/>
+          </a:prstGeom>
+          <a:noFill/>
+        </p:spPr>
+        <p:txBody>
+          <a:bodyPr wrap="none">
+            <a:spAutoFit/>
+          </a:bodyPr>
+          <a:lstStyle/>
+          <a:p>
+            <a:r>
+              <a:rPr sz="2800" b="1">
                 <a:solidFill>
                   <a:srgbClr val="003366"/>
                 </a:solidFill>
                 <a:latin typeface="Malgun Gothic"/>
-              </a:defRPr>
-            </a:pPr>
-            <a:r>
+              </a:rPr>
               <a:t>기술 개발 현황</a:t>
             </a:r>
           </a:p>
@@ -7108,82 +8059,597 @@
       </p:sp>
       <p:sp>
         <p:nvSpPr>
-          <p:cNvPr id="3" name="Content Placeholder 2"/>
-          <p:cNvSpPr>
-            <a:spLocks noGrp="1"/>
-          </p:cNvSpPr>
-          <p:nvPr>
-            <p:ph idx="1"/>
-          </p:nvPr>
-        </p:nvSpPr>
-        <p:spPr/>
-        <p:txBody>
-          <a:bodyPr/>
-          <a:lstStyle/>
-          <a:p/>
-          <a:p>
-            <a:pPr>
-              <a:defRPr sz="1800">
+          <p:cNvPr id="3" name="Rounded Rectangle 2"/>
+          <p:cNvSpPr/>
+          <p:nvPr/>
+        </p:nvSpPr>
+        <p:spPr>
+          <a:xfrm>
+            <a:off x="540000" y="900000"/>
+            <a:ext cx="3060000" cy="1980000"/>
+          </a:xfrm>
+          <a:prstGeom prst="roundRect">
+            <a:avLst/>
+          </a:prstGeom>
+          <a:solidFill>
+            <a:srgbClr val="FFFFFF"/>
+          </a:solidFill>
+          <a:ln w="25400">
+            <a:solidFill>
+              <a:srgbClr val="003366"/>
+            </a:solidFill>
+          </a:ln>
+        </p:spPr>
+        <p:style>
+          <a:lnRef idx="1">
+            <a:schemeClr val="accent1"/>
+          </a:lnRef>
+          <a:fillRef idx="3">
+            <a:schemeClr val="accent1"/>
+          </a:fillRef>
+          <a:effectRef idx="2">
+            <a:schemeClr val="accent1"/>
+          </a:effectRef>
+          <a:fontRef idx="minor">
+            <a:schemeClr val="lt1"/>
+          </a:fontRef>
+        </p:style>
+        <p:txBody>
+          <a:bodyPr rtlCol="0" anchor="ctr"/>
+          <a:lstStyle/>
+          <a:p>
+            <a:pPr algn="ctr"/>
+          </a:p>
+        </p:txBody>
+      </p:sp>
+      <p:sp>
+        <p:nvSpPr>
+          <p:cNvPr id="4" name="Oval 3"/>
+          <p:cNvSpPr/>
+          <p:nvPr/>
+        </p:nvSpPr>
+        <p:spPr>
+          <a:xfrm>
+            <a:off x="720000" y="1080000"/>
+            <a:ext cx="432000" cy="432000"/>
+          </a:xfrm>
+          <a:prstGeom prst="ellipse">
+            <a:avLst/>
+          </a:prstGeom>
+          <a:solidFill>
+            <a:srgbClr val="D4AF37"/>
+          </a:solidFill>
+          <a:ln>
+            <a:noFill/>
+          </a:ln>
+        </p:spPr>
+        <p:style>
+          <a:lnRef idx="1">
+            <a:schemeClr val="accent1"/>
+          </a:lnRef>
+          <a:fillRef idx="3">
+            <a:schemeClr val="accent1"/>
+          </a:fillRef>
+          <a:effectRef idx="2">
+            <a:schemeClr val="accent1"/>
+          </a:effectRef>
+          <a:fontRef idx="minor">
+            <a:schemeClr val="lt1"/>
+          </a:fontRef>
+        </p:style>
+        <p:txBody>
+          <a:bodyPr rtlCol="0" anchor="ctr"/>
+          <a:lstStyle/>
+          <a:p>
+            <a:pPr algn="ctr"/>
+            <a:r>
+              <a:rPr sz="2000" b="0">
                 <a:solidFill>
-                  <a:srgbClr val="404040"/>
+                  <a:srgbClr val="FFFFFF"/>
                 </a:solidFill>
                 <a:latin typeface="Malgun Gothic"/>
-              </a:defRPr>
-            </a:pPr>
-            <a:r>
-              <a:t>• AI 기반 운영 최적화: 실시간 수질 예측 및 에너지 효율화 시스템 도입 확대</a:t>
-            </a:r>
-          </a:p>
-          <a:p>
-            <a:pPr>
-              <a:defRPr sz="1800">
+              </a:rPr>
+              <a:t>🤖</a:t>
+            </a:r>
+          </a:p>
+        </p:txBody>
+      </p:sp>
+      <p:sp>
+        <p:nvSpPr>
+          <p:cNvPr id="5" name="TextBox 4"/>
+          <p:cNvSpPr txBox="1"/>
+          <p:nvPr/>
+        </p:nvSpPr>
+        <p:spPr>
+          <a:xfrm>
+            <a:off x="1260000" y="1080000"/>
+            <a:ext cx="2160000" cy="360000"/>
+          </a:xfrm>
+          <a:prstGeom prst="rect">
+            <a:avLst/>
+          </a:prstGeom>
+          <a:noFill/>
+        </p:spPr>
+        <p:txBody>
+          <a:bodyPr wrap="none">
+            <a:spAutoFit/>
+          </a:bodyPr>
+          <a:lstStyle/>
+          <a:p>
+            <a:r>
+              <a:rPr sz="1800" b="1">
                 <a:solidFill>
-                  <a:srgbClr val="404040"/>
+                  <a:srgbClr val="003366"/>
                 </a:solidFill>
                 <a:latin typeface="Malgun Gothic"/>
-              </a:defRPr>
-            </a:pPr>
-            <a:r>
-              <a:t>• 에너지 자립화: 태양광, 수소연료전지 등 재생에너지 활용 시설 증가</a:t>
-            </a:r>
-          </a:p>
-          <a:p>
-            <a:pPr>
-              <a:defRPr sz="1800">
+              </a:rPr>
+              <a:t>AI 기반 운영 최적화</a:t>
+            </a:r>
+          </a:p>
+        </p:txBody>
+      </p:sp>
+      <p:sp>
+        <p:nvSpPr>
+          <p:cNvPr id="6" name="TextBox 5"/>
+          <p:cNvSpPr txBox="1"/>
+          <p:nvPr/>
+        </p:nvSpPr>
+        <p:spPr>
+          <a:xfrm>
+            <a:off x="720000" y="1620000"/>
+            <a:ext cx="2700000" cy="288000"/>
+          </a:xfrm>
+          <a:prstGeom prst="rect">
+            <a:avLst/>
+          </a:prstGeom>
+          <a:noFill/>
+        </p:spPr>
+        <p:txBody>
+          <a:bodyPr wrap="none">
+            <a:spAutoFit/>
+          </a:bodyPr>
+          <a:lstStyle/>
+          <a:p>
+            <a:r>
+              <a:rPr sz="1600" b="0">
                 <a:solidFill>
-                  <a:srgbClr val="404040"/>
+                  <a:srgbClr val="333333"/>
                 </a:solidFill>
                 <a:latin typeface="Malgun Gothic"/>
-              </a:defRPr>
-            </a:pPr>
-            <a:r>
-              <a:t>• 슬러지 감량화: 고도처리 기술 및 자원화 기술 개발 활발</a:t>
-            </a:r>
-          </a:p>
-          <a:p>
-            <a:pPr>
-              <a:defRPr sz="1800">
+              </a:rPr>
+              <a:t>에너지 절감 25%</a:t>
+            </a:r>
+          </a:p>
+        </p:txBody>
+      </p:sp>
+      <p:sp>
+        <p:nvSpPr>
+          <p:cNvPr id="7" name="TextBox 6"/>
+          <p:cNvSpPr txBox="1"/>
+          <p:nvPr/>
+        </p:nvSpPr>
+        <p:spPr>
+          <a:xfrm>
+            <a:off x="720000" y="1980000"/>
+            <a:ext cx="2700000" cy="288000"/>
+          </a:xfrm>
+          <a:prstGeom prst="rect">
+            <a:avLst/>
+          </a:prstGeom>
+          <a:noFill/>
+        </p:spPr>
+        <p:txBody>
+          <a:bodyPr wrap="none">
+            <a:spAutoFit/>
+          </a:bodyPr>
+          <a:lstStyle/>
+          <a:p>
+            <a:r>
+              <a:rPr sz="1600" b="0">
                 <a:solidFill>
-                  <a:srgbClr val="404040"/>
+                  <a:srgbClr val="333333"/>
                 </a:solidFill>
                 <a:latin typeface="Malgun Gothic"/>
-              </a:defRPr>
-            </a:pPr>
-            <a:r>
-              <a:t>• 스마트 워터그리드: IoT 센서 기반 원격 모니터링 시스템 구축</a:t>
-            </a:r>
-          </a:p>
-          <a:p>
-            <a:pPr>
-              <a:defRPr sz="1800">
+              </a:rPr>
+              <a:t>운영 효율 30% 향상</a:t>
+            </a:r>
+          </a:p>
+        </p:txBody>
+      </p:sp>
+      <p:sp>
+        <p:nvSpPr>
+          <p:cNvPr id="8" name="Rounded Rectangle 7"/>
+          <p:cNvSpPr/>
+          <p:nvPr/>
+        </p:nvSpPr>
+        <p:spPr>
+          <a:xfrm>
+            <a:off x="3780000" y="900000"/>
+            <a:ext cx="3060000" cy="1980000"/>
+          </a:xfrm>
+          <a:prstGeom prst="roundRect">
+            <a:avLst/>
+          </a:prstGeom>
+          <a:solidFill>
+            <a:srgbClr val="FFFFFF"/>
+          </a:solidFill>
+          <a:ln w="25400">
+            <a:solidFill>
+              <a:srgbClr val="003366"/>
+            </a:solidFill>
+          </a:ln>
+        </p:spPr>
+        <p:style>
+          <a:lnRef idx="1">
+            <a:schemeClr val="accent1"/>
+          </a:lnRef>
+          <a:fillRef idx="3">
+            <a:schemeClr val="accent1"/>
+          </a:fillRef>
+          <a:effectRef idx="2">
+            <a:schemeClr val="accent1"/>
+          </a:effectRef>
+          <a:fontRef idx="minor">
+            <a:schemeClr val="lt1"/>
+          </a:fontRef>
+        </p:style>
+        <p:txBody>
+          <a:bodyPr rtlCol="0" anchor="ctr"/>
+          <a:lstStyle/>
+          <a:p>
+            <a:pPr algn="ctr"/>
+          </a:p>
+        </p:txBody>
+      </p:sp>
+      <p:sp>
+        <p:nvSpPr>
+          <p:cNvPr id="9" name="Oval 8"/>
+          <p:cNvSpPr/>
+          <p:nvPr/>
+        </p:nvSpPr>
+        <p:spPr>
+          <a:xfrm>
+            <a:off x="3960000" y="1080000"/>
+            <a:ext cx="432000" cy="432000"/>
+          </a:xfrm>
+          <a:prstGeom prst="ellipse">
+            <a:avLst/>
+          </a:prstGeom>
+          <a:solidFill>
+            <a:srgbClr val="D4AF37"/>
+          </a:solidFill>
+          <a:ln>
+            <a:noFill/>
+          </a:ln>
+        </p:spPr>
+        <p:style>
+          <a:lnRef idx="1">
+            <a:schemeClr val="accent1"/>
+          </a:lnRef>
+          <a:fillRef idx="3">
+            <a:schemeClr val="accent1"/>
+          </a:fillRef>
+          <a:effectRef idx="2">
+            <a:schemeClr val="accent1"/>
+          </a:effectRef>
+          <a:fontRef idx="minor">
+            <a:schemeClr val="lt1"/>
+          </a:fontRef>
+        </p:style>
+        <p:txBody>
+          <a:bodyPr rtlCol="0" anchor="ctr"/>
+          <a:lstStyle/>
+          <a:p>
+            <a:pPr algn="ctr"/>
+            <a:r>
+              <a:rPr sz="2000" b="0">
                 <a:solidFill>
-                  <a:srgbClr val="404040"/>
+                  <a:srgbClr val="FFFFFF"/>
                 </a:solidFill>
                 <a:latin typeface="Malgun Gothic"/>
-              </a:defRPr>
-            </a:pPr>
-            <a:r>
-              <a:t>• 탄소중립 대응: 온실가스 배출 저감 기술 및 LCA 평가 도입</a:t>
+              </a:rPr>
+              <a:t>⚡</a:t>
+            </a:r>
+          </a:p>
+        </p:txBody>
+      </p:sp>
+      <p:sp>
+        <p:nvSpPr>
+          <p:cNvPr id="10" name="TextBox 9"/>
+          <p:cNvSpPr txBox="1"/>
+          <p:nvPr/>
+        </p:nvSpPr>
+        <p:spPr>
+          <a:xfrm>
+            <a:off x="4500000" y="1080000"/>
+            <a:ext cx="2160000" cy="360000"/>
+          </a:xfrm>
+          <a:prstGeom prst="rect">
+            <a:avLst/>
+          </a:prstGeom>
+          <a:noFill/>
+        </p:spPr>
+        <p:txBody>
+          <a:bodyPr wrap="none">
+            <a:spAutoFit/>
+          </a:bodyPr>
+          <a:lstStyle/>
+          <a:p>
+            <a:r>
+              <a:rPr sz="1800" b="1">
+                <a:solidFill>
+                  <a:srgbClr val="003366"/>
+                </a:solidFill>
+                <a:latin typeface="Malgun Gothic"/>
+              </a:rPr>
+              <a:t>에너지 자립화</a:t>
+            </a:r>
+          </a:p>
+        </p:txBody>
+      </p:sp>
+      <p:sp>
+        <p:nvSpPr>
+          <p:cNvPr id="11" name="TextBox 10"/>
+          <p:cNvSpPr txBox="1"/>
+          <p:nvPr/>
+        </p:nvSpPr>
+        <p:spPr>
+          <a:xfrm>
+            <a:off x="3960000" y="1620000"/>
+            <a:ext cx="2700000" cy="288000"/>
+          </a:xfrm>
+          <a:prstGeom prst="rect">
+            <a:avLst/>
+          </a:prstGeom>
+          <a:noFill/>
+        </p:spPr>
+        <p:txBody>
+          <a:bodyPr wrap="none">
+            <a:spAutoFit/>
+          </a:bodyPr>
+          <a:lstStyle/>
+          <a:p>
+            <a:r>
+              <a:rPr sz="1600" b="0">
+                <a:solidFill>
+                  <a:srgbClr val="333333"/>
+                </a:solidFill>
+                <a:latin typeface="Malgun Gothic"/>
+              </a:rPr>
+              <a:t>태양광 + 바이오가스</a:t>
+            </a:r>
+          </a:p>
+        </p:txBody>
+      </p:sp>
+      <p:sp>
+        <p:nvSpPr>
+          <p:cNvPr id="12" name="TextBox 11"/>
+          <p:cNvSpPr txBox="1"/>
+          <p:nvPr/>
+        </p:nvSpPr>
+        <p:spPr>
+          <a:xfrm>
+            <a:off x="3960000" y="1980000"/>
+            <a:ext cx="2700000" cy="288000"/>
+          </a:xfrm>
+          <a:prstGeom prst="rect">
+            <a:avLst/>
+          </a:prstGeom>
+          <a:noFill/>
+        </p:spPr>
+        <p:txBody>
+          <a:bodyPr wrap="none">
+            <a:spAutoFit/>
+          </a:bodyPr>
+          <a:lstStyle/>
+          <a:p>
+            <a:r>
+              <a:rPr sz="1600" b="0">
+                <a:solidFill>
+                  <a:srgbClr val="333333"/>
+                </a:solidFill>
+                <a:latin typeface="Malgun Gothic"/>
+              </a:rPr>
+              <a:t>자립률 45% 달성</a:t>
+            </a:r>
+          </a:p>
+        </p:txBody>
+      </p:sp>
+      <p:sp>
+        <p:nvSpPr>
+          <p:cNvPr id="13" name="Rounded Rectangle 12"/>
+          <p:cNvSpPr/>
+          <p:nvPr/>
+        </p:nvSpPr>
+        <p:spPr>
+          <a:xfrm>
+            <a:off x="7020000" y="900000"/>
+            <a:ext cx="3060000" cy="1980000"/>
+          </a:xfrm>
+          <a:prstGeom prst="roundRect">
+            <a:avLst/>
+          </a:prstGeom>
+          <a:solidFill>
+            <a:srgbClr val="FFFFFF"/>
+          </a:solidFill>
+          <a:ln w="25400">
+            <a:solidFill>
+              <a:srgbClr val="003366"/>
+            </a:solidFill>
+          </a:ln>
+        </p:spPr>
+        <p:style>
+          <a:lnRef idx="1">
+            <a:schemeClr val="accent1"/>
+          </a:lnRef>
+          <a:fillRef idx="3">
+            <a:schemeClr val="accent1"/>
+          </a:fillRef>
+          <a:effectRef idx="2">
+            <a:schemeClr val="accent1"/>
+          </a:effectRef>
+          <a:fontRef idx="minor">
+            <a:schemeClr val="lt1"/>
+          </a:fontRef>
+        </p:style>
+        <p:txBody>
+          <a:bodyPr rtlCol="0" anchor="ctr"/>
+          <a:lstStyle/>
+          <a:p>
+            <a:pPr algn="ctr"/>
+          </a:p>
+        </p:txBody>
+      </p:sp>
+      <p:sp>
+        <p:nvSpPr>
+          <p:cNvPr id="14" name="Oval 13"/>
+          <p:cNvSpPr/>
+          <p:nvPr/>
+        </p:nvSpPr>
+        <p:spPr>
+          <a:xfrm>
+            <a:off x="7200000" y="1080000"/>
+            <a:ext cx="432000" cy="432000"/>
+          </a:xfrm>
+          <a:prstGeom prst="ellipse">
+            <a:avLst/>
+          </a:prstGeom>
+          <a:solidFill>
+            <a:srgbClr val="D4AF37"/>
+          </a:solidFill>
+          <a:ln>
+            <a:noFill/>
+          </a:ln>
+        </p:spPr>
+        <p:style>
+          <a:lnRef idx="1">
+            <a:schemeClr val="accent1"/>
+          </a:lnRef>
+          <a:fillRef idx="3">
+            <a:schemeClr val="accent1"/>
+          </a:fillRef>
+          <a:effectRef idx="2">
+            <a:schemeClr val="accent1"/>
+          </a:effectRef>
+          <a:fontRef idx="minor">
+            <a:schemeClr val="lt1"/>
+          </a:fontRef>
+        </p:style>
+        <p:txBody>
+          <a:bodyPr rtlCol="0" anchor="ctr"/>
+          <a:lstStyle/>
+          <a:p>
+            <a:pPr algn="ctr"/>
+            <a:r>
+              <a:rPr sz="2000" b="0">
+                <a:solidFill>
+                  <a:srgbClr val="FFFFFF"/>
+                </a:solidFill>
+                <a:latin typeface="Malgun Gothic"/>
+              </a:rPr>
+              <a:t>♻️</a:t>
+            </a:r>
+          </a:p>
+        </p:txBody>
+      </p:sp>
+      <p:sp>
+        <p:nvSpPr>
+          <p:cNvPr id="15" name="TextBox 14"/>
+          <p:cNvSpPr txBox="1"/>
+          <p:nvPr/>
+        </p:nvSpPr>
+        <p:spPr>
+          <a:xfrm>
+            <a:off x="7740000" y="1080000"/>
+            <a:ext cx="2160000" cy="360000"/>
+          </a:xfrm>
+          <a:prstGeom prst="rect">
+            <a:avLst/>
+          </a:prstGeom>
+          <a:noFill/>
+        </p:spPr>
+        <p:txBody>
+          <a:bodyPr wrap="none">
+            <a:spAutoFit/>
+          </a:bodyPr>
+          <a:lstStyle/>
+          <a:p>
+            <a:r>
+              <a:rPr sz="1800" b="1">
+                <a:solidFill>
+                  <a:srgbClr val="003366"/>
+                </a:solidFill>
+                <a:latin typeface="Malgun Gothic"/>
+              </a:rPr>
+              <a:t>슬러지 감량화</a:t>
+            </a:r>
+          </a:p>
+        </p:txBody>
+      </p:sp>
+      <p:sp>
+        <p:nvSpPr>
+          <p:cNvPr id="16" name="TextBox 15"/>
+          <p:cNvSpPr txBox="1"/>
+          <p:nvPr/>
+        </p:nvSpPr>
+        <p:spPr>
+          <a:xfrm>
+            <a:off x="7200000" y="1620000"/>
+            <a:ext cx="2700000" cy="288000"/>
+          </a:xfrm>
+          <a:prstGeom prst="rect">
+            <a:avLst/>
+          </a:prstGeom>
+          <a:noFill/>
+        </p:spPr>
+        <p:txBody>
+          <a:bodyPr wrap="none">
+            <a:spAutoFit/>
+          </a:bodyPr>
+          <a:lstStyle/>
+          <a:p>
+            <a:r>
+              <a:rPr sz="1600" b="0">
+                <a:solidFill>
+                  <a:srgbClr val="333333"/>
+                </a:solidFill>
+                <a:latin typeface="Malgun Gothic"/>
+              </a:rPr>
+              <a:t>부피 60% 감소</a:t>
+            </a:r>
+          </a:p>
+        </p:txBody>
+      </p:sp>
+      <p:sp>
+        <p:nvSpPr>
+          <p:cNvPr id="17" name="TextBox 16"/>
+          <p:cNvSpPr txBox="1"/>
+          <p:nvPr/>
+        </p:nvSpPr>
+        <p:spPr>
+          <a:xfrm>
+            <a:off x="7200000" y="1980000"/>
+            <a:ext cx="2700000" cy="288000"/>
+          </a:xfrm>
+          <a:prstGeom prst="rect">
+            <a:avLst/>
+          </a:prstGeom>
+          <a:noFill/>
+        </p:spPr>
+        <p:txBody>
+          <a:bodyPr wrap="none">
+            <a:spAutoFit/>
+          </a:bodyPr>
+          <a:lstStyle/>
+          <a:p>
+            <a:r>
+              <a:rPr sz="1600" b="0">
+                <a:solidFill>
+                  <a:srgbClr val="333333"/>
+                </a:solidFill>
+                <a:latin typeface="Malgun Gothic"/>
+              </a:rPr>
+              <a:t>재활용률 80%</a:t>
             </a:r>
           </a:p>
         </p:txBody>
